--- a/Employee-management-system.pptx
+++ b/Employee-management-system.pptx
@@ -7,24 +7,32 @@
     <p:sldMasterId id="2147483673" r:id="rId3"/>
   </p:sldMasterIdLst>
   <p:notesMasterIdLst>
-    <p:notesMasterId r:id="rId16"/>
+    <p:notesMasterId r:id="rId24"/>
   </p:notesMasterIdLst>
   <p:handoutMasterIdLst>
-    <p:handoutMasterId r:id="rId17"/>
+    <p:handoutMasterId r:id="rId25"/>
   </p:handoutMasterIdLst>
   <p:sldIdLst>
     <p:sldId id="442" r:id="rId4"/>
     <p:sldId id="456" r:id="rId5"/>
     <p:sldId id="457" r:id="rId6"/>
     <p:sldId id="458" r:id="rId7"/>
-    <p:sldId id="459" r:id="rId8"/>
-    <p:sldId id="460" r:id="rId9"/>
+    <p:sldId id="460" r:id="rId8"/>
+    <p:sldId id="459" r:id="rId9"/>
     <p:sldId id="461" r:id="rId10"/>
     <p:sldId id="462" r:id="rId11"/>
-    <p:sldId id="463" r:id="rId12"/>
-    <p:sldId id="465" r:id="rId13"/>
-    <p:sldId id="466" r:id="rId14"/>
-    <p:sldId id="464" r:id="rId15"/>
+    <p:sldId id="469" r:id="rId12"/>
+    <p:sldId id="470" r:id="rId13"/>
+    <p:sldId id="471" r:id="rId14"/>
+    <p:sldId id="472" r:id="rId15"/>
+    <p:sldId id="478" r:id="rId16"/>
+    <p:sldId id="479" r:id="rId17"/>
+    <p:sldId id="480" r:id="rId18"/>
+    <p:sldId id="463" r:id="rId19"/>
+    <p:sldId id="465" r:id="rId20"/>
+    <p:sldId id="466" r:id="rId21"/>
+    <p:sldId id="477" r:id="rId22"/>
+    <p:sldId id="464" r:id="rId23"/>
   </p:sldIdLst>
   <p:sldSz cx="9144000" cy="6858000" type="screen4x3"/>
   <p:notesSz cx="6858000" cy="9144000"/>
@@ -378,7 +386,7 @@
                 <a:ea typeface="+mn-ea"/>
                 <a:cs typeface="Arial" panose="020B0604020202020204" pitchFamily="34" charset="0"/>
               </a:rPr>
-              <a:t>18 October 2024</a:t>
+              <a:t>10 November 2024</a:t>
             </a:fld>
             <a:endParaRPr kumimoji="0" lang="en-IN" sz="1200" b="0" i="0" u="none" strike="noStrike" kern="1200" cap="none" spc="0" normalizeH="0" baseline="0" noProof="0" dirty="0">
               <a:ln>
@@ -710,7 +718,7 @@
                 <a:ea typeface="+mn-ea"/>
                 <a:cs typeface="+mn-cs"/>
               </a:rPr>
-              <a:t>18 October 2024</a:t>
+              <a:t>10 November 2024</a:t>
             </a:fld>
             <a:endParaRPr kumimoji="0" lang="en-US" sz="1200" b="0" i="0" u="none" strike="noStrike" kern="1200" cap="none" spc="0" normalizeH="0" baseline="0" noProof="0" dirty="0">
               <a:ln>
@@ -1381,7 +1389,7 @@
                 <a:ea typeface="+mn-ea"/>
                 <a:cs typeface="+mn-cs"/>
               </a:rPr>
-              <a:t>18 October 2024</a:t>
+              <a:t>10 November 2024</a:t>
             </a:fld>
             <a:endParaRPr kumimoji="0" lang="en-US" sz="1200" b="0" i="0" u="none" strike="noStrike" kern="1200" cap="none" spc="0" normalizeH="0" baseline="0" noProof="0" dirty="0">
               <a:ln>
@@ -13205,8 +13213,8 @@
         </p:nvSpPr>
         <p:spPr>
           <a:xfrm>
-            <a:off x="1752600" y="1107440"/>
-            <a:ext cx="7010400" cy="1165225"/>
+            <a:off x="1447800" y="2012937"/>
+            <a:ext cx="7252769" cy="1165225"/>
           </a:xfrm>
           <a:prstGeom prst="rect">
             <a:avLst/>
@@ -13224,7 +13232,7 @@
               <a:defRPr/>
             </a:pPr>
             <a:r>
-              <a:rPr lang="en-GB" sz="3600" b="1" dirty="0">
+              <a:rPr lang="en-GB" sz="2800" b="1" dirty="0">
                 <a:solidFill>
                   <a:schemeClr val="tx1">
                     <a:lumMod val="95000"/>
@@ -13234,9 +13242,46 @@
                 <a:latin typeface="Times New Roman" panose="02020603050405020304" pitchFamily="18" charset="0"/>
                 <a:cs typeface="Times New Roman" panose="02020603050405020304" pitchFamily="18" charset="0"/>
               </a:rPr>
-              <a:t>EMPLOYEE MANAGEMENT</a:t>
-            </a:r>
-            <a:endParaRPr kumimoji="0" sz="3600" b="1" kern="1200" cap="none" spc="0" normalizeH="0" baseline="0" noProof="0" dirty="0">
+              <a:t>EMPLOYEE MANAGEMENT SYSTEM</a:t>
+            </a:r>
+          </a:p>
+          <a:p>
+            <a:pPr marR="0" algn="ctr" defTabSz="914400">
+              <a:buClrTx/>
+              <a:buSzTx/>
+              <a:buFontTx/>
+              <a:buNone/>
+              <a:defRPr/>
+            </a:pPr>
+            <a:endParaRPr lang="en-GB" sz="3200" b="1" dirty="0">
+              <a:solidFill>
+                <a:schemeClr val="tx1">
+                  <a:lumMod val="95000"/>
+                  <a:lumOff val="5000"/>
+                </a:schemeClr>
+              </a:solidFill>
+              <a:latin typeface="Times New Roman" panose="02020603050405020304" pitchFamily="18" charset="0"/>
+              <a:cs typeface="Times New Roman" panose="02020603050405020304" pitchFamily="18" charset="0"/>
+            </a:endParaRPr>
+          </a:p>
+          <a:p>
+            <a:pPr algn="ctr">
+              <a:defRPr/>
+            </a:pPr>
+            <a:r>
+              <a:rPr lang="en-US" sz="1600" dirty="0"/>
+              <a:t>       Revolutionizing Workforce Management with Integrated Solutions</a:t>
+            </a:r>
+          </a:p>
+          <a:p>
+            <a:pPr marR="0" algn="ctr" defTabSz="914400">
+              <a:buClrTx/>
+              <a:buSzTx/>
+              <a:buFontTx/>
+              <a:buNone/>
+              <a:defRPr/>
+            </a:pPr>
+            <a:endParaRPr kumimoji="0" sz="2800" b="1" kern="1200" cap="none" spc="0" normalizeH="0" baseline="0" noProof="0" dirty="0">
               <a:solidFill>
                 <a:schemeClr val="tx1">
                   <a:lumMod val="95000"/>
@@ -13325,6 +13370,46 @@
               <a:t>Dr.S.ANANDAMURUGAN</a:t>
             </a:r>
             <a:endParaRPr lang="en-US" sz="2000" b="1" dirty="0">
+              <a:latin typeface="Times New Roman" panose="02020603050405020304"/>
+              <a:ea typeface="Times New Roman" panose="02020603050405020304"/>
+              <a:cs typeface="Times New Roman" panose="02020603050405020304"/>
+              <a:sym typeface="Times New Roman" panose="02020603050405020304"/>
+            </a:endParaRPr>
+          </a:p>
+          <a:p>
+            <a:pPr marL="0" marR="45720" lvl="0" indent="0" rtl="0">
+              <a:spcBef>
+                <a:spcPts val="360"/>
+              </a:spcBef>
+              <a:spcAft>
+                <a:spcPts val="0"/>
+              </a:spcAft>
+              <a:buNone/>
+            </a:pPr>
+            <a:r>
+              <a:rPr lang="en-US" sz="2000" dirty="0"/>
+              <a:t>		     </a:t>
+            </a:r>
+            <a:r>
+              <a:rPr lang="en-US" sz="1600" dirty="0"/>
+              <a:t>Head of the Department, </a:t>
+            </a:r>
+          </a:p>
+          <a:p>
+            <a:pPr marL="0" marR="45720" lvl="0" indent="0" rtl="0">
+              <a:spcBef>
+                <a:spcPts val="360"/>
+              </a:spcBef>
+              <a:spcAft>
+                <a:spcPts val="0"/>
+              </a:spcAft>
+              <a:buNone/>
+            </a:pPr>
+            <a:r>
+              <a:rPr lang="en-US" sz="1600" dirty="0"/>
+              <a:t>		      Department of Information Technology</a:t>
+            </a:r>
+            <a:endParaRPr lang="en-US" sz="1600" b="1" dirty="0">
               <a:latin typeface="Times New Roman" panose="02020603050405020304"/>
               <a:ea typeface="Times New Roman" panose="02020603050405020304"/>
               <a:cs typeface="Times New Roman" panose="02020603050405020304"/>
@@ -13501,6 +13586,1056 @@
 </file>
 
 <file path=ppt/slides/slide10.xml><?xml version="1.0" encoding="utf-8"?>
+<p:sld xmlns:a="http://schemas.openxmlformats.org/drawingml/2006/main" xmlns:r="http://schemas.openxmlformats.org/officeDocument/2006/relationships" xmlns:p="http://schemas.openxmlformats.org/presentationml/2006/main">
+  <p:cSld>
+    <p:spTree>
+      <p:nvGrpSpPr>
+        <p:cNvPr id="1" name="">
+          <a:extLst>
+            <a:ext uri="{FF2B5EF4-FFF2-40B4-BE49-F238E27FC236}">
+              <a16:creationId xmlns:a16="http://schemas.microsoft.com/office/drawing/2014/main" id="{E625428E-5E1B-FD49-5297-DED52F200E2D}"/>
+            </a:ext>
+          </a:extLst>
+        </p:cNvPr>
+        <p:cNvGrpSpPr/>
+        <p:nvPr/>
+      </p:nvGrpSpPr>
+      <p:grpSpPr>
+        <a:xfrm>
+          <a:off x="0" y="0"/>
+          <a:ext cx="0" cy="0"/>
+          <a:chOff x="0" y="0"/>
+          <a:chExt cx="0" cy="0"/>
+        </a:xfrm>
+      </p:grpSpPr>
+      <p:sp>
+        <p:nvSpPr>
+          <p:cNvPr id="2" name="Title 1">
+            <a:extLst>
+              <a:ext uri="{FF2B5EF4-FFF2-40B4-BE49-F238E27FC236}">
+                <a16:creationId xmlns:a16="http://schemas.microsoft.com/office/drawing/2014/main" id="{2332E834-D2D2-73AF-CCB1-F36ADD7C2A41}"/>
+              </a:ext>
+            </a:extLst>
+          </p:cNvPr>
+          <p:cNvSpPr>
+            <a:spLocks noGrp="1"/>
+          </p:cNvSpPr>
+          <p:nvPr>
+            <p:ph type="title"/>
+          </p:nvPr>
+        </p:nvSpPr>
+        <p:spPr>
+          <a:xfrm>
+            <a:off x="457200" y="533400"/>
+            <a:ext cx="8229600" cy="643813"/>
+          </a:xfrm>
+        </p:spPr>
+        <p:txBody>
+          <a:bodyPr/>
+          <a:lstStyle/>
+          <a:p>
+            <a:pPr algn="ctr"/>
+            <a:r>
+              <a:rPr lang="en-IN" b="1" dirty="0">
+                <a:solidFill>
+                  <a:srgbClr val="C00000"/>
+                </a:solidFill>
+                <a:latin typeface="Times New Roman" panose="02020603050405020304" pitchFamily="18" charset="0"/>
+                <a:cs typeface="Times New Roman" panose="02020603050405020304" pitchFamily="18" charset="0"/>
+              </a:rPr>
+              <a:t>Communication System</a:t>
+            </a:r>
+          </a:p>
+        </p:txBody>
+      </p:sp>
+      <p:sp>
+        <p:nvSpPr>
+          <p:cNvPr id="3" name="Title 1">
+            <a:extLst>
+              <a:ext uri="{FF2B5EF4-FFF2-40B4-BE49-F238E27FC236}">
+                <a16:creationId xmlns:a16="http://schemas.microsoft.com/office/drawing/2014/main" id="{2DBB69D7-DCEA-02CE-1214-64161070145C}"/>
+              </a:ext>
+            </a:extLst>
+          </p:cNvPr>
+          <p:cNvSpPr txBox="1">
+            <a:spLocks/>
+          </p:cNvSpPr>
+          <p:nvPr/>
+        </p:nvSpPr>
+        <p:spPr>
+          <a:xfrm>
+            <a:off x="462116" y="2888376"/>
+            <a:ext cx="8229600" cy="643813"/>
+          </a:xfrm>
+          <a:prstGeom prst="rect">
+            <a:avLst/>
+          </a:prstGeom>
+          <a:noFill/>
+          <a:ln w="9525">
+            <a:noFill/>
+          </a:ln>
+        </p:spPr>
+        <p:txBody>
+          <a:bodyPr lIns="0" rIns="0" bIns="0" anchor="b" anchorCtr="0"/>
+          <a:lstStyle>
+            <a:lvl1pPr algn="l" rtl="0" eaLnBrk="0" fontAlgn="base" hangingPunct="0">
+              <a:spcBef>
+                <a:spcPct val="0"/>
+              </a:spcBef>
+              <a:spcAft>
+                <a:spcPct val="0"/>
+              </a:spcAft>
+              <a:defRPr sz="3200" kern="1200">
+                <a:solidFill>
+                  <a:schemeClr val="accent1"/>
+                </a:solidFill>
+                <a:latin typeface="+mj-lt"/>
+                <a:ea typeface="+mj-ea"/>
+                <a:cs typeface="+mj-cs"/>
+              </a:defRPr>
+            </a:lvl1pPr>
+            <a:lvl2pPr algn="l" rtl="0" eaLnBrk="0" fontAlgn="base" hangingPunct="0">
+              <a:spcBef>
+                <a:spcPct val="0"/>
+              </a:spcBef>
+              <a:spcAft>
+                <a:spcPct val="0"/>
+              </a:spcAft>
+              <a:defRPr sz="3200">
+                <a:solidFill>
+                  <a:schemeClr val="accent1"/>
+                </a:solidFill>
+                <a:latin typeface="Arial" panose="020B0604020202020204" pitchFamily="34" charset="0"/>
+              </a:defRPr>
+            </a:lvl2pPr>
+            <a:lvl3pPr algn="l" rtl="0" eaLnBrk="0" fontAlgn="base" hangingPunct="0">
+              <a:spcBef>
+                <a:spcPct val="0"/>
+              </a:spcBef>
+              <a:spcAft>
+                <a:spcPct val="0"/>
+              </a:spcAft>
+              <a:defRPr sz="3200">
+                <a:solidFill>
+                  <a:schemeClr val="accent1"/>
+                </a:solidFill>
+                <a:latin typeface="Arial" panose="020B0604020202020204" pitchFamily="34" charset="0"/>
+              </a:defRPr>
+            </a:lvl3pPr>
+            <a:lvl4pPr algn="l" rtl="0" eaLnBrk="0" fontAlgn="base" hangingPunct="0">
+              <a:spcBef>
+                <a:spcPct val="0"/>
+              </a:spcBef>
+              <a:spcAft>
+                <a:spcPct val="0"/>
+              </a:spcAft>
+              <a:defRPr sz="3200">
+                <a:solidFill>
+                  <a:schemeClr val="accent1"/>
+                </a:solidFill>
+                <a:latin typeface="Arial" panose="020B0604020202020204" pitchFamily="34" charset="0"/>
+              </a:defRPr>
+            </a:lvl4pPr>
+            <a:lvl5pPr algn="l" rtl="0" eaLnBrk="0" fontAlgn="base" hangingPunct="0">
+              <a:spcBef>
+                <a:spcPct val="0"/>
+              </a:spcBef>
+              <a:spcAft>
+                <a:spcPct val="0"/>
+              </a:spcAft>
+              <a:defRPr sz="3200">
+                <a:solidFill>
+                  <a:schemeClr val="accent1"/>
+                </a:solidFill>
+                <a:latin typeface="Arial" panose="020B0604020202020204" pitchFamily="34" charset="0"/>
+              </a:defRPr>
+            </a:lvl5pPr>
+            <a:lvl6pPr marL="457200" algn="l" rtl="0" fontAlgn="base">
+              <a:spcBef>
+                <a:spcPct val="0"/>
+              </a:spcBef>
+              <a:spcAft>
+                <a:spcPct val="0"/>
+              </a:spcAft>
+              <a:defRPr sz="5000">
+                <a:solidFill>
+                  <a:schemeClr val="tx2"/>
+                </a:solidFill>
+                <a:latin typeface="Calibri" panose="020F0502020204030204" pitchFamily="34" charset="0"/>
+              </a:defRPr>
+            </a:lvl6pPr>
+            <a:lvl7pPr marL="914400" algn="l" rtl="0" fontAlgn="base">
+              <a:spcBef>
+                <a:spcPct val="0"/>
+              </a:spcBef>
+              <a:spcAft>
+                <a:spcPct val="0"/>
+              </a:spcAft>
+              <a:defRPr sz="5000">
+                <a:solidFill>
+                  <a:schemeClr val="tx2"/>
+                </a:solidFill>
+                <a:latin typeface="Calibri" panose="020F0502020204030204" pitchFamily="34" charset="0"/>
+              </a:defRPr>
+            </a:lvl7pPr>
+            <a:lvl8pPr marL="1371600" algn="l" rtl="0" fontAlgn="base">
+              <a:spcBef>
+                <a:spcPct val="0"/>
+              </a:spcBef>
+              <a:spcAft>
+                <a:spcPct val="0"/>
+              </a:spcAft>
+              <a:defRPr sz="5000">
+                <a:solidFill>
+                  <a:schemeClr val="tx2"/>
+                </a:solidFill>
+                <a:latin typeface="Calibri" panose="020F0502020204030204" pitchFamily="34" charset="0"/>
+              </a:defRPr>
+            </a:lvl8pPr>
+            <a:lvl9pPr marL="1828800" algn="l" rtl="0" fontAlgn="base">
+              <a:spcBef>
+                <a:spcPct val="0"/>
+              </a:spcBef>
+              <a:spcAft>
+                <a:spcPct val="0"/>
+              </a:spcAft>
+              <a:defRPr sz="5000">
+                <a:solidFill>
+                  <a:schemeClr val="tx2"/>
+                </a:solidFill>
+                <a:latin typeface="Calibri" panose="020F0502020204030204" pitchFamily="34" charset="0"/>
+              </a:defRPr>
+            </a:lvl9pPr>
+          </a:lstStyle>
+          <a:p>
+            <a:pPr algn="ctr"/>
+            <a:r>
+              <a:rPr lang="en-IN" b="1" dirty="0">
+                <a:solidFill>
+                  <a:srgbClr val="C00000"/>
+                </a:solidFill>
+                <a:latin typeface="Times New Roman" panose="02020603050405020304" pitchFamily="18" charset="0"/>
+                <a:cs typeface="Times New Roman" panose="02020603050405020304" pitchFamily="18" charset="0"/>
+              </a:rPr>
+              <a:t>Leave Application </a:t>
+            </a:r>
+          </a:p>
+        </p:txBody>
+      </p:sp>
+      <p:sp>
+        <p:nvSpPr>
+          <p:cNvPr id="7" name="TextBox 6">
+            <a:extLst>
+              <a:ext uri="{FF2B5EF4-FFF2-40B4-BE49-F238E27FC236}">
+                <a16:creationId xmlns:a16="http://schemas.microsoft.com/office/drawing/2014/main" id="{8CDD555B-03EB-64BE-78D2-8AA4C4ADAF10}"/>
+              </a:ext>
+            </a:extLst>
+          </p:cNvPr>
+          <p:cNvSpPr txBox="1"/>
+          <p:nvPr/>
+        </p:nvSpPr>
+        <p:spPr>
+          <a:xfrm>
+            <a:off x="2171700" y="1411048"/>
+            <a:ext cx="4343400" cy="1477328"/>
+          </a:xfrm>
+          <a:prstGeom prst="rect">
+            <a:avLst/>
+          </a:prstGeom>
+          <a:noFill/>
+        </p:spPr>
+        <p:txBody>
+          <a:bodyPr wrap="square">
+            <a:spAutoFit/>
+          </a:bodyPr>
+          <a:lstStyle/>
+          <a:p>
+            <a:pPr algn="just"/>
+            <a:r>
+              <a:rPr lang="en-US" dirty="0"/>
+              <a:t>Admin broadcast messaging with Twilio SMS notifications</a:t>
+            </a:r>
+          </a:p>
+          <a:p>
+            <a:pPr algn="just"/>
+            <a:endParaRPr lang="en-US" dirty="0"/>
+          </a:p>
+          <a:p>
+            <a:pPr algn="just"/>
+            <a:r>
+              <a:rPr lang="en-US" dirty="0"/>
+              <a:t>Leave approval and rejection details sent using node mailer</a:t>
+            </a:r>
+          </a:p>
+        </p:txBody>
+      </p:sp>
+      <p:sp>
+        <p:nvSpPr>
+          <p:cNvPr id="9" name="TextBox 8">
+            <a:extLst>
+              <a:ext uri="{FF2B5EF4-FFF2-40B4-BE49-F238E27FC236}">
+                <a16:creationId xmlns:a16="http://schemas.microsoft.com/office/drawing/2014/main" id="{C97597CB-0A36-698C-8ADF-522EA90888F5}"/>
+              </a:ext>
+            </a:extLst>
+          </p:cNvPr>
+          <p:cNvSpPr txBox="1"/>
+          <p:nvPr/>
+        </p:nvSpPr>
+        <p:spPr>
+          <a:xfrm>
+            <a:off x="1143000" y="4217259"/>
+            <a:ext cx="7086600" cy="923330"/>
+          </a:xfrm>
+          <a:prstGeom prst="rect">
+            <a:avLst/>
+          </a:prstGeom>
+          <a:noFill/>
+        </p:spPr>
+        <p:txBody>
+          <a:bodyPr wrap="square">
+            <a:spAutoFit/>
+          </a:bodyPr>
+          <a:lstStyle/>
+          <a:p>
+            <a:pPr algn="just"/>
+            <a:r>
+              <a:rPr lang="en-US" dirty="0"/>
+              <a:t>Employee applies for leave and wait for approval.</a:t>
+            </a:r>
+            <a:br>
+              <a:rPr lang="en-US" dirty="0"/>
+            </a:br>
+            <a:br>
+              <a:rPr lang="en-US" dirty="0"/>
+            </a:br>
+            <a:r>
+              <a:rPr lang="en-US" dirty="0"/>
+              <a:t>Will be displayed Approved/Rejected status after admin intervention.</a:t>
+            </a:r>
+          </a:p>
+        </p:txBody>
+      </p:sp>
+      <p:pic>
+        <p:nvPicPr>
+          <p:cNvPr id="11" name="Picture 10">
+            <a:extLst>
+              <a:ext uri="{FF2B5EF4-FFF2-40B4-BE49-F238E27FC236}">
+                <a16:creationId xmlns:a16="http://schemas.microsoft.com/office/drawing/2014/main" id="{D12A00A8-F1F2-AB74-D18F-9A4C12EEF847}"/>
+              </a:ext>
+            </a:extLst>
+          </p:cNvPr>
+          <p:cNvPicPr>
+            <a:picLocks noChangeAspect="1"/>
+          </p:cNvPicPr>
+          <p:nvPr/>
+        </p:nvPicPr>
+        <p:blipFill>
+          <a:blip r:embed="rId2"/>
+          <a:stretch>
+            <a:fillRect/>
+          </a:stretch>
+        </p:blipFill>
+        <p:spPr>
+          <a:xfrm>
+            <a:off x="6781800" y="1371600"/>
+            <a:ext cx="1844842" cy="1862246"/>
+          </a:xfrm>
+          <a:prstGeom prst="rect">
+            <a:avLst/>
+          </a:prstGeom>
+        </p:spPr>
+      </p:pic>
+      <p:pic>
+        <p:nvPicPr>
+          <p:cNvPr id="13" name="Picture 12">
+            <a:extLst>
+              <a:ext uri="{FF2B5EF4-FFF2-40B4-BE49-F238E27FC236}">
+                <a16:creationId xmlns:a16="http://schemas.microsoft.com/office/drawing/2014/main" id="{E96B4B26-F91C-5B66-B014-DE1F9737130A}"/>
+              </a:ext>
+            </a:extLst>
+          </p:cNvPr>
+          <p:cNvPicPr>
+            <a:picLocks noChangeAspect="1"/>
+          </p:cNvPicPr>
+          <p:nvPr/>
+        </p:nvPicPr>
+        <p:blipFill>
+          <a:blip r:embed="rId3"/>
+          <a:stretch>
+            <a:fillRect/>
+          </a:stretch>
+        </p:blipFill>
+        <p:spPr>
+          <a:xfrm>
+            <a:off x="2590800" y="5506065"/>
+            <a:ext cx="6400800" cy="1098880"/>
+          </a:xfrm>
+          <a:prstGeom prst="rect">
+            <a:avLst/>
+          </a:prstGeom>
+        </p:spPr>
+      </p:pic>
+      <p:pic>
+        <p:nvPicPr>
+          <p:cNvPr id="14" name="Picture 13">
+            <a:extLst>
+              <a:ext uri="{FF2B5EF4-FFF2-40B4-BE49-F238E27FC236}">
+                <a16:creationId xmlns:a16="http://schemas.microsoft.com/office/drawing/2014/main" id="{D05FCFC1-5894-E2F6-2433-8CBF3910096F}"/>
+              </a:ext>
+            </a:extLst>
+          </p:cNvPr>
+          <p:cNvPicPr>
+            <a:picLocks noChangeAspect="1"/>
+          </p:cNvPicPr>
+          <p:nvPr/>
+        </p:nvPicPr>
+        <p:blipFill>
+          <a:blip r:embed="rId4"/>
+          <a:stretch>
+            <a:fillRect/>
+          </a:stretch>
+        </p:blipFill>
+        <p:spPr>
+          <a:xfrm>
+            <a:off x="685800" y="3531387"/>
+            <a:ext cx="5943600" cy="645795"/>
+          </a:xfrm>
+          <a:prstGeom prst="rect">
+            <a:avLst/>
+          </a:prstGeom>
+        </p:spPr>
+      </p:pic>
+    </p:spTree>
+    <p:extLst>
+      <p:ext uri="{BB962C8B-B14F-4D97-AF65-F5344CB8AC3E}">
+        <p14:creationId xmlns:p14="http://schemas.microsoft.com/office/powerpoint/2010/main" val="4278415937"/>
+      </p:ext>
+    </p:extLst>
+  </p:cSld>
+  <p:clrMapOvr>
+    <a:masterClrMapping/>
+  </p:clrMapOvr>
+  <p:transition>
+    <p:fade/>
+  </p:transition>
+</p:sld>
+</file>
+
+<file path=ppt/slides/slide11.xml><?xml version="1.0" encoding="utf-8"?>
+<p:sld xmlns:a="http://schemas.openxmlformats.org/drawingml/2006/main" xmlns:r="http://schemas.openxmlformats.org/officeDocument/2006/relationships" xmlns:p="http://schemas.openxmlformats.org/presentationml/2006/main">
+  <p:cSld>
+    <p:spTree>
+      <p:nvGrpSpPr>
+        <p:cNvPr id="1" name="">
+          <a:extLst>
+            <a:ext uri="{FF2B5EF4-FFF2-40B4-BE49-F238E27FC236}">
+              <a16:creationId xmlns:a16="http://schemas.microsoft.com/office/drawing/2014/main" id="{308FB1C3-7515-CB13-167E-9CDE1ABD7D8D}"/>
+            </a:ext>
+          </a:extLst>
+        </p:cNvPr>
+        <p:cNvGrpSpPr/>
+        <p:nvPr/>
+      </p:nvGrpSpPr>
+      <p:grpSpPr>
+        <a:xfrm>
+          <a:off x="0" y="0"/>
+          <a:ext cx="0" cy="0"/>
+          <a:chOff x="0" y="0"/>
+          <a:chExt cx="0" cy="0"/>
+        </a:xfrm>
+      </p:grpSpPr>
+      <p:sp>
+        <p:nvSpPr>
+          <p:cNvPr id="2" name="Title 1">
+            <a:extLst>
+              <a:ext uri="{FF2B5EF4-FFF2-40B4-BE49-F238E27FC236}">
+                <a16:creationId xmlns:a16="http://schemas.microsoft.com/office/drawing/2014/main" id="{601F827A-DB7F-C8B6-E832-77F2CBDAA71E}"/>
+              </a:ext>
+            </a:extLst>
+          </p:cNvPr>
+          <p:cNvSpPr>
+            <a:spLocks noGrp="1"/>
+          </p:cNvSpPr>
+          <p:nvPr>
+            <p:ph type="title"/>
+          </p:nvPr>
+        </p:nvSpPr>
+        <p:spPr>
+          <a:xfrm>
+            <a:off x="457200" y="533400"/>
+            <a:ext cx="8229600" cy="643813"/>
+          </a:xfrm>
+        </p:spPr>
+        <p:txBody>
+          <a:bodyPr/>
+          <a:lstStyle/>
+          <a:p>
+            <a:pPr algn="ctr"/>
+            <a:r>
+              <a:rPr lang="en-IN" b="1" dirty="0">
+                <a:solidFill>
+                  <a:srgbClr val="C00000"/>
+                </a:solidFill>
+                <a:latin typeface="Times New Roman" panose="02020603050405020304" pitchFamily="18" charset="0"/>
+                <a:cs typeface="Times New Roman" panose="02020603050405020304" pitchFamily="18" charset="0"/>
+              </a:rPr>
+              <a:t>Flow chart</a:t>
+            </a:r>
+          </a:p>
+        </p:txBody>
+      </p:sp>
+      <p:pic>
+        <p:nvPicPr>
+          <p:cNvPr id="4" name="Picture 3">
+            <a:extLst>
+              <a:ext uri="{FF2B5EF4-FFF2-40B4-BE49-F238E27FC236}">
+                <a16:creationId xmlns:a16="http://schemas.microsoft.com/office/drawing/2014/main" id="{E2FDA07F-4AE8-88E8-5CB9-FB75B2CEB28D}"/>
+              </a:ext>
+            </a:extLst>
+          </p:cNvPr>
+          <p:cNvPicPr>
+            <a:picLocks noChangeAspect="1"/>
+          </p:cNvPicPr>
+          <p:nvPr/>
+        </p:nvPicPr>
+        <p:blipFill>
+          <a:blip r:embed="rId2"/>
+          <a:stretch>
+            <a:fillRect/>
+          </a:stretch>
+        </p:blipFill>
+        <p:spPr>
+          <a:xfrm>
+            <a:off x="762000" y="1295400"/>
+            <a:ext cx="7924800" cy="4378582"/>
+          </a:xfrm>
+          <a:prstGeom prst="rect">
+            <a:avLst/>
+          </a:prstGeom>
+        </p:spPr>
+      </p:pic>
+    </p:spTree>
+    <p:extLst>
+      <p:ext uri="{BB962C8B-B14F-4D97-AF65-F5344CB8AC3E}">
+        <p14:creationId xmlns:p14="http://schemas.microsoft.com/office/powerpoint/2010/main" val="962623674"/>
+      </p:ext>
+    </p:extLst>
+  </p:cSld>
+  <p:clrMapOvr>
+    <a:masterClrMapping/>
+  </p:clrMapOvr>
+  <p:transition>
+    <p:fade/>
+  </p:transition>
+</p:sld>
+</file>
+
+<file path=ppt/slides/slide12.xml><?xml version="1.0" encoding="utf-8"?>
+<p:sld xmlns:a="http://schemas.openxmlformats.org/drawingml/2006/main" xmlns:r="http://schemas.openxmlformats.org/officeDocument/2006/relationships" xmlns:p="http://schemas.openxmlformats.org/presentationml/2006/main">
+  <p:cSld>
+    <p:spTree>
+      <p:nvGrpSpPr>
+        <p:cNvPr id="1" name="">
+          <a:extLst>
+            <a:ext uri="{FF2B5EF4-FFF2-40B4-BE49-F238E27FC236}">
+              <a16:creationId xmlns:a16="http://schemas.microsoft.com/office/drawing/2014/main" id="{850B156D-0FFE-905D-A76A-3F0F2B08588E}"/>
+            </a:ext>
+          </a:extLst>
+        </p:cNvPr>
+        <p:cNvGrpSpPr/>
+        <p:nvPr/>
+      </p:nvGrpSpPr>
+      <p:grpSpPr>
+        <a:xfrm>
+          <a:off x="0" y="0"/>
+          <a:ext cx="0" cy="0"/>
+          <a:chOff x="0" y="0"/>
+          <a:chExt cx="0" cy="0"/>
+        </a:xfrm>
+      </p:grpSpPr>
+    </p:spTree>
+    <p:extLst>
+      <p:ext uri="{BB962C8B-B14F-4D97-AF65-F5344CB8AC3E}">
+        <p14:creationId xmlns:p14="http://schemas.microsoft.com/office/powerpoint/2010/main" val="36583590"/>
+      </p:ext>
+    </p:extLst>
+  </p:cSld>
+  <p:clrMapOvr>
+    <a:masterClrMapping/>
+  </p:clrMapOvr>
+  <p:transition>
+    <p:fade/>
+  </p:transition>
+</p:sld>
+</file>
+
+<file path=ppt/slides/slide13.xml><?xml version="1.0" encoding="utf-8"?>
+<p:sld xmlns:a="http://schemas.openxmlformats.org/drawingml/2006/main" xmlns:r="http://schemas.openxmlformats.org/officeDocument/2006/relationships" xmlns:p="http://schemas.openxmlformats.org/presentationml/2006/main">
+  <p:cSld>
+    <p:spTree>
+      <p:nvGrpSpPr>
+        <p:cNvPr id="1" name="">
+          <a:extLst>
+            <a:ext uri="{FF2B5EF4-FFF2-40B4-BE49-F238E27FC236}">
+              <a16:creationId xmlns:a16="http://schemas.microsoft.com/office/drawing/2014/main" id="{AED98E09-C60F-2D22-D48E-7E7A628F0627}"/>
+            </a:ext>
+          </a:extLst>
+        </p:cNvPr>
+        <p:cNvGrpSpPr/>
+        <p:nvPr/>
+      </p:nvGrpSpPr>
+      <p:grpSpPr>
+        <a:xfrm>
+          <a:off x="0" y="0"/>
+          <a:ext cx="0" cy="0"/>
+          <a:chOff x="0" y="0"/>
+          <a:chExt cx="0" cy="0"/>
+        </a:xfrm>
+      </p:grpSpPr>
+    </p:spTree>
+    <p:extLst>
+      <p:ext uri="{BB962C8B-B14F-4D97-AF65-F5344CB8AC3E}">
+        <p14:creationId xmlns:p14="http://schemas.microsoft.com/office/powerpoint/2010/main" val="1041818132"/>
+      </p:ext>
+    </p:extLst>
+  </p:cSld>
+  <p:clrMapOvr>
+    <a:masterClrMapping/>
+  </p:clrMapOvr>
+  <p:transition>
+    <p:fade/>
+  </p:transition>
+</p:sld>
+</file>
+
+<file path=ppt/slides/slide14.xml><?xml version="1.0" encoding="utf-8"?>
+<p:sld xmlns:a="http://schemas.openxmlformats.org/drawingml/2006/main" xmlns:r="http://schemas.openxmlformats.org/officeDocument/2006/relationships" xmlns:p="http://schemas.openxmlformats.org/presentationml/2006/main">
+  <p:cSld>
+    <p:spTree>
+      <p:nvGrpSpPr>
+        <p:cNvPr id="1" name="">
+          <a:extLst>
+            <a:ext uri="{FF2B5EF4-FFF2-40B4-BE49-F238E27FC236}">
+              <a16:creationId xmlns:a16="http://schemas.microsoft.com/office/drawing/2014/main" id="{5553156A-38E9-DEB2-186B-9A1FCDE9054A}"/>
+            </a:ext>
+          </a:extLst>
+        </p:cNvPr>
+        <p:cNvGrpSpPr/>
+        <p:nvPr/>
+      </p:nvGrpSpPr>
+      <p:grpSpPr>
+        <a:xfrm>
+          <a:off x="0" y="0"/>
+          <a:ext cx="0" cy="0"/>
+          <a:chOff x="0" y="0"/>
+          <a:chExt cx="0" cy="0"/>
+        </a:xfrm>
+      </p:grpSpPr>
+    </p:spTree>
+    <p:extLst>
+      <p:ext uri="{BB962C8B-B14F-4D97-AF65-F5344CB8AC3E}">
+        <p14:creationId xmlns:p14="http://schemas.microsoft.com/office/powerpoint/2010/main" val="12542646"/>
+      </p:ext>
+    </p:extLst>
+  </p:cSld>
+  <p:clrMapOvr>
+    <a:masterClrMapping/>
+  </p:clrMapOvr>
+  <p:transition>
+    <p:fade/>
+  </p:transition>
+</p:sld>
+</file>
+
+<file path=ppt/slides/slide15.xml><?xml version="1.0" encoding="utf-8"?>
+<p:sld xmlns:a="http://schemas.openxmlformats.org/drawingml/2006/main" xmlns:r="http://schemas.openxmlformats.org/officeDocument/2006/relationships" xmlns:p="http://schemas.openxmlformats.org/presentationml/2006/main">
+  <p:cSld>
+    <p:spTree>
+      <p:nvGrpSpPr>
+        <p:cNvPr id="1" name="">
+          <a:extLst>
+            <a:ext uri="{FF2B5EF4-FFF2-40B4-BE49-F238E27FC236}">
+              <a16:creationId xmlns:a16="http://schemas.microsoft.com/office/drawing/2014/main" id="{4A07D551-F60C-2441-242A-4C1036EC0E7C}"/>
+            </a:ext>
+          </a:extLst>
+        </p:cNvPr>
+        <p:cNvGrpSpPr/>
+        <p:nvPr/>
+      </p:nvGrpSpPr>
+      <p:grpSpPr>
+        <a:xfrm>
+          <a:off x="0" y="0"/>
+          <a:ext cx="0" cy="0"/>
+          <a:chOff x="0" y="0"/>
+          <a:chExt cx="0" cy="0"/>
+        </a:xfrm>
+      </p:grpSpPr>
+    </p:spTree>
+    <p:extLst>
+      <p:ext uri="{BB962C8B-B14F-4D97-AF65-F5344CB8AC3E}">
+        <p14:creationId xmlns:p14="http://schemas.microsoft.com/office/powerpoint/2010/main" val="1147869355"/>
+      </p:ext>
+    </p:extLst>
+  </p:cSld>
+  <p:clrMapOvr>
+    <a:masterClrMapping/>
+  </p:clrMapOvr>
+  <p:transition>
+    <p:fade/>
+  </p:transition>
+</p:sld>
+</file>
+
+<file path=ppt/slides/slide16.xml><?xml version="1.0" encoding="utf-8"?>
+<p:sld xmlns:a="http://schemas.openxmlformats.org/drawingml/2006/main" xmlns:r="http://schemas.openxmlformats.org/officeDocument/2006/relationships" xmlns:p="http://schemas.openxmlformats.org/presentationml/2006/main">
+  <p:cSld>
+    <p:spTree>
+      <p:nvGrpSpPr>
+        <p:cNvPr id="1" name=""/>
+        <p:cNvGrpSpPr/>
+        <p:nvPr/>
+      </p:nvGrpSpPr>
+      <p:grpSpPr>
+        <a:xfrm>
+          <a:off x="0" y="0"/>
+          <a:ext cx="0" cy="0"/>
+          <a:chOff x="0" y="0"/>
+          <a:chExt cx="0" cy="0"/>
+        </a:xfrm>
+      </p:grpSpPr>
+      <p:sp>
+        <p:nvSpPr>
+          <p:cNvPr id="4" name="Title 1"/>
+          <p:cNvSpPr txBox="1"/>
+          <p:nvPr/>
+        </p:nvSpPr>
+        <p:spPr>
+          <a:xfrm>
+            <a:off x="699796" y="499187"/>
+            <a:ext cx="8229600" cy="643813"/>
+          </a:xfrm>
+          <a:prstGeom prst="rect">
+            <a:avLst/>
+          </a:prstGeom>
+        </p:spPr>
+        <p:txBody>
+          <a:bodyPr/>
+          <a:lstStyle>
+            <a:defPPr marR="0" lvl="0" algn="l" rtl="0">
+              <a:lnSpc>
+                <a:spcPct val="100000"/>
+              </a:lnSpc>
+              <a:spcBef>
+                <a:spcPts val="0"/>
+              </a:spcBef>
+              <a:spcAft>
+                <a:spcPts val="0"/>
+              </a:spcAft>
+            </a:defPPr>
+            <a:lvl1pPr marR="0" lvl="0" algn="l" rtl="0">
+              <a:lnSpc>
+                <a:spcPct val="100000"/>
+              </a:lnSpc>
+              <a:spcBef>
+                <a:spcPts val="0"/>
+              </a:spcBef>
+              <a:spcAft>
+                <a:spcPts val="0"/>
+              </a:spcAft>
+              <a:buClr>
+                <a:srgbClr val="000000"/>
+              </a:buClr>
+              <a:buFont typeface="Arial" panose="020B0604020202020204"/>
+              <a:defRPr sz="1400" b="0" i="0" u="none" strike="noStrike" cap="none">
+                <a:solidFill>
+                  <a:srgbClr val="000000"/>
+                </a:solidFill>
+                <a:latin typeface="Arial" panose="020B0604020202020204"/>
+                <a:ea typeface="Arial" panose="020B0604020202020204"/>
+                <a:cs typeface="Arial" panose="020B0604020202020204"/>
+                <a:sym typeface="Arial" panose="020B0604020202020204"/>
+              </a:defRPr>
+            </a:lvl1pPr>
+            <a:lvl2pPr marR="0" lvl="1" algn="l" rtl="0">
+              <a:lnSpc>
+                <a:spcPct val="100000"/>
+              </a:lnSpc>
+              <a:spcBef>
+                <a:spcPts val="0"/>
+              </a:spcBef>
+              <a:spcAft>
+                <a:spcPts val="0"/>
+              </a:spcAft>
+              <a:buClr>
+                <a:srgbClr val="000000"/>
+              </a:buClr>
+              <a:buFont typeface="Arial" panose="020B0604020202020204"/>
+              <a:defRPr sz="1400" b="0" i="0" u="none" strike="noStrike" cap="none">
+                <a:solidFill>
+                  <a:srgbClr val="000000"/>
+                </a:solidFill>
+                <a:latin typeface="Arial" panose="020B0604020202020204"/>
+                <a:ea typeface="Arial" panose="020B0604020202020204"/>
+                <a:cs typeface="Arial" panose="020B0604020202020204"/>
+                <a:sym typeface="Arial" panose="020B0604020202020204"/>
+              </a:defRPr>
+            </a:lvl2pPr>
+            <a:lvl3pPr marR="0" lvl="2" algn="l" rtl="0">
+              <a:lnSpc>
+                <a:spcPct val="100000"/>
+              </a:lnSpc>
+              <a:spcBef>
+                <a:spcPts val="0"/>
+              </a:spcBef>
+              <a:spcAft>
+                <a:spcPts val="0"/>
+              </a:spcAft>
+              <a:buClr>
+                <a:srgbClr val="000000"/>
+              </a:buClr>
+              <a:buFont typeface="Arial" panose="020B0604020202020204"/>
+              <a:defRPr sz="1400" b="0" i="0" u="none" strike="noStrike" cap="none">
+                <a:solidFill>
+                  <a:srgbClr val="000000"/>
+                </a:solidFill>
+                <a:latin typeface="Arial" panose="020B0604020202020204"/>
+                <a:ea typeface="Arial" panose="020B0604020202020204"/>
+                <a:cs typeface="Arial" panose="020B0604020202020204"/>
+                <a:sym typeface="Arial" panose="020B0604020202020204"/>
+              </a:defRPr>
+            </a:lvl3pPr>
+            <a:lvl4pPr marR="0" lvl="3" algn="l" rtl="0">
+              <a:lnSpc>
+                <a:spcPct val="100000"/>
+              </a:lnSpc>
+              <a:spcBef>
+                <a:spcPts val="0"/>
+              </a:spcBef>
+              <a:spcAft>
+                <a:spcPts val="0"/>
+              </a:spcAft>
+              <a:buClr>
+                <a:srgbClr val="000000"/>
+              </a:buClr>
+              <a:buFont typeface="Arial" panose="020B0604020202020204"/>
+              <a:defRPr sz="1400" b="0" i="0" u="none" strike="noStrike" cap="none">
+                <a:solidFill>
+                  <a:srgbClr val="000000"/>
+                </a:solidFill>
+                <a:latin typeface="Arial" panose="020B0604020202020204"/>
+                <a:ea typeface="Arial" panose="020B0604020202020204"/>
+                <a:cs typeface="Arial" panose="020B0604020202020204"/>
+                <a:sym typeface="Arial" panose="020B0604020202020204"/>
+              </a:defRPr>
+            </a:lvl4pPr>
+            <a:lvl5pPr marR="0" lvl="4" algn="l" rtl="0">
+              <a:lnSpc>
+                <a:spcPct val="100000"/>
+              </a:lnSpc>
+              <a:spcBef>
+                <a:spcPts val="0"/>
+              </a:spcBef>
+              <a:spcAft>
+                <a:spcPts val="0"/>
+              </a:spcAft>
+              <a:buClr>
+                <a:srgbClr val="000000"/>
+              </a:buClr>
+              <a:buFont typeface="Arial" panose="020B0604020202020204"/>
+              <a:defRPr sz="1400" b="0" i="0" u="none" strike="noStrike" cap="none">
+                <a:solidFill>
+                  <a:srgbClr val="000000"/>
+                </a:solidFill>
+                <a:latin typeface="Arial" panose="020B0604020202020204"/>
+                <a:ea typeface="Arial" panose="020B0604020202020204"/>
+                <a:cs typeface="Arial" panose="020B0604020202020204"/>
+                <a:sym typeface="Arial" panose="020B0604020202020204"/>
+              </a:defRPr>
+            </a:lvl5pPr>
+            <a:lvl6pPr marR="0" lvl="5" algn="l" rtl="0">
+              <a:lnSpc>
+                <a:spcPct val="100000"/>
+              </a:lnSpc>
+              <a:spcBef>
+                <a:spcPts val="0"/>
+              </a:spcBef>
+              <a:spcAft>
+                <a:spcPts val="0"/>
+              </a:spcAft>
+              <a:buClr>
+                <a:srgbClr val="000000"/>
+              </a:buClr>
+              <a:buFont typeface="Arial" panose="020B0604020202020204"/>
+              <a:defRPr sz="1400" b="0" i="0" u="none" strike="noStrike" cap="none">
+                <a:solidFill>
+                  <a:srgbClr val="000000"/>
+                </a:solidFill>
+                <a:latin typeface="Arial" panose="020B0604020202020204"/>
+                <a:ea typeface="Arial" panose="020B0604020202020204"/>
+                <a:cs typeface="Arial" panose="020B0604020202020204"/>
+                <a:sym typeface="Arial" panose="020B0604020202020204"/>
+              </a:defRPr>
+            </a:lvl6pPr>
+            <a:lvl7pPr marR="0" lvl="6" algn="l" rtl="0">
+              <a:lnSpc>
+                <a:spcPct val="100000"/>
+              </a:lnSpc>
+              <a:spcBef>
+                <a:spcPts val="0"/>
+              </a:spcBef>
+              <a:spcAft>
+                <a:spcPts val="0"/>
+              </a:spcAft>
+              <a:buClr>
+                <a:srgbClr val="000000"/>
+              </a:buClr>
+              <a:buFont typeface="Arial" panose="020B0604020202020204"/>
+              <a:defRPr sz="1400" b="0" i="0" u="none" strike="noStrike" cap="none">
+                <a:solidFill>
+                  <a:srgbClr val="000000"/>
+                </a:solidFill>
+                <a:latin typeface="Arial" panose="020B0604020202020204"/>
+                <a:ea typeface="Arial" panose="020B0604020202020204"/>
+                <a:cs typeface="Arial" panose="020B0604020202020204"/>
+                <a:sym typeface="Arial" panose="020B0604020202020204"/>
+              </a:defRPr>
+            </a:lvl7pPr>
+            <a:lvl8pPr marR="0" lvl="7" algn="l" rtl="0">
+              <a:lnSpc>
+                <a:spcPct val="100000"/>
+              </a:lnSpc>
+              <a:spcBef>
+                <a:spcPts val="0"/>
+              </a:spcBef>
+              <a:spcAft>
+                <a:spcPts val="0"/>
+              </a:spcAft>
+              <a:buClr>
+                <a:srgbClr val="000000"/>
+              </a:buClr>
+              <a:buFont typeface="Arial" panose="020B0604020202020204"/>
+              <a:defRPr sz="1400" b="0" i="0" u="none" strike="noStrike" cap="none">
+                <a:solidFill>
+                  <a:srgbClr val="000000"/>
+                </a:solidFill>
+                <a:latin typeface="Arial" panose="020B0604020202020204"/>
+                <a:ea typeface="Arial" panose="020B0604020202020204"/>
+                <a:cs typeface="Arial" panose="020B0604020202020204"/>
+                <a:sym typeface="Arial" panose="020B0604020202020204"/>
+              </a:defRPr>
+            </a:lvl8pPr>
+            <a:lvl9pPr marR="0" lvl="8" algn="l" rtl="0">
+              <a:lnSpc>
+                <a:spcPct val="100000"/>
+              </a:lnSpc>
+              <a:spcBef>
+                <a:spcPts val="0"/>
+              </a:spcBef>
+              <a:spcAft>
+                <a:spcPts val="0"/>
+              </a:spcAft>
+              <a:buClr>
+                <a:srgbClr val="000000"/>
+              </a:buClr>
+              <a:buFont typeface="Arial" panose="020B0604020202020204"/>
+              <a:defRPr sz="1400" b="0" i="0" u="none" strike="noStrike" cap="none">
+                <a:solidFill>
+                  <a:srgbClr val="000000"/>
+                </a:solidFill>
+                <a:latin typeface="Arial" panose="020B0604020202020204"/>
+                <a:ea typeface="Arial" panose="020B0604020202020204"/>
+                <a:cs typeface="Arial" panose="020B0604020202020204"/>
+                <a:sym typeface="Arial" panose="020B0604020202020204"/>
+              </a:defRPr>
+            </a:lvl9pPr>
+          </a:lstStyle>
+          <a:p>
+            <a:pPr algn="ctr"/>
+            <a:r>
+              <a:rPr lang="en-IN" sz="3200" b="1" dirty="0">
+                <a:solidFill>
+                  <a:srgbClr val="C00000"/>
+                </a:solidFill>
+                <a:latin typeface="Times New Roman" panose="02020603050405020304" pitchFamily="18" charset="0"/>
+                <a:cs typeface="Times New Roman" panose="02020603050405020304" pitchFamily="18" charset="0"/>
+              </a:rPr>
+              <a:t>OUTPUT SCREENSHOT</a:t>
+            </a:r>
+          </a:p>
+        </p:txBody>
+      </p:sp>
+      <p:pic>
+        <p:nvPicPr>
+          <p:cNvPr id="3" name="Picture 2">
+            <a:extLst>
+              <a:ext uri="{FF2B5EF4-FFF2-40B4-BE49-F238E27FC236}">
+                <a16:creationId xmlns:a16="http://schemas.microsoft.com/office/drawing/2014/main" id="{F57BE300-21D0-00BF-34A8-B57E2800537F}"/>
+              </a:ext>
+            </a:extLst>
+          </p:cNvPr>
+          <p:cNvPicPr>
+            <a:picLocks noChangeAspect="1"/>
+          </p:cNvPicPr>
+          <p:nvPr/>
+        </p:nvPicPr>
+        <p:blipFill>
+          <a:blip r:embed="rId2"/>
+          <a:stretch>
+            <a:fillRect/>
+          </a:stretch>
+        </p:blipFill>
+        <p:spPr>
+          <a:xfrm>
+            <a:off x="1066800" y="1138085"/>
+            <a:ext cx="4391865" cy="2367116"/>
+          </a:xfrm>
+          <a:prstGeom prst="rect">
+            <a:avLst/>
+          </a:prstGeom>
+        </p:spPr>
+      </p:pic>
+      <p:pic>
+        <p:nvPicPr>
+          <p:cNvPr id="6" name="Picture 5">
+            <a:extLst>
+              <a:ext uri="{FF2B5EF4-FFF2-40B4-BE49-F238E27FC236}">
+                <a16:creationId xmlns:a16="http://schemas.microsoft.com/office/drawing/2014/main" id="{58B9FEC2-FD00-7D7E-C3C6-46E50B35C8AA}"/>
+              </a:ext>
+            </a:extLst>
+          </p:cNvPr>
+          <p:cNvPicPr>
+            <a:picLocks noChangeAspect="1"/>
+          </p:cNvPicPr>
+          <p:nvPr/>
+        </p:nvPicPr>
+        <p:blipFill>
+          <a:blip r:embed="rId3"/>
+          <a:stretch>
+            <a:fillRect/>
+          </a:stretch>
+        </p:blipFill>
+        <p:spPr>
+          <a:xfrm>
+            <a:off x="5796929" y="2895600"/>
+            <a:ext cx="3132467" cy="3604359"/>
+          </a:xfrm>
+          <a:prstGeom prst="rect">
+            <a:avLst/>
+          </a:prstGeom>
+        </p:spPr>
+      </p:pic>
+    </p:spTree>
+  </p:cSld>
+  <p:clrMapOvr>
+    <a:masterClrMapping/>
+  </p:clrMapOvr>
+  <p:transition>
+    <p:fade/>
+  </p:transition>
+</p:sld>
+</file>
+
+<file path=ppt/slides/slide17.xml><?xml version="1.0" encoding="utf-8"?>
 <p:sld xmlns:a="http://schemas.openxmlformats.org/drawingml/2006/main" xmlns:r="http://schemas.openxmlformats.org/officeDocument/2006/relationships" xmlns:p="http://schemas.openxmlformats.org/presentationml/2006/main">
   <p:cSld>
     <p:spTree>
@@ -13664,7 +14799,7 @@
 </p:sld>
 </file>
 
-<file path=ppt/slides/slide11.xml><?xml version="1.0" encoding="utf-8"?>
+<file path=ppt/slides/slide18.xml><?xml version="1.0" encoding="utf-8"?>
 <p:sld xmlns:a="http://schemas.openxmlformats.org/drawingml/2006/main" xmlns:r="http://schemas.openxmlformats.org/officeDocument/2006/relationships" xmlns:p="http://schemas.openxmlformats.org/presentationml/2006/main">
   <p:cSld>
     <p:spTree>
@@ -13858,12 +14993,12 @@
 </p:sld>
 </file>
 
-<file path=ppt/slides/slide12.xml><?xml version="1.0" encoding="utf-8"?>
+<file path=ppt/slides/slide19.xml><?xml version="1.0" encoding="utf-8"?>
 <p:sld xmlns:a="http://schemas.openxmlformats.org/drawingml/2006/main" xmlns:r="http://schemas.openxmlformats.org/officeDocument/2006/relationships" xmlns:p="http://schemas.openxmlformats.org/presentationml/2006/main">
   <p:cSld>
     <p:spTree>
       <p:nvGrpSpPr>
-        <p:cNvPr id="1" name="Shape 254"/>
+        <p:cNvPr id="1" name=""/>
         <p:cNvGrpSpPr/>
         <p:nvPr/>
       </p:nvGrpSpPr>
@@ -13877,67 +15012,240 @@
       </p:grpSpPr>
       <p:sp>
         <p:nvSpPr>
-          <p:cNvPr id="255" name="Google Shape;255;p45"/>
-          <p:cNvSpPr txBox="1">
+          <p:cNvPr id="2" name="Date Placeholder 1">
+            <a:extLst>
+              <a:ext uri="{FF2B5EF4-FFF2-40B4-BE49-F238E27FC236}">
+                <a16:creationId xmlns:a16="http://schemas.microsoft.com/office/drawing/2014/main" id="{544D1B20-7A25-B6C0-ABE1-79F51BC6DAFB}"/>
+              </a:ext>
+            </a:extLst>
+          </p:cNvPr>
+          <p:cNvSpPr>
             <a:spLocks noGrp="1"/>
           </p:cNvSpPr>
           <p:nvPr>
-            <p:ph type="title"/>
+            <p:ph type="dt" sz="half" idx="2"/>
           </p:nvPr>
         </p:nvSpPr>
-        <p:spPr>
-          <a:xfrm>
-            <a:off x="685800" y="2209800"/>
-            <a:ext cx="8229600" cy="1417955"/>
-          </a:xfrm>
-          <a:prstGeom prst="rect">
-            <a:avLst/>
-          </a:prstGeom>
-          <a:noFill/>
-          <a:ln>
-            <a:noFill/>
-          </a:ln>
-        </p:spPr>
+        <p:spPr/>
         <p:txBody>
-          <a:bodyPr spcFirstLastPara="1" wrap="square" lIns="0" tIns="45700" rIns="0" bIns="0" anchor="b" anchorCtr="0">
-            <a:noAutofit/>
-          </a:bodyPr>
+          <a:bodyPr/>
           <a:lstStyle/>
           <a:p>
-            <a:pPr marL="0" lvl="0" indent="0" algn="ctr" rtl="0">
+            <a:pPr marL="0" marR="0" lvl="0" indent="0" algn="l" defTabSz="914400" rtl="0" eaLnBrk="1" fontAlgn="auto" latinLnBrk="0" hangingPunct="1">
+              <a:lnSpc>
+                <a:spcPct val="100000"/>
+              </a:lnSpc>
               <a:spcBef>
                 <a:spcPts val="0"/>
               </a:spcBef>
               <a:spcAft>
                 <a:spcPts val="0"/>
               </a:spcAft>
-              <a:buNone/>
+              <a:buClrTx/>
+              <a:buSzTx/>
+              <a:buFontTx/>
+              <a:buNone/>
+              <a:defRPr/>
             </a:pPr>
             <a:r>
-              <a:rPr lang="en-US" sz="5400" b="1" i="1" dirty="0">
+              <a:rPr kumimoji="0" lang="en-US" sz="1000" b="0" i="0" u="none" strike="noStrike" kern="1200" cap="none" spc="0" normalizeH="0" baseline="0" noProof="0">
+                <a:ln>
+                  <a:noFill/>
+                </a:ln>
+                <a:solidFill>
+                  <a:schemeClr val="tx1"/>
+                </a:solidFill>
+                <a:effectLst/>
+                <a:uLnTx/>
+                <a:uFillTx/>
+                <a:latin typeface="+mn-lt"/>
+                <a:ea typeface="+mn-ea"/>
+                <a:cs typeface="+mn-cs"/>
+              </a:rPr>
+              <a:t>3-Sep-24</a:t>
+            </a:r>
+            <a:endParaRPr kumimoji="0" lang="en-US" sz="1000" b="0" i="0" u="none" strike="noStrike" kern="1200" cap="none" spc="0" normalizeH="0" baseline="0" noProof="0" dirty="0">
+              <a:ln>
+                <a:noFill/>
+              </a:ln>
+              <a:solidFill>
+                <a:schemeClr val="tx1"/>
+              </a:solidFill>
+              <a:effectLst/>
+              <a:uLnTx/>
+              <a:uFillTx/>
+              <a:latin typeface="+mn-lt"/>
+              <a:ea typeface="+mn-ea"/>
+              <a:cs typeface="+mn-cs"/>
+            </a:endParaRPr>
+          </a:p>
+        </p:txBody>
+      </p:sp>
+      <p:sp>
+        <p:nvSpPr>
+          <p:cNvPr id="4" name="TextBox 3">
+            <a:extLst>
+              <a:ext uri="{FF2B5EF4-FFF2-40B4-BE49-F238E27FC236}">
+                <a16:creationId xmlns:a16="http://schemas.microsoft.com/office/drawing/2014/main" id="{A15991EA-E975-24D4-DED2-9081C4AACFBF}"/>
+              </a:ext>
+            </a:extLst>
+          </p:cNvPr>
+          <p:cNvSpPr txBox="1"/>
+          <p:nvPr/>
+        </p:nvSpPr>
+        <p:spPr>
+          <a:xfrm>
+            <a:off x="1552074" y="1905000"/>
+            <a:ext cx="7543800" cy="3416320"/>
+          </a:xfrm>
+          <a:prstGeom prst="rect">
+            <a:avLst/>
+          </a:prstGeom>
+          <a:noFill/>
+        </p:spPr>
+        <p:txBody>
+          <a:bodyPr wrap="square">
+            <a:spAutoFit/>
+          </a:bodyPr>
+          <a:lstStyle/>
+          <a:p>
+            <a:r>
+              <a:rPr lang="en-US" dirty="0"/>
+              <a:t>Project git link:</a:t>
+            </a:r>
+          </a:p>
+          <a:p>
+            <a:r>
+              <a:rPr lang="en-US" dirty="0">
+                <a:hlinkClick r:id="rId2"/>
+              </a:rPr>
+              <a:t>https://github.com/Immanuvel1207/employee-Management-System</a:t>
+            </a:r>
+            <a:endParaRPr lang="en-US" dirty="0"/>
+          </a:p>
+          <a:p>
+            <a:endParaRPr lang="en-US" dirty="0"/>
+          </a:p>
+          <a:p>
+            <a:r>
+              <a:rPr lang="en-US" dirty="0"/>
+              <a:t>EMS Host-link: </a:t>
+            </a:r>
+          </a:p>
+          <a:p>
+            <a:endParaRPr lang="en-US" dirty="0"/>
+          </a:p>
+          <a:p>
+            <a:r>
+              <a:rPr lang="en-US" dirty="0"/>
+              <a:t>Node.js Documentation: </a:t>
+            </a:r>
+            <a:r>
+              <a:rPr lang="en-US" dirty="0">
+                <a:hlinkClick r:id="rId3"/>
+              </a:rPr>
+              <a:t>https://nodejs.org/en/docs</a:t>
+            </a:r>
+            <a:endParaRPr lang="en-US" dirty="0"/>
+          </a:p>
+          <a:p>
+            <a:endParaRPr lang="en-US" dirty="0"/>
+          </a:p>
+          <a:p>
+            <a:r>
+              <a:rPr lang="en-US" dirty="0"/>
+              <a:t>React Documentation: </a:t>
+            </a:r>
+            <a:r>
+              <a:rPr lang="en-US" dirty="0">
+                <a:hlinkClick r:id="rId4"/>
+              </a:rPr>
+              <a:t>https://reactjs.org/docs/getting-started.html</a:t>
+            </a:r>
+            <a:endParaRPr lang="en-US" dirty="0"/>
+          </a:p>
+          <a:p>
+            <a:endParaRPr lang="en-US" dirty="0"/>
+          </a:p>
+          <a:p>
+            <a:r>
+              <a:rPr lang="en-US" dirty="0"/>
+              <a:t>MongoDB Documentation: </a:t>
+            </a:r>
+            <a:r>
+              <a:rPr lang="en-US" dirty="0">
+                <a:hlinkClick r:id="rId5"/>
+              </a:rPr>
+              <a:t>https://docs.mongodb.com/</a:t>
+            </a:r>
+            <a:endParaRPr lang="en-US" dirty="0"/>
+          </a:p>
+          <a:p>
+            <a:endParaRPr lang="en-US" dirty="0"/>
+          </a:p>
+          <a:p>
+            <a:r>
+              <a:rPr lang="en-US" dirty="0"/>
+              <a:t>Twilio API Documentation: </a:t>
+            </a:r>
+            <a:r>
+              <a:rPr lang="en-US" dirty="0">
+                <a:hlinkClick r:id="rId6"/>
+              </a:rPr>
+              <a:t>https://www.twilio.com/docs</a:t>
+            </a:r>
+            <a:endParaRPr lang="en-US" dirty="0"/>
+          </a:p>
+        </p:txBody>
+      </p:sp>
+      <p:sp>
+        <p:nvSpPr>
+          <p:cNvPr id="14" name="TextBox 13">
+            <a:extLst>
+              <a:ext uri="{FF2B5EF4-FFF2-40B4-BE49-F238E27FC236}">
+                <a16:creationId xmlns:a16="http://schemas.microsoft.com/office/drawing/2014/main" id="{4F772384-FE66-B230-E74E-CEA7083D9DA6}"/>
+              </a:ext>
+            </a:extLst>
+          </p:cNvPr>
+          <p:cNvSpPr txBox="1"/>
+          <p:nvPr/>
+        </p:nvSpPr>
+        <p:spPr>
+          <a:xfrm>
+            <a:off x="3962400" y="1123890"/>
+            <a:ext cx="1981200" cy="400110"/>
+          </a:xfrm>
+          <a:prstGeom prst="rect">
+            <a:avLst/>
+          </a:prstGeom>
+          <a:noFill/>
+        </p:spPr>
+        <p:txBody>
+          <a:bodyPr wrap="square">
+            <a:spAutoFit/>
+          </a:bodyPr>
+          <a:lstStyle/>
+          <a:p>
+            <a:r>
+              <a:rPr lang="en-IN" sz="2000" b="1" dirty="0">
                 <a:solidFill>
                   <a:srgbClr val="C00000"/>
                 </a:solidFill>
                 <a:latin typeface="Times New Roman" panose="02020603050405020304" pitchFamily="18" charset="0"/>
-                <a:ea typeface="Algerian" panose="04020705040A02060702"/>
                 <a:cs typeface="Times New Roman" panose="02020603050405020304" pitchFamily="18" charset="0"/>
-                <a:sym typeface="Algerian" panose="04020705040A02060702"/>
               </a:rPr>
-              <a:t>THANK YOU</a:t>
-            </a:r>
-            <a:endParaRPr sz="5400" b="1" i="1" dirty="0">
-              <a:solidFill>
-                <a:schemeClr val="dk1"/>
-              </a:solidFill>
-              <a:latin typeface="Times New Roman" panose="02020603050405020304" pitchFamily="18" charset="0"/>
-              <a:ea typeface="Algerian" panose="04020705040A02060702"/>
-              <a:cs typeface="Times New Roman" panose="02020603050405020304" pitchFamily="18" charset="0"/>
-              <a:sym typeface="Algerian" panose="04020705040A02060702"/>
-            </a:endParaRPr>
+              <a:t>REFERENCES</a:t>
+            </a:r>
+            <a:endParaRPr lang="en-US" sz="2000" dirty="0"/>
           </a:p>
         </p:txBody>
       </p:sp>
     </p:spTree>
+    <p:extLst>
+      <p:ext uri="{BB962C8B-B14F-4D97-AF65-F5344CB8AC3E}">
+        <p14:creationId xmlns:p14="http://schemas.microsoft.com/office/powerpoint/2010/main" val="3483052740"/>
+      </p:ext>
+    </p:extLst>
   </p:cSld>
   <p:clrMapOvr>
     <a:masterClrMapping/>
@@ -14022,8 +15330,8 @@
         </p:nvSpPr>
         <p:spPr bwMode="auto">
           <a:xfrm>
-            <a:off x="990600" y="1447814"/>
-            <a:ext cx="7434262" cy="2535566"/>
+            <a:off x="1004159" y="1447800"/>
+            <a:ext cx="7434262" cy="2951064"/>
           </a:xfrm>
           <a:prstGeom prst="rect">
             <a:avLst/>
@@ -14087,17 +15395,20 @@
               <a:buNone/>
               <a:tabLst/>
             </a:pPr>
-            <a:endParaRPr kumimoji="0" lang="en-US" altLang="en-US" sz="1800" b="0" i="0" u="none" strike="noStrike" cap="none" normalizeH="0" baseline="0" dirty="0">
-              <a:ln>
-                <a:noFill/>
-              </a:ln>
-              <a:solidFill>
-                <a:schemeClr val="tx1"/>
-              </a:solidFill>
-              <a:effectLst/>
-              <a:latin typeface="Times New Roman" panose="02020603050405020304" pitchFamily="18" charset="0"/>
-              <a:cs typeface="Times New Roman" panose="02020603050405020304" pitchFamily="18" charset="0"/>
-            </a:endParaRPr>
+            <a:r>
+              <a:rPr kumimoji="0" lang="en-US" altLang="en-US" sz="1800" b="0" i="0" u="none" strike="noStrike" cap="none" normalizeH="0" baseline="0" dirty="0">
+                <a:ln>
+                  <a:noFill/>
+                </a:ln>
+                <a:solidFill>
+                  <a:schemeClr val="tx1"/>
+                </a:solidFill>
+                <a:effectLst/>
+                <a:latin typeface="Times New Roman" panose="02020603050405020304" pitchFamily="18" charset="0"/>
+                <a:cs typeface="Times New Roman" panose="02020603050405020304" pitchFamily="18" charset="0"/>
+              </a:rPr>
+              <a:t>Traditional employee management systems often lack integration, leading to:</a:t>
+            </a:r>
           </a:p>
           <a:p>
             <a:pPr marL="0" marR="0" lvl="0" indent="0" algn="just" defTabSz="914400" rtl="0" eaLnBrk="0" fontAlgn="base" latinLnBrk="0" hangingPunct="0">
@@ -14112,6 +15423,7 @@
               </a:spcAft>
               <a:buClrTx/>
               <a:buSzTx/>
+              <a:buFontTx/>
               <a:buNone/>
               <a:tabLst/>
             </a:pPr>
@@ -14127,10 +15439,28 @@
                 <a:latin typeface="Times New Roman" panose="02020603050405020304" pitchFamily="18" charset="0"/>
                 <a:cs typeface="Times New Roman" panose="02020603050405020304" pitchFamily="18" charset="0"/>
               </a:rPr>
-              <a:t>Managing employee data and administrative tasks manually can be time-consuming and prone to error. The </a:t>
-            </a:r>
-            <a:r>
-              <a:rPr kumimoji="0" lang="en-US" altLang="en-US" sz="1800" i="0" u="none" strike="noStrike" cap="none" normalizeH="0" baseline="0" dirty="0">
+              <a:t>- Inefficient data management across departments</a:t>
+            </a:r>
+          </a:p>
+          <a:p>
+            <a:pPr marL="0" marR="0" lvl="0" indent="0" algn="just" defTabSz="914400" rtl="0" eaLnBrk="0" fontAlgn="base" latinLnBrk="0" hangingPunct="0">
+              <a:lnSpc>
+                <a:spcPct val="150000"/>
+              </a:lnSpc>
+              <a:spcBef>
+                <a:spcPct val="0"/>
+              </a:spcBef>
+              <a:spcAft>
+                <a:spcPct val="0"/>
+              </a:spcAft>
+              <a:buClrTx/>
+              <a:buSzTx/>
+              <a:buFontTx/>
+              <a:buNone/>
+              <a:tabLst/>
+            </a:pPr>
+            <a:r>
+              <a:rPr kumimoji="0" lang="en-US" altLang="en-US" sz="1800" b="0" i="0" u="none" strike="noStrike" cap="none" normalizeH="0" baseline="0" dirty="0">
                 <a:ln>
                   <a:noFill/>
                 </a:ln>
@@ -14141,8 +15471,26 @@
                 <a:latin typeface="Times New Roman" panose="02020603050405020304" pitchFamily="18" charset="0"/>
                 <a:cs typeface="Times New Roman" panose="02020603050405020304" pitchFamily="18" charset="0"/>
               </a:rPr>
-              <a:t>Employee Management System (EMS)</a:t>
-            </a:r>
+              <a:t>- Time-consuming manual processes for attendance and leave management</a:t>
+            </a:r>
+          </a:p>
+          <a:p>
+            <a:pPr marL="0" marR="0" lvl="0" indent="0" algn="just" defTabSz="914400" rtl="0" eaLnBrk="0" fontAlgn="base" latinLnBrk="0" hangingPunct="0">
+              <a:lnSpc>
+                <a:spcPct val="150000"/>
+              </a:lnSpc>
+              <a:spcBef>
+                <a:spcPct val="0"/>
+              </a:spcBef>
+              <a:spcAft>
+                <a:spcPct val="0"/>
+              </a:spcAft>
+              <a:buClrTx/>
+              <a:buSzTx/>
+              <a:buFontTx/>
+              <a:buNone/>
+              <a:tabLst/>
+            </a:pPr>
             <a:r>
               <a:rPr kumimoji="0" lang="en-US" altLang="en-US" sz="1800" b="0" i="0" u="none" strike="noStrike" cap="none" normalizeH="0" baseline="0" dirty="0">
                 <a:ln>
@@ -14155,7 +15503,71 @@
                 <a:latin typeface="Times New Roman" panose="02020603050405020304" pitchFamily="18" charset="0"/>
                 <a:cs typeface="Times New Roman" panose="02020603050405020304" pitchFamily="18" charset="0"/>
               </a:rPr>
-              <a:t> provides a streamlined solution for HR departments to automate employee records, attendance, and payroll management with role-based access for security and efficiency. </a:t>
+              <a:t>- Lack of real-time insights for decision-making</a:t>
+            </a:r>
+          </a:p>
+          <a:p>
+            <a:pPr marL="0" marR="0" lvl="0" indent="0" algn="just" defTabSz="914400" rtl="0" eaLnBrk="0" fontAlgn="base" latinLnBrk="0" hangingPunct="0">
+              <a:lnSpc>
+                <a:spcPct val="150000"/>
+              </a:lnSpc>
+              <a:spcBef>
+                <a:spcPct val="0"/>
+              </a:spcBef>
+              <a:spcAft>
+                <a:spcPct val="0"/>
+              </a:spcAft>
+              <a:buClrTx/>
+              <a:buSzTx/>
+              <a:buFontTx/>
+              <a:buNone/>
+              <a:tabLst/>
+            </a:pPr>
+            <a:r>
+              <a:rPr kumimoji="0" lang="en-US" altLang="en-US" sz="1800" b="0" i="0" u="none" strike="noStrike" cap="none" normalizeH="0" baseline="0" dirty="0">
+                <a:ln>
+                  <a:noFill/>
+                </a:ln>
+                <a:solidFill>
+                  <a:schemeClr val="tx1"/>
+                </a:solidFill>
+                <a:effectLst/>
+                <a:latin typeface="Times New Roman" panose="02020603050405020304" pitchFamily="18" charset="0"/>
+                <a:cs typeface="Times New Roman" panose="02020603050405020304" pitchFamily="18" charset="0"/>
+              </a:rPr>
+              <a:t>- Communication gaps between management and employees</a:t>
+            </a:r>
+          </a:p>
+          <a:p>
+            <a:pPr marL="0" marR="0" lvl="0" indent="0" algn="just" defTabSz="914400" rtl="0" eaLnBrk="0" fontAlgn="base" latinLnBrk="0" hangingPunct="0">
+              <a:lnSpc>
+                <a:spcPct val="150000"/>
+              </a:lnSpc>
+              <a:spcBef>
+                <a:spcPct val="0"/>
+              </a:spcBef>
+              <a:spcAft>
+                <a:spcPct val="0"/>
+              </a:spcAft>
+              <a:buClrTx/>
+              <a:buSzTx/>
+              <a:buFontTx/>
+              <a:buNone/>
+              <a:tabLst/>
+            </a:pPr>
+            <a:r>
+              <a:rPr kumimoji="0" lang="en-US" altLang="en-US" sz="1800" b="0" i="0" u="none" strike="noStrike" cap="none" normalizeH="0" baseline="0" dirty="0">
+                <a:ln>
+                  <a:noFill/>
+                </a:ln>
+                <a:solidFill>
+                  <a:schemeClr val="tx1"/>
+                </a:solidFill>
+                <a:effectLst/>
+                <a:latin typeface="Times New Roman" panose="02020603050405020304" pitchFamily="18" charset="0"/>
+                <a:cs typeface="Times New Roman" panose="02020603050405020304" pitchFamily="18" charset="0"/>
+              </a:rPr>
+              <a:t>Need for a unified platform that addresses all aspects of employee management.</a:t>
             </a:r>
           </a:p>
         </p:txBody>
@@ -14188,8 +15600,8 @@
         </p:blipFill>
         <p:spPr>
           <a:xfrm>
-            <a:off x="5791200" y="3657600"/>
-            <a:ext cx="2914613" cy="2914613"/>
+            <a:off x="6216943" y="4010389"/>
+            <a:ext cx="2647221" cy="2647221"/>
           </a:xfrm>
           <a:prstGeom prst="roundRect">
             <a:avLst>
@@ -14220,6 +15632,96 @@
           </a:sp3d>
         </p:spPr>
       </p:pic>
+    </p:spTree>
+  </p:cSld>
+  <p:clrMapOvr>
+    <a:masterClrMapping/>
+  </p:clrMapOvr>
+  <p:transition>
+    <p:fade/>
+  </p:transition>
+</p:sld>
+</file>
+
+<file path=ppt/slides/slide20.xml><?xml version="1.0" encoding="utf-8"?>
+<p:sld xmlns:a="http://schemas.openxmlformats.org/drawingml/2006/main" xmlns:r="http://schemas.openxmlformats.org/officeDocument/2006/relationships" xmlns:p="http://schemas.openxmlformats.org/presentationml/2006/main">
+  <p:cSld>
+    <p:spTree>
+      <p:nvGrpSpPr>
+        <p:cNvPr id="1" name="Shape 254"/>
+        <p:cNvGrpSpPr/>
+        <p:nvPr/>
+      </p:nvGrpSpPr>
+      <p:grpSpPr>
+        <a:xfrm>
+          <a:off x="0" y="0"/>
+          <a:ext cx="0" cy="0"/>
+          <a:chOff x="0" y="0"/>
+          <a:chExt cx="0" cy="0"/>
+        </a:xfrm>
+      </p:grpSpPr>
+      <p:sp>
+        <p:nvSpPr>
+          <p:cNvPr id="255" name="Google Shape;255;p45"/>
+          <p:cNvSpPr txBox="1">
+            <a:spLocks noGrp="1"/>
+          </p:cNvSpPr>
+          <p:nvPr>
+            <p:ph type="title"/>
+          </p:nvPr>
+        </p:nvSpPr>
+        <p:spPr>
+          <a:xfrm>
+            <a:off x="685800" y="2209800"/>
+            <a:ext cx="8229600" cy="1417955"/>
+          </a:xfrm>
+          <a:prstGeom prst="rect">
+            <a:avLst/>
+          </a:prstGeom>
+          <a:noFill/>
+          <a:ln>
+            <a:noFill/>
+          </a:ln>
+        </p:spPr>
+        <p:txBody>
+          <a:bodyPr spcFirstLastPara="1" wrap="square" lIns="0" tIns="45700" rIns="0" bIns="0" anchor="b" anchorCtr="0">
+            <a:noAutofit/>
+          </a:bodyPr>
+          <a:lstStyle/>
+          <a:p>
+            <a:pPr marL="0" lvl="0" indent="0" algn="ctr" rtl="0">
+              <a:spcBef>
+                <a:spcPts val="0"/>
+              </a:spcBef>
+              <a:spcAft>
+                <a:spcPts val="0"/>
+              </a:spcAft>
+              <a:buNone/>
+            </a:pPr>
+            <a:r>
+              <a:rPr lang="en-US" sz="5400" b="1" i="1" dirty="0">
+                <a:solidFill>
+                  <a:srgbClr val="C00000"/>
+                </a:solidFill>
+                <a:latin typeface="Times New Roman" panose="02020603050405020304" pitchFamily="18" charset="0"/>
+                <a:ea typeface="Algerian" panose="04020705040A02060702"/>
+                <a:cs typeface="Times New Roman" panose="02020603050405020304" pitchFamily="18" charset="0"/>
+                <a:sym typeface="Algerian" panose="04020705040A02060702"/>
+              </a:rPr>
+              <a:t>THANK YOU</a:t>
+            </a:r>
+            <a:endParaRPr sz="5400" b="1" i="1" dirty="0">
+              <a:solidFill>
+                <a:schemeClr val="dk1"/>
+              </a:solidFill>
+              <a:latin typeface="Times New Roman" panose="02020603050405020304" pitchFamily="18" charset="0"/>
+              <a:ea typeface="Algerian" panose="04020705040A02060702"/>
+              <a:cs typeface="Times New Roman" panose="02020603050405020304" pitchFamily="18" charset="0"/>
+              <a:sym typeface="Algerian" panose="04020705040A02060702"/>
+            </a:endParaRPr>
+          </a:p>
+        </p:txBody>
+      </p:sp>
     </p:spTree>
   </p:cSld>
   <p:clrMapOvr>
@@ -14477,7 +15979,7 @@
               <a:buSzTx/>
               <a:tabLst/>
             </a:pPr>
-            <a:endParaRPr kumimoji="0" lang="en-US" altLang="en-US" sz="1800" b="0" i="0" u="none" strike="noStrike" cap="none" normalizeH="0" baseline="0" dirty="0">
+            <a:endParaRPr kumimoji="0" lang="en-US" altLang="en-US" sz="1800" i="0" u="none" strike="noStrike" cap="none" normalizeH="0" baseline="0" dirty="0">
               <a:ln>
                 <a:noFill/>
               </a:ln>
@@ -14559,30 +16061,28 @@
       </p:sp>
       <p:sp>
         <p:nvSpPr>
-          <p:cNvPr id="5" name="Rectangle 2">
+          <p:cNvPr id="8" name="Rectangle 2">
             <a:extLst>
               <a:ext uri="{FF2B5EF4-FFF2-40B4-BE49-F238E27FC236}">
-                <a16:creationId xmlns:a16="http://schemas.microsoft.com/office/drawing/2014/main" id="{560DD823-0233-ACD7-F1C7-5FE58F81F30D}"/>
+                <a16:creationId xmlns:a16="http://schemas.microsoft.com/office/drawing/2014/main" id="{5C75F2EF-F367-C057-6453-67ECF5813619}"/>
               </a:ext>
             </a:extLst>
           </p:cNvPr>
-          <p:cNvSpPr>
-            <a:spLocks noGrp="1" noChangeArrowheads="1"/>
+          <p:cNvSpPr txBox="1">
+            <a:spLocks noChangeArrowheads="1"/>
           </p:cNvSpPr>
-          <p:nvPr>
-            <p:ph type="body" idx="1"/>
-          </p:nvPr>
+          <p:nvPr/>
         </p:nvSpPr>
         <p:spPr bwMode="auto">
           <a:xfrm>
-            <a:off x="1219199" y="1918502"/>
-            <a:ext cx="6858001" cy="3366563"/>
+            <a:off x="1066800" y="1905000"/>
+            <a:ext cx="7543800" cy="2585323"/>
           </a:xfrm>
           <a:prstGeom prst="rect">
             <a:avLst/>
           </a:prstGeom>
           <a:noFill/>
-          <a:ln>
+          <a:ln w="9525">
             <a:noFill/>
           </a:ln>
           <a:effectLst/>
@@ -14622,182 +16122,247 @@
             </a:prstTxWarp>
             <a:spAutoFit/>
           </a:bodyPr>
-          <a:lstStyle/>
-          <a:p>
-            <a:pPr marR="0" lvl="0" algn="just" defTabSz="914400" rtl="0" eaLnBrk="0" fontAlgn="base" latinLnBrk="0" hangingPunct="0">
-              <a:lnSpc>
-                <a:spcPct val="150000"/>
-              </a:lnSpc>
+          <a:lstStyle>
+            <a:lvl1pPr marL="273050" indent="-273050" algn="l" rtl="0" eaLnBrk="0" fontAlgn="base" hangingPunct="0">
               <a:spcBef>
-                <a:spcPct val="0"/>
+                <a:spcPct val="20000"/>
               </a:spcBef>
               <a:spcAft>
                 <a:spcPct val="0"/>
               </a:spcAft>
-              <a:buClrTx/>
-              <a:buSzTx/>
-              <a:tabLst/>
-            </a:pPr>
-            <a:r>
-              <a:rPr kumimoji="0" lang="en-US" altLang="en-US" sz="1800" b="1" i="0" u="none" strike="noStrike" cap="none" normalizeH="0" baseline="0" dirty="0">
-                <a:ln>
-                  <a:noFill/>
-                </a:ln>
+              <a:buSzPct val="80000"/>
+              <a:buFont typeface="Wingdings" panose="05000000000000000000" pitchFamily="2" charset="2"/>
+              <a:buChar char="Ø"/>
+              <a:defRPr sz="2000" kern="1200">
                 <a:solidFill>
                   <a:schemeClr val="tx1"/>
                 </a:solidFill>
-                <a:effectLst/>
+                <a:latin typeface="+mn-lt"/>
+                <a:ea typeface="+mn-ea"/>
+                <a:cs typeface="+mn-cs"/>
+              </a:defRPr>
+            </a:lvl1pPr>
+            <a:lvl2pPr marL="640080" indent="-246380" algn="l" rtl="0" eaLnBrk="0" fontAlgn="base" hangingPunct="0">
+              <a:spcBef>
+                <a:spcPct val="20000"/>
+              </a:spcBef>
+              <a:spcAft>
+                <a:spcPct val="0"/>
+              </a:spcAft>
+              <a:buSzPct val="80000"/>
+              <a:buFont typeface="Wingdings" panose="05000000000000000000" pitchFamily="2" charset="2"/>
+              <a:buChar char="Ø"/>
+              <a:defRPr sz="2000" kern="1200">
+                <a:solidFill>
+                  <a:schemeClr val="tx1"/>
+                </a:solidFill>
+                <a:latin typeface="+mn-lt"/>
+                <a:ea typeface="+mn-ea"/>
+                <a:cs typeface="+mn-cs"/>
+              </a:defRPr>
+            </a:lvl2pPr>
+            <a:lvl3pPr marL="914400" indent="-246380" algn="l" rtl="0" eaLnBrk="0" fontAlgn="base" hangingPunct="0">
+              <a:spcBef>
+                <a:spcPct val="20000"/>
+              </a:spcBef>
+              <a:spcAft>
+                <a:spcPct val="0"/>
+              </a:spcAft>
+              <a:buSzPct val="80000"/>
+              <a:buFont typeface="Wingdings" panose="05000000000000000000" pitchFamily="2" charset="2"/>
+              <a:buChar char="Ø"/>
+              <a:defRPr sz="2000" kern="1200">
+                <a:solidFill>
+                  <a:schemeClr val="tx1"/>
+                </a:solidFill>
+                <a:latin typeface="+mn-lt"/>
+                <a:ea typeface="+mn-ea"/>
+                <a:cs typeface="+mn-cs"/>
+              </a:defRPr>
+            </a:lvl3pPr>
+            <a:lvl4pPr marL="1187450" indent="-209550" algn="l" rtl="0" eaLnBrk="0" fontAlgn="base" hangingPunct="0">
+              <a:spcBef>
+                <a:spcPct val="20000"/>
+              </a:spcBef>
+              <a:spcAft>
+                <a:spcPct val="0"/>
+              </a:spcAft>
+              <a:buSzPct val="80000"/>
+              <a:buFont typeface="Wingdings" panose="05000000000000000000" pitchFamily="2" charset="2"/>
+              <a:buChar char="Ø"/>
+              <a:defRPr sz="2000" kern="1200">
+                <a:solidFill>
+                  <a:schemeClr val="tx1"/>
+                </a:solidFill>
+                <a:latin typeface="+mn-lt"/>
+                <a:ea typeface="+mn-ea"/>
+                <a:cs typeface="+mn-cs"/>
+              </a:defRPr>
+            </a:lvl4pPr>
+            <a:lvl5pPr marL="1462405" indent="-209550" algn="l" rtl="0" eaLnBrk="0" fontAlgn="base" hangingPunct="0">
+              <a:spcBef>
+                <a:spcPct val="20000"/>
+              </a:spcBef>
+              <a:spcAft>
+                <a:spcPct val="0"/>
+              </a:spcAft>
+              <a:buSzPct val="80000"/>
+              <a:buFont typeface="Wingdings" panose="05000000000000000000" pitchFamily="2" charset="2"/>
+              <a:buChar char="Ø"/>
+              <a:defRPr sz="2000" kern="1200">
+                <a:solidFill>
+                  <a:schemeClr val="tx1"/>
+                </a:solidFill>
+                <a:latin typeface="+mn-lt"/>
+                <a:ea typeface="+mn-ea"/>
+                <a:cs typeface="+mn-cs"/>
+              </a:defRPr>
+            </a:lvl5pPr>
+            <a:lvl6pPr marL="1737360" indent="-210185" algn="l" rtl="0" eaLnBrk="1" latinLnBrk="0" hangingPunct="1">
+              <a:spcBef>
+                <a:spcPct val="20000"/>
+              </a:spcBef>
+              <a:buClr>
+                <a:schemeClr val="accent5"/>
+              </a:buClr>
+              <a:buSzPct val="80000"/>
+              <a:buFont typeface="Wingdings 2" panose="05020102010507070707"/>
+              <a:buChar char=""/>
+              <a:defRPr kumimoji="0" sz="1800" kern="1200">
+                <a:solidFill>
+                  <a:schemeClr val="tx1"/>
+                </a:solidFill>
+                <a:latin typeface="+mn-lt"/>
+                <a:ea typeface="+mn-ea"/>
+                <a:cs typeface="+mn-cs"/>
+              </a:defRPr>
+            </a:lvl6pPr>
+            <a:lvl7pPr marL="1920240" indent="-182880" algn="l" rtl="0" eaLnBrk="1" latinLnBrk="0" hangingPunct="1">
+              <a:spcBef>
+                <a:spcPct val="20000"/>
+              </a:spcBef>
+              <a:buClr>
+                <a:schemeClr val="accent6"/>
+              </a:buClr>
+              <a:buSzPct val="80000"/>
+              <a:buFont typeface="Wingdings 2" panose="05020102010507070707"/>
+              <a:buChar char=""/>
+              <a:defRPr kumimoji="0" sz="1600" kern="1200" baseline="0">
+                <a:solidFill>
+                  <a:schemeClr val="tx1"/>
+                </a:solidFill>
+                <a:latin typeface="+mn-lt"/>
+                <a:ea typeface="+mn-ea"/>
+                <a:cs typeface="+mn-cs"/>
+              </a:defRPr>
+            </a:lvl7pPr>
+            <a:lvl8pPr marL="2194560" indent="-182880" algn="l" rtl="0" eaLnBrk="1" latinLnBrk="0" hangingPunct="1">
+              <a:spcBef>
+                <a:spcPct val="20000"/>
+              </a:spcBef>
+              <a:buClr>
+                <a:schemeClr val="tx2"/>
+              </a:buClr>
+              <a:buChar char="•"/>
+              <a:defRPr kumimoji="0" sz="1600" kern="1200">
+                <a:solidFill>
+                  <a:schemeClr val="tx1"/>
+                </a:solidFill>
+                <a:latin typeface="+mn-lt"/>
+                <a:ea typeface="+mn-ea"/>
+                <a:cs typeface="+mn-cs"/>
+              </a:defRPr>
+            </a:lvl8pPr>
+            <a:lvl9pPr marL="2468880" indent="-182880" algn="l" rtl="0" eaLnBrk="1" latinLnBrk="0" hangingPunct="1">
+              <a:spcBef>
+                <a:spcPct val="20000"/>
+              </a:spcBef>
+              <a:buClr>
+                <a:schemeClr val="tx2"/>
+              </a:buClr>
+              <a:buFontTx/>
+              <a:buChar char="•"/>
+              <a:defRPr kumimoji="0" sz="1400" kern="1200" baseline="0">
+                <a:solidFill>
+                  <a:schemeClr val="tx1"/>
+                </a:solidFill>
+                <a:latin typeface="+mn-lt"/>
+                <a:ea typeface="+mn-ea"/>
+                <a:cs typeface="+mn-cs"/>
+              </a:defRPr>
+            </a:lvl9pPr>
+          </a:lstStyle>
+          <a:p>
+            <a:pPr algn="just"/>
+            <a:r>
+              <a:rPr lang="en-US" sz="1800" dirty="0">
                 <a:latin typeface="Times New Roman" panose="02020603050405020304" pitchFamily="18" charset="0"/>
                 <a:cs typeface="Times New Roman" panose="02020603050405020304" pitchFamily="18" charset="0"/>
               </a:rPr>
-              <a:t>Efficient Employee Data Management</a:t>
-            </a:r>
-            <a:r>
-              <a:rPr kumimoji="0" lang="en-US" altLang="en-US" sz="1800" b="0" i="0" u="none" strike="noStrike" cap="none" normalizeH="0" baseline="0" dirty="0">
-                <a:ln>
-                  <a:noFill/>
-                </a:ln>
-                <a:solidFill>
-                  <a:schemeClr val="tx1"/>
-                </a:solidFill>
-                <a:effectLst/>
+              <a:t>1. Develop an integrated system for comprehensive employee data management</a:t>
+            </a:r>
+          </a:p>
+          <a:p>
+            <a:pPr algn="just"/>
+            <a:r>
+              <a:rPr lang="en-US" sz="1800" dirty="0">
                 <a:latin typeface="Times New Roman" panose="02020603050405020304" pitchFamily="18" charset="0"/>
                 <a:cs typeface="Times New Roman" panose="02020603050405020304" pitchFamily="18" charset="0"/>
               </a:rPr>
-              <a:t>: Enable organizations to easily manage employee information.</a:t>
-            </a:r>
-          </a:p>
-          <a:p>
-            <a:pPr marR="0" lvl="0" algn="just" defTabSz="914400" rtl="0" eaLnBrk="0" fontAlgn="base" latinLnBrk="0" hangingPunct="0">
-              <a:lnSpc>
-                <a:spcPct val="150000"/>
-              </a:lnSpc>
-              <a:spcBef>
-                <a:spcPct val="0"/>
-              </a:spcBef>
-              <a:spcAft>
-                <a:spcPct val="0"/>
-              </a:spcAft>
-              <a:buClrTx/>
-              <a:buSzTx/>
-              <a:tabLst/>
-            </a:pPr>
-            <a:r>
-              <a:rPr kumimoji="0" lang="en-US" altLang="en-US" sz="1800" b="1" i="0" u="none" strike="noStrike" cap="none" normalizeH="0" baseline="0" dirty="0">
-                <a:ln>
-                  <a:noFill/>
-                </a:ln>
-                <a:solidFill>
-                  <a:schemeClr val="tx1"/>
-                </a:solidFill>
-                <a:effectLst/>
+              <a:t>2. Automate attendance tracking and leave management processes</a:t>
+            </a:r>
+          </a:p>
+          <a:p>
+            <a:pPr algn="just"/>
+            <a:r>
+              <a:rPr lang="en-US" sz="1800" dirty="0">
                 <a:latin typeface="Times New Roman" panose="02020603050405020304" pitchFamily="18" charset="0"/>
                 <a:cs typeface="Times New Roman" panose="02020603050405020304" pitchFamily="18" charset="0"/>
               </a:rPr>
-              <a:t>Full-Stack Development</a:t>
-            </a:r>
-            <a:r>
-              <a:rPr kumimoji="0" lang="en-US" altLang="en-US" sz="1800" b="0" i="0" u="none" strike="noStrike" cap="none" normalizeH="0" baseline="0" dirty="0">
-                <a:ln>
-                  <a:noFill/>
-                </a:ln>
-                <a:solidFill>
-                  <a:schemeClr val="tx1"/>
-                </a:solidFill>
-                <a:effectLst/>
+              <a:t>3. Implement a real-time salary calculation system</a:t>
+            </a:r>
+          </a:p>
+          <a:p>
+            <a:pPr algn="just"/>
+            <a:r>
+              <a:rPr lang="en-US" sz="1800" dirty="0">
                 <a:latin typeface="Times New Roman" panose="02020603050405020304" pitchFamily="18" charset="0"/>
                 <a:cs typeface="Times New Roman" panose="02020603050405020304" pitchFamily="18" charset="0"/>
               </a:rPr>
-              <a:t>: Utilizing modern technology stacks for seamless interaction.</a:t>
-            </a:r>
-          </a:p>
-          <a:p>
-            <a:pPr marR="0" lvl="0" algn="just" defTabSz="914400" rtl="0" eaLnBrk="0" fontAlgn="base" latinLnBrk="0" hangingPunct="0">
-              <a:lnSpc>
-                <a:spcPct val="150000"/>
-              </a:lnSpc>
-              <a:spcBef>
-                <a:spcPct val="0"/>
-              </a:spcBef>
-              <a:spcAft>
-                <a:spcPct val="0"/>
-              </a:spcAft>
-              <a:buClrTx/>
-              <a:buSzTx/>
-              <a:tabLst/>
-            </a:pPr>
-            <a:r>
-              <a:rPr kumimoji="0" lang="en-US" altLang="en-US" sz="1800" b="1" i="0" u="none" strike="noStrike" cap="none" normalizeH="0" baseline="0" dirty="0">
-                <a:ln>
-                  <a:noFill/>
-                </a:ln>
-                <a:solidFill>
-                  <a:schemeClr val="tx1"/>
-                </a:solidFill>
-                <a:effectLst/>
+              <a:t>4. Enhance communication between management and employees</a:t>
+            </a:r>
+          </a:p>
+          <a:p>
+            <a:pPr algn="just"/>
+            <a:r>
+              <a:rPr lang="en-US" sz="1800" dirty="0">
                 <a:latin typeface="Times New Roman" panose="02020603050405020304" pitchFamily="18" charset="0"/>
                 <a:cs typeface="Times New Roman" panose="02020603050405020304" pitchFamily="18" charset="0"/>
               </a:rPr>
-              <a:t>User-Centric Design</a:t>
-            </a:r>
-            <a:r>
-              <a:rPr kumimoji="0" lang="en-US" altLang="en-US" sz="1800" b="0" i="0" u="none" strike="noStrike" cap="none" normalizeH="0" baseline="0" dirty="0">
-                <a:ln>
-                  <a:noFill/>
-                </a:ln>
-                <a:solidFill>
-                  <a:schemeClr val="tx1"/>
-                </a:solidFill>
-                <a:effectLst/>
+              <a:t>5. Provide a user-friendly interface for both administrators and employees</a:t>
+            </a:r>
+          </a:p>
+          <a:p>
+            <a:pPr algn="just"/>
+            <a:r>
+              <a:rPr lang="en-US" sz="1800" dirty="0">
                 <a:latin typeface="Times New Roman" panose="02020603050405020304" pitchFamily="18" charset="0"/>
                 <a:cs typeface="Times New Roman" panose="02020603050405020304" pitchFamily="18" charset="0"/>
               </a:rPr>
-              <a:t>: Focus on ease of navigation and data management.</a:t>
-            </a:r>
-          </a:p>
-          <a:p>
-            <a:pPr marR="0" lvl="0" algn="just" defTabSz="914400" rtl="0" eaLnBrk="0" fontAlgn="base" latinLnBrk="0" hangingPunct="0">
-              <a:lnSpc>
-                <a:spcPct val="150000"/>
-              </a:lnSpc>
+              <a:t>6. Ensure data security and role-based access control.</a:t>
+            </a:r>
+          </a:p>
+          <a:p>
+            <a:pPr algn="just">
               <a:spcBef>
                 <a:spcPct val="0"/>
               </a:spcBef>
-              <a:spcAft>
-                <a:spcPct val="0"/>
-              </a:spcAft>
-              <a:buClrTx/>
               <a:buSzTx/>
-              <a:tabLst/>
             </a:pPr>
-            <a:r>
-              <a:rPr kumimoji="0" lang="en-US" altLang="en-US" sz="1800" b="1" i="0" u="none" strike="noStrike" cap="none" normalizeH="0" baseline="0" dirty="0">
-                <a:ln>
-                  <a:noFill/>
-                </a:ln>
-                <a:solidFill>
-                  <a:schemeClr val="tx1"/>
-                </a:solidFill>
-                <a:effectLst/>
-                <a:latin typeface="Times New Roman" panose="02020603050405020304" pitchFamily="18" charset="0"/>
-                <a:cs typeface="Times New Roman" panose="02020603050405020304" pitchFamily="18" charset="0"/>
-              </a:rPr>
-              <a:t>Scalability</a:t>
-            </a:r>
-            <a:r>
-              <a:rPr kumimoji="0" lang="en-US" altLang="en-US" sz="1800" b="0" i="0" u="none" strike="noStrike" cap="none" normalizeH="0" baseline="0" dirty="0">
-                <a:ln>
-                  <a:noFill/>
-                </a:ln>
-                <a:solidFill>
-                  <a:schemeClr val="tx1"/>
-                </a:solidFill>
-                <a:effectLst/>
-                <a:latin typeface="Times New Roman" panose="02020603050405020304" pitchFamily="18" charset="0"/>
-                <a:cs typeface="Times New Roman" panose="02020603050405020304" pitchFamily="18" charset="0"/>
-              </a:rPr>
-              <a:t>: Capable of handling more users and future feature integrations. </a:t>
-            </a:r>
+            <a:endParaRPr lang="en-US" altLang="en-US" sz="1800" dirty="0">
+              <a:latin typeface="Times New Roman" panose="02020603050405020304" pitchFamily="18" charset="0"/>
+              <a:cs typeface="Times New Roman" panose="02020603050405020304" pitchFamily="18" charset="0"/>
+            </a:endParaRPr>
           </a:p>
         </p:txBody>
       </p:sp>
@@ -14841,8 +16406,8 @@
         </p:nvSpPr>
         <p:spPr>
           <a:xfrm>
-            <a:off x="606490" y="577915"/>
-            <a:ext cx="8229600" cy="713403"/>
+            <a:off x="681134" y="704850"/>
+            <a:ext cx="8005665" cy="657419"/>
           </a:xfrm>
         </p:spPr>
         <p:txBody>
@@ -14851,491 +16416,420 @@
           <a:p>
             <a:pPr algn="ctr"/>
             <a:r>
-              <a:rPr lang="en-IN" altLang="en-US" b="1" dirty="0">
+              <a:rPr lang="en-IN" b="1" dirty="0">
                 <a:solidFill>
                   <a:srgbClr val="C00000"/>
                 </a:solidFill>
                 <a:latin typeface="Times New Roman" panose="02020603050405020304" pitchFamily="18" charset="0"/>
                 <a:cs typeface="Times New Roman" panose="02020603050405020304" pitchFamily="18" charset="0"/>
-                <a:sym typeface="Times New Roman" panose="02020603050405020304"/>
               </a:rPr>
-              <a:t>MODULE DESCRIPTION</a:t>
+              <a:t>MODULES</a:t>
             </a:r>
           </a:p>
         </p:txBody>
       </p:sp>
       <p:sp>
         <p:nvSpPr>
-          <p:cNvPr id="4" name="Rectangle 1">
+          <p:cNvPr id="4" name="Text Placeholder 3"/>
+          <p:cNvSpPr>
+            <a:spLocks noGrp="1"/>
+          </p:cNvSpPr>
+          <p:nvPr>
+            <p:ph type="body" idx="1"/>
+          </p:nvPr>
+        </p:nvSpPr>
+        <p:spPr>
+          <a:xfrm>
+            <a:off x="1026695" y="2245531"/>
+            <a:ext cx="4288082" cy="4389437"/>
+          </a:xfrm>
+        </p:spPr>
+        <p:txBody>
+          <a:bodyPr/>
+          <a:lstStyle/>
+          <a:p>
+            <a:r>
+              <a:rPr lang="en-US" dirty="0"/>
+              <a:t>Admin Dashboard</a:t>
+            </a:r>
+          </a:p>
+          <a:p>
+            <a:pPr lvl="1">
+              <a:buFont typeface="Wingdings" panose="05000000000000000000" pitchFamily="2" charset="2"/>
+              <a:buChar char="§"/>
+            </a:pPr>
+            <a:r>
+              <a:rPr lang="en-US" dirty="0"/>
+              <a:t>Add Employee</a:t>
+            </a:r>
+          </a:p>
+          <a:p>
+            <a:pPr lvl="1">
+              <a:buFont typeface="Wingdings" panose="05000000000000000000" pitchFamily="2" charset="2"/>
+              <a:buChar char="§"/>
+            </a:pPr>
+            <a:r>
+              <a:rPr lang="en-US" dirty="0"/>
+              <a:t>Update Employee</a:t>
+            </a:r>
+          </a:p>
+          <a:p>
+            <a:pPr lvl="1">
+              <a:buFont typeface="Wingdings" panose="05000000000000000000" pitchFamily="2" charset="2"/>
+              <a:buChar char="§"/>
+            </a:pPr>
+            <a:r>
+              <a:rPr lang="en-US" dirty="0"/>
+              <a:t>Delete(Resigned) Employee</a:t>
+            </a:r>
+          </a:p>
+          <a:p>
+            <a:pPr lvl="1">
+              <a:buFont typeface="Wingdings" panose="05000000000000000000" pitchFamily="2" charset="2"/>
+              <a:buChar char="§"/>
+            </a:pPr>
+            <a:r>
+              <a:rPr lang="en-US" dirty="0"/>
+              <a:t>Track attendance</a:t>
+            </a:r>
+          </a:p>
+          <a:p>
+            <a:pPr lvl="1">
+              <a:buFont typeface="Wingdings" panose="05000000000000000000" pitchFamily="2" charset="2"/>
+              <a:buChar char="§"/>
+            </a:pPr>
+            <a:r>
+              <a:rPr lang="en-US" dirty="0"/>
+              <a:t>Integrated messaging system</a:t>
+            </a:r>
+          </a:p>
+          <a:p>
+            <a:pPr lvl="1">
+              <a:buFont typeface="Wingdings" panose="05000000000000000000" pitchFamily="2" charset="2"/>
+              <a:buChar char="§"/>
+            </a:pPr>
+            <a:r>
+              <a:rPr lang="en-US" dirty="0"/>
+              <a:t>Leave Management</a:t>
+            </a:r>
+          </a:p>
+          <a:p>
+            <a:pPr lvl="1">
+              <a:buFont typeface="Wingdings" panose="05000000000000000000" pitchFamily="2" charset="2"/>
+              <a:buChar char="§"/>
+            </a:pPr>
+            <a:r>
+              <a:rPr lang="en-US" dirty="0"/>
+              <a:t>Holiday management</a:t>
+            </a:r>
+          </a:p>
+          <a:p>
+            <a:pPr lvl="1">
+              <a:buFont typeface="Wingdings" panose="05000000000000000000" pitchFamily="2" charset="2"/>
+              <a:buChar char="§"/>
+            </a:pPr>
+            <a:r>
+              <a:rPr lang="en-US" dirty="0"/>
+              <a:t>Information Passing</a:t>
+            </a:r>
+          </a:p>
+          <a:p>
+            <a:pPr lvl="1">
+              <a:buFont typeface="Wingdings" panose="05000000000000000000" pitchFamily="2" charset="2"/>
+              <a:buChar char="§"/>
+            </a:pPr>
+            <a:r>
+              <a:rPr lang="en-US" dirty="0"/>
+              <a:t>Salary calculation</a:t>
+            </a:r>
+          </a:p>
+          <a:p>
+            <a:endParaRPr lang="en-US" dirty="0"/>
+          </a:p>
+          <a:p>
+            <a:endParaRPr lang="en-US" dirty="0"/>
+          </a:p>
+        </p:txBody>
+      </p:sp>
+      <p:sp>
+        <p:nvSpPr>
+          <p:cNvPr id="3" name="Text Placeholder 3">
             <a:extLst>
               <a:ext uri="{FF2B5EF4-FFF2-40B4-BE49-F238E27FC236}">
-                <a16:creationId xmlns:a16="http://schemas.microsoft.com/office/drawing/2014/main" id="{3C2F7489-71EB-4DBD-C446-FA64316F5D79}"/>
+                <a16:creationId xmlns:a16="http://schemas.microsoft.com/office/drawing/2014/main" id="{8622B14B-ED52-24CF-5CAD-5612960AA095}"/>
               </a:ext>
             </a:extLst>
           </p:cNvPr>
-          <p:cNvSpPr>
-            <a:spLocks noChangeArrowheads="1"/>
+          <p:cNvSpPr txBox="1">
+            <a:spLocks/>
           </p:cNvSpPr>
           <p:nvPr/>
         </p:nvSpPr>
-        <p:spPr bwMode="auto">
+        <p:spPr>
           <a:xfrm>
-            <a:off x="0" y="-184666"/>
-            <a:ext cx="184731" cy="369332"/>
+            <a:off x="5065295" y="2245530"/>
+            <a:ext cx="4114800" cy="4389437"/>
           </a:xfrm>
           <a:prstGeom prst="rect">
             <a:avLst/>
           </a:prstGeom>
           <a:noFill/>
-          <a:ln>
+          <a:ln w="9525">
             <a:noFill/>
           </a:ln>
-          <a:effectLst/>
-          <a:extLst>
-            <a:ext uri="{909E8E84-426E-40DD-AFC4-6F175D3DCCD1}">
-              <a14:hiddenFill xmlns:a14="http://schemas.microsoft.com/office/drawing/2010/main">
-                <a:solidFill>
-                  <a:schemeClr val="accent1"/>
-                </a:solidFill>
-              </a14:hiddenFill>
-            </a:ext>
-            <a:ext uri="{91240B29-F687-4F45-9708-019B960494DF}">
-              <a14:hiddenLine xmlns:a14="http://schemas.microsoft.com/office/drawing/2010/main" w="9525">
-                <a:solidFill>
-                  <a:schemeClr val="tx1"/>
-                </a:solidFill>
-                <a:miter lim="800000"/>
-                <a:headEnd/>
-                <a:tailEnd/>
-              </a14:hiddenLine>
-            </a:ext>
-            <a:ext uri="{AF507438-7753-43E0-B8FC-AC1667EBCBE1}">
-              <a14:hiddenEffects xmlns:a14="http://schemas.microsoft.com/office/drawing/2010/main">
-                <a:effectLst>
-                  <a:outerShdw dist="35921" dir="2700000" algn="ctr" rotWithShape="0">
-                    <a:schemeClr val="bg2"/>
-                  </a:outerShdw>
-                </a:effectLst>
-              </a14:hiddenEffects>
-            </a:ext>
-          </a:extLst>
         </p:spPr>
         <p:txBody>
-          <a:bodyPr vert="horz" wrap="none" lIns="91440" tIns="45720" rIns="91440" bIns="45720" numCol="1" anchor="ctr" anchorCtr="0" compatLnSpc="1">
-            <a:prstTxWarp prst="textNoShape">
-              <a:avLst/>
-            </a:prstTxWarp>
-            <a:spAutoFit/>
-          </a:bodyPr>
-          <a:lstStyle/>
-          <a:p>
-            <a:pPr marL="0" marR="0" lvl="0" indent="0" algn="l" defTabSz="914400" rtl="0" eaLnBrk="0" fontAlgn="base" latinLnBrk="0" hangingPunct="0">
-              <a:lnSpc>
-                <a:spcPct val="100000"/>
-              </a:lnSpc>
+          <a:bodyPr/>
+          <a:lstStyle>
+            <a:lvl1pPr marL="273050" indent="-273050" algn="l" rtl="0" eaLnBrk="0" fontAlgn="base" hangingPunct="0">
               <a:spcBef>
-                <a:spcPct val="0"/>
+                <a:spcPct val="20000"/>
               </a:spcBef>
               <a:spcAft>
                 <a:spcPct val="0"/>
               </a:spcAft>
-              <a:buClrTx/>
-              <a:buSzTx/>
+              <a:buSzPct val="80000"/>
+              <a:buFont typeface="Wingdings" panose="05000000000000000000" pitchFamily="2" charset="2"/>
+              <a:buChar char="Ø"/>
+              <a:defRPr sz="2000" kern="1200">
+                <a:solidFill>
+                  <a:schemeClr val="tx1"/>
+                </a:solidFill>
+                <a:latin typeface="+mn-lt"/>
+                <a:ea typeface="+mn-ea"/>
+                <a:cs typeface="+mn-cs"/>
+              </a:defRPr>
+            </a:lvl1pPr>
+            <a:lvl2pPr marL="640080" indent="-246380" algn="l" rtl="0" eaLnBrk="0" fontAlgn="base" hangingPunct="0">
+              <a:spcBef>
+                <a:spcPct val="20000"/>
+              </a:spcBef>
+              <a:spcAft>
+                <a:spcPct val="0"/>
+              </a:spcAft>
+              <a:buSzPct val="80000"/>
+              <a:buFont typeface="Wingdings" panose="05000000000000000000" pitchFamily="2" charset="2"/>
+              <a:buChar char="Ø"/>
+              <a:defRPr sz="2000" kern="1200">
+                <a:solidFill>
+                  <a:schemeClr val="tx1"/>
+                </a:solidFill>
+                <a:latin typeface="+mn-lt"/>
+                <a:ea typeface="+mn-ea"/>
+                <a:cs typeface="+mn-cs"/>
+              </a:defRPr>
+            </a:lvl2pPr>
+            <a:lvl3pPr marL="914400" indent="-246380" algn="l" rtl="0" eaLnBrk="0" fontAlgn="base" hangingPunct="0">
+              <a:spcBef>
+                <a:spcPct val="20000"/>
+              </a:spcBef>
+              <a:spcAft>
+                <a:spcPct val="0"/>
+              </a:spcAft>
+              <a:buSzPct val="80000"/>
+              <a:buFont typeface="Wingdings" panose="05000000000000000000" pitchFamily="2" charset="2"/>
+              <a:buChar char="Ø"/>
+              <a:defRPr sz="2000" kern="1200">
+                <a:solidFill>
+                  <a:schemeClr val="tx1"/>
+                </a:solidFill>
+                <a:latin typeface="+mn-lt"/>
+                <a:ea typeface="+mn-ea"/>
+                <a:cs typeface="+mn-cs"/>
+              </a:defRPr>
+            </a:lvl3pPr>
+            <a:lvl4pPr marL="1187450" indent="-209550" algn="l" rtl="0" eaLnBrk="0" fontAlgn="base" hangingPunct="0">
+              <a:spcBef>
+                <a:spcPct val="20000"/>
+              </a:spcBef>
+              <a:spcAft>
+                <a:spcPct val="0"/>
+              </a:spcAft>
+              <a:buSzPct val="80000"/>
+              <a:buFont typeface="Wingdings" panose="05000000000000000000" pitchFamily="2" charset="2"/>
+              <a:buChar char="Ø"/>
+              <a:defRPr sz="2000" kern="1200">
+                <a:solidFill>
+                  <a:schemeClr val="tx1"/>
+                </a:solidFill>
+                <a:latin typeface="+mn-lt"/>
+                <a:ea typeface="+mn-ea"/>
+                <a:cs typeface="+mn-cs"/>
+              </a:defRPr>
+            </a:lvl4pPr>
+            <a:lvl5pPr marL="1462405" indent="-209550" algn="l" rtl="0" eaLnBrk="0" fontAlgn="base" hangingPunct="0">
+              <a:spcBef>
+                <a:spcPct val="20000"/>
+              </a:spcBef>
+              <a:spcAft>
+                <a:spcPct val="0"/>
+              </a:spcAft>
+              <a:buSzPct val="80000"/>
+              <a:buFont typeface="Wingdings" panose="05000000000000000000" pitchFamily="2" charset="2"/>
+              <a:buChar char="Ø"/>
+              <a:defRPr sz="2000" kern="1200">
+                <a:solidFill>
+                  <a:schemeClr val="tx1"/>
+                </a:solidFill>
+                <a:latin typeface="+mn-lt"/>
+                <a:ea typeface="+mn-ea"/>
+                <a:cs typeface="+mn-cs"/>
+              </a:defRPr>
+            </a:lvl5pPr>
+            <a:lvl6pPr marL="1737360" indent="-210185" algn="l" rtl="0" eaLnBrk="1" latinLnBrk="0" hangingPunct="1">
+              <a:spcBef>
+                <a:spcPct val="20000"/>
+              </a:spcBef>
+              <a:buClr>
+                <a:schemeClr val="accent5"/>
+              </a:buClr>
+              <a:buSzPct val="80000"/>
+              <a:buFont typeface="Wingdings 2" panose="05020102010507070707"/>
+              <a:buChar char=""/>
+              <a:defRPr kumimoji="0" sz="1800" kern="1200">
+                <a:solidFill>
+                  <a:schemeClr val="tx1"/>
+                </a:solidFill>
+                <a:latin typeface="+mn-lt"/>
+                <a:ea typeface="+mn-ea"/>
+                <a:cs typeface="+mn-cs"/>
+              </a:defRPr>
+            </a:lvl6pPr>
+            <a:lvl7pPr marL="1920240" indent="-182880" algn="l" rtl="0" eaLnBrk="1" latinLnBrk="0" hangingPunct="1">
+              <a:spcBef>
+                <a:spcPct val="20000"/>
+              </a:spcBef>
+              <a:buClr>
+                <a:schemeClr val="accent6"/>
+              </a:buClr>
+              <a:buSzPct val="80000"/>
+              <a:buFont typeface="Wingdings 2" panose="05020102010507070707"/>
+              <a:buChar char=""/>
+              <a:defRPr kumimoji="0" sz="1600" kern="1200" baseline="0">
+                <a:solidFill>
+                  <a:schemeClr val="tx1"/>
+                </a:solidFill>
+                <a:latin typeface="+mn-lt"/>
+                <a:ea typeface="+mn-ea"/>
+                <a:cs typeface="+mn-cs"/>
+              </a:defRPr>
+            </a:lvl7pPr>
+            <a:lvl8pPr marL="2194560" indent="-182880" algn="l" rtl="0" eaLnBrk="1" latinLnBrk="0" hangingPunct="1">
+              <a:spcBef>
+                <a:spcPct val="20000"/>
+              </a:spcBef>
+              <a:buClr>
+                <a:schemeClr val="tx2"/>
+              </a:buClr>
+              <a:buChar char="•"/>
+              <a:defRPr kumimoji="0" sz="1600" kern="1200">
+                <a:solidFill>
+                  <a:schemeClr val="tx1"/>
+                </a:solidFill>
+                <a:latin typeface="+mn-lt"/>
+                <a:ea typeface="+mn-ea"/>
+                <a:cs typeface="+mn-cs"/>
+              </a:defRPr>
+            </a:lvl8pPr>
+            <a:lvl9pPr marL="2468880" indent="-182880" algn="l" rtl="0" eaLnBrk="1" latinLnBrk="0" hangingPunct="1">
+              <a:spcBef>
+                <a:spcPct val="20000"/>
+              </a:spcBef>
+              <a:buClr>
+                <a:schemeClr val="tx2"/>
+              </a:buClr>
               <a:buFontTx/>
-              <a:buNone/>
-              <a:tabLst/>
+              <a:buChar char="•"/>
+              <a:defRPr kumimoji="0" sz="1400" kern="1200" baseline="0">
+                <a:solidFill>
+                  <a:schemeClr val="tx1"/>
+                </a:solidFill>
+                <a:latin typeface="+mn-lt"/>
+                <a:ea typeface="+mn-ea"/>
+                <a:cs typeface="+mn-cs"/>
+              </a:defRPr>
+            </a:lvl9pPr>
+          </a:lstStyle>
+          <a:p>
+            <a:r>
+              <a:rPr lang="en-US" dirty="0"/>
+              <a:t>Employee Dashboard</a:t>
+            </a:r>
+          </a:p>
+          <a:p>
+            <a:pPr lvl="1">
+              <a:buFont typeface="Wingdings" panose="05000000000000000000" pitchFamily="2" charset="2"/>
+              <a:buChar char="§"/>
             </a:pPr>
-            <a:endParaRPr kumimoji="0" lang="en-US" altLang="en-US" sz="1800" b="0" i="0" u="none" strike="noStrike" cap="none" normalizeH="0" baseline="0" dirty="0">
-              <a:ln>
-                <a:noFill/>
-              </a:ln>
-              <a:solidFill>
-                <a:schemeClr val="tx1"/>
-              </a:solidFill>
-              <a:effectLst/>
-              <a:latin typeface="Arial" panose="020B0604020202020204" pitchFamily="34" charset="0"/>
-            </a:endParaRPr>
+            <a:r>
+              <a:rPr lang="en-US" dirty="0"/>
+              <a:t>Personal details</a:t>
+            </a:r>
+          </a:p>
+          <a:p>
+            <a:pPr lvl="1">
+              <a:buFont typeface="Wingdings" panose="05000000000000000000" pitchFamily="2" charset="2"/>
+              <a:buChar char="§"/>
+            </a:pPr>
+            <a:r>
+              <a:rPr lang="en-US" dirty="0"/>
+              <a:t>Leave application</a:t>
+            </a:r>
+          </a:p>
+          <a:p>
+            <a:pPr lvl="1">
+              <a:buFont typeface="Wingdings" panose="05000000000000000000" pitchFamily="2" charset="2"/>
+              <a:buChar char="§"/>
+            </a:pPr>
+            <a:r>
+              <a:rPr lang="en-US" dirty="0"/>
+              <a:t>Attendance &amp; salary viewing</a:t>
+            </a:r>
+          </a:p>
+          <a:p>
+            <a:endParaRPr lang="en-US" dirty="0"/>
+          </a:p>
+          <a:p>
+            <a:pPr algn="ctr"/>
+            <a:endParaRPr lang="en-US" dirty="0"/>
           </a:p>
         </p:txBody>
       </p:sp>
       <p:sp>
         <p:nvSpPr>
-          <p:cNvPr id="6" name="Rectangle 3">
+          <p:cNvPr id="8" name="TextBox 7">
             <a:extLst>
               <a:ext uri="{FF2B5EF4-FFF2-40B4-BE49-F238E27FC236}">
-                <a16:creationId xmlns:a16="http://schemas.microsoft.com/office/drawing/2014/main" id="{E6CFD1E5-42A7-2555-8A7F-733120439FEE}"/>
+                <a16:creationId xmlns:a16="http://schemas.microsoft.com/office/drawing/2014/main" id="{21870AFD-D6C7-095D-930C-6226B6AA25B3}"/>
               </a:ext>
             </a:extLst>
           </p:cNvPr>
-          <p:cNvSpPr>
-            <a:spLocks noChangeArrowheads="1"/>
-          </p:cNvSpPr>
+          <p:cNvSpPr txBox="1"/>
           <p:nvPr/>
         </p:nvSpPr>
-        <p:spPr bwMode="auto">
+        <p:spPr>
           <a:xfrm>
-            <a:off x="0" y="-184666"/>
-            <a:ext cx="184731" cy="369332"/>
+            <a:off x="3371513" y="1600200"/>
+            <a:ext cx="2320763" cy="400110"/>
           </a:xfrm>
           <a:prstGeom prst="rect">
             <a:avLst/>
           </a:prstGeom>
           <a:noFill/>
-          <a:ln>
-            <a:noFill/>
-          </a:ln>
-          <a:effectLst/>
-          <a:extLst>
-            <a:ext uri="{909E8E84-426E-40DD-AFC4-6F175D3DCCD1}">
-              <a14:hiddenFill xmlns:a14="http://schemas.microsoft.com/office/drawing/2010/main">
-                <a:solidFill>
-                  <a:schemeClr val="accent1"/>
-                </a:solidFill>
-              </a14:hiddenFill>
-            </a:ext>
-            <a:ext uri="{91240B29-F687-4F45-9708-019B960494DF}">
-              <a14:hiddenLine xmlns:a14="http://schemas.microsoft.com/office/drawing/2010/main" w="9525">
-                <a:solidFill>
-                  <a:schemeClr val="tx1"/>
-                </a:solidFill>
-                <a:miter lim="800000"/>
-                <a:headEnd/>
-                <a:tailEnd/>
-              </a14:hiddenLine>
-            </a:ext>
-            <a:ext uri="{AF507438-7753-43E0-B8FC-AC1667EBCBE1}">
-              <a14:hiddenEffects xmlns:a14="http://schemas.microsoft.com/office/drawing/2010/main">
-                <a:effectLst>
-                  <a:outerShdw dist="35921" dir="2700000" algn="ctr" rotWithShape="0">
-                    <a:schemeClr val="bg2"/>
-                  </a:outerShdw>
-                </a:effectLst>
-              </a14:hiddenEffects>
-            </a:ext>
-          </a:extLst>
         </p:spPr>
         <p:txBody>
-          <a:bodyPr vert="horz" wrap="none" lIns="91440" tIns="45720" rIns="91440" bIns="45720" numCol="1" anchor="ctr" anchorCtr="0" compatLnSpc="1">
-            <a:prstTxWarp prst="textNoShape">
-              <a:avLst/>
-            </a:prstTxWarp>
+          <a:bodyPr wrap="square">
             <a:spAutoFit/>
           </a:bodyPr>
           <a:lstStyle/>
           <a:p>
-            <a:pPr marL="0" marR="0" lvl="0" indent="0" algn="l" defTabSz="914400" rtl="0" eaLnBrk="0" fontAlgn="base" latinLnBrk="0" hangingPunct="0">
-              <a:lnSpc>
-                <a:spcPct val="100000"/>
-              </a:lnSpc>
-              <a:spcBef>
-                <a:spcPct val="0"/>
-              </a:spcBef>
-              <a:spcAft>
-                <a:spcPct val="0"/>
-              </a:spcAft>
-              <a:buClrTx/>
-              <a:buSzTx/>
-              <a:buFontTx/>
-              <a:buNone/>
-              <a:tabLst/>
+            <a:pPr marL="285750" indent="-285750" algn="ctr">
+              <a:buFont typeface="Wingdings" panose="05000000000000000000" pitchFamily="2" charset="2"/>
+              <a:buChar char="Ø"/>
             </a:pPr>
-            <a:endParaRPr kumimoji="0" lang="en-US" altLang="en-US" sz="1800" b="0" i="0" u="none" strike="noStrike" cap="none" normalizeH="0" baseline="0" dirty="0">
-              <a:ln>
-                <a:noFill/>
-              </a:ln>
-              <a:solidFill>
-                <a:schemeClr val="tx1"/>
-              </a:solidFill>
-              <a:effectLst/>
-              <a:latin typeface="Arial" panose="020B0604020202020204" pitchFamily="34" charset="0"/>
-            </a:endParaRPr>
-          </a:p>
-        </p:txBody>
-      </p:sp>
-      <p:sp>
-        <p:nvSpPr>
-          <p:cNvPr id="5" name="Rectangle 2">
-            <a:extLst>
-              <a:ext uri="{FF2B5EF4-FFF2-40B4-BE49-F238E27FC236}">
-                <a16:creationId xmlns:a16="http://schemas.microsoft.com/office/drawing/2014/main" id="{08780E82-12A5-50E9-2724-75AC8711A1D9}"/>
-              </a:ext>
-            </a:extLst>
-          </p:cNvPr>
-          <p:cNvSpPr>
-            <a:spLocks noGrp="1" noChangeArrowheads="1"/>
-          </p:cNvSpPr>
-          <p:nvPr>
-            <p:ph type="body" idx="1"/>
-          </p:nvPr>
-        </p:nvSpPr>
-        <p:spPr bwMode="auto">
-          <a:xfrm>
-            <a:off x="1295400" y="2023998"/>
-            <a:ext cx="7346950" cy="3782061"/>
-          </a:xfrm>
-          <a:prstGeom prst="rect">
-            <a:avLst/>
-          </a:prstGeom>
-          <a:noFill/>
-          <a:ln>
-            <a:noFill/>
-          </a:ln>
-          <a:effectLst/>
-          <a:extLst>
-            <a:ext uri="{909E8E84-426E-40DD-AFC4-6F175D3DCCD1}">
-              <a14:hiddenFill xmlns:a14="http://schemas.microsoft.com/office/drawing/2010/main">
-                <a:solidFill>
-                  <a:schemeClr val="accent1"/>
-                </a:solidFill>
-              </a14:hiddenFill>
-            </a:ext>
-            <a:ext uri="{91240B29-F687-4F45-9708-019B960494DF}">
-              <a14:hiddenLine xmlns:a14="http://schemas.microsoft.com/office/drawing/2010/main" w="9525">
-                <a:solidFill>
-                  <a:schemeClr val="tx1"/>
-                </a:solidFill>
-                <a:miter lim="800000"/>
-                <a:headEnd/>
-                <a:tailEnd/>
-              </a14:hiddenLine>
-            </a:ext>
-            <a:ext uri="{AF507438-7753-43E0-B8FC-AC1667EBCBE1}">
-              <a14:hiddenEffects xmlns:a14="http://schemas.microsoft.com/office/drawing/2010/main">
-                <a:effectLst>
-                  <a:outerShdw dist="35921" dir="2700000" algn="ctr" rotWithShape="0">
-                    <a:schemeClr val="bg2"/>
-                  </a:outerShdw>
-                </a:effectLst>
-              </a14:hiddenEffects>
-            </a:ext>
-          </a:extLst>
-        </p:spPr>
-        <p:txBody>
-          <a:bodyPr vert="horz" wrap="square" lIns="91440" tIns="45720" rIns="91440" bIns="45720" numCol="1" anchor="ctr" anchorCtr="0" compatLnSpc="1">
-            <a:prstTxWarp prst="textNoShape">
-              <a:avLst/>
-            </a:prstTxWarp>
-            <a:spAutoFit/>
-          </a:bodyPr>
-          <a:lstStyle/>
-          <a:p>
-            <a:pPr marR="0" lvl="0" algn="just" defTabSz="914400" rtl="0" eaLnBrk="0" fontAlgn="base" latinLnBrk="0" hangingPunct="0">
-              <a:lnSpc>
-                <a:spcPct val="150000"/>
-              </a:lnSpc>
-              <a:spcBef>
-                <a:spcPct val="0"/>
-              </a:spcBef>
-              <a:spcAft>
-                <a:spcPct val="0"/>
-              </a:spcAft>
-              <a:buClrTx/>
-              <a:buSzTx/>
-              <a:tabLst/>
-            </a:pPr>
-            <a:r>
-              <a:rPr kumimoji="0" lang="en-US" altLang="en-US" sz="1800" b="1" i="0" u="none" strike="noStrike" cap="none" normalizeH="0" baseline="0" dirty="0">
-                <a:ln>
-                  <a:noFill/>
-                </a:ln>
-                <a:solidFill>
-                  <a:schemeClr val="tx1"/>
-                </a:solidFill>
-                <a:effectLst/>
-                <a:latin typeface="Times New Roman" panose="02020603050405020304" pitchFamily="18" charset="0"/>
-                <a:cs typeface="Times New Roman" panose="02020603050405020304" pitchFamily="18" charset="0"/>
-              </a:rPr>
-              <a:t>User Authentication</a:t>
-            </a:r>
-            <a:r>
-              <a:rPr kumimoji="0" lang="en-US" altLang="en-US" sz="1800" b="0" i="0" u="none" strike="noStrike" cap="none" normalizeH="0" baseline="0" dirty="0">
-                <a:ln>
-                  <a:noFill/>
-                </a:ln>
-                <a:solidFill>
-                  <a:schemeClr val="tx1"/>
-                </a:solidFill>
-                <a:effectLst/>
-                <a:latin typeface="Times New Roman" panose="02020603050405020304" pitchFamily="18" charset="0"/>
-                <a:cs typeface="Times New Roman" panose="02020603050405020304" pitchFamily="18" charset="0"/>
-              </a:rPr>
-              <a:t>: Secure login and registration for different roles (Admin, Employee).</a:t>
-            </a:r>
-          </a:p>
-          <a:p>
-            <a:pPr marR="0" lvl="0" algn="just" defTabSz="914400" rtl="0" eaLnBrk="0" fontAlgn="base" latinLnBrk="0" hangingPunct="0">
-              <a:lnSpc>
-                <a:spcPct val="150000"/>
-              </a:lnSpc>
-              <a:spcBef>
-                <a:spcPct val="0"/>
-              </a:spcBef>
-              <a:spcAft>
-                <a:spcPct val="0"/>
-              </a:spcAft>
-              <a:buClrTx/>
-              <a:buSzTx/>
-              <a:tabLst/>
-            </a:pPr>
-            <a:r>
-              <a:rPr kumimoji="0" lang="en-US" altLang="en-US" sz="1800" b="1" i="0" u="none" strike="noStrike" cap="none" normalizeH="0" baseline="0" dirty="0">
-                <a:ln>
-                  <a:noFill/>
-                </a:ln>
-                <a:solidFill>
-                  <a:schemeClr val="tx1"/>
-                </a:solidFill>
-                <a:effectLst/>
-                <a:latin typeface="Times New Roman" panose="02020603050405020304" pitchFamily="18" charset="0"/>
-                <a:cs typeface="Times New Roman" panose="02020603050405020304" pitchFamily="18" charset="0"/>
-              </a:rPr>
-              <a:t>Employee Management</a:t>
-            </a:r>
-            <a:r>
-              <a:rPr kumimoji="0" lang="en-US" altLang="en-US" sz="1800" b="0" i="0" u="none" strike="noStrike" cap="none" normalizeH="0" baseline="0" dirty="0">
-                <a:ln>
-                  <a:noFill/>
-                </a:ln>
-                <a:solidFill>
-                  <a:schemeClr val="tx1"/>
-                </a:solidFill>
-                <a:effectLst/>
-                <a:latin typeface="Times New Roman" panose="02020603050405020304" pitchFamily="18" charset="0"/>
-                <a:cs typeface="Times New Roman" panose="02020603050405020304" pitchFamily="18" charset="0"/>
-              </a:rPr>
-              <a:t>: Add, edit, delete, and view employee details.</a:t>
-            </a:r>
-          </a:p>
-          <a:p>
-            <a:pPr marR="0" lvl="0" algn="just" defTabSz="914400" rtl="0" eaLnBrk="0" fontAlgn="base" latinLnBrk="0" hangingPunct="0">
-              <a:lnSpc>
-                <a:spcPct val="150000"/>
-              </a:lnSpc>
-              <a:spcBef>
-                <a:spcPct val="0"/>
-              </a:spcBef>
-              <a:spcAft>
-                <a:spcPct val="0"/>
-              </a:spcAft>
-              <a:buClrTx/>
-              <a:buSzTx/>
-              <a:tabLst/>
-            </a:pPr>
-            <a:r>
-              <a:rPr kumimoji="0" lang="en-US" altLang="en-US" sz="1800" b="1" i="0" u="none" strike="noStrike" cap="none" normalizeH="0" baseline="0" dirty="0">
-                <a:ln>
-                  <a:noFill/>
-                </a:ln>
-                <a:solidFill>
-                  <a:schemeClr val="tx1"/>
-                </a:solidFill>
-                <a:effectLst/>
-                <a:latin typeface="Times New Roman" panose="02020603050405020304" pitchFamily="18" charset="0"/>
-                <a:cs typeface="Times New Roman" panose="02020603050405020304" pitchFamily="18" charset="0"/>
-              </a:rPr>
-              <a:t>Attendance Tracking</a:t>
-            </a:r>
-            <a:r>
-              <a:rPr kumimoji="0" lang="en-US" altLang="en-US" sz="1800" b="0" i="0" u="none" strike="noStrike" cap="none" normalizeH="0" baseline="0" dirty="0">
-                <a:ln>
-                  <a:noFill/>
-                </a:ln>
-                <a:solidFill>
-                  <a:schemeClr val="tx1"/>
-                </a:solidFill>
-                <a:effectLst/>
-                <a:latin typeface="Times New Roman" panose="02020603050405020304" pitchFamily="18" charset="0"/>
-                <a:cs typeface="Times New Roman" panose="02020603050405020304" pitchFamily="18" charset="0"/>
-              </a:rPr>
-              <a:t>: Manage employee attendance records and view logs.</a:t>
-            </a:r>
-          </a:p>
-          <a:p>
-            <a:pPr marR="0" lvl="0" algn="just" defTabSz="914400" rtl="0" eaLnBrk="0" fontAlgn="base" latinLnBrk="0" hangingPunct="0">
-              <a:lnSpc>
-                <a:spcPct val="150000"/>
-              </a:lnSpc>
-              <a:spcBef>
-                <a:spcPct val="0"/>
-              </a:spcBef>
-              <a:spcAft>
-                <a:spcPct val="0"/>
-              </a:spcAft>
-              <a:buClrTx/>
-              <a:buSzTx/>
-              <a:tabLst/>
-            </a:pPr>
-            <a:r>
-              <a:rPr kumimoji="0" lang="en-US" altLang="en-US" sz="1800" b="1" i="0" u="none" strike="noStrike" cap="none" normalizeH="0" baseline="0" dirty="0">
-                <a:ln>
-                  <a:noFill/>
-                </a:ln>
-                <a:solidFill>
-                  <a:schemeClr val="tx1"/>
-                </a:solidFill>
-                <a:effectLst/>
-                <a:latin typeface="Times New Roman" panose="02020603050405020304" pitchFamily="18" charset="0"/>
-                <a:cs typeface="Times New Roman" panose="02020603050405020304" pitchFamily="18" charset="0"/>
-              </a:rPr>
-              <a:t>Role-Based Access Control</a:t>
-            </a:r>
-            <a:r>
-              <a:rPr kumimoji="0" lang="en-US" altLang="en-US" sz="1800" b="0" i="0" u="none" strike="noStrike" cap="none" normalizeH="0" baseline="0" dirty="0">
-                <a:ln>
-                  <a:noFill/>
-                </a:ln>
-                <a:solidFill>
-                  <a:schemeClr val="tx1"/>
-                </a:solidFill>
-                <a:effectLst/>
-                <a:latin typeface="Times New Roman" panose="02020603050405020304" pitchFamily="18" charset="0"/>
-                <a:cs typeface="Times New Roman" panose="02020603050405020304" pitchFamily="18" charset="0"/>
-              </a:rPr>
-              <a:t>: Admin access to specific features, limited access for regular employees.</a:t>
-            </a:r>
-          </a:p>
-          <a:p>
-            <a:pPr marR="0" lvl="0" algn="just" defTabSz="914400" rtl="0" eaLnBrk="0" fontAlgn="base" latinLnBrk="0" hangingPunct="0">
-              <a:lnSpc>
-                <a:spcPct val="150000"/>
-              </a:lnSpc>
-              <a:spcBef>
-                <a:spcPct val="0"/>
-              </a:spcBef>
-              <a:spcAft>
-                <a:spcPct val="0"/>
-              </a:spcAft>
-              <a:buClrTx/>
-              <a:buSzTx/>
-              <a:tabLst/>
-            </a:pPr>
-            <a:r>
-              <a:rPr kumimoji="0" lang="en-US" altLang="en-US" sz="1800" b="1" i="0" u="none" strike="noStrike" cap="none" normalizeH="0" baseline="0" dirty="0">
-                <a:ln>
-                  <a:noFill/>
-                </a:ln>
-                <a:solidFill>
-                  <a:schemeClr val="tx1"/>
-                </a:solidFill>
-                <a:effectLst/>
-                <a:latin typeface="Times New Roman" panose="02020603050405020304" pitchFamily="18" charset="0"/>
-                <a:cs typeface="Times New Roman" panose="02020603050405020304" pitchFamily="18" charset="0"/>
-              </a:rPr>
-              <a:t>Admin Dashboard</a:t>
-            </a:r>
-            <a:r>
-              <a:rPr kumimoji="0" lang="en-US" altLang="en-US" sz="1800" b="0" i="0" u="none" strike="noStrike" cap="none" normalizeH="0" baseline="0" dirty="0">
-                <a:ln>
-                  <a:noFill/>
-                </a:ln>
-                <a:solidFill>
-                  <a:schemeClr val="tx1"/>
-                </a:solidFill>
-                <a:effectLst/>
-                <a:latin typeface="Times New Roman" panose="02020603050405020304" pitchFamily="18" charset="0"/>
-                <a:cs typeface="Times New Roman" panose="02020603050405020304" pitchFamily="18" charset="0"/>
-              </a:rPr>
-              <a:t>: Overview of employee statistics, departments, and system analytics. </a:t>
+            <a:r>
+              <a:rPr lang="en-US" sz="2000" dirty="0"/>
+              <a:t>Login</a:t>
             </a:r>
           </a:p>
         </p:txBody>
@@ -15380,8 +16874,8 @@
         </p:nvSpPr>
         <p:spPr>
           <a:xfrm>
-            <a:off x="681134" y="704850"/>
-            <a:ext cx="8005665" cy="657419"/>
+            <a:off x="606490" y="577915"/>
+            <a:ext cx="8229600" cy="713403"/>
           </a:xfrm>
         </p:spPr>
         <p:txBody>
@@ -15390,76 +16884,575 @@
           <a:p>
             <a:pPr algn="ctr"/>
             <a:r>
-              <a:rPr lang="en-IN" b="1" dirty="0">
+              <a:rPr lang="en-IN" altLang="en-US" b="1" dirty="0">
                 <a:solidFill>
                   <a:srgbClr val="C00000"/>
                 </a:solidFill>
                 <a:latin typeface="Times New Roman" panose="02020603050405020304" pitchFamily="18" charset="0"/>
                 <a:cs typeface="Times New Roman" panose="02020603050405020304" pitchFamily="18" charset="0"/>
+                <a:sym typeface="Times New Roman" panose="02020603050405020304"/>
               </a:rPr>
-              <a:t>SAMPLE MODULES</a:t>
+              <a:t>NOVELTY</a:t>
             </a:r>
           </a:p>
         </p:txBody>
       </p:sp>
       <p:sp>
         <p:nvSpPr>
-          <p:cNvPr id="4" name="Text Placeholder 3"/>
+          <p:cNvPr id="4" name="Rectangle 1">
+            <a:extLst>
+              <a:ext uri="{FF2B5EF4-FFF2-40B4-BE49-F238E27FC236}">
+                <a16:creationId xmlns:a16="http://schemas.microsoft.com/office/drawing/2014/main" id="{3C2F7489-71EB-4DBD-C446-FA64316F5D79}"/>
+              </a:ext>
+            </a:extLst>
+          </p:cNvPr>
           <p:cNvSpPr>
-            <a:spLocks noGrp="1"/>
+            <a:spLocks noChangeArrowheads="1"/>
+          </p:cNvSpPr>
+          <p:nvPr/>
+        </p:nvSpPr>
+        <p:spPr bwMode="auto">
+          <a:xfrm>
+            <a:off x="0" y="-184666"/>
+            <a:ext cx="184731" cy="369332"/>
+          </a:xfrm>
+          <a:prstGeom prst="rect">
+            <a:avLst/>
+          </a:prstGeom>
+          <a:noFill/>
+          <a:ln>
+            <a:noFill/>
+          </a:ln>
+          <a:effectLst/>
+          <a:extLst>
+            <a:ext uri="{909E8E84-426E-40DD-AFC4-6F175D3DCCD1}">
+              <a14:hiddenFill xmlns:a14="http://schemas.microsoft.com/office/drawing/2010/main">
+                <a:solidFill>
+                  <a:schemeClr val="accent1"/>
+                </a:solidFill>
+              </a14:hiddenFill>
+            </a:ext>
+            <a:ext uri="{91240B29-F687-4F45-9708-019B960494DF}">
+              <a14:hiddenLine xmlns:a14="http://schemas.microsoft.com/office/drawing/2010/main" w="9525">
+                <a:solidFill>
+                  <a:schemeClr val="tx1"/>
+                </a:solidFill>
+                <a:miter lim="800000"/>
+                <a:headEnd/>
+                <a:tailEnd/>
+              </a14:hiddenLine>
+            </a:ext>
+            <a:ext uri="{AF507438-7753-43E0-B8FC-AC1667EBCBE1}">
+              <a14:hiddenEffects xmlns:a14="http://schemas.microsoft.com/office/drawing/2010/main">
+                <a:effectLst>
+                  <a:outerShdw dist="35921" dir="2700000" algn="ctr" rotWithShape="0">
+                    <a:schemeClr val="bg2"/>
+                  </a:outerShdw>
+                </a:effectLst>
+              </a14:hiddenEffects>
+            </a:ext>
+          </a:extLst>
+        </p:spPr>
+        <p:txBody>
+          <a:bodyPr vert="horz" wrap="none" lIns="91440" tIns="45720" rIns="91440" bIns="45720" numCol="1" anchor="ctr" anchorCtr="0" compatLnSpc="1">
+            <a:prstTxWarp prst="textNoShape">
+              <a:avLst/>
+            </a:prstTxWarp>
+            <a:spAutoFit/>
+          </a:bodyPr>
+          <a:lstStyle/>
+          <a:p>
+            <a:pPr marL="0" marR="0" lvl="0" indent="0" algn="l" defTabSz="914400" rtl="0" eaLnBrk="0" fontAlgn="base" latinLnBrk="0" hangingPunct="0">
+              <a:lnSpc>
+                <a:spcPct val="100000"/>
+              </a:lnSpc>
+              <a:spcBef>
+                <a:spcPct val="0"/>
+              </a:spcBef>
+              <a:spcAft>
+                <a:spcPct val="0"/>
+              </a:spcAft>
+              <a:buClrTx/>
+              <a:buSzTx/>
+              <a:buFontTx/>
+              <a:buNone/>
+              <a:tabLst/>
+            </a:pPr>
+            <a:endParaRPr kumimoji="0" lang="en-US" altLang="en-US" sz="1800" b="0" i="0" u="none" strike="noStrike" cap="none" normalizeH="0" baseline="0" dirty="0">
+              <a:ln>
+                <a:noFill/>
+              </a:ln>
+              <a:solidFill>
+                <a:schemeClr val="tx1"/>
+              </a:solidFill>
+              <a:effectLst/>
+              <a:latin typeface="Arial" panose="020B0604020202020204" pitchFamily="34" charset="0"/>
+            </a:endParaRPr>
+          </a:p>
+        </p:txBody>
+      </p:sp>
+      <p:sp>
+        <p:nvSpPr>
+          <p:cNvPr id="6" name="Rectangle 3">
+            <a:extLst>
+              <a:ext uri="{FF2B5EF4-FFF2-40B4-BE49-F238E27FC236}">
+                <a16:creationId xmlns:a16="http://schemas.microsoft.com/office/drawing/2014/main" id="{E6CFD1E5-42A7-2555-8A7F-733120439FEE}"/>
+              </a:ext>
+            </a:extLst>
+          </p:cNvPr>
+          <p:cNvSpPr>
+            <a:spLocks noChangeArrowheads="1"/>
+          </p:cNvSpPr>
+          <p:nvPr/>
+        </p:nvSpPr>
+        <p:spPr bwMode="auto">
+          <a:xfrm>
+            <a:off x="0" y="-184666"/>
+            <a:ext cx="184731" cy="369332"/>
+          </a:xfrm>
+          <a:prstGeom prst="rect">
+            <a:avLst/>
+          </a:prstGeom>
+          <a:noFill/>
+          <a:ln>
+            <a:noFill/>
+          </a:ln>
+          <a:effectLst/>
+          <a:extLst>
+            <a:ext uri="{909E8E84-426E-40DD-AFC4-6F175D3DCCD1}">
+              <a14:hiddenFill xmlns:a14="http://schemas.microsoft.com/office/drawing/2010/main">
+                <a:solidFill>
+                  <a:schemeClr val="accent1"/>
+                </a:solidFill>
+              </a14:hiddenFill>
+            </a:ext>
+            <a:ext uri="{91240B29-F687-4F45-9708-019B960494DF}">
+              <a14:hiddenLine xmlns:a14="http://schemas.microsoft.com/office/drawing/2010/main" w="9525">
+                <a:solidFill>
+                  <a:schemeClr val="tx1"/>
+                </a:solidFill>
+                <a:miter lim="800000"/>
+                <a:headEnd/>
+                <a:tailEnd/>
+              </a14:hiddenLine>
+            </a:ext>
+            <a:ext uri="{AF507438-7753-43E0-B8FC-AC1667EBCBE1}">
+              <a14:hiddenEffects xmlns:a14="http://schemas.microsoft.com/office/drawing/2010/main">
+                <a:effectLst>
+                  <a:outerShdw dist="35921" dir="2700000" algn="ctr" rotWithShape="0">
+                    <a:schemeClr val="bg2"/>
+                  </a:outerShdw>
+                </a:effectLst>
+              </a14:hiddenEffects>
+            </a:ext>
+          </a:extLst>
+        </p:spPr>
+        <p:txBody>
+          <a:bodyPr vert="horz" wrap="none" lIns="91440" tIns="45720" rIns="91440" bIns="45720" numCol="1" anchor="ctr" anchorCtr="0" compatLnSpc="1">
+            <a:prstTxWarp prst="textNoShape">
+              <a:avLst/>
+            </a:prstTxWarp>
+            <a:spAutoFit/>
+          </a:bodyPr>
+          <a:lstStyle/>
+          <a:p>
+            <a:pPr marL="0" marR="0" lvl="0" indent="0" algn="l" defTabSz="914400" rtl="0" eaLnBrk="0" fontAlgn="base" latinLnBrk="0" hangingPunct="0">
+              <a:lnSpc>
+                <a:spcPct val="100000"/>
+              </a:lnSpc>
+              <a:spcBef>
+                <a:spcPct val="0"/>
+              </a:spcBef>
+              <a:spcAft>
+                <a:spcPct val="0"/>
+              </a:spcAft>
+              <a:buClrTx/>
+              <a:buSzTx/>
+              <a:buFontTx/>
+              <a:buNone/>
+              <a:tabLst/>
+            </a:pPr>
+            <a:endParaRPr kumimoji="0" lang="en-US" altLang="en-US" sz="1800" b="0" i="0" u="none" strike="noStrike" cap="none" normalizeH="0" baseline="0" dirty="0">
+              <a:ln>
+                <a:noFill/>
+              </a:ln>
+              <a:solidFill>
+                <a:schemeClr val="tx1"/>
+              </a:solidFill>
+              <a:effectLst/>
+              <a:latin typeface="Arial" panose="020B0604020202020204" pitchFamily="34" charset="0"/>
+            </a:endParaRPr>
+          </a:p>
+        </p:txBody>
+      </p:sp>
+      <p:sp>
+        <p:nvSpPr>
+          <p:cNvPr id="5" name="Rectangle 2">
+            <a:extLst>
+              <a:ext uri="{FF2B5EF4-FFF2-40B4-BE49-F238E27FC236}">
+                <a16:creationId xmlns:a16="http://schemas.microsoft.com/office/drawing/2014/main" id="{08780E82-12A5-50E9-2724-75AC8711A1D9}"/>
+              </a:ext>
+            </a:extLst>
+          </p:cNvPr>
+          <p:cNvSpPr>
+            <a:spLocks noGrp="1" noChangeArrowheads="1"/>
           </p:cNvSpPr>
           <p:nvPr>
             <p:ph type="body" idx="1"/>
           </p:nvPr>
         </p:nvSpPr>
-        <p:spPr>
+        <p:spPr bwMode="auto">
           <a:xfrm>
-            <a:off x="3198066" y="1788294"/>
-            <a:ext cx="2971800" cy="4389437"/>
-          </a:xfrm>
+            <a:off x="2133600" y="1537969"/>
+            <a:ext cx="7499350" cy="3782061"/>
+          </a:xfrm>
+          <a:prstGeom prst="rect">
+            <a:avLst/>
+          </a:prstGeom>
+          <a:noFill/>
+          <a:ln>
+            <a:noFill/>
+          </a:ln>
+          <a:effectLst/>
+          <a:extLst>
+            <a:ext uri="{909E8E84-426E-40DD-AFC4-6F175D3DCCD1}">
+              <a14:hiddenFill xmlns:a14="http://schemas.microsoft.com/office/drawing/2010/main">
+                <a:solidFill>
+                  <a:schemeClr val="accent1"/>
+                </a:solidFill>
+              </a14:hiddenFill>
+            </a:ext>
+            <a:ext uri="{91240B29-F687-4F45-9708-019B960494DF}">
+              <a14:hiddenLine xmlns:a14="http://schemas.microsoft.com/office/drawing/2010/main" w="9525">
+                <a:solidFill>
+                  <a:schemeClr val="tx1"/>
+                </a:solidFill>
+                <a:miter lim="800000"/>
+                <a:headEnd/>
+                <a:tailEnd/>
+              </a14:hiddenLine>
+            </a:ext>
+            <a:ext uri="{AF507438-7753-43E0-B8FC-AC1667EBCBE1}">
+              <a14:hiddenEffects xmlns:a14="http://schemas.microsoft.com/office/drawing/2010/main">
+                <a:effectLst>
+                  <a:outerShdw dist="35921" dir="2700000" algn="ctr" rotWithShape="0">
+                    <a:schemeClr val="bg2"/>
+                  </a:outerShdw>
+                </a:effectLst>
+              </a14:hiddenEffects>
+            </a:ext>
+          </a:extLst>
         </p:spPr>
         <p:txBody>
-          <a:bodyPr/>
+          <a:bodyPr vert="horz" wrap="square" lIns="91440" tIns="45720" rIns="91440" bIns="45720" numCol="1" anchor="ctr" anchorCtr="0" compatLnSpc="1">
+            <a:prstTxWarp prst="textNoShape">
+              <a:avLst/>
+            </a:prstTxWarp>
+            <a:spAutoFit/>
+          </a:bodyPr>
           <a:lstStyle/>
           <a:p>
-            <a:r>
-              <a:rPr lang="en-US" dirty="0"/>
-              <a:t>Login</a:t>
-            </a:r>
-          </a:p>
-          <a:p>
-            <a:r>
-              <a:rPr lang="en-US" dirty="0"/>
-              <a:t>Admin Dashboard</a:t>
-            </a:r>
-          </a:p>
-          <a:p>
-            <a:r>
-              <a:rPr lang="en-US" dirty="0"/>
-              <a:t>Employee Dashboard</a:t>
-            </a:r>
-          </a:p>
-          <a:p>
-            <a:r>
-              <a:rPr lang="en-US" dirty="0"/>
-              <a:t>Leave form</a:t>
-            </a:r>
-          </a:p>
-          <a:p>
-            <a:r>
-              <a:rPr lang="en-US" dirty="0"/>
-              <a:t>Attendance tracking</a:t>
-            </a:r>
-          </a:p>
-          <a:p>
-            <a:r>
-              <a:rPr lang="en-US" dirty="0"/>
-              <a:t>Information Passing</a:t>
-            </a:r>
-          </a:p>
-          <a:p>
-            <a:pPr algn="ctr"/>
-            <a:endParaRPr lang="en-US" dirty="0"/>
+            <a:pPr marR="0" lvl="0" algn="just" defTabSz="914400" rtl="0" eaLnBrk="0" fontAlgn="base" latinLnBrk="0" hangingPunct="0">
+              <a:lnSpc>
+                <a:spcPct val="150000"/>
+              </a:lnSpc>
+              <a:spcBef>
+                <a:spcPct val="0"/>
+              </a:spcBef>
+              <a:spcAft>
+                <a:spcPct val="0"/>
+              </a:spcAft>
+              <a:buClrTx/>
+              <a:buSzTx/>
+              <a:tabLst/>
+            </a:pPr>
+            <a:r>
+              <a:rPr kumimoji="0" lang="en-US" altLang="en-US" sz="1800" i="0" u="none" strike="noStrike" cap="none" normalizeH="0" baseline="0" dirty="0">
+                <a:ln>
+                  <a:noFill/>
+                </a:ln>
+                <a:solidFill>
+                  <a:schemeClr val="tx1"/>
+                </a:solidFill>
+                <a:effectLst/>
+                <a:latin typeface="Times New Roman" panose="02020603050405020304" pitchFamily="18" charset="0"/>
+                <a:cs typeface="Times New Roman" panose="02020603050405020304" pitchFamily="18" charset="0"/>
+              </a:rPr>
+              <a:t>1. Integrated Excel-based Attendance Upload</a:t>
+            </a:r>
+          </a:p>
+          <a:p>
+            <a:pPr marL="0" marR="0" lvl="0" indent="0" algn="just" defTabSz="914400" rtl="0" eaLnBrk="0" fontAlgn="base" latinLnBrk="0" hangingPunct="0">
+              <a:lnSpc>
+                <a:spcPct val="150000"/>
+              </a:lnSpc>
+              <a:spcBef>
+                <a:spcPct val="0"/>
+              </a:spcBef>
+              <a:spcAft>
+                <a:spcPct val="0"/>
+              </a:spcAft>
+              <a:buClrTx/>
+              <a:buSzTx/>
+              <a:buNone/>
+              <a:tabLst/>
+            </a:pPr>
+            <a:r>
+              <a:rPr kumimoji="0" lang="en-US" altLang="en-US" sz="1800" i="0" u="none" strike="noStrike" cap="none" normalizeH="0" baseline="0" dirty="0">
+                <a:ln>
+                  <a:noFill/>
+                </a:ln>
+                <a:solidFill>
+                  <a:schemeClr val="tx1"/>
+                </a:solidFill>
+                <a:effectLst/>
+                <a:latin typeface="Times New Roman" panose="02020603050405020304" pitchFamily="18" charset="0"/>
+                <a:cs typeface="Times New Roman" panose="02020603050405020304" pitchFamily="18" charset="0"/>
+              </a:rPr>
+              <a:t>	- Automatic processing and status updates</a:t>
+            </a:r>
+          </a:p>
+          <a:p>
+            <a:pPr marR="0" lvl="0" algn="just" defTabSz="914400" rtl="0" eaLnBrk="0" fontAlgn="base" latinLnBrk="0" hangingPunct="0">
+              <a:lnSpc>
+                <a:spcPct val="150000"/>
+              </a:lnSpc>
+              <a:spcBef>
+                <a:spcPct val="0"/>
+              </a:spcBef>
+              <a:spcAft>
+                <a:spcPct val="0"/>
+              </a:spcAft>
+              <a:buClrTx/>
+              <a:buSzTx/>
+              <a:tabLst/>
+            </a:pPr>
+            <a:r>
+              <a:rPr kumimoji="0" lang="en-US" altLang="en-US" sz="1800" i="0" u="none" strike="noStrike" cap="none" normalizeH="0" baseline="0" dirty="0">
+                <a:ln>
+                  <a:noFill/>
+                </a:ln>
+                <a:solidFill>
+                  <a:schemeClr val="tx1"/>
+                </a:solidFill>
+                <a:effectLst/>
+                <a:latin typeface="Times New Roman" panose="02020603050405020304" pitchFamily="18" charset="0"/>
+                <a:cs typeface="Times New Roman" panose="02020603050405020304" pitchFamily="18" charset="0"/>
+              </a:rPr>
+              <a:t>2. Smart Leave Management</a:t>
+            </a:r>
+          </a:p>
+          <a:p>
+            <a:pPr marL="0" marR="0" lvl="0" indent="0" algn="just" defTabSz="914400" rtl="0" eaLnBrk="0" fontAlgn="base" latinLnBrk="0" hangingPunct="0">
+              <a:lnSpc>
+                <a:spcPct val="150000"/>
+              </a:lnSpc>
+              <a:spcBef>
+                <a:spcPct val="0"/>
+              </a:spcBef>
+              <a:spcAft>
+                <a:spcPct val="0"/>
+              </a:spcAft>
+              <a:buClrTx/>
+              <a:buSzTx/>
+              <a:buNone/>
+              <a:tabLst/>
+            </a:pPr>
+            <a:r>
+              <a:rPr kumimoji="0" lang="en-US" altLang="en-US" sz="1800" i="0" u="none" strike="noStrike" cap="none" normalizeH="0" baseline="0" dirty="0">
+                <a:ln>
+                  <a:noFill/>
+                </a:ln>
+                <a:solidFill>
+                  <a:schemeClr val="tx1"/>
+                </a:solidFill>
+                <a:effectLst/>
+                <a:latin typeface="Times New Roman" panose="02020603050405020304" pitchFamily="18" charset="0"/>
+                <a:cs typeface="Times New Roman" panose="02020603050405020304" pitchFamily="18" charset="0"/>
+              </a:rPr>
+              <a:t>	- Automatic notifications and leave handling</a:t>
+            </a:r>
+          </a:p>
+          <a:p>
+            <a:pPr marR="0" lvl="0" algn="just" defTabSz="914400" rtl="0" eaLnBrk="0" fontAlgn="base" latinLnBrk="0" hangingPunct="0">
+              <a:lnSpc>
+                <a:spcPct val="150000"/>
+              </a:lnSpc>
+              <a:spcBef>
+                <a:spcPct val="0"/>
+              </a:spcBef>
+              <a:spcAft>
+                <a:spcPct val="0"/>
+              </a:spcAft>
+              <a:buClrTx/>
+              <a:buSzTx/>
+              <a:tabLst/>
+            </a:pPr>
+            <a:r>
+              <a:rPr kumimoji="0" lang="en-US" altLang="en-US" sz="1800" i="0" u="none" strike="noStrike" cap="none" normalizeH="0" baseline="0" dirty="0">
+                <a:ln>
+                  <a:noFill/>
+                </a:ln>
+                <a:solidFill>
+                  <a:schemeClr val="tx1"/>
+                </a:solidFill>
+                <a:effectLst/>
+                <a:latin typeface="Times New Roman" panose="02020603050405020304" pitchFamily="18" charset="0"/>
+                <a:cs typeface="Times New Roman" panose="02020603050405020304" pitchFamily="18" charset="0"/>
+              </a:rPr>
+              <a:t>3. Real-time Salary Calculation</a:t>
+            </a:r>
+          </a:p>
+          <a:p>
+            <a:pPr marL="0" marR="0" lvl="0" indent="0" algn="just" defTabSz="914400" rtl="0" eaLnBrk="0" fontAlgn="base" latinLnBrk="0" hangingPunct="0">
+              <a:lnSpc>
+                <a:spcPct val="150000"/>
+              </a:lnSpc>
+              <a:spcBef>
+                <a:spcPct val="0"/>
+              </a:spcBef>
+              <a:spcAft>
+                <a:spcPct val="0"/>
+              </a:spcAft>
+              <a:buClrTx/>
+              <a:buSzTx/>
+              <a:buNone/>
+              <a:tabLst/>
+            </a:pPr>
+            <a:r>
+              <a:rPr kumimoji="0" lang="en-US" altLang="en-US" sz="1800" i="0" u="none" strike="noStrike" cap="none" normalizeH="0" baseline="0" dirty="0">
+                <a:ln>
+                  <a:noFill/>
+                </a:ln>
+                <a:solidFill>
+                  <a:schemeClr val="tx1"/>
+                </a:solidFill>
+                <a:effectLst/>
+                <a:latin typeface="Times New Roman" panose="02020603050405020304" pitchFamily="18" charset="0"/>
+                <a:cs typeface="Times New Roman" panose="02020603050405020304" pitchFamily="18" charset="0"/>
+              </a:rPr>
+              <a:t>	- Adjustments for uninformed leaves and rejections</a:t>
+            </a:r>
+          </a:p>
+          <a:p>
+            <a:pPr marR="0" lvl="0" algn="just" defTabSz="914400" rtl="0" eaLnBrk="0" fontAlgn="base" latinLnBrk="0" hangingPunct="0">
+              <a:lnSpc>
+                <a:spcPct val="150000"/>
+              </a:lnSpc>
+              <a:spcBef>
+                <a:spcPct val="0"/>
+              </a:spcBef>
+              <a:spcAft>
+                <a:spcPct val="0"/>
+              </a:spcAft>
+              <a:buClrTx/>
+              <a:buSzTx/>
+              <a:tabLst/>
+            </a:pPr>
+            <a:r>
+              <a:rPr kumimoji="0" lang="en-US" altLang="en-US" sz="1800" i="0" u="none" strike="noStrike" cap="none" normalizeH="0" baseline="0" dirty="0">
+                <a:ln>
+                  <a:noFill/>
+                </a:ln>
+                <a:solidFill>
+                  <a:schemeClr val="tx1"/>
+                </a:solidFill>
+                <a:effectLst/>
+                <a:latin typeface="Times New Roman" panose="02020603050405020304" pitchFamily="18" charset="0"/>
+                <a:cs typeface="Times New Roman" panose="02020603050405020304" pitchFamily="18" charset="0"/>
+              </a:rPr>
+              <a:t>4. Multi-channel Communication</a:t>
+            </a:r>
+          </a:p>
+          <a:p>
+            <a:pPr marL="0" marR="0" lvl="0" indent="0" algn="just" defTabSz="914400" rtl="0" eaLnBrk="0" fontAlgn="base" latinLnBrk="0" hangingPunct="0">
+              <a:lnSpc>
+                <a:spcPct val="150000"/>
+              </a:lnSpc>
+              <a:spcBef>
+                <a:spcPct val="0"/>
+              </a:spcBef>
+              <a:spcAft>
+                <a:spcPct val="0"/>
+              </a:spcAft>
+              <a:buClrTx/>
+              <a:buSzTx/>
+              <a:buNone/>
+              <a:tabLst/>
+            </a:pPr>
+            <a:r>
+              <a:rPr kumimoji="0" lang="en-US" altLang="en-US" sz="1800" i="0" u="none" strike="noStrike" cap="none" normalizeH="0" baseline="0" dirty="0">
+                <a:ln>
+                  <a:noFill/>
+                </a:ln>
+                <a:solidFill>
+                  <a:schemeClr val="tx1"/>
+                </a:solidFill>
+                <a:effectLst/>
+                <a:latin typeface="Times New Roman" panose="02020603050405020304" pitchFamily="18" charset="0"/>
+                <a:cs typeface="Times New Roman" panose="02020603050405020304" pitchFamily="18" charset="0"/>
+              </a:rPr>
+              <a:t>	- In-app(</a:t>
+            </a:r>
+            <a:r>
+              <a:rPr kumimoji="0" lang="en-US" altLang="en-US" sz="1800" i="0" u="none" strike="noStrike" cap="none" normalizeH="0" baseline="0" dirty="0" err="1">
+                <a:ln>
+                  <a:noFill/>
+                </a:ln>
+                <a:solidFill>
+                  <a:schemeClr val="tx1"/>
+                </a:solidFill>
+                <a:effectLst/>
+                <a:latin typeface="Times New Roman" panose="02020603050405020304" pitchFamily="18" charset="0"/>
+                <a:cs typeface="Times New Roman" panose="02020603050405020304" pitchFamily="18" charset="0"/>
+              </a:rPr>
+              <a:t>Modemailer</a:t>
+            </a:r>
+            <a:r>
+              <a:rPr kumimoji="0" lang="en-US" altLang="en-US" sz="1800" i="0" u="none" strike="noStrike" cap="none" normalizeH="0" baseline="0" dirty="0">
+                <a:ln>
+                  <a:noFill/>
+                </a:ln>
+                <a:solidFill>
+                  <a:schemeClr val="tx1"/>
+                </a:solidFill>
+                <a:effectLst/>
+                <a:latin typeface="Times New Roman" panose="02020603050405020304" pitchFamily="18" charset="0"/>
+                <a:cs typeface="Times New Roman" panose="02020603050405020304" pitchFamily="18" charset="0"/>
+              </a:rPr>
+              <a:t>) and SMS notifications </a:t>
+            </a:r>
+          </a:p>
+          <a:p>
+            <a:pPr marL="0" marR="0" lvl="0" indent="0" algn="just" defTabSz="914400" rtl="0" eaLnBrk="0" fontAlgn="base" latinLnBrk="0" hangingPunct="0">
+              <a:lnSpc>
+                <a:spcPct val="150000"/>
+              </a:lnSpc>
+              <a:spcBef>
+                <a:spcPct val="0"/>
+              </a:spcBef>
+              <a:spcAft>
+                <a:spcPct val="0"/>
+              </a:spcAft>
+              <a:buClrTx/>
+              <a:buSzTx/>
+              <a:buNone/>
+              <a:tabLst/>
+            </a:pPr>
+            <a:r>
+              <a:rPr kumimoji="0" lang="en-US" altLang="en-US" sz="1800" i="0" u="none" strike="noStrike" cap="none" normalizeH="0" baseline="0" dirty="0">
+                <a:ln>
+                  <a:noFill/>
+                </a:ln>
+                <a:solidFill>
+                  <a:schemeClr val="tx1"/>
+                </a:solidFill>
+                <a:effectLst/>
+                <a:latin typeface="Times New Roman" panose="02020603050405020304" pitchFamily="18" charset="0"/>
+                <a:cs typeface="Times New Roman" panose="02020603050405020304" pitchFamily="18" charset="0"/>
+              </a:rPr>
+              <a:t>with Twilio integration.</a:t>
+            </a:r>
           </a:p>
         </p:txBody>
       </p:sp>
@@ -15533,8 +17526,537 @@
         </p:nvSpPr>
         <p:spPr>
           <a:xfrm>
-            <a:off x="5708567" y="1912774"/>
-            <a:ext cx="4260767" cy="4392775"/>
+            <a:off x="5638801" y="1507958"/>
+            <a:ext cx="4260767" cy="5085571"/>
+          </a:xfrm>
+          <a:prstGeom prst="rect">
+            <a:avLst/>
+          </a:prstGeom>
+          <a:noFill/>
+          <a:ln>
+            <a:noFill/>
+          </a:ln>
+        </p:spPr>
+        <p:txBody>
+          <a:bodyPr spcFirstLastPara="1" wrap="square" lIns="91425" tIns="45700" rIns="91425" bIns="45700" anchor="t" anchorCtr="0">
+            <a:normAutofit fontScale="77500" lnSpcReduction="20000"/>
+          </a:bodyPr>
+          <a:lstStyle>
+            <a:defPPr marR="0" lvl="0" algn="l" rtl="0">
+              <a:lnSpc>
+                <a:spcPct val="100000"/>
+              </a:lnSpc>
+              <a:spcBef>
+                <a:spcPts val="0"/>
+              </a:spcBef>
+              <a:spcAft>
+                <a:spcPts val="0"/>
+              </a:spcAft>
+            </a:defPPr>
+            <a:lvl1pPr marL="457200" marR="0" lvl="0" indent="-320040" algn="l" rtl="0">
+              <a:lnSpc>
+                <a:spcPct val="100000"/>
+              </a:lnSpc>
+              <a:spcBef>
+                <a:spcPts val="360"/>
+              </a:spcBef>
+              <a:spcAft>
+                <a:spcPts val="0"/>
+              </a:spcAft>
+              <a:buClr>
+                <a:schemeClr val="dk1"/>
+              </a:buClr>
+              <a:buSzPts val="1440"/>
+              <a:buFont typeface="Noto Sans Symbols"/>
+              <a:buChar char="⮚"/>
+              <a:defRPr sz="2000" b="0" i="0" u="none" strike="noStrike" cap="none">
+                <a:solidFill>
+                  <a:schemeClr val="dk1"/>
+                </a:solidFill>
+                <a:latin typeface="Arial" panose="020B0604020202020204"/>
+                <a:ea typeface="Arial" panose="020B0604020202020204"/>
+                <a:cs typeface="Arial" panose="020B0604020202020204"/>
+                <a:sym typeface="Arial" panose="020B0604020202020204"/>
+              </a:defRPr>
+            </a:lvl1pPr>
+            <a:lvl2pPr marL="914400" marR="0" lvl="1" indent="-320040" algn="l" rtl="0">
+              <a:lnSpc>
+                <a:spcPct val="100000"/>
+              </a:lnSpc>
+              <a:spcBef>
+                <a:spcPts val="360"/>
+              </a:spcBef>
+              <a:spcAft>
+                <a:spcPts val="0"/>
+              </a:spcAft>
+              <a:buClr>
+                <a:schemeClr val="dk1"/>
+              </a:buClr>
+              <a:buSzPts val="1440"/>
+              <a:buFont typeface="Noto Sans Symbols"/>
+              <a:buChar char="⮚"/>
+              <a:defRPr sz="2000" b="0" i="0" u="none" strike="noStrike" cap="none">
+                <a:solidFill>
+                  <a:schemeClr val="dk1"/>
+                </a:solidFill>
+                <a:latin typeface="Arial" panose="020B0604020202020204"/>
+                <a:ea typeface="Arial" panose="020B0604020202020204"/>
+                <a:cs typeface="Arial" panose="020B0604020202020204"/>
+                <a:sym typeface="Arial" panose="020B0604020202020204"/>
+              </a:defRPr>
+            </a:lvl2pPr>
+            <a:lvl3pPr marL="1371600" marR="0" lvl="2" indent="-320040" algn="l" rtl="0">
+              <a:lnSpc>
+                <a:spcPct val="100000"/>
+              </a:lnSpc>
+              <a:spcBef>
+                <a:spcPts val="360"/>
+              </a:spcBef>
+              <a:spcAft>
+                <a:spcPts val="0"/>
+              </a:spcAft>
+              <a:buClr>
+                <a:schemeClr val="dk1"/>
+              </a:buClr>
+              <a:buSzPts val="1440"/>
+              <a:buFont typeface="Noto Sans Symbols"/>
+              <a:buChar char="⮚"/>
+              <a:defRPr sz="2000" b="0" i="0" u="none" strike="noStrike" cap="none">
+                <a:solidFill>
+                  <a:schemeClr val="dk1"/>
+                </a:solidFill>
+                <a:latin typeface="Arial" panose="020B0604020202020204"/>
+                <a:ea typeface="Arial" panose="020B0604020202020204"/>
+                <a:cs typeface="Arial" panose="020B0604020202020204"/>
+                <a:sym typeface="Arial" panose="020B0604020202020204"/>
+              </a:defRPr>
+            </a:lvl3pPr>
+            <a:lvl4pPr marL="1828800" marR="0" lvl="3" indent="-320040" algn="l" rtl="0">
+              <a:lnSpc>
+                <a:spcPct val="100000"/>
+              </a:lnSpc>
+              <a:spcBef>
+                <a:spcPts val="360"/>
+              </a:spcBef>
+              <a:spcAft>
+                <a:spcPts val="0"/>
+              </a:spcAft>
+              <a:buClr>
+                <a:schemeClr val="dk1"/>
+              </a:buClr>
+              <a:buSzPts val="1440"/>
+              <a:buFont typeface="Noto Sans Symbols"/>
+              <a:buChar char="⮚"/>
+              <a:defRPr sz="2000" b="0" i="0" u="none" strike="noStrike" cap="none">
+                <a:solidFill>
+                  <a:schemeClr val="dk1"/>
+                </a:solidFill>
+                <a:latin typeface="Arial" panose="020B0604020202020204"/>
+                <a:ea typeface="Arial" panose="020B0604020202020204"/>
+                <a:cs typeface="Arial" panose="020B0604020202020204"/>
+                <a:sym typeface="Arial" panose="020B0604020202020204"/>
+              </a:defRPr>
+            </a:lvl4pPr>
+            <a:lvl5pPr marL="2286000" marR="0" lvl="4" indent="-320040" algn="l" rtl="0">
+              <a:lnSpc>
+                <a:spcPct val="100000"/>
+              </a:lnSpc>
+              <a:spcBef>
+                <a:spcPts val="360"/>
+              </a:spcBef>
+              <a:spcAft>
+                <a:spcPts val="0"/>
+              </a:spcAft>
+              <a:buClr>
+                <a:schemeClr val="dk1"/>
+              </a:buClr>
+              <a:buSzPts val="1440"/>
+              <a:buFont typeface="Noto Sans Symbols"/>
+              <a:buChar char="⮚"/>
+              <a:defRPr sz="2000" b="0" i="0" u="none" strike="noStrike" cap="none">
+                <a:solidFill>
+                  <a:schemeClr val="dk1"/>
+                </a:solidFill>
+                <a:latin typeface="Arial" panose="020B0604020202020204"/>
+                <a:ea typeface="Arial" panose="020B0604020202020204"/>
+                <a:cs typeface="Arial" panose="020B0604020202020204"/>
+                <a:sym typeface="Arial" panose="020B0604020202020204"/>
+              </a:defRPr>
+            </a:lvl5pPr>
+            <a:lvl6pPr marL="2743200" marR="0" lvl="5" indent="-320040" algn="l" rtl="0">
+              <a:lnSpc>
+                <a:spcPct val="100000"/>
+              </a:lnSpc>
+              <a:spcBef>
+                <a:spcPts val="360"/>
+              </a:spcBef>
+              <a:spcAft>
+                <a:spcPts val="0"/>
+              </a:spcAft>
+              <a:buClr>
+                <a:schemeClr val="accent5"/>
+              </a:buClr>
+              <a:buSzPts val="1440"/>
+              <a:buFont typeface="Noto Sans Symbols"/>
+              <a:buChar char="⚫"/>
+              <a:defRPr sz="1800" b="0" i="0" u="none" strike="noStrike" cap="none">
+                <a:solidFill>
+                  <a:schemeClr val="dk1"/>
+                </a:solidFill>
+                <a:latin typeface="Arial" panose="020B0604020202020204"/>
+                <a:ea typeface="Arial" panose="020B0604020202020204"/>
+                <a:cs typeface="Arial" panose="020B0604020202020204"/>
+                <a:sym typeface="Arial" panose="020B0604020202020204"/>
+              </a:defRPr>
+            </a:lvl6pPr>
+            <a:lvl7pPr marL="3200400" marR="0" lvl="6" indent="-320040" algn="l" rtl="0">
+              <a:lnSpc>
+                <a:spcPct val="100000"/>
+              </a:lnSpc>
+              <a:spcBef>
+                <a:spcPts val="360"/>
+              </a:spcBef>
+              <a:spcAft>
+                <a:spcPts val="0"/>
+              </a:spcAft>
+              <a:buClr>
+                <a:schemeClr val="accent6"/>
+              </a:buClr>
+              <a:buSzPts val="1440"/>
+              <a:buFont typeface="Noto Sans Symbols"/>
+              <a:buChar char="⚫"/>
+              <a:defRPr sz="1600" b="0" i="0" u="none" strike="noStrike" cap="none">
+                <a:solidFill>
+                  <a:schemeClr val="dk1"/>
+                </a:solidFill>
+                <a:latin typeface="Arial" panose="020B0604020202020204"/>
+                <a:ea typeface="Arial" panose="020B0604020202020204"/>
+                <a:cs typeface="Arial" panose="020B0604020202020204"/>
+                <a:sym typeface="Arial" panose="020B0604020202020204"/>
+              </a:defRPr>
+            </a:lvl7pPr>
+            <a:lvl8pPr marL="3657600" marR="0" lvl="7" indent="-342900" algn="l" rtl="0">
+              <a:lnSpc>
+                <a:spcPct val="100000"/>
+              </a:lnSpc>
+              <a:spcBef>
+                <a:spcPts val="360"/>
+              </a:spcBef>
+              <a:spcAft>
+                <a:spcPts val="0"/>
+              </a:spcAft>
+              <a:buClr>
+                <a:schemeClr val="dk2"/>
+              </a:buClr>
+              <a:buSzPts val="1800"/>
+              <a:buFont typeface="Arial" panose="020B0604020202020204"/>
+              <a:buChar char="•"/>
+              <a:defRPr sz="1600" b="0" i="0" u="none" strike="noStrike" cap="none">
+                <a:solidFill>
+                  <a:schemeClr val="dk1"/>
+                </a:solidFill>
+                <a:latin typeface="Arial" panose="020B0604020202020204"/>
+                <a:ea typeface="Arial" panose="020B0604020202020204"/>
+                <a:cs typeface="Arial" panose="020B0604020202020204"/>
+                <a:sym typeface="Arial" panose="020B0604020202020204"/>
+              </a:defRPr>
+            </a:lvl8pPr>
+            <a:lvl9pPr marL="4114800" marR="0" lvl="8" indent="-342900" algn="l" rtl="0">
+              <a:lnSpc>
+                <a:spcPct val="100000"/>
+              </a:lnSpc>
+              <a:spcBef>
+                <a:spcPts val="360"/>
+              </a:spcBef>
+              <a:spcAft>
+                <a:spcPts val="0"/>
+              </a:spcAft>
+              <a:buClr>
+                <a:schemeClr val="dk2"/>
+              </a:buClr>
+              <a:buSzPts val="1800"/>
+              <a:buFont typeface="Arial" panose="020B0604020202020204"/>
+              <a:buChar char="•"/>
+              <a:defRPr sz="1400" b="0" i="0" u="none" strike="noStrike" cap="none">
+                <a:solidFill>
+                  <a:schemeClr val="dk1"/>
+                </a:solidFill>
+                <a:latin typeface="Arial" panose="020B0604020202020204"/>
+                <a:ea typeface="Arial" panose="020B0604020202020204"/>
+                <a:cs typeface="Arial" panose="020B0604020202020204"/>
+                <a:sym typeface="Arial" panose="020B0604020202020204"/>
+              </a:defRPr>
+            </a:lvl9pPr>
+          </a:lstStyle>
+          <a:p>
+            <a:pPr marL="0" indent="0">
+              <a:lnSpc>
+                <a:spcPct val="150000"/>
+              </a:lnSpc>
+              <a:buFont typeface="Noto Sans Symbols"/>
+              <a:buNone/>
+            </a:pPr>
+            <a:r>
+              <a:rPr lang="en-IN" sz="2400" b="1" dirty="0">
+                <a:solidFill>
+                  <a:srgbClr val="C00000"/>
+                </a:solidFill>
+                <a:latin typeface="Times New Roman" panose="02020603050405020304" pitchFamily="18" charset="0"/>
+                <a:cs typeface="Times New Roman" panose="02020603050405020304" pitchFamily="18" charset="0"/>
+              </a:rPr>
+              <a:t>BACK-END:</a:t>
+            </a:r>
+          </a:p>
+          <a:p>
+            <a:pPr marL="0" indent="0">
+              <a:lnSpc>
+                <a:spcPct val="150000"/>
+              </a:lnSpc>
+              <a:buFont typeface="Noto Sans Symbols"/>
+              <a:buNone/>
+            </a:pPr>
+            <a:endParaRPr lang="en-IN" dirty="0">
+              <a:solidFill>
+                <a:schemeClr val="tx1"/>
+              </a:solidFill>
+              <a:latin typeface="Times New Roman" panose="02020603050405020304" pitchFamily="18" charset="0"/>
+              <a:cs typeface="Times New Roman" panose="02020603050405020304" pitchFamily="18" charset="0"/>
+            </a:endParaRPr>
+          </a:p>
+          <a:p>
+            <a:pPr marL="0" indent="0">
+              <a:lnSpc>
+                <a:spcPct val="150000"/>
+              </a:lnSpc>
+              <a:buFont typeface="Noto Sans Symbols"/>
+              <a:buNone/>
+            </a:pPr>
+            <a:r>
+              <a:rPr lang="en-IN" dirty="0">
+                <a:solidFill>
+                  <a:schemeClr val="tx1"/>
+                </a:solidFill>
+                <a:latin typeface="Times New Roman" panose="02020603050405020304" pitchFamily="18" charset="0"/>
+                <a:cs typeface="Times New Roman" panose="02020603050405020304" pitchFamily="18" charset="0"/>
+              </a:rPr>
+              <a:t>Express.js</a:t>
+            </a:r>
+          </a:p>
+          <a:p>
+            <a:pPr marL="0" indent="0">
+              <a:lnSpc>
+                <a:spcPct val="150000"/>
+              </a:lnSpc>
+              <a:buFont typeface="Noto Sans Symbols"/>
+              <a:buNone/>
+            </a:pPr>
+            <a:endParaRPr lang="en-IN" dirty="0">
+              <a:solidFill>
+                <a:schemeClr val="tx1"/>
+              </a:solidFill>
+              <a:latin typeface="Times New Roman" panose="02020603050405020304" pitchFamily="18" charset="0"/>
+              <a:cs typeface="Times New Roman" panose="02020603050405020304" pitchFamily="18" charset="0"/>
+            </a:endParaRPr>
+          </a:p>
+          <a:p>
+            <a:pPr marL="0" indent="0">
+              <a:lnSpc>
+                <a:spcPct val="150000"/>
+              </a:lnSpc>
+              <a:buFont typeface="Noto Sans Symbols"/>
+              <a:buNone/>
+            </a:pPr>
+            <a:r>
+              <a:rPr lang="en-IN" dirty="0">
+                <a:solidFill>
+                  <a:schemeClr val="tx1"/>
+                </a:solidFill>
+                <a:latin typeface="Times New Roman" panose="02020603050405020304" pitchFamily="18" charset="0"/>
+                <a:cs typeface="Times New Roman" panose="02020603050405020304" pitchFamily="18" charset="0"/>
+              </a:rPr>
+              <a:t>MongoDB</a:t>
+            </a:r>
+            <a:endParaRPr lang="en-IN" sz="2400" dirty="0">
+              <a:solidFill>
+                <a:schemeClr val="tx1"/>
+              </a:solidFill>
+              <a:latin typeface="Times New Roman" panose="02020603050405020304" pitchFamily="18" charset="0"/>
+              <a:cs typeface="Times New Roman" panose="02020603050405020304" pitchFamily="18" charset="0"/>
+            </a:endParaRPr>
+          </a:p>
+          <a:p>
+            <a:pPr marL="0" indent="0">
+              <a:lnSpc>
+                <a:spcPct val="150000"/>
+              </a:lnSpc>
+              <a:buFont typeface="Noto Sans Symbols"/>
+              <a:buNone/>
+            </a:pPr>
+            <a:endParaRPr lang="en-IN" dirty="0">
+              <a:solidFill>
+                <a:schemeClr val="tx1"/>
+              </a:solidFill>
+              <a:latin typeface="Times New Roman" panose="02020603050405020304" pitchFamily="18" charset="0"/>
+              <a:cs typeface="Times New Roman" panose="02020603050405020304" pitchFamily="18" charset="0"/>
+            </a:endParaRPr>
+          </a:p>
+          <a:p>
+            <a:pPr marL="0" indent="0">
+              <a:lnSpc>
+                <a:spcPct val="150000"/>
+              </a:lnSpc>
+              <a:buFont typeface="Noto Sans Symbols"/>
+              <a:buNone/>
+            </a:pPr>
+            <a:r>
+              <a:rPr lang="en-IN" dirty="0">
+                <a:solidFill>
+                  <a:schemeClr val="tx1"/>
+                </a:solidFill>
+                <a:latin typeface="Times New Roman" panose="02020603050405020304" pitchFamily="18" charset="0"/>
+                <a:cs typeface="Times New Roman" panose="02020603050405020304" pitchFamily="18" charset="0"/>
+              </a:rPr>
+              <a:t>Twilio</a:t>
+            </a:r>
+            <a:endParaRPr lang="en-IN" sz="2400" dirty="0">
+              <a:solidFill>
+                <a:schemeClr val="tx1"/>
+              </a:solidFill>
+              <a:latin typeface="Times New Roman" panose="02020603050405020304" pitchFamily="18" charset="0"/>
+              <a:cs typeface="Times New Roman" panose="02020603050405020304" pitchFamily="18" charset="0"/>
+            </a:endParaRPr>
+          </a:p>
+          <a:p>
+            <a:pPr marL="0" indent="0">
+              <a:lnSpc>
+                <a:spcPct val="150000"/>
+              </a:lnSpc>
+              <a:buFont typeface="Noto Sans Symbols"/>
+              <a:buNone/>
+            </a:pPr>
+            <a:endParaRPr lang="en-IN" dirty="0">
+              <a:solidFill>
+                <a:schemeClr val="tx1"/>
+              </a:solidFill>
+              <a:latin typeface="Times New Roman" panose="02020603050405020304" pitchFamily="18" charset="0"/>
+              <a:cs typeface="Times New Roman" panose="02020603050405020304" pitchFamily="18" charset="0"/>
+            </a:endParaRPr>
+          </a:p>
+          <a:p>
+            <a:pPr marL="0" indent="0">
+              <a:lnSpc>
+                <a:spcPct val="150000"/>
+              </a:lnSpc>
+              <a:buFont typeface="Noto Sans Symbols"/>
+              <a:buNone/>
+            </a:pPr>
+            <a:r>
+              <a:rPr lang="en-IN" dirty="0">
+                <a:solidFill>
+                  <a:schemeClr val="tx1"/>
+                </a:solidFill>
+                <a:latin typeface="Times New Roman" panose="02020603050405020304" pitchFamily="18" charset="0"/>
+                <a:cs typeface="Times New Roman" panose="02020603050405020304" pitchFamily="18" charset="0"/>
+              </a:rPr>
+              <a:t>Render</a:t>
+            </a:r>
+          </a:p>
+          <a:p>
+            <a:pPr marL="0" indent="0">
+              <a:lnSpc>
+                <a:spcPct val="150000"/>
+              </a:lnSpc>
+              <a:buFont typeface="Noto Sans Symbols"/>
+              <a:buNone/>
+            </a:pPr>
+            <a:endParaRPr lang="en-IN" dirty="0">
+              <a:solidFill>
+                <a:schemeClr val="tx1"/>
+              </a:solidFill>
+              <a:latin typeface="Times New Roman" panose="02020603050405020304" pitchFamily="18" charset="0"/>
+              <a:cs typeface="Times New Roman" panose="02020603050405020304" pitchFamily="18" charset="0"/>
+            </a:endParaRPr>
+          </a:p>
+          <a:p>
+            <a:pPr marL="0" indent="0">
+              <a:lnSpc>
+                <a:spcPct val="150000"/>
+              </a:lnSpc>
+              <a:buFont typeface="Noto Sans Symbols"/>
+              <a:buNone/>
+            </a:pPr>
+            <a:r>
+              <a:rPr lang="en-US" sz="2100" dirty="0" err="1">
+                <a:latin typeface="Times New Roman" panose="02020603050405020304" pitchFamily="18" charset="0"/>
+                <a:cs typeface="Times New Roman" panose="02020603050405020304" pitchFamily="18" charset="0"/>
+              </a:rPr>
+              <a:t>Nodemailer</a:t>
+            </a:r>
+            <a:endParaRPr lang="en-US" sz="2100" dirty="0">
+              <a:latin typeface="Times New Roman" panose="02020603050405020304" pitchFamily="18" charset="0"/>
+              <a:cs typeface="Times New Roman" panose="02020603050405020304" pitchFamily="18" charset="0"/>
+            </a:endParaRPr>
+          </a:p>
+          <a:p>
+            <a:pPr marL="0" indent="0">
+              <a:lnSpc>
+                <a:spcPct val="150000"/>
+              </a:lnSpc>
+              <a:buFont typeface="Noto Sans Symbols"/>
+              <a:buNone/>
+            </a:pPr>
+            <a:endParaRPr lang="en-US" dirty="0">
+              <a:solidFill>
+                <a:schemeClr val="tx1"/>
+              </a:solidFill>
+              <a:latin typeface="Times New Roman" panose="02020603050405020304" pitchFamily="18" charset="0"/>
+              <a:cs typeface="Times New Roman" panose="02020603050405020304" pitchFamily="18" charset="0"/>
+            </a:endParaRPr>
+          </a:p>
+          <a:p>
+            <a:pPr marL="0" indent="0">
+              <a:lnSpc>
+                <a:spcPct val="150000"/>
+              </a:lnSpc>
+              <a:buFont typeface="Noto Sans Symbols"/>
+              <a:buNone/>
+            </a:pPr>
+            <a:r>
+              <a:rPr lang="en-US" dirty="0">
+                <a:solidFill>
+                  <a:schemeClr val="tx1"/>
+                </a:solidFill>
+                <a:latin typeface="Times New Roman" panose="02020603050405020304" pitchFamily="18" charset="0"/>
+                <a:cs typeface="Times New Roman" panose="02020603050405020304" pitchFamily="18" charset="0"/>
+              </a:rPr>
+              <a:t>JWT</a:t>
+            </a:r>
+            <a:endParaRPr lang="en-IN" dirty="0">
+              <a:solidFill>
+                <a:schemeClr val="tx1"/>
+              </a:solidFill>
+              <a:latin typeface="Times New Roman" panose="02020603050405020304" pitchFamily="18" charset="0"/>
+              <a:cs typeface="Times New Roman" panose="02020603050405020304" pitchFamily="18" charset="0"/>
+            </a:endParaRPr>
+          </a:p>
+        </p:txBody>
+      </p:sp>
+      <p:sp>
+        <p:nvSpPr>
+          <p:cNvPr id="3" name="Content Placeholder 2">
+            <a:extLst>
+              <a:ext uri="{FF2B5EF4-FFF2-40B4-BE49-F238E27FC236}">
+                <a16:creationId xmlns:a16="http://schemas.microsoft.com/office/drawing/2014/main" id="{575BC973-DC6B-6A5C-584E-D87DBA081745}"/>
+              </a:ext>
+            </a:extLst>
+          </p:cNvPr>
+          <p:cNvSpPr txBox="1"/>
+          <p:nvPr/>
+        </p:nvSpPr>
+        <p:spPr>
+          <a:xfrm>
+            <a:off x="1143001" y="1524000"/>
+            <a:ext cx="2362200" cy="2345371"/>
           </a:xfrm>
           <a:prstGeom prst="rect">
             <a:avLst/>
@@ -15811,712 +18333,7 @@
                 <a:latin typeface="Times New Roman" panose="02020603050405020304" pitchFamily="18" charset="0"/>
                 <a:cs typeface="Times New Roman" panose="02020603050405020304" pitchFamily="18" charset="0"/>
               </a:rPr>
-              <a:t>BACK-END:</a:t>
-            </a:r>
-          </a:p>
-          <a:p>
-            <a:pPr marL="0" indent="0">
-              <a:lnSpc>
-                <a:spcPct val="150000"/>
-              </a:lnSpc>
-              <a:buFont typeface="Noto Sans Symbols"/>
-              <a:buNone/>
-            </a:pPr>
-            <a:r>
-              <a:rPr lang="en-IN" dirty="0">
-                <a:solidFill>
-                  <a:schemeClr val="tx1"/>
-                </a:solidFill>
-                <a:latin typeface="Times New Roman" panose="02020603050405020304" pitchFamily="18" charset="0"/>
-                <a:cs typeface="Times New Roman" panose="02020603050405020304" pitchFamily="18" charset="0"/>
-              </a:rPr>
-              <a:t>Express.js</a:t>
-            </a:r>
-          </a:p>
-          <a:p>
-            <a:pPr marL="0" indent="0">
-              <a:lnSpc>
-                <a:spcPct val="150000"/>
-              </a:lnSpc>
-              <a:buFont typeface="Noto Sans Symbols"/>
-              <a:buNone/>
-            </a:pPr>
-            <a:r>
-              <a:rPr lang="en-IN" dirty="0">
-                <a:solidFill>
-                  <a:schemeClr val="tx1"/>
-                </a:solidFill>
-                <a:latin typeface="Times New Roman" panose="02020603050405020304" pitchFamily="18" charset="0"/>
-                <a:cs typeface="Times New Roman" panose="02020603050405020304" pitchFamily="18" charset="0"/>
-              </a:rPr>
-              <a:t>MongoDB</a:t>
-            </a:r>
-            <a:endParaRPr lang="en-IN" sz="2400" dirty="0">
-              <a:solidFill>
-                <a:schemeClr val="tx1"/>
-              </a:solidFill>
-              <a:latin typeface="Times New Roman" panose="02020603050405020304" pitchFamily="18" charset="0"/>
-              <a:cs typeface="Times New Roman" panose="02020603050405020304" pitchFamily="18" charset="0"/>
-            </a:endParaRPr>
-          </a:p>
-          <a:p>
-            <a:pPr marL="0" indent="0">
-              <a:lnSpc>
-                <a:spcPct val="150000"/>
-              </a:lnSpc>
-              <a:buFont typeface="Noto Sans Symbols"/>
-              <a:buNone/>
-            </a:pPr>
-            <a:r>
-              <a:rPr lang="en-IN" dirty="0">
-                <a:solidFill>
-                  <a:schemeClr val="tx1"/>
-                </a:solidFill>
-                <a:latin typeface="Times New Roman" panose="02020603050405020304" pitchFamily="18" charset="0"/>
-                <a:cs typeface="Times New Roman" panose="02020603050405020304" pitchFamily="18" charset="0"/>
-              </a:rPr>
-              <a:t>Twilio</a:t>
-            </a:r>
-            <a:endParaRPr lang="en-IN" sz="2400" dirty="0">
-              <a:solidFill>
-                <a:schemeClr val="tx1"/>
-              </a:solidFill>
-              <a:latin typeface="Times New Roman" panose="02020603050405020304" pitchFamily="18" charset="0"/>
-              <a:cs typeface="Times New Roman" panose="02020603050405020304" pitchFamily="18" charset="0"/>
-            </a:endParaRPr>
-          </a:p>
-          <a:p>
-            <a:pPr marL="0" indent="0">
-              <a:lnSpc>
-                <a:spcPct val="150000"/>
-              </a:lnSpc>
-              <a:buFont typeface="Noto Sans Symbols"/>
-              <a:buNone/>
-            </a:pPr>
-            <a:r>
-              <a:rPr lang="en-IN" dirty="0">
-                <a:solidFill>
-                  <a:schemeClr val="tx1"/>
-                </a:solidFill>
-                <a:latin typeface="Times New Roman" panose="02020603050405020304" pitchFamily="18" charset="0"/>
-                <a:cs typeface="Times New Roman" panose="02020603050405020304" pitchFamily="18" charset="0"/>
-              </a:rPr>
-              <a:t>Render</a:t>
-            </a:r>
-          </a:p>
-        </p:txBody>
-      </p:sp>
-      <p:sp>
-        <p:nvSpPr>
-          <p:cNvPr id="8" name="Content Placeholder 2"/>
-          <p:cNvSpPr txBox="1"/>
-          <p:nvPr/>
-        </p:nvSpPr>
-        <p:spPr>
-          <a:xfrm>
-            <a:off x="5791200" y="1760375"/>
-            <a:ext cx="4260767" cy="2108997"/>
-          </a:xfrm>
-          <a:prstGeom prst="rect">
-            <a:avLst/>
-          </a:prstGeom>
-          <a:noFill/>
-          <a:ln>
-            <a:noFill/>
-          </a:ln>
-        </p:spPr>
-        <p:txBody>
-          <a:bodyPr spcFirstLastPara="1" wrap="square" lIns="91425" tIns="45700" rIns="91425" bIns="45700" anchor="t" anchorCtr="0">
-            <a:normAutofit/>
-          </a:bodyPr>
-          <a:lstStyle>
-            <a:defPPr marR="0" lvl="0" algn="l" rtl="0">
-              <a:lnSpc>
-                <a:spcPct val="100000"/>
-              </a:lnSpc>
-              <a:spcBef>
-                <a:spcPts val="0"/>
-              </a:spcBef>
-              <a:spcAft>
-                <a:spcPts val="0"/>
-              </a:spcAft>
-            </a:defPPr>
-            <a:lvl1pPr marL="457200" marR="0" lvl="0" indent="-320040" algn="l" rtl="0">
-              <a:lnSpc>
-                <a:spcPct val="100000"/>
-              </a:lnSpc>
-              <a:spcBef>
-                <a:spcPts val="360"/>
-              </a:spcBef>
-              <a:spcAft>
-                <a:spcPts val="0"/>
-              </a:spcAft>
-              <a:buClr>
-                <a:schemeClr val="dk1"/>
-              </a:buClr>
-              <a:buSzPts val="1440"/>
-              <a:buFont typeface="Noto Sans Symbols"/>
-              <a:buChar char="⮚"/>
-              <a:defRPr sz="2000" b="0" i="0" u="none" strike="noStrike" cap="none">
-                <a:solidFill>
-                  <a:schemeClr val="dk1"/>
-                </a:solidFill>
-                <a:latin typeface="Arial" panose="020B0604020202020204"/>
-                <a:ea typeface="Arial" panose="020B0604020202020204"/>
-                <a:cs typeface="Arial" panose="020B0604020202020204"/>
-                <a:sym typeface="Arial" panose="020B0604020202020204"/>
-              </a:defRPr>
-            </a:lvl1pPr>
-            <a:lvl2pPr marL="914400" marR="0" lvl="1" indent="-320040" algn="l" rtl="0">
-              <a:lnSpc>
-                <a:spcPct val="100000"/>
-              </a:lnSpc>
-              <a:spcBef>
-                <a:spcPts val="360"/>
-              </a:spcBef>
-              <a:spcAft>
-                <a:spcPts val="0"/>
-              </a:spcAft>
-              <a:buClr>
-                <a:schemeClr val="dk1"/>
-              </a:buClr>
-              <a:buSzPts val="1440"/>
-              <a:buFont typeface="Noto Sans Symbols"/>
-              <a:buChar char="⮚"/>
-              <a:defRPr sz="2000" b="0" i="0" u="none" strike="noStrike" cap="none">
-                <a:solidFill>
-                  <a:schemeClr val="dk1"/>
-                </a:solidFill>
-                <a:latin typeface="Arial" panose="020B0604020202020204"/>
-                <a:ea typeface="Arial" panose="020B0604020202020204"/>
-                <a:cs typeface="Arial" panose="020B0604020202020204"/>
-                <a:sym typeface="Arial" panose="020B0604020202020204"/>
-              </a:defRPr>
-            </a:lvl2pPr>
-            <a:lvl3pPr marL="1371600" marR="0" lvl="2" indent="-320040" algn="l" rtl="0">
-              <a:lnSpc>
-                <a:spcPct val="100000"/>
-              </a:lnSpc>
-              <a:spcBef>
-                <a:spcPts val="360"/>
-              </a:spcBef>
-              <a:spcAft>
-                <a:spcPts val="0"/>
-              </a:spcAft>
-              <a:buClr>
-                <a:schemeClr val="dk1"/>
-              </a:buClr>
-              <a:buSzPts val="1440"/>
-              <a:buFont typeface="Noto Sans Symbols"/>
-              <a:buChar char="⮚"/>
-              <a:defRPr sz="2000" b="0" i="0" u="none" strike="noStrike" cap="none">
-                <a:solidFill>
-                  <a:schemeClr val="dk1"/>
-                </a:solidFill>
-                <a:latin typeface="Arial" panose="020B0604020202020204"/>
-                <a:ea typeface="Arial" panose="020B0604020202020204"/>
-                <a:cs typeface="Arial" panose="020B0604020202020204"/>
-                <a:sym typeface="Arial" panose="020B0604020202020204"/>
-              </a:defRPr>
-            </a:lvl3pPr>
-            <a:lvl4pPr marL="1828800" marR="0" lvl="3" indent="-320040" algn="l" rtl="0">
-              <a:lnSpc>
-                <a:spcPct val="100000"/>
-              </a:lnSpc>
-              <a:spcBef>
-                <a:spcPts val="360"/>
-              </a:spcBef>
-              <a:spcAft>
-                <a:spcPts val="0"/>
-              </a:spcAft>
-              <a:buClr>
-                <a:schemeClr val="dk1"/>
-              </a:buClr>
-              <a:buSzPts val="1440"/>
-              <a:buFont typeface="Noto Sans Symbols"/>
-              <a:buChar char="⮚"/>
-              <a:defRPr sz="2000" b="0" i="0" u="none" strike="noStrike" cap="none">
-                <a:solidFill>
-                  <a:schemeClr val="dk1"/>
-                </a:solidFill>
-                <a:latin typeface="Arial" panose="020B0604020202020204"/>
-                <a:ea typeface="Arial" panose="020B0604020202020204"/>
-                <a:cs typeface="Arial" panose="020B0604020202020204"/>
-                <a:sym typeface="Arial" panose="020B0604020202020204"/>
-              </a:defRPr>
-            </a:lvl4pPr>
-            <a:lvl5pPr marL="2286000" marR="0" lvl="4" indent="-320040" algn="l" rtl="0">
-              <a:lnSpc>
-                <a:spcPct val="100000"/>
-              </a:lnSpc>
-              <a:spcBef>
-                <a:spcPts val="360"/>
-              </a:spcBef>
-              <a:spcAft>
-                <a:spcPts val="0"/>
-              </a:spcAft>
-              <a:buClr>
-                <a:schemeClr val="dk1"/>
-              </a:buClr>
-              <a:buSzPts val="1440"/>
-              <a:buFont typeface="Noto Sans Symbols"/>
-              <a:buChar char="⮚"/>
-              <a:defRPr sz="2000" b="0" i="0" u="none" strike="noStrike" cap="none">
-                <a:solidFill>
-                  <a:schemeClr val="dk1"/>
-                </a:solidFill>
-                <a:latin typeface="Arial" panose="020B0604020202020204"/>
-                <a:ea typeface="Arial" panose="020B0604020202020204"/>
-                <a:cs typeface="Arial" panose="020B0604020202020204"/>
-                <a:sym typeface="Arial" panose="020B0604020202020204"/>
-              </a:defRPr>
-            </a:lvl5pPr>
-            <a:lvl6pPr marL="2743200" marR="0" lvl="5" indent="-320040" algn="l" rtl="0">
-              <a:lnSpc>
-                <a:spcPct val="100000"/>
-              </a:lnSpc>
-              <a:spcBef>
-                <a:spcPts val="360"/>
-              </a:spcBef>
-              <a:spcAft>
-                <a:spcPts val="0"/>
-              </a:spcAft>
-              <a:buClr>
-                <a:schemeClr val="accent5"/>
-              </a:buClr>
-              <a:buSzPts val="1440"/>
-              <a:buFont typeface="Noto Sans Symbols"/>
-              <a:buChar char="⚫"/>
-              <a:defRPr sz="1800" b="0" i="0" u="none" strike="noStrike" cap="none">
-                <a:solidFill>
-                  <a:schemeClr val="dk1"/>
-                </a:solidFill>
-                <a:latin typeface="Arial" panose="020B0604020202020204"/>
-                <a:ea typeface="Arial" panose="020B0604020202020204"/>
-                <a:cs typeface="Arial" panose="020B0604020202020204"/>
-                <a:sym typeface="Arial" panose="020B0604020202020204"/>
-              </a:defRPr>
-            </a:lvl6pPr>
-            <a:lvl7pPr marL="3200400" marR="0" lvl="6" indent="-320040" algn="l" rtl="0">
-              <a:lnSpc>
-                <a:spcPct val="100000"/>
-              </a:lnSpc>
-              <a:spcBef>
-                <a:spcPts val="360"/>
-              </a:spcBef>
-              <a:spcAft>
-                <a:spcPts val="0"/>
-              </a:spcAft>
-              <a:buClr>
-                <a:schemeClr val="accent6"/>
-              </a:buClr>
-              <a:buSzPts val="1440"/>
-              <a:buFont typeface="Noto Sans Symbols"/>
-              <a:buChar char="⚫"/>
-              <a:defRPr sz="1600" b="0" i="0" u="none" strike="noStrike" cap="none">
-                <a:solidFill>
-                  <a:schemeClr val="dk1"/>
-                </a:solidFill>
-                <a:latin typeface="Arial" panose="020B0604020202020204"/>
-                <a:ea typeface="Arial" panose="020B0604020202020204"/>
-                <a:cs typeface="Arial" panose="020B0604020202020204"/>
-                <a:sym typeface="Arial" panose="020B0604020202020204"/>
-              </a:defRPr>
-            </a:lvl7pPr>
-            <a:lvl8pPr marL="3657600" marR="0" lvl="7" indent="-342900" algn="l" rtl="0">
-              <a:lnSpc>
-                <a:spcPct val="100000"/>
-              </a:lnSpc>
-              <a:spcBef>
-                <a:spcPts val="360"/>
-              </a:spcBef>
-              <a:spcAft>
-                <a:spcPts val="0"/>
-              </a:spcAft>
-              <a:buClr>
-                <a:schemeClr val="dk2"/>
-              </a:buClr>
-              <a:buSzPts val="1800"/>
-              <a:buFont typeface="Arial" panose="020B0604020202020204"/>
-              <a:buChar char="•"/>
-              <a:defRPr sz="1600" b="0" i="0" u="none" strike="noStrike" cap="none">
-                <a:solidFill>
-                  <a:schemeClr val="dk1"/>
-                </a:solidFill>
-                <a:latin typeface="Arial" panose="020B0604020202020204"/>
-                <a:ea typeface="Arial" panose="020B0604020202020204"/>
-                <a:cs typeface="Arial" panose="020B0604020202020204"/>
-                <a:sym typeface="Arial" panose="020B0604020202020204"/>
-              </a:defRPr>
-            </a:lvl8pPr>
-            <a:lvl9pPr marL="4114800" marR="0" lvl="8" indent="-342900" algn="l" rtl="0">
-              <a:lnSpc>
-                <a:spcPct val="100000"/>
-              </a:lnSpc>
-              <a:spcBef>
-                <a:spcPts val="360"/>
-              </a:spcBef>
-              <a:spcAft>
-                <a:spcPts val="0"/>
-              </a:spcAft>
-              <a:buClr>
-                <a:schemeClr val="dk2"/>
-              </a:buClr>
-              <a:buSzPts val="1800"/>
-              <a:buFont typeface="Arial" panose="020B0604020202020204"/>
-              <a:buChar char="•"/>
-              <a:defRPr sz="1400" b="0" i="0" u="none" strike="noStrike" cap="none">
-                <a:solidFill>
-                  <a:schemeClr val="dk1"/>
-                </a:solidFill>
-                <a:latin typeface="Arial" panose="020B0604020202020204"/>
-                <a:ea typeface="Arial" panose="020B0604020202020204"/>
-                <a:cs typeface="Arial" panose="020B0604020202020204"/>
-                <a:sym typeface="Arial" panose="020B0604020202020204"/>
-              </a:defRPr>
-            </a:lvl9pPr>
-          </a:lstStyle>
-          <a:p>
-            <a:pPr marL="0" indent="0">
-              <a:lnSpc>
-                <a:spcPct val="150000"/>
-              </a:lnSpc>
-              <a:buFont typeface="Noto Sans Symbols"/>
-              <a:buNone/>
-            </a:pPr>
-            <a:endParaRPr lang="en-IN" sz="2400" dirty="0">
-              <a:solidFill>
-                <a:srgbClr val="C00000"/>
-              </a:solidFill>
-              <a:latin typeface="Times New Roman" panose="02020603050405020304" pitchFamily="18" charset="0"/>
-              <a:cs typeface="Times New Roman" panose="02020603050405020304" pitchFamily="18" charset="0"/>
-            </a:endParaRPr>
-          </a:p>
-          <a:p>
-            <a:pPr>
-              <a:lnSpc>
-                <a:spcPct val="150000"/>
-              </a:lnSpc>
-            </a:pPr>
-            <a:endParaRPr lang="en-IN" dirty="0">
-              <a:latin typeface="Times New Roman" panose="02020603050405020304" pitchFamily="18" charset="0"/>
-              <a:cs typeface="Times New Roman" panose="02020603050405020304" pitchFamily="18" charset="0"/>
-            </a:endParaRPr>
-          </a:p>
-        </p:txBody>
-      </p:sp>
-      <p:sp>
-        <p:nvSpPr>
-          <p:cNvPr id="3" name="Content Placeholder 2">
-            <a:extLst>
-              <a:ext uri="{FF2B5EF4-FFF2-40B4-BE49-F238E27FC236}">
-                <a16:creationId xmlns:a16="http://schemas.microsoft.com/office/drawing/2014/main" id="{575BC973-DC6B-6A5C-584E-D87DBA081745}"/>
-              </a:ext>
-            </a:extLst>
-          </p:cNvPr>
-          <p:cNvSpPr txBox="1"/>
-          <p:nvPr/>
-        </p:nvSpPr>
-        <p:spPr>
-          <a:xfrm>
-            <a:off x="1752600" y="1908258"/>
-            <a:ext cx="4260767" cy="4392775"/>
-          </a:xfrm>
-          <a:prstGeom prst="rect">
-            <a:avLst/>
-          </a:prstGeom>
-          <a:noFill/>
-          <a:ln>
-            <a:noFill/>
-          </a:ln>
-        </p:spPr>
-        <p:txBody>
-          <a:bodyPr spcFirstLastPara="1" wrap="square" lIns="91425" tIns="45700" rIns="91425" bIns="45700" anchor="t" anchorCtr="0">
-            <a:normAutofit/>
-          </a:bodyPr>
-          <a:lstStyle>
-            <a:defPPr marR="0" lvl="0" algn="l" rtl="0">
-              <a:lnSpc>
-                <a:spcPct val="100000"/>
-              </a:lnSpc>
-              <a:spcBef>
-                <a:spcPts val="0"/>
-              </a:spcBef>
-              <a:spcAft>
-                <a:spcPts val="0"/>
-              </a:spcAft>
-            </a:defPPr>
-            <a:lvl1pPr marL="457200" marR="0" lvl="0" indent="-320040" algn="l" rtl="0">
-              <a:lnSpc>
-                <a:spcPct val="100000"/>
-              </a:lnSpc>
-              <a:spcBef>
-                <a:spcPts val="360"/>
-              </a:spcBef>
-              <a:spcAft>
-                <a:spcPts val="0"/>
-              </a:spcAft>
-              <a:buClr>
-                <a:schemeClr val="dk1"/>
-              </a:buClr>
-              <a:buSzPts val="1440"/>
-              <a:buFont typeface="Noto Sans Symbols"/>
-              <a:buChar char="⮚"/>
-              <a:defRPr sz="2000" b="0" i="0" u="none" strike="noStrike" cap="none">
-                <a:solidFill>
-                  <a:schemeClr val="dk1"/>
-                </a:solidFill>
-                <a:latin typeface="Arial" panose="020B0604020202020204"/>
-                <a:ea typeface="Arial" panose="020B0604020202020204"/>
-                <a:cs typeface="Arial" panose="020B0604020202020204"/>
-                <a:sym typeface="Arial" panose="020B0604020202020204"/>
-              </a:defRPr>
-            </a:lvl1pPr>
-            <a:lvl2pPr marL="914400" marR="0" lvl="1" indent="-320040" algn="l" rtl="0">
-              <a:lnSpc>
-                <a:spcPct val="100000"/>
-              </a:lnSpc>
-              <a:spcBef>
-                <a:spcPts val="360"/>
-              </a:spcBef>
-              <a:spcAft>
-                <a:spcPts val="0"/>
-              </a:spcAft>
-              <a:buClr>
-                <a:schemeClr val="dk1"/>
-              </a:buClr>
-              <a:buSzPts val="1440"/>
-              <a:buFont typeface="Noto Sans Symbols"/>
-              <a:buChar char="⮚"/>
-              <a:defRPr sz="2000" b="0" i="0" u="none" strike="noStrike" cap="none">
-                <a:solidFill>
-                  <a:schemeClr val="dk1"/>
-                </a:solidFill>
-                <a:latin typeface="Arial" panose="020B0604020202020204"/>
-                <a:ea typeface="Arial" panose="020B0604020202020204"/>
-                <a:cs typeface="Arial" panose="020B0604020202020204"/>
-                <a:sym typeface="Arial" panose="020B0604020202020204"/>
-              </a:defRPr>
-            </a:lvl2pPr>
-            <a:lvl3pPr marL="1371600" marR="0" lvl="2" indent="-320040" algn="l" rtl="0">
-              <a:lnSpc>
-                <a:spcPct val="100000"/>
-              </a:lnSpc>
-              <a:spcBef>
-                <a:spcPts val="360"/>
-              </a:spcBef>
-              <a:spcAft>
-                <a:spcPts val="0"/>
-              </a:spcAft>
-              <a:buClr>
-                <a:schemeClr val="dk1"/>
-              </a:buClr>
-              <a:buSzPts val="1440"/>
-              <a:buFont typeface="Noto Sans Symbols"/>
-              <a:buChar char="⮚"/>
-              <a:defRPr sz="2000" b="0" i="0" u="none" strike="noStrike" cap="none">
-                <a:solidFill>
-                  <a:schemeClr val="dk1"/>
-                </a:solidFill>
-                <a:latin typeface="Arial" panose="020B0604020202020204"/>
-                <a:ea typeface="Arial" panose="020B0604020202020204"/>
-                <a:cs typeface="Arial" panose="020B0604020202020204"/>
-                <a:sym typeface="Arial" panose="020B0604020202020204"/>
-              </a:defRPr>
-            </a:lvl3pPr>
-            <a:lvl4pPr marL="1828800" marR="0" lvl="3" indent="-320040" algn="l" rtl="0">
-              <a:lnSpc>
-                <a:spcPct val="100000"/>
-              </a:lnSpc>
-              <a:spcBef>
-                <a:spcPts val="360"/>
-              </a:spcBef>
-              <a:spcAft>
-                <a:spcPts val="0"/>
-              </a:spcAft>
-              <a:buClr>
-                <a:schemeClr val="dk1"/>
-              </a:buClr>
-              <a:buSzPts val="1440"/>
-              <a:buFont typeface="Noto Sans Symbols"/>
-              <a:buChar char="⮚"/>
-              <a:defRPr sz="2000" b="0" i="0" u="none" strike="noStrike" cap="none">
-                <a:solidFill>
-                  <a:schemeClr val="dk1"/>
-                </a:solidFill>
-                <a:latin typeface="Arial" panose="020B0604020202020204"/>
-                <a:ea typeface="Arial" panose="020B0604020202020204"/>
-                <a:cs typeface="Arial" panose="020B0604020202020204"/>
-                <a:sym typeface="Arial" panose="020B0604020202020204"/>
-              </a:defRPr>
-            </a:lvl4pPr>
-            <a:lvl5pPr marL="2286000" marR="0" lvl="4" indent="-320040" algn="l" rtl="0">
-              <a:lnSpc>
-                <a:spcPct val="100000"/>
-              </a:lnSpc>
-              <a:spcBef>
-                <a:spcPts val="360"/>
-              </a:spcBef>
-              <a:spcAft>
-                <a:spcPts val="0"/>
-              </a:spcAft>
-              <a:buClr>
-                <a:schemeClr val="dk1"/>
-              </a:buClr>
-              <a:buSzPts val="1440"/>
-              <a:buFont typeface="Noto Sans Symbols"/>
-              <a:buChar char="⮚"/>
-              <a:defRPr sz="2000" b="0" i="0" u="none" strike="noStrike" cap="none">
-                <a:solidFill>
-                  <a:schemeClr val="dk1"/>
-                </a:solidFill>
-                <a:latin typeface="Arial" panose="020B0604020202020204"/>
-                <a:ea typeface="Arial" panose="020B0604020202020204"/>
-                <a:cs typeface="Arial" panose="020B0604020202020204"/>
-                <a:sym typeface="Arial" panose="020B0604020202020204"/>
-              </a:defRPr>
-            </a:lvl5pPr>
-            <a:lvl6pPr marL="2743200" marR="0" lvl="5" indent="-320040" algn="l" rtl="0">
-              <a:lnSpc>
-                <a:spcPct val="100000"/>
-              </a:lnSpc>
-              <a:spcBef>
-                <a:spcPts val="360"/>
-              </a:spcBef>
-              <a:spcAft>
-                <a:spcPts val="0"/>
-              </a:spcAft>
-              <a:buClr>
-                <a:schemeClr val="accent5"/>
-              </a:buClr>
-              <a:buSzPts val="1440"/>
-              <a:buFont typeface="Noto Sans Symbols"/>
-              <a:buChar char="⚫"/>
-              <a:defRPr sz="1800" b="0" i="0" u="none" strike="noStrike" cap="none">
-                <a:solidFill>
-                  <a:schemeClr val="dk1"/>
-                </a:solidFill>
-                <a:latin typeface="Arial" panose="020B0604020202020204"/>
-                <a:ea typeface="Arial" panose="020B0604020202020204"/>
-                <a:cs typeface="Arial" panose="020B0604020202020204"/>
-                <a:sym typeface="Arial" panose="020B0604020202020204"/>
-              </a:defRPr>
-            </a:lvl6pPr>
-            <a:lvl7pPr marL="3200400" marR="0" lvl="6" indent="-320040" algn="l" rtl="0">
-              <a:lnSpc>
-                <a:spcPct val="100000"/>
-              </a:lnSpc>
-              <a:spcBef>
-                <a:spcPts val="360"/>
-              </a:spcBef>
-              <a:spcAft>
-                <a:spcPts val="0"/>
-              </a:spcAft>
-              <a:buClr>
-                <a:schemeClr val="accent6"/>
-              </a:buClr>
-              <a:buSzPts val="1440"/>
-              <a:buFont typeface="Noto Sans Symbols"/>
-              <a:buChar char="⚫"/>
-              <a:defRPr sz="1600" b="0" i="0" u="none" strike="noStrike" cap="none">
-                <a:solidFill>
-                  <a:schemeClr val="dk1"/>
-                </a:solidFill>
-                <a:latin typeface="Arial" panose="020B0604020202020204"/>
-                <a:ea typeface="Arial" panose="020B0604020202020204"/>
-                <a:cs typeface="Arial" panose="020B0604020202020204"/>
-                <a:sym typeface="Arial" panose="020B0604020202020204"/>
-              </a:defRPr>
-            </a:lvl7pPr>
-            <a:lvl8pPr marL="3657600" marR="0" lvl="7" indent="-342900" algn="l" rtl="0">
-              <a:lnSpc>
-                <a:spcPct val="100000"/>
-              </a:lnSpc>
-              <a:spcBef>
-                <a:spcPts val="360"/>
-              </a:spcBef>
-              <a:spcAft>
-                <a:spcPts val="0"/>
-              </a:spcAft>
-              <a:buClr>
-                <a:schemeClr val="dk2"/>
-              </a:buClr>
-              <a:buSzPts val="1800"/>
-              <a:buFont typeface="Arial" panose="020B0604020202020204"/>
-              <a:buChar char="•"/>
-              <a:defRPr sz="1600" b="0" i="0" u="none" strike="noStrike" cap="none">
-                <a:solidFill>
-                  <a:schemeClr val="dk1"/>
-                </a:solidFill>
-                <a:latin typeface="Arial" panose="020B0604020202020204"/>
-                <a:ea typeface="Arial" panose="020B0604020202020204"/>
-                <a:cs typeface="Arial" panose="020B0604020202020204"/>
-                <a:sym typeface="Arial" panose="020B0604020202020204"/>
-              </a:defRPr>
-            </a:lvl8pPr>
-            <a:lvl9pPr marL="4114800" marR="0" lvl="8" indent="-342900" algn="l" rtl="0">
-              <a:lnSpc>
-                <a:spcPct val="100000"/>
-              </a:lnSpc>
-              <a:spcBef>
-                <a:spcPts val="360"/>
-              </a:spcBef>
-              <a:spcAft>
-                <a:spcPts val="0"/>
-              </a:spcAft>
-              <a:buClr>
-                <a:schemeClr val="dk2"/>
-              </a:buClr>
-              <a:buSzPts val="1800"/>
-              <a:buFont typeface="Arial" panose="020B0604020202020204"/>
-              <a:buChar char="•"/>
-              <a:defRPr sz="1400" b="0" i="0" u="none" strike="noStrike" cap="none">
-                <a:solidFill>
-                  <a:schemeClr val="dk1"/>
-                </a:solidFill>
-                <a:latin typeface="Arial" panose="020B0604020202020204"/>
-                <a:ea typeface="Arial" panose="020B0604020202020204"/>
-                <a:cs typeface="Arial" panose="020B0604020202020204"/>
-                <a:sym typeface="Arial" panose="020B0604020202020204"/>
-              </a:defRPr>
-            </a:lvl9pPr>
-          </a:lstStyle>
-          <a:p>
-            <a:pPr marL="0" indent="0">
-              <a:lnSpc>
-                <a:spcPct val="150000"/>
-              </a:lnSpc>
-              <a:buFont typeface="Noto Sans Symbols"/>
-              <a:buNone/>
-            </a:pPr>
-            <a:r>
-              <a:rPr lang="en-IN" sz="2400" b="1" dirty="0">
-                <a:solidFill>
-                  <a:srgbClr val="C00000"/>
-                </a:solidFill>
-                <a:latin typeface="Times New Roman" panose="02020603050405020304" pitchFamily="18" charset="0"/>
-                <a:cs typeface="Times New Roman" panose="02020603050405020304" pitchFamily="18" charset="0"/>
-              </a:rPr>
               <a:t>FRONT-END:</a:t>
-            </a:r>
-          </a:p>
-          <a:p>
-            <a:pPr marL="0" indent="0">
-              <a:lnSpc>
-                <a:spcPct val="150000"/>
-              </a:lnSpc>
-              <a:buFont typeface="Noto Sans Symbols"/>
-              <a:buNone/>
-            </a:pPr>
-            <a:r>
-              <a:rPr lang="en-IN" dirty="0">
-                <a:solidFill>
-                  <a:schemeClr val="tx1"/>
-                </a:solidFill>
-                <a:latin typeface="Times New Roman" panose="02020603050405020304" pitchFamily="18" charset="0"/>
-                <a:cs typeface="Times New Roman" panose="02020603050405020304" pitchFamily="18" charset="0"/>
-              </a:rPr>
-              <a:t>ReactJS</a:t>
             </a:r>
           </a:p>
           <a:p>
@@ -16535,8 +18352,372 @@
               <a:cs typeface="Times New Roman" panose="02020603050405020304" pitchFamily="18" charset="0"/>
             </a:endParaRPr>
           </a:p>
+          <a:p>
+            <a:pPr marL="0" indent="0">
+              <a:lnSpc>
+                <a:spcPct val="150000"/>
+              </a:lnSpc>
+              <a:buFont typeface="Noto Sans Symbols"/>
+              <a:buNone/>
+            </a:pPr>
+            <a:r>
+              <a:rPr lang="en-IN" dirty="0">
+                <a:solidFill>
+                  <a:schemeClr val="tx1"/>
+                </a:solidFill>
+                <a:latin typeface="Times New Roman" panose="02020603050405020304" pitchFamily="18" charset="0"/>
+                <a:cs typeface="Times New Roman" panose="02020603050405020304" pitchFamily="18" charset="0"/>
+              </a:rPr>
+              <a:t>ReactJS</a:t>
+            </a:r>
+          </a:p>
+          <a:p>
+            <a:pPr marL="0" indent="0">
+              <a:lnSpc>
+                <a:spcPct val="150000"/>
+              </a:lnSpc>
+              <a:buFont typeface="Noto Sans Symbols"/>
+              <a:buNone/>
+            </a:pPr>
+            <a:endParaRPr lang="en-IN" dirty="0">
+              <a:solidFill>
+                <a:schemeClr val="tx1"/>
+              </a:solidFill>
+              <a:latin typeface="Times New Roman" panose="02020603050405020304" pitchFamily="18" charset="0"/>
+              <a:cs typeface="Times New Roman" panose="02020603050405020304" pitchFamily="18" charset="0"/>
+            </a:endParaRPr>
+          </a:p>
         </p:txBody>
       </p:sp>
+      <p:pic>
+        <p:nvPicPr>
+          <p:cNvPr id="1026" name="Picture 2" descr="React">
+            <a:extLst>
+              <a:ext uri="{FF2B5EF4-FFF2-40B4-BE49-F238E27FC236}">
+                <a16:creationId xmlns:a16="http://schemas.microsoft.com/office/drawing/2014/main" id="{6B0A4973-37F2-AB34-4A3A-076DDABD972C}"/>
+              </a:ext>
+            </a:extLst>
+          </p:cNvPr>
+          <p:cNvPicPr>
+            <a:picLocks noChangeAspect="1" noChangeArrowheads="1"/>
+          </p:cNvPicPr>
+          <p:nvPr/>
+        </p:nvPicPr>
+        <p:blipFill>
+          <a:blip r:embed="rId2">
+            <a:extLst>
+              <a:ext uri="{28A0092B-C50C-407E-A947-70E740481C1C}">
+                <a14:useLocalDpi xmlns:a14="http://schemas.microsoft.com/office/drawing/2010/main" val="0"/>
+              </a:ext>
+            </a:extLst>
+          </a:blip>
+          <a:srcRect/>
+          <a:stretch>
+            <a:fillRect/>
+          </a:stretch>
+        </p:blipFill>
+        <p:spPr bwMode="auto">
+          <a:xfrm>
+            <a:off x="914400" y="3183571"/>
+            <a:ext cx="1371600" cy="1371600"/>
+          </a:xfrm>
+          <a:prstGeom prst="rect">
+            <a:avLst/>
+          </a:prstGeom>
+          <a:noFill/>
+          <a:extLst>
+            <a:ext uri="{909E8E84-426E-40DD-AFC4-6F175D3DCCD1}">
+              <a14:hiddenFill xmlns:a14="http://schemas.microsoft.com/office/drawing/2010/main">
+                <a:solidFill>
+                  <a:srgbClr val="FFFFFF"/>
+                </a:solidFill>
+              </a14:hiddenFill>
+            </a:ext>
+          </a:extLst>
+        </p:spPr>
+      </p:pic>
+      <p:pic>
+        <p:nvPicPr>
+          <p:cNvPr id="1028" name="Picture 4" descr="How to Make an API with Express.js: A ...">
+            <a:extLst>
+              <a:ext uri="{FF2B5EF4-FFF2-40B4-BE49-F238E27FC236}">
+                <a16:creationId xmlns:a16="http://schemas.microsoft.com/office/drawing/2014/main" id="{F42CDBD5-2701-5EEE-BB9B-FC906BBDDB75}"/>
+              </a:ext>
+            </a:extLst>
+          </p:cNvPr>
+          <p:cNvPicPr>
+            <a:picLocks noChangeAspect="1" noChangeArrowheads="1"/>
+          </p:cNvPicPr>
+          <p:nvPr/>
+        </p:nvPicPr>
+        <p:blipFill>
+          <a:blip r:embed="rId3">
+            <a:extLst>
+              <a:ext uri="{28A0092B-C50C-407E-A947-70E740481C1C}">
+                <a14:useLocalDpi xmlns:a14="http://schemas.microsoft.com/office/drawing/2010/main" val="0"/>
+              </a:ext>
+            </a:extLst>
+          </a:blip>
+          <a:srcRect/>
+          <a:stretch>
+            <a:fillRect/>
+          </a:stretch>
+        </p:blipFill>
+        <p:spPr bwMode="auto">
+          <a:xfrm>
+            <a:off x="4237542" y="2133600"/>
+            <a:ext cx="1371762" cy="912845"/>
+          </a:xfrm>
+          <a:prstGeom prst="rect">
+            <a:avLst/>
+          </a:prstGeom>
+          <a:noFill/>
+          <a:extLst>
+            <a:ext uri="{909E8E84-426E-40DD-AFC4-6F175D3DCCD1}">
+              <a14:hiddenFill xmlns:a14="http://schemas.microsoft.com/office/drawing/2010/main">
+                <a:solidFill>
+                  <a:srgbClr val="FFFFFF"/>
+                </a:solidFill>
+              </a14:hiddenFill>
+            </a:ext>
+          </a:extLst>
+        </p:spPr>
+      </p:pic>
+      <p:pic>
+        <p:nvPicPr>
+          <p:cNvPr id="1030" name="Picture 6" descr="What Is MongoDB? - GTech">
+            <a:extLst>
+              <a:ext uri="{FF2B5EF4-FFF2-40B4-BE49-F238E27FC236}">
+                <a16:creationId xmlns:a16="http://schemas.microsoft.com/office/drawing/2014/main" id="{3C9DEF65-4F86-5692-2D19-AE493AA6E2F2}"/>
+              </a:ext>
+            </a:extLst>
+          </p:cNvPr>
+          <p:cNvPicPr>
+            <a:picLocks noChangeAspect="1" noChangeArrowheads="1"/>
+          </p:cNvPicPr>
+          <p:nvPr/>
+        </p:nvPicPr>
+        <p:blipFill>
+          <a:blip r:embed="rId4">
+            <a:extLst>
+              <a:ext uri="{28A0092B-C50C-407E-A947-70E740481C1C}">
+                <a14:useLocalDpi xmlns:a14="http://schemas.microsoft.com/office/drawing/2010/main" val="0"/>
+              </a:ext>
+            </a:extLst>
+          </a:blip>
+          <a:srcRect/>
+          <a:stretch>
+            <a:fillRect/>
+          </a:stretch>
+        </p:blipFill>
+        <p:spPr bwMode="auto">
+          <a:xfrm>
+            <a:off x="6784031" y="2819400"/>
+            <a:ext cx="1932493" cy="884756"/>
+          </a:xfrm>
+          <a:prstGeom prst="rect">
+            <a:avLst/>
+          </a:prstGeom>
+          <a:noFill/>
+          <a:extLst>
+            <a:ext uri="{909E8E84-426E-40DD-AFC4-6F175D3DCCD1}">
+              <a14:hiddenFill xmlns:a14="http://schemas.microsoft.com/office/drawing/2010/main">
+                <a:solidFill>
+                  <a:srgbClr val="FFFFFF"/>
+                </a:solidFill>
+              </a14:hiddenFill>
+            </a:ext>
+          </a:extLst>
+        </p:spPr>
+      </p:pic>
+      <p:pic>
+        <p:nvPicPr>
+          <p:cNvPr id="1032" name="Picture 8" descr="Integrating Salesforce and Twilio - SMBHD">
+            <a:extLst>
+              <a:ext uri="{FF2B5EF4-FFF2-40B4-BE49-F238E27FC236}">
+                <a16:creationId xmlns:a16="http://schemas.microsoft.com/office/drawing/2014/main" id="{3A13954D-C6E9-4A71-4663-09B23BE84708}"/>
+              </a:ext>
+            </a:extLst>
+          </p:cNvPr>
+          <p:cNvPicPr>
+            <a:picLocks noChangeAspect="1" noChangeArrowheads="1"/>
+          </p:cNvPicPr>
+          <p:nvPr/>
+        </p:nvPicPr>
+        <p:blipFill>
+          <a:blip r:embed="rId5">
+            <a:extLst>
+              <a:ext uri="{28A0092B-C50C-407E-A947-70E740481C1C}">
+                <a14:useLocalDpi xmlns:a14="http://schemas.microsoft.com/office/drawing/2010/main" val="0"/>
+              </a:ext>
+            </a:extLst>
+          </a:blip>
+          <a:srcRect/>
+          <a:stretch>
+            <a:fillRect/>
+          </a:stretch>
+        </p:blipFill>
+        <p:spPr bwMode="auto">
+          <a:xfrm>
+            <a:off x="4436647" y="3493992"/>
+            <a:ext cx="1113502" cy="1113502"/>
+          </a:xfrm>
+          <a:prstGeom prst="rect">
+            <a:avLst/>
+          </a:prstGeom>
+          <a:noFill/>
+          <a:extLst>
+            <a:ext uri="{909E8E84-426E-40DD-AFC4-6F175D3DCCD1}">
+              <a14:hiddenFill xmlns:a14="http://schemas.microsoft.com/office/drawing/2010/main">
+                <a:solidFill>
+                  <a:srgbClr val="FFFFFF"/>
+                </a:solidFill>
+              </a14:hiddenFill>
+            </a:ext>
+          </a:extLst>
+        </p:spPr>
+      </p:pic>
+      <p:pic>
+        <p:nvPicPr>
+          <p:cNvPr id="1034" name="Picture 10" descr="Render (@render) / X">
+            <a:extLst>
+              <a:ext uri="{FF2B5EF4-FFF2-40B4-BE49-F238E27FC236}">
+                <a16:creationId xmlns:a16="http://schemas.microsoft.com/office/drawing/2014/main" id="{D6F60FF0-3604-FC6B-F36D-E8A5C0EC9D5F}"/>
+              </a:ext>
+            </a:extLst>
+          </p:cNvPr>
+          <p:cNvPicPr>
+            <a:picLocks noChangeAspect="1" noChangeArrowheads="1"/>
+          </p:cNvPicPr>
+          <p:nvPr/>
+        </p:nvPicPr>
+        <p:blipFill>
+          <a:blip r:embed="rId6">
+            <a:extLst>
+              <a:ext uri="{28A0092B-C50C-407E-A947-70E740481C1C}">
+                <a14:useLocalDpi xmlns:a14="http://schemas.microsoft.com/office/drawing/2010/main" val="0"/>
+              </a:ext>
+            </a:extLst>
+          </a:blip>
+          <a:srcRect/>
+          <a:stretch>
+            <a:fillRect/>
+          </a:stretch>
+        </p:blipFill>
+        <p:spPr bwMode="auto">
+          <a:xfrm>
+            <a:off x="6695286" y="4303732"/>
+            <a:ext cx="988463" cy="988463"/>
+          </a:xfrm>
+          <a:prstGeom prst="rect">
+            <a:avLst/>
+          </a:prstGeom>
+          <a:noFill/>
+          <a:extLst>
+            <a:ext uri="{909E8E84-426E-40DD-AFC4-6F175D3DCCD1}">
+              <a14:hiddenFill xmlns:a14="http://schemas.microsoft.com/office/drawing/2010/main">
+                <a:solidFill>
+                  <a:srgbClr val="FFFFFF"/>
+                </a:solidFill>
+              </a14:hiddenFill>
+            </a:ext>
+          </a:extLst>
+        </p:spPr>
+      </p:pic>
+      <p:pic>
+        <p:nvPicPr>
+          <p:cNvPr id="1036" name="Picture 12" descr="Medusa - medusa-plugin-nodemailer | Medusa">
+            <a:extLst>
+              <a:ext uri="{FF2B5EF4-FFF2-40B4-BE49-F238E27FC236}">
+                <a16:creationId xmlns:a16="http://schemas.microsoft.com/office/drawing/2014/main" id="{4E4FFF34-57E1-42C9-7B11-6330A11D86F0}"/>
+              </a:ext>
+            </a:extLst>
+          </p:cNvPr>
+          <p:cNvPicPr>
+            <a:picLocks noChangeAspect="1" noChangeArrowheads="1"/>
+          </p:cNvPicPr>
+          <p:nvPr/>
+        </p:nvPicPr>
+        <p:blipFill>
+          <a:blip r:embed="rId7">
+            <a:extLst>
+              <a:ext uri="{28A0092B-C50C-407E-A947-70E740481C1C}">
+                <a14:useLocalDpi xmlns:a14="http://schemas.microsoft.com/office/drawing/2010/main" val="0"/>
+              </a:ext>
+            </a:extLst>
+          </a:blip>
+          <a:srcRect/>
+          <a:stretch>
+            <a:fillRect/>
+          </a:stretch>
+        </p:blipFill>
+        <p:spPr bwMode="auto">
+          <a:xfrm>
+            <a:off x="4366672" y="4953000"/>
+            <a:ext cx="1113502" cy="1113502"/>
+          </a:xfrm>
+          <a:prstGeom prst="rect">
+            <a:avLst/>
+          </a:prstGeom>
+          <a:noFill/>
+          <a:extLst>
+            <a:ext uri="{909E8E84-426E-40DD-AFC4-6F175D3DCCD1}">
+              <a14:hiddenFill xmlns:a14="http://schemas.microsoft.com/office/drawing/2010/main">
+                <a:solidFill>
+                  <a:srgbClr val="FFFFFF"/>
+                </a:solidFill>
+              </a14:hiddenFill>
+            </a:ext>
+          </a:extLst>
+        </p:spPr>
+      </p:pic>
+      <p:pic>
+        <p:nvPicPr>
+          <p:cNvPr id="1040" name="Picture 16" descr="JSON Web Token color icon in PNG, SVG">
+            <a:extLst>
+              <a:ext uri="{FF2B5EF4-FFF2-40B4-BE49-F238E27FC236}">
+                <a16:creationId xmlns:a16="http://schemas.microsoft.com/office/drawing/2014/main" id="{27D019F8-E201-F78F-79FD-E1A6D8648B7A}"/>
+              </a:ext>
+            </a:extLst>
+          </p:cNvPr>
+          <p:cNvPicPr>
+            <a:picLocks noChangeAspect="1" noChangeArrowheads="1"/>
+          </p:cNvPicPr>
+          <p:nvPr/>
+        </p:nvPicPr>
+        <p:blipFill>
+          <a:blip r:embed="rId8">
+            <a:extLst>
+              <a:ext uri="{28A0092B-C50C-407E-A947-70E740481C1C}">
+                <a14:useLocalDpi xmlns:a14="http://schemas.microsoft.com/office/drawing/2010/main" val="0"/>
+              </a:ext>
+            </a:extLst>
+          </a:blip>
+          <a:srcRect/>
+          <a:stretch>
+            <a:fillRect/>
+          </a:stretch>
+        </p:blipFill>
+        <p:spPr bwMode="auto">
+          <a:xfrm>
+            <a:off x="6784031" y="5715000"/>
+            <a:ext cx="988464" cy="988464"/>
+          </a:xfrm>
+          <a:prstGeom prst="rect">
+            <a:avLst/>
+          </a:prstGeom>
+          <a:noFill/>
+          <a:extLst>
+            <a:ext uri="{909E8E84-426E-40DD-AFC4-6F175D3DCCD1}">
+              <a14:hiddenFill xmlns:a14="http://schemas.microsoft.com/office/drawing/2010/main">
+                <a:solidFill>
+                  <a:srgbClr val="FFFFFF"/>
+                </a:solidFill>
+              </a14:hiddenFill>
+            </a:ext>
+          </a:extLst>
+        </p:spPr>
+      </p:pic>
     </p:spTree>
   </p:cSld>
   <p:clrMapOvr>
@@ -16577,7 +18758,7 @@
         </p:nvSpPr>
         <p:spPr>
           <a:xfrm>
-            <a:off x="457200" y="494522"/>
+            <a:off x="609600" y="637572"/>
             <a:ext cx="8229600" cy="643813"/>
           </a:xfrm>
         </p:spPr>
@@ -16594,17 +18775,341 @@
                 <a:latin typeface="Times New Roman" panose="02020603050405020304" pitchFamily="18" charset="0"/>
                 <a:cs typeface="Times New Roman" panose="02020603050405020304" pitchFamily="18" charset="0"/>
               </a:rPr>
-              <a:t>ARCHITECTURE</a:t>
+              <a:t>Module Description </a:t>
+            </a:r>
+            <a:br>
+              <a:rPr lang="en-IN" b="1" dirty="0">
+                <a:solidFill>
+                  <a:srgbClr val="C00000"/>
+                </a:solidFill>
+                <a:latin typeface="Times New Roman" panose="02020603050405020304" pitchFamily="18" charset="0"/>
+                <a:cs typeface="Times New Roman" panose="02020603050405020304" pitchFamily="18" charset="0"/>
+              </a:rPr>
+            </a:br>
+            <a:r>
+              <a:rPr lang="en-IN" b="1" dirty="0">
+                <a:solidFill>
+                  <a:srgbClr val="C00000"/>
+                </a:solidFill>
+                <a:latin typeface="Times New Roman" panose="02020603050405020304" pitchFamily="18" charset="0"/>
+                <a:cs typeface="Times New Roman" panose="02020603050405020304" pitchFamily="18" charset="0"/>
+              </a:rPr>
+              <a:t> Employee Management</a:t>
+            </a:r>
+          </a:p>
+        </p:txBody>
+      </p:sp>
+      <p:sp>
+        <p:nvSpPr>
+          <p:cNvPr id="4" name="TextBox 3">
+            <a:extLst>
+              <a:ext uri="{FF2B5EF4-FFF2-40B4-BE49-F238E27FC236}">
+                <a16:creationId xmlns:a16="http://schemas.microsoft.com/office/drawing/2014/main" id="{F03E2F76-A1CB-178D-5876-85BBC43ACE61}"/>
+              </a:ext>
+            </a:extLst>
+          </p:cNvPr>
+          <p:cNvSpPr txBox="1"/>
+          <p:nvPr/>
+        </p:nvSpPr>
+        <p:spPr>
+          <a:xfrm>
+            <a:off x="762000" y="1528027"/>
+            <a:ext cx="5562600" cy="1477328"/>
+          </a:xfrm>
+          <a:prstGeom prst="rect">
+            <a:avLst/>
+          </a:prstGeom>
+          <a:noFill/>
+        </p:spPr>
+        <p:txBody>
+          <a:bodyPr wrap="square">
+            <a:spAutoFit/>
+          </a:bodyPr>
+          <a:lstStyle/>
+          <a:p>
+            <a:pPr algn="just"/>
+            <a:r>
+              <a:rPr lang="en-US" dirty="0"/>
+              <a:t>Comprehensive employee data management</a:t>
+            </a:r>
+          </a:p>
+          <a:p>
+            <a:pPr algn="just"/>
+            <a:endParaRPr lang="en-US" dirty="0"/>
+          </a:p>
+          <a:p>
+            <a:pPr algn="just"/>
+            <a:r>
+              <a:rPr lang="en-US" dirty="0"/>
+              <a:t>- Personal and professional details</a:t>
+            </a:r>
+          </a:p>
+          <a:p>
+            <a:pPr algn="just"/>
+            <a:endParaRPr lang="en-US" dirty="0"/>
+          </a:p>
+          <a:p>
+            <a:pPr algn="just"/>
+            <a:r>
+              <a:rPr lang="en-US" dirty="0"/>
+              <a:t>- Resignation and update management.</a:t>
+            </a:r>
+          </a:p>
+        </p:txBody>
+      </p:sp>
+      <p:sp>
+        <p:nvSpPr>
+          <p:cNvPr id="6" name="Title 1">
+            <a:extLst>
+              <a:ext uri="{FF2B5EF4-FFF2-40B4-BE49-F238E27FC236}">
+                <a16:creationId xmlns:a16="http://schemas.microsoft.com/office/drawing/2014/main" id="{2B66B144-AE17-FCB2-7A8B-1B709B8B0805}"/>
+              </a:ext>
+            </a:extLst>
+          </p:cNvPr>
+          <p:cNvSpPr txBox="1">
+            <a:spLocks/>
+          </p:cNvSpPr>
+          <p:nvPr/>
+        </p:nvSpPr>
+        <p:spPr>
+          <a:xfrm>
+            <a:off x="457200" y="3757087"/>
+            <a:ext cx="8229600" cy="643813"/>
+          </a:xfrm>
+          <a:prstGeom prst="rect">
+            <a:avLst/>
+          </a:prstGeom>
+          <a:noFill/>
+          <a:ln w="9525">
+            <a:noFill/>
+          </a:ln>
+        </p:spPr>
+        <p:txBody>
+          <a:bodyPr lIns="0" rIns="0" bIns="0" anchor="b" anchorCtr="0"/>
+          <a:lstStyle>
+            <a:lvl1pPr algn="l" rtl="0" eaLnBrk="0" fontAlgn="base" hangingPunct="0">
+              <a:spcBef>
+                <a:spcPct val="0"/>
+              </a:spcBef>
+              <a:spcAft>
+                <a:spcPct val="0"/>
+              </a:spcAft>
+              <a:defRPr sz="3200" kern="1200">
+                <a:solidFill>
+                  <a:schemeClr val="accent1"/>
+                </a:solidFill>
+                <a:latin typeface="+mj-lt"/>
+                <a:ea typeface="+mj-ea"/>
+                <a:cs typeface="+mj-cs"/>
+              </a:defRPr>
+            </a:lvl1pPr>
+            <a:lvl2pPr algn="l" rtl="0" eaLnBrk="0" fontAlgn="base" hangingPunct="0">
+              <a:spcBef>
+                <a:spcPct val="0"/>
+              </a:spcBef>
+              <a:spcAft>
+                <a:spcPct val="0"/>
+              </a:spcAft>
+              <a:defRPr sz="3200">
+                <a:solidFill>
+                  <a:schemeClr val="accent1"/>
+                </a:solidFill>
+                <a:latin typeface="Arial" panose="020B0604020202020204" pitchFamily="34" charset="0"/>
+              </a:defRPr>
+            </a:lvl2pPr>
+            <a:lvl3pPr algn="l" rtl="0" eaLnBrk="0" fontAlgn="base" hangingPunct="0">
+              <a:spcBef>
+                <a:spcPct val="0"/>
+              </a:spcBef>
+              <a:spcAft>
+                <a:spcPct val="0"/>
+              </a:spcAft>
+              <a:defRPr sz="3200">
+                <a:solidFill>
+                  <a:schemeClr val="accent1"/>
+                </a:solidFill>
+                <a:latin typeface="Arial" panose="020B0604020202020204" pitchFamily="34" charset="0"/>
+              </a:defRPr>
+            </a:lvl3pPr>
+            <a:lvl4pPr algn="l" rtl="0" eaLnBrk="0" fontAlgn="base" hangingPunct="0">
+              <a:spcBef>
+                <a:spcPct val="0"/>
+              </a:spcBef>
+              <a:spcAft>
+                <a:spcPct val="0"/>
+              </a:spcAft>
+              <a:defRPr sz="3200">
+                <a:solidFill>
+                  <a:schemeClr val="accent1"/>
+                </a:solidFill>
+                <a:latin typeface="Arial" panose="020B0604020202020204" pitchFamily="34" charset="0"/>
+              </a:defRPr>
+            </a:lvl4pPr>
+            <a:lvl5pPr algn="l" rtl="0" eaLnBrk="0" fontAlgn="base" hangingPunct="0">
+              <a:spcBef>
+                <a:spcPct val="0"/>
+              </a:spcBef>
+              <a:spcAft>
+                <a:spcPct val="0"/>
+              </a:spcAft>
+              <a:defRPr sz="3200">
+                <a:solidFill>
+                  <a:schemeClr val="accent1"/>
+                </a:solidFill>
+                <a:latin typeface="Arial" panose="020B0604020202020204" pitchFamily="34" charset="0"/>
+              </a:defRPr>
+            </a:lvl5pPr>
+            <a:lvl6pPr marL="457200" algn="l" rtl="0" fontAlgn="base">
+              <a:spcBef>
+                <a:spcPct val="0"/>
+              </a:spcBef>
+              <a:spcAft>
+                <a:spcPct val="0"/>
+              </a:spcAft>
+              <a:defRPr sz="5000">
+                <a:solidFill>
+                  <a:schemeClr val="tx2"/>
+                </a:solidFill>
+                <a:latin typeface="Calibri" panose="020F0502020204030204" pitchFamily="34" charset="0"/>
+              </a:defRPr>
+            </a:lvl6pPr>
+            <a:lvl7pPr marL="914400" algn="l" rtl="0" fontAlgn="base">
+              <a:spcBef>
+                <a:spcPct val="0"/>
+              </a:spcBef>
+              <a:spcAft>
+                <a:spcPct val="0"/>
+              </a:spcAft>
+              <a:defRPr sz="5000">
+                <a:solidFill>
+                  <a:schemeClr val="tx2"/>
+                </a:solidFill>
+                <a:latin typeface="Calibri" panose="020F0502020204030204" pitchFamily="34" charset="0"/>
+              </a:defRPr>
+            </a:lvl7pPr>
+            <a:lvl8pPr marL="1371600" algn="l" rtl="0" fontAlgn="base">
+              <a:spcBef>
+                <a:spcPct val="0"/>
+              </a:spcBef>
+              <a:spcAft>
+                <a:spcPct val="0"/>
+              </a:spcAft>
+              <a:defRPr sz="5000">
+                <a:solidFill>
+                  <a:schemeClr val="tx2"/>
+                </a:solidFill>
+                <a:latin typeface="Calibri" panose="020F0502020204030204" pitchFamily="34" charset="0"/>
+              </a:defRPr>
+            </a:lvl8pPr>
+            <a:lvl9pPr marL="1828800" algn="l" rtl="0" fontAlgn="base">
+              <a:spcBef>
+                <a:spcPct val="0"/>
+              </a:spcBef>
+              <a:spcAft>
+                <a:spcPct val="0"/>
+              </a:spcAft>
+              <a:defRPr sz="5000">
+                <a:solidFill>
+                  <a:schemeClr val="tx2"/>
+                </a:solidFill>
+                <a:latin typeface="Calibri" panose="020F0502020204030204" pitchFamily="34" charset="0"/>
+              </a:defRPr>
+            </a:lvl9pPr>
+          </a:lstStyle>
+          <a:p>
+            <a:pPr algn="ctr"/>
+            <a:r>
+              <a:rPr lang="en-IN" sz="2800" b="1" dirty="0">
+                <a:solidFill>
+                  <a:srgbClr val="C00000"/>
+                </a:solidFill>
+                <a:latin typeface="Times New Roman" panose="02020603050405020304" pitchFamily="18" charset="0"/>
+                <a:cs typeface="Times New Roman" panose="02020603050405020304" pitchFamily="18" charset="0"/>
+              </a:rPr>
+              <a:t>Attendance Management</a:t>
+            </a:r>
+          </a:p>
+        </p:txBody>
+      </p:sp>
+      <p:sp>
+        <p:nvSpPr>
+          <p:cNvPr id="7" name="TextBox 6">
+            <a:extLst>
+              <a:ext uri="{FF2B5EF4-FFF2-40B4-BE49-F238E27FC236}">
+                <a16:creationId xmlns:a16="http://schemas.microsoft.com/office/drawing/2014/main" id="{D2719AD3-C233-E132-8E13-CB57B2FBCFF2}"/>
+              </a:ext>
+            </a:extLst>
+          </p:cNvPr>
+          <p:cNvSpPr txBox="1"/>
+          <p:nvPr/>
+        </p:nvSpPr>
+        <p:spPr>
+          <a:xfrm>
+            <a:off x="1980487" y="4572000"/>
+            <a:ext cx="5638800" cy="1477328"/>
+          </a:xfrm>
+          <a:prstGeom prst="rect">
+            <a:avLst/>
+          </a:prstGeom>
+          <a:noFill/>
+        </p:spPr>
+        <p:txBody>
+          <a:bodyPr wrap="square">
+            <a:spAutoFit/>
+          </a:bodyPr>
+          <a:lstStyle/>
+          <a:p>
+            <a:pPr marL="285750" indent="-285750" algn="just">
+              <a:buFontTx/>
+              <a:buChar char="-"/>
+            </a:pPr>
+            <a:r>
+              <a:rPr lang="en-US" dirty="0"/>
+              <a:t>Excel-based upload</a:t>
+            </a:r>
+          </a:p>
+          <a:p>
+            <a:pPr marL="285750" indent="-285750" algn="just">
+              <a:buFontTx/>
+              <a:buChar char="-"/>
+            </a:pPr>
+            <a:endParaRPr lang="en-US" dirty="0"/>
+          </a:p>
+          <a:p>
+            <a:pPr marL="285750" indent="-285750" algn="just">
+              <a:buFontTx/>
+              <a:buChar char="-"/>
+            </a:pPr>
+            <a:r>
+              <a:rPr lang="en-US" dirty="0"/>
+              <a:t>Real-time dashboard for tracking and updates</a:t>
+            </a:r>
+          </a:p>
+          <a:p>
+            <a:pPr marL="285750" indent="-285750" algn="just">
+              <a:buFontTx/>
+              <a:buChar char="-"/>
+            </a:pPr>
+            <a:endParaRPr lang="en-US" dirty="0"/>
+          </a:p>
+          <a:p>
+            <a:pPr marL="285750" indent="-285750" algn="just">
+              <a:buFontTx/>
+              <a:buChar char="-"/>
+            </a:pPr>
+            <a:r>
+              <a:rPr lang="en-US" dirty="0"/>
+              <a:t>Holiday management.</a:t>
             </a:r>
           </a:p>
         </p:txBody>
       </p:sp>
       <p:pic>
         <p:nvPicPr>
-          <p:cNvPr id="5" name="Picture 4">
+          <p:cNvPr id="9" name="Picture 8">
             <a:extLst>
               <a:ext uri="{FF2B5EF4-FFF2-40B4-BE49-F238E27FC236}">
-                <a16:creationId xmlns:a16="http://schemas.microsoft.com/office/drawing/2014/main" id="{17257E44-4DA5-F43A-AB88-88DB9AA7A4EB}"/>
+                <a16:creationId xmlns:a16="http://schemas.microsoft.com/office/drawing/2014/main" id="{41052D93-0C38-A1DA-46E6-13E9602038BD}"/>
               </a:ext>
             </a:extLst>
           </p:cNvPr>
@@ -16621,8 +19126,98 @@
         </p:blipFill>
         <p:spPr>
           <a:xfrm>
-            <a:off x="990600" y="1301674"/>
-            <a:ext cx="7543800" cy="5232572"/>
+            <a:off x="651388" y="3757087"/>
+            <a:ext cx="1329099" cy="1648428"/>
+          </a:xfrm>
+          <a:prstGeom prst="rect">
+            <a:avLst/>
+          </a:prstGeom>
+        </p:spPr>
+      </p:pic>
+      <p:pic>
+        <p:nvPicPr>
+          <p:cNvPr id="11" name="Picture 10">
+            <a:extLst>
+              <a:ext uri="{FF2B5EF4-FFF2-40B4-BE49-F238E27FC236}">
+                <a16:creationId xmlns:a16="http://schemas.microsoft.com/office/drawing/2014/main" id="{8657D339-2A9A-F3B5-463B-CEF9F0B62DA7}"/>
+              </a:ext>
+            </a:extLst>
+          </p:cNvPr>
+          <p:cNvPicPr>
+            <a:picLocks noChangeAspect="1"/>
+          </p:cNvPicPr>
+          <p:nvPr/>
+        </p:nvPicPr>
+        <p:blipFill>
+          <a:blip r:embed="rId3"/>
+          <a:stretch>
+            <a:fillRect/>
+          </a:stretch>
+        </p:blipFill>
+        <p:spPr>
+          <a:xfrm>
+            <a:off x="5028668" y="5596641"/>
+            <a:ext cx="3810532" cy="1076475"/>
+          </a:xfrm>
+          <a:prstGeom prst="rect">
+            <a:avLst/>
+          </a:prstGeom>
+        </p:spPr>
+      </p:pic>
+      <p:pic>
+        <p:nvPicPr>
+          <p:cNvPr id="13" name="Picture 12">
+            <a:extLst>
+              <a:ext uri="{FF2B5EF4-FFF2-40B4-BE49-F238E27FC236}">
+                <a16:creationId xmlns:a16="http://schemas.microsoft.com/office/drawing/2014/main" id="{BEA4DAA6-A4E3-D869-C90B-35F2B32E7C9D}"/>
+              </a:ext>
+            </a:extLst>
+          </p:cNvPr>
+          <p:cNvPicPr>
+            <a:picLocks noChangeAspect="1"/>
+          </p:cNvPicPr>
+          <p:nvPr/>
+        </p:nvPicPr>
+        <p:blipFill>
+          <a:blip r:embed="rId4"/>
+          <a:stretch>
+            <a:fillRect/>
+          </a:stretch>
+        </p:blipFill>
+        <p:spPr>
+          <a:xfrm>
+            <a:off x="4952999" y="1855635"/>
+            <a:ext cx="4148937" cy="2174361"/>
+          </a:xfrm>
+          <a:prstGeom prst="rect">
+            <a:avLst/>
+          </a:prstGeom>
+        </p:spPr>
+      </p:pic>
+      <p:pic>
+        <p:nvPicPr>
+          <p:cNvPr id="15" name="Picture 14">
+            <a:extLst>
+              <a:ext uri="{FF2B5EF4-FFF2-40B4-BE49-F238E27FC236}">
+                <a16:creationId xmlns:a16="http://schemas.microsoft.com/office/drawing/2014/main" id="{D2BC4D17-873D-AC38-AB93-22269EC77DBA}"/>
+              </a:ext>
+            </a:extLst>
+          </p:cNvPr>
+          <p:cNvPicPr>
+            <a:picLocks noChangeAspect="1"/>
+          </p:cNvPicPr>
+          <p:nvPr/>
+        </p:nvPicPr>
+        <p:blipFill>
+          <a:blip r:embed="rId5"/>
+          <a:stretch>
+            <a:fillRect/>
+          </a:stretch>
+        </p:blipFill>
+        <p:spPr>
+          <a:xfrm>
+            <a:off x="2396605" y="3022232"/>
+            <a:ext cx="2403282" cy="847291"/>
           </a:xfrm>
           <a:prstGeom prst="rect">
             <a:avLst/>
@@ -16645,7 +19240,13 @@
   <p:cSld>
     <p:spTree>
       <p:nvGrpSpPr>
-        <p:cNvPr id="1" name=""/>
+        <p:cNvPr id="1" name="">
+          <a:extLst>
+            <a:ext uri="{FF2B5EF4-FFF2-40B4-BE49-F238E27FC236}">
+              <a16:creationId xmlns:a16="http://schemas.microsoft.com/office/drawing/2014/main" id="{FC93AE82-5DA4-9C53-8D7F-567205AD9374}"/>
+            </a:ext>
+          </a:extLst>
+        </p:cNvPr>
         <p:cNvGrpSpPr/>
         <p:nvPr/>
       </p:nvGrpSpPr>
@@ -16659,271 +19260,322 @@
       </p:grpSpPr>
       <p:sp>
         <p:nvSpPr>
-          <p:cNvPr id="4" name="Title 1"/>
+          <p:cNvPr id="2" name="Title 1">
+            <a:extLst>
+              <a:ext uri="{FF2B5EF4-FFF2-40B4-BE49-F238E27FC236}">
+                <a16:creationId xmlns:a16="http://schemas.microsoft.com/office/drawing/2014/main" id="{DA70B6CE-D2DA-D3E8-4A1C-0256ED18004E}"/>
+              </a:ext>
+            </a:extLst>
+          </p:cNvPr>
+          <p:cNvSpPr>
+            <a:spLocks noGrp="1"/>
+          </p:cNvSpPr>
+          <p:nvPr>
+            <p:ph type="title"/>
+          </p:nvPr>
+        </p:nvSpPr>
+        <p:spPr>
+          <a:xfrm>
+            <a:off x="457200" y="533400"/>
+            <a:ext cx="8229600" cy="643813"/>
+          </a:xfrm>
+        </p:spPr>
+        <p:txBody>
+          <a:bodyPr/>
+          <a:lstStyle/>
+          <a:p>
+            <a:pPr algn="ctr"/>
+            <a:r>
+              <a:rPr lang="en-IN" b="1" dirty="0">
+                <a:solidFill>
+                  <a:srgbClr val="C00000"/>
+                </a:solidFill>
+                <a:latin typeface="Times New Roman" panose="02020603050405020304" pitchFamily="18" charset="0"/>
+                <a:cs typeface="Times New Roman" panose="02020603050405020304" pitchFamily="18" charset="0"/>
+              </a:rPr>
+              <a:t>Leave Management</a:t>
+            </a:r>
+          </a:p>
+        </p:txBody>
+      </p:sp>
+      <p:sp>
+        <p:nvSpPr>
+          <p:cNvPr id="4" name="TextBox 3">
+            <a:extLst>
+              <a:ext uri="{FF2B5EF4-FFF2-40B4-BE49-F238E27FC236}">
+                <a16:creationId xmlns:a16="http://schemas.microsoft.com/office/drawing/2014/main" id="{BB69AE4C-08BD-01FA-EE68-7E75BDC150DD}"/>
+              </a:ext>
+            </a:extLst>
+          </p:cNvPr>
           <p:cNvSpPr txBox="1"/>
           <p:nvPr/>
         </p:nvSpPr>
         <p:spPr>
           <a:xfrm>
-            <a:off x="699796" y="499187"/>
-            <a:ext cx="8229600" cy="643813"/>
+            <a:off x="4168877" y="1461986"/>
+            <a:ext cx="5257800" cy="1477328"/>
           </a:xfrm>
           <a:prstGeom prst="rect">
             <a:avLst/>
           </a:prstGeom>
+          <a:noFill/>
         </p:spPr>
         <p:txBody>
-          <a:bodyPr/>
+          <a:bodyPr wrap="square">
+            <a:spAutoFit/>
+          </a:bodyPr>
+          <a:lstStyle/>
+          <a:p>
+            <a:r>
+              <a:rPr lang="en-US" dirty="0"/>
+              <a:t>Leave applications with automated email notifications</a:t>
+            </a:r>
+          </a:p>
+          <a:p>
+            <a:pPr marL="285750" indent="-285750">
+              <a:buFontTx/>
+              <a:buChar char="-"/>
+            </a:pPr>
+            <a:endParaRPr lang="en-US" dirty="0"/>
+          </a:p>
+          <a:p>
+            <a:r>
+              <a:rPr lang="en-US" dirty="0"/>
+              <a:t>Status tracking and integration with salary module.</a:t>
+            </a:r>
+          </a:p>
+        </p:txBody>
+      </p:sp>
+      <p:sp>
+        <p:nvSpPr>
+          <p:cNvPr id="5" name="Title 1">
+            <a:extLst>
+              <a:ext uri="{FF2B5EF4-FFF2-40B4-BE49-F238E27FC236}">
+                <a16:creationId xmlns:a16="http://schemas.microsoft.com/office/drawing/2014/main" id="{A5861655-9593-F3AC-6BAA-3DE0E83C4D23}"/>
+              </a:ext>
+            </a:extLst>
+          </p:cNvPr>
+          <p:cNvSpPr txBox="1">
+            <a:spLocks/>
+          </p:cNvSpPr>
+          <p:nvPr/>
+        </p:nvSpPr>
+        <p:spPr>
+          <a:xfrm>
+            <a:off x="609600" y="2971800"/>
+            <a:ext cx="8229600" cy="643813"/>
+          </a:xfrm>
+          <a:prstGeom prst="rect">
+            <a:avLst/>
+          </a:prstGeom>
+          <a:noFill/>
+          <a:ln w="9525">
+            <a:noFill/>
+          </a:ln>
+        </p:spPr>
+        <p:txBody>
+          <a:bodyPr lIns="0" rIns="0" bIns="0" anchor="b" anchorCtr="0"/>
           <a:lstStyle>
-            <a:defPPr marR="0" lvl="0" algn="l" rtl="0">
-              <a:lnSpc>
-                <a:spcPct val="100000"/>
-              </a:lnSpc>
+            <a:lvl1pPr algn="l" rtl="0" eaLnBrk="0" fontAlgn="base" hangingPunct="0">
               <a:spcBef>
-                <a:spcPts val="0"/>
+                <a:spcPct val="0"/>
               </a:spcBef>
               <a:spcAft>
-                <a:spcPts val="0"/>
+                <a:spcPct val="0"/>
               </a:spcAft>
-            </a:defPPr>
-            <a:lvl1pPr marR="0" lvl="0" algn="l" rtl="0">
-              <a:lnSpc>
-                <a:spcPct val="100000"/>
-              </a:lnSpc>
+              <a:defRPr sz="3200" kern="1200">
+                <a:solidFill>
+                  <a:schemeClr val="accent1"/>
+                </a:solidFill>
+                <a:latin typeface="+mj-lt"/>
+                <a:ea typeface="+mj-ea"/>
+                <a:cs typeface="+mj-cs"/>
+              </a:defRPr>
+            </a:lvl1pPr>
+            <a:lvl2pPr algn="l" rtl="0" eaLnBrk="0" fontAlgn="base" hangingPunct="0">
               <a:spcBef>
-                <a:spcPts val="0"/>
+                <a:spcPct val="0"/>
               </a:spcBef>
               <a:spcAft>
-                <a:spcPts val="0"/>
+                <a:spcPct val="0"/>
               </a:spcAft>
-              <a:buClr>
-                <a:srgbClr val="000000"/>
-              </a:buClr>
-              <a:buFont typeface="Arial" panose="020B0604020202020204"/>
-              <a:defRPr sz="1400" b="0" i="0" u="none" strike="noStrike" cap="none">
-                <a:solidFill>
-                  <a:srgbClr val="000000"/>
-                </a:solidFill>
-                <a:latin typeface="Arial" panose="020B0604020202020204"/>
-                <a:ea typeface="Arial" panose="020B0604020202020204"/>
-                <a:cs typeface="Arial" panose="020B0604020202020204"/>
-                <a:sym typeface="Arial" panose="020B0604020202020204"/>
+              <a:defRPr sz="3200">
+                <a:solidFill>
+                  <a:schemeClr val="accent1"/>
+                </a:solidFill>
+                <a:latin typeface="Arial" panose="020B0604020202020204" pitchFamily="34" charset="0"/>
               </a:defRPr>
-            </a:lvl1pPr>
-            <a:lvl2pPr marR="0" lvl="1" algn="l" rtl="0">
-              <a:lnSpc>
-                <a:spcPct val="100000"/>
-              </a:lnSpc>
+            </a:lvl2pPr>
+            <a:lvl3pPr algn="l" rtl="0" eaLnBrk="0" fontAlgn="base" hangingPunct="0">
               <a:spcBef>
-                <a:spcPts val="0"/>
+                <a:spcPct val="0"/>
               </a:spcBef>
               <a:spcAft>
-                <a:spcPts val="0"/>
+                <a:spcPct val="0"/>
               </a:spcAft>
-              <a:buClr>
-                <a:srgbClr val="000000"/>
-              </a:buClr>
-              <a:buFont typeface="Arial" panose="020B0604020202020204"/>
-              <a:defRPr sz="1400" b="0" i="0" u="none" strike="noStrike" cap="none">
-                <a:solidFill>
-                  <a:srgbClr val="000000"/>
-                </a:solidFill>
-                <a:latin typeface="Arial" panose="020B0604020202020204"/>
-                <a:ea typeface="Arial" panose="020B0604020202020204"/>
-                <a:cs typeface="Arial" panose="020B0604020202020204"/>
-                <a:sym typeface="Arial" panose="020B0604020202020204"/>
+              <a:defRPr sz="3200">
+                <a:solidFill>
+                  <a:schemeClr val="accent1"/>
+                </a:solidFill>
+                <a:latin typeface="Arial" panose="020B0604020202020204" pitchFamily="34" charset="0"/>
               </a:defRPr>
-            </a:lvl2pPr>
-            <a:lvl3pPr marR="0" lvl="2" algn="l" rtl="0">
-              <a:lnSpc>
-                <a:spcPct val="100000"/>
-              </a:lnSpc>
+            </a:lvl3pPr>
+            <a:lvl4pPr algn="l" rtl="0" eaLnBrk="0" fontAlgn="base" hangingPunct="0">
               <a:spcBef>
-                <a:spcPts val="0"/>
+                <a:spcPct val="0"/>
               </a:spcBef>
               <a:spcAft>
-                <a:spcPts val="0"/>
+                <a:spcPct val="0"/>
               </a:spcAft>
-              <a:buClr>
-                <a:srgbClr val="000000"/>
-              </a:buClr>
-              <a:buFont typeface="Arial" panose="020B0604020202020204"/>
-              <a:defRPr sz="1400" b="0" i="0" u="none" strike="noStrike" cap="none">
-                <a:solidFill>
-                  <a:srgbClr val="000000"/>
-                </a:solidFill>
-                <a:latin typeface="Arial" panose="020B0604020202020204"/>
-                <a:ea typeface="Arial" panose="020B0604020202020204"/>
-                <a:cs typeface="Arial" panose="020B0604020202020204"/>
-                <a:sym typeface="Arial" panose="020B0604020202020204"/>
+              <a:defRPr sz="3200">
+                <a:solidFill>
+                  <a:schemeClr val="accent1"/>
+                </a:solidFill>
+                <a:latin typeface="Arial" panose="020B0604020202020204" pitchFamily="34" charset="0"/>
               </a:defRPr>
-            </a:lvl3pPr>
-            <a:lvl4pPr marR="0" lvl="3" algn="l" rtl="0">
-              <a:lnSpc>
-                <a:spcPct val="100000"/>
-              </a:lnSpc>
+            </a:lvl4pPr>
+            <a:lvl5pPr algn="l" rtl="0" eaLnBrk="0" fontAlgn="base" hangingPunct="0">
               <a:spcBef>
-                <a:spcPts val="0"/>
+                <a:spcPct val="0"/>
               </a:spcBef>
               <a:spcAft>
-                <a:spcPts val="0"/>
+                <a:spcPct val="0"/>
               </a:spcAft>
-              <a:buClr>
-                <a:srgbClr val="000000"/>
-              </a:buClr>
-              <a:buFont typeface="Arial" panose="020B0604020202020204"/>
-              <a:defRPr sz="1400" b="0" i="0" u="none" strike="noStrike" cap="none">
-                <a:solidFill>
-                  <a:srgbClr val="000000"/>
-                </a:solidFill>
-                <a:latin typeface="Arial" panose="020B0604020202020204"/>
-                <a:ea typeface="Arial" panose="020B0604020202020204"/>
-                <a:cs typeface="Arial" panose="020B0604020202020204"/>
-                <a:sym typeface="Arial" panose="020B0604020202020204"/>
+              <a:defRPr sz="3200">
+                <a:solidFill>
+                  <a:schemeClr val="accent1"/>
+                </a:solidFill>
+                <a:latin typeface="Arial" panose="020B0604020202020204" pitchFamily="34" charset="0"/>
               </a:defRPr>
-            </a:lvl4pPr>
-            <a:lvl5pPr marR="0" lvl="4" algn="l" rtl="0">
-              <a:lnSpc>
-                <a:spcPct val="100000"/>
-              </a:lnSpc>
+            </a:lvl5pPr>
+            <a:lvl6pPr marL="457200" algn="l" rtl="0" fontAlgn="base">
               <a:spcBef>
-                <a:spcPts val="0"/>
+                <a:spcPct val="0"/>
               </a:spcBef>
               <a:spcAft>
-                <a:spcPts val="0"/>
+                <a:spcPct val="0"/>
               </a:spcAft>
-              <a:buClr>
-                <a:srgbClr val="000000"/>
-              </a:buClr>
-              <a:buFont typeface="Arial" panose="020B0604020202020204"/>
-              <a:defRPr sz="1400" b="0" i="0" u="none" strike="noStrike" cap="none">
-                <a:solidFill>
-                  <a:srgbClr val="000000"/>
-                </a:solidFill>
-                <a:latin typeface="Arial" panose="020B0604020202020204"/>
-                <a:ea typeface="Arial" panose="020B0604020202020204"/>
-                <a:cs typeface="Arial" panose="020B0604020202020204"/>
-                <a:sym typeface="Arial" panose="020B0604020202020204"/>
+              <a:defRPr sz="5000">
+                <a:solidFill>
+                  <a:schemeClr val="tx2"/>
+                </a:solidFill>
+                <a:latin typeface="Calibri" panose="020F0502020204030204" pitchFamily="34" charset="0"/>
               </a:defRPr>
-            </a:lvl5pPr>
-            <a:lvl6pPr marR="0" lvl="5" algn="l" rtl="0">
-              <a:lnSpc>
-                <a:spcPct val="100000"/>
-              </a:lnSpc>
+            </a:lvl6pPr>
+            <a:lvl7pPr marL="914400" algn="l" rtl="0" fontAlgn="base">
               <a:spcBef>
-                <a:spcPts val="0"/>
+                <a:spcPct val="0"/>
               </a:spcBef>
               <a:spcAft>
-                <a:spcPts val="0"/>
+                <a:spcPct val="0"/>
               </a:spcAft>
-              <a:buClr>
-                <a:srgbClr val="000000"/>
-              </a:buClr>
-              <a:buFont typeface="Arial" panose="020B0604020202020204"/>
-              <a:defRPr sz="1400" b="0" i="0" u="none" strike="noStrike" cap="none">
-                <a:solidFill>
-                  <a:srgbClr val="000000"/>
-                </a:solidFill>
-                <a:latin typeface="Arial" panose="020B0604020202020204"/>
-                <a:ea typeface="Arial" panose="020B0604020202020204"/>
-                <a:cs typeface="Arial" panose="020B0604020202020204"/>
-                <a:sym typeface="Arial" panose="020B0604020202020204"/>
+              <a:defRPr sz="5000">
+                <a:solidFill>
+                  <a:schemeClr val="tx2"/>
+                </a:solidFill>
+                <a:latin typeface="Calibri" panose="020F0502020204030204" pitchFamily="34" charset="0"/>
               </a:defRPr>
-            </a:lvl6pPr>
-            <a:lvl7pPr marR="0" lvl="6" algn="l" rtl="0">
-              <a:lnSpc>
-                <a:spcPct val="100000"/>
-              </a:lnSpc>
+            </a:lvl7pPr>
+            <a:lvl8pPr marL="1371600" algn="l" rtl="0" fontAlgn="base">
               <a:spcBef>
-                <a:spcPts val="0"/>
+                <a:spcPct val="0"/>
               </a:spcBef>
               <a:spcAft>
-                <a:spcPts val="0"/>
+                <a:spcPct val="0"/>
               </a:spcAft>
-              <a:buClr>
-                <a:srgbClr val="000000"/>
-              </a:buClr>
-              <a:buFont typeface="Arial" panose="020B0604020202020204"/>
-              <a:defRPr sz="1400" b="0" i="0" u="none" strike="noStrike" cap="none">
-                <a:solidFill>
-                  <a:srgbClr val="000000"/>
-                </a:solidFill>
-                <a:latin typeface="Arial" panose="020B0604020202020204"/>
-                <a:ea typeface="Arial" panose="020B0604020202020204"/>
-                <a:cs typeface="Arial" panose="020B0604020202020204"/>
-                <a:sym typeface="Arial" panose="020B0604020202020204"/>
+              <a:defRPr sz="5000">
+                <a:solidFill>
+                  <a:schemeClr val="tx2"/>
+                </a:solidFill>
+                <a:latin typeface="Calibri" panose="020F0502020204030204" pitchFamily="34" charset="0"/>
               </a:defRPr>
-            </a:lvl7pPr>
-            <a:lvl8pPr marR="0" lvl="7" algn="l" rtl="0">
-              <a:lnSpc>
-                <a:spcPct val="100000"/>
-              </a:lnSpc>
+            </a:lvl8pPr>
+            <a:lvl9pPr marL="1828800" algn="l" rtl="0" fontAlgn="base">
               <a:spcBef>
-                <a:spcPts val="0"/>
+                <a:spcPct val="0"/>
               </a:spcBef>
               <a:spcAft>
-                <a:spcPts val="0"/>
+                <a:spcPct val="0"/>
               </a:spcAft>
-              <a:buClr>
-                <a:srgbClr val="000000"/>
-              </a:buClr>
-              <a:buFont typeface="Arial" panose="020B0604020202020204"/>
-              <a:defRPr sz="1400" b="0" i="0" u="none" strike="noStrike" cap="none">
-                <a:solidFill>
-                  <a:srgbClr val="000000"/>
-                </a:solidFill>
-                <a:latin typeface="Arial" panose="020B0604020202020204"/>
-                <a:ea typeface="Arial" panose="020B0604020202020204"/>
-                <a:cs typeface="Arial" panose="020B0604020202020204"/>
-                <a:sym typeface="Arial" panose="020B0604020202020204"/>
-              </a:defRPr>
-            </a:lvl8pPr>
-            <a:lvl9pPr marR="0" lvl="8" algn="l" rtl="0">
-              <a:lnSpc>
-                <a:spcPct val="100000"/>
-              </a:lnSpc>
-              <a:spcBef>
-                <a:spcPts val="0"/>
-              </a:spcBef>
-              <a:spcAft>
-                <a:spcPts val="0"/>
-              </a:spcAft>
-              <a:buClr>
-                <a:srgbClr val="000000"/>
-              </a:buClr>
-              <a:buFont typeface="Arial" panose="020B0604020202020204"/>
-              <a:defRPr sz="1400" b="0" i="0" u="none" strike="noStrike" cap="none">
-                <a:solidFill>
-                  <a:srgbClr val="000000"/>
-                </a:solidFill>
-                <a:latin typeface="Arial" panose="020B0604020202020204"/>
-                <a:ea typeface="Arial" panose="020B0604020202020204"/>
-                <a:cs typeface="Arial" panose="020B0604020202020204"/>
-                <a:sym typeface="Arial" panose="020B0604020202020204"/>
+              <a:defRPr sz="5000">
+                <a:solidFill>
+                  <a:schemeClr val="tx2"/>
+                </a:solidFill>
+                <a:latin typeface="Calibri" panose="020F0502020204030204" pitchFamily="34" charset="0"/>
               </a:defRPr>
             </a:lvl9pPr>
           </a:lstStyle>
           <a:p>
             <a:pPr algn="ctr"/>
             <a:r>
-              <a:rPr lang="en-IN" sz="3200" b="1" dirty="0">
+              <a:rPr lang="en-IN" b="1" dirty="0">
                 <a:solidFill>
                   <a:srgbClr val="C00000"/>
                 </a:solidFill>
                 <a:latin typeface="Times New Roman" panose="02020603050405020304" pitchFamily="18" charset="0"/>
                 <a:cs typeface="Times New Roman" panose="02020603050405020304" pitchFamily="18" charset="0"/>
               </a:rPr>
-              <a:t>OUTPUT SCREENSHOT</a:t>
+              <a:t>Salary Calculation</a:t>
+            </a:r>
+          </a:p>
+        </p:txBody>
+      </p:sp>
+      <p:sp>
+        <p:nvSpPr>
+          <p:cNvPr id="9" name="TextBox 8">
+            <a:extLst>
+              <a:ext uri="{FF2B5EF4-FFF2-40B4-BE49-F238E27FC236}">
+                <a16:creationId xmlns:a16="http://schemas.microsoft.com/office/drawing/2014/main" id="{DD295316-D683-0D51-BBD4-451D2A82AB9A}"/>
+              </a:ext>
+            </a:extLst>
+          </p:cNvPr>
+          <p:cNvSpPr txBox="1"/>
+          <p:nvPr/>
+        </p:nvSpPr>
+        <p:spPr>
+          <a:xfrm>
+            <a:off x="2057400" y="3900386"/>
+            <a:ext cx="6400800" cy="923330"/>
+          </a:xfrm>
+          <a:prstGeom prst="rect">
+            <a:avLst/>
+          </a:prstGeom>
+          <a:noFill/>
+        </p:spPr>
+        <p:txBody>
+          <a:bodyPr wrap="square">
+            <a:spAutoFit/>
+          </a:bodyPr>
+          <a:lstStyle/>
+          <a:p>
+            <a:pPr algn="just"/>
+            <a:r>
+              <a:rPr lang="en-US" dirty="0"/>
+              <a:t>Automated monthly calculations including DA and PF</a:t>
+            </a:r>
+          </a:p>
+          <a:p>
+            <a:pPr marL="285750" indent="-285750" algn="just">
+              <a:buFontTx/>
+              <a:buChar char="-"/>
+            </a:pPr>
+            <a:endParaRPr lang="en-US" dirty="0"/>
+          </a:p>
+          <a:p>
+            <a:pPr algn="just"/>
+            <a:r>
+              <a:rPr lang="en-US" dirty="0"/>
+              <a:t>Deductions for uninformed leaves.</a:t>
             </a:r>
           </a:p>
         </p:txBody>
       </p:sp>
       <p:pic>
         <p:nvPicPr>
-          <p:cNvPr id="3" name="Picture 2">
+          <p:cNvPr id="11" name="Picture 10">
             <a:extLst>
               <a:ext uri="{FF2B5EF4-FFF2-40B4-BE49-F238E27FC236}">
-                <a16:creationId xmlns:a16="http://schemas.microsoft.com/office/drawing/2014/main" id="{F57BE300-21D0-00BF-34A8-B57E2800537F}"/>
+                <a16:creationId xmlns:a16="http://schemas.microsoft.com/office/drawing/2014/main" id="{81BF92DC-A9EB-9415-608B-E8112D0E1E5F}"/>
               </a:ext>
             </a:extLst>
           </p:cNvPr>
@@ -16940,8 +19592,8 @@
         </p:blipFill>
         <p:spPr>
           <a:xfrm>
-            <a:off x="1066800" y="1138085"/>
-            <a:ext cx="4391865" cy="2367116"/>
+            <a:off x="892277" y="1209699"/>
+            <a:ext cx="3276600" cy="1844077"/>
           </a:xfrm>
           <a:prstGeom prst="rect">
             <a:avLst/>
@@ -16950,10 +19602,10 @@
       </p:pic>
       <p:pic>
         <p:nvPicPr>
-          <p:cNvPr id="6" name="Picture 5">
+          <p:cNvPr id="13" name="Picture 12">
             <a:extLst>
               <a:ext uri="{FF2B5EF4-FFF2-40B4-BE49-F238E27FC236}">
-                <a16:creationId xmlns:a16="http://schemas.microsoft.com/office/drawing/2014/main" id="{58B9FEC2-FD00-7D7E-C3C6-46E50B35C8AA}"/>
+                <a16:creationId xmlns:a16="http://schemas.microsoft.com/office/drawing/2014/main" id="{7156C71D-4D69-9D7E-90EE-D20AFDF84011}"/>
               </a:ext>
             </a:extLst>
           </p:cNvPr>
@@ -16970,15 +19622,50 @@
         </p:blipFill>
         <p:spPr>
           <a:xfrm>
-            <a:off x="5796929" y="2895600"/>
-            <a:ext cx="3132467" cy="3604359"/>
+            <a:off x="907025" y="4953000"/>
+            <a:ext cx="4694790" cy="573026"/>
           </a:xfrm>
           <a:prstGeom prst="rect">
             <a:avLst/>
           </a:prstGeom>
         </p:spPr>
       </p:pic>
+      <p:pic>
+        <p:nvPicPr>
+          <p:cNvPr id="15" name="Picture 14">
+            <a:extLst>
+              <a:ext uri="{FF2B5EF4-FFF2-40B4-BE49-F238E27FC236}">
+                <a16:creationId xmlns:a16="http://schemas.microsoft.com/office/drawing/2014/main" id="{EEAFF3B7-0E2B-4EC4-5768-14467A0A3698}"/>
+              </a:ext>
+            </a:extLst>
+          </p:cNvPr>
+          <p:cNvPicPr>
+            <a:picLocks noChangeAspect="1"/>
+          </p:cNvPicPr>
+          <p:nvPr/>
+        </p:nvPicPr>
+        <p:blipFill>
+          <a:blip r:embed="rId4"/>
+          <a:stretch>
+            <a:fillRect/>
+          </a:stretch>
+        </p:blipFill>
+        <p:spPr>
+          <a:xfrm>
+            <a:off x="3060720" y="5737123"/>
+            <a:ext cx="5626080" cy="573026"/>
+          </a:xfrm>
+          <a:prstGeom prst="rect">
+            <a:avLst/>
+          </a:prstGeom>
+        </p:spPr>
+      </p:pic>
     </p:spTree>
+    <p:extLst>
+      <p:ext uri="{BB962C8B-B14F-4D97-AF65-F5344CB8AC3E}">
+        <p14:creationId xmlns:p14="http://schemas.microsoft.com/office/powerpoint/2010/main" val="2279289348"/>
+      </p:ext>
+    </p:extLst>
   </p:cSld>
   <p:clrMapOvr>
     <a:masterClrMapping/>

--- a/Employee-management-system.pptx
+++ b/Employee-management-system.pptx
@@ -7,32 +7,44 @@
     <p:sldMasterId id="2147483673" r:id="rId3"/>
   </p:sldMasterIdLst>
   <p:notesMasterIdLst>
-    <p:notesMasterId r:id="rId24"/>
+    <p:notesMasterId r:id="rId36"/>
   </p:notesMasterIdLst>
   <p:handoutMasterIdLst>
-    <p:handoutMasterId r:id="rId25"/>
+    <p:handoutMasterId r:id="rId37"/>
   </p:handoutMasterIdLst>
   <p:sldIdLst>
     <p:sldId id="442" r:id="rId4"/>
     <p:sldId id="456" r:id="rId5"/>
-    <p:sldId id="457" r:id="rId6"/>
-    <p:sldId id="458" r:id="rId7"/>
-    <p:sldId id="460" r:id="rId8"/>
-    <p:sldId id="459" r:id="rId9"/>
-    <p:sldId id="461" r:id="rId10"/>
+    <p:sldId id="458" r:id="rId6"/>
+    <p:sldId id="457" r:id="rId7"/>
+    <p:sldId id="461" r:id="rId8"/>
+    <p:sldId id="460" r:id="rId9"/>
+    <p:sldId id="459" r:id="rId10"/>
     <p:sldId id="462" r:id="rId11"/>
     <p:sldId id="469" r:id="rId12"/>
-    <p:sldId id="470" r:id="rId13"/>
-    <p:sldId id="471" r:id="rId14"/>
-    <p:sldId id="472" r:id="rId15"/>
-    <p:sldId id="478" r:id="rId16"/>
-    <p:sldId id="479" r:id="rId17"/>
-    <p:sldId id="480" r:id="rId18"/>
-    <p:sldId id="463" r:id="rId19"/>
-    <p:sldId id="465" r:id="rId20"/>
-    <p:sldId id="466" r:id="rId21"/>
-    <p:sldId id="477" r:id="rId22"/>
-    <p:sldId id="464" r:id="rId23"/>
+    <p:sldId id="492" r:id="rId13"/>
+    <p:sldId id="470" r:id="rId14"/>
+    <p:sldId id="471" r:id="rId15"/>
+    <p:sldId id="472" r:id="rId16"/>
+    <p:sldId id="478" r:id="rId17"/>
+    <p:sldId id="479" r:id="rId18"/>
+    <p:sldId id="480" r:id="rId19"/>
+    <p:sldId id="463" r:id="rId20"/>
+    <p:sldId id="465" r:id="rId21"/>
+    <p:sldId id="466" r:id="rId22"/>
+    <p:sldId id="481" r:id="rId23"/>
+    <p:sldId id="482" r:id="rId24"/>
+    <p:sldId id="483" r:id="rId25"/>
+    <p:sldId id="491" r:id="rId26"/>
+    <p:sldId id="484" r:id="rId27"/>
+    <p:sldId id="485" r:id="rId28"/>
+    <p:sldId id="486" r:id="rId29"/>
+    <p:sldId id="487" r:id="rId30"/>
+    <p:sldId id="488" r:id="rId31"/>
+    <p:sldId id="489" r:id="rId32"/>
+    <p:sldId id="490" r:id="rId33"/>
+    <p:sldId id="477" r:id="rId34"/>
+    <p:sldId id="464" r:id="rId35"/>
   </p:sldIdLst>
   <p:sldSz cx="9144000" cy="6858000" type="screen4x3"/>
   <p:notesSz cx="6858000" cy="9144000"/>
@@ -386,7 +398,7 @@
                 <a:ea typeface="+mn-ea"/>
                 <a:cs typeface="Arial" panose="020B0604020202020204" pitchFamily="34" charset="0"/>
               </a:rPr>
-              <a:t>10 November 2024</a:t>
+              <a:t>11 November 2024</a:t>
             </a:fld>
             <a:endParaRPr kumimoji="0" lang="en-IN" sz="1200" b="0" i="0" u="none" strike="noStrike" kern="1200" cap="none" spc="0" normalizeH="0" baseline="0" noProof="0" dirty="0">
               <a:ln>
@@ -718,7 +730,7 @@
                 <a:ea typeface="+mn-ea"/>
                 <a:cs typeface="+mn-cs"/>
               </a:rPr>
-              <a:t>10 November 2024</a:t>
+              <a:t>11 November 2024</a:t>
             </a:fld>
             <a:endParaRPr kumimoji="0" lang="en-US" sz="1200" b="0" i="0" u="none" strike="noStrike" kern="1200" cap="none" spc="0" normalizeH="0" baseline="0" noProof="0" dirty="0">
               <a:ln>
@@ -1389,7 +1401,7 @@
                 <a:ea typeface="+mn-ea"/>
                 <a:cs typeface="+mn-cs"/>
               </a:rPr>
-              <a:t>10 November 2024</a:t>
+              <a:t>11 November 2024</a:t>
             </a:fld>
             <a:endParaRPr kumimoji="0" lang="en-US" sz="1200" b="0" i="0" u="none" strike="noStrike" kern="1200" cap="none" spc="0" normalizeH="0" baseline="0" noProof="0" dirty="0">
               <a:ln>
@@ -13349,7 +13361,7 @@
               <a:buNone/>
             </a:pPr>
             <a:r>
-              <a:rPr lang="en-US" sz="2000" b="1" dirty="0">
+              <a:rPr lang="en-US" b="1" dirty="0">
                 <a:solidFill>
                   <a:srgbClr val="C00000"/>
                 </a:solidFill>
@@ -13361,7 +13373,7 @@
               <a:t>MENTOR : </a:t>
             </a:r>
             <a:r>
-              <a:rPr lang="en-US" sz="2000" b="1" dirty="0" err="1">
+              <a:rPr lang="en-US" b="1" dirty="0" err="1">
                 <a:latin typeface="Times New Roman" panose="02020603050405020304"/>
                 <a:ea typeface="Times New Roman" panose="02020603050405020304"/>
                 <a:cs typeface="Times New Roman" panose="02020603050405020304"/>
@@ -13369,7 +13381,7 @@
               </a:rPr>
               <a:t>Dr.S.ANANDAMURUGAN</a:t>
             </a:r>
-            <a:endParaRPr lang="en-US" sz="2000" b="1" dirty="0">
+            <a:endParaRPr lang="en-US" b="1" dirty="0">
               <a:latin typeface="Times New Roman" panose="02020603050405020304"/>
               <a:ea typeface="Times New Roman" panose="02020603050405020304"/>
               <a:cs typeface="Times New Roman" panose="02020603050405020304"/>
@@ -13456,10 +13468,22 @@
                 <a:cs typeface="Times New Roman" panose="02020603050405020304"/>
                 <a:sym typeface="Times New Roman" panose="02020603050405020304"/>
               </a:rPr>
-              <a:t>           ME</a:t>
-            </a:r>
-            <a:r>
-              <a:rPr lang="en-US" sz="2000" b="1" dirty="0">
+              <a:t>           </a:t>
+            </a:r>
+            <a:r>
+              <a:rPr lang="en-US" b="1" i="0" u="none" strike="noStrike" cap="none" dirty="0">
+                <a:solidFill>
+                  <a:srgbClr val="C00000"/>
+                </a:solidFill>
+                <a:latin typeface="Times New Roman" panose="02020603050405020304"/>
+                <a:ea typeface="Times New Roman" panose="02020603050405020304"/>
+                <a:cs typeface="Times New Roman" panose="02020603050405020304"/>
+                <a:sym typeface="Times New Roman" panose="02020603050405020304"/>
+              </a:rPr>
+              <a:t>ME</a:t>
+            </a:r>
+            <a:r>
+              <a:rPr lang="en-US" b="1" dirty="0">
                 <a:solidFill>
                   <a:srgbClr val="C00000"/>
                 </a:solidFill>
@@ -13471,7 +13495,7 @@
               <a:t>MBERS: </a:t>
             </a:r>
             <a:r>
-              <a:rPr lang="en-US" sz="2000" b="1" dirty="0">
+              <a:rPr lang="en-US" sz="1600" b="1" dirty="0">
                 <a:latin typeface="Times New Roman" panose="02020603050405020304"/>
                 <a:ea typeface="Times New Roman" panose="02020603050405020304"/>
                 <a:cs typeface="Times New Roman" panose="02020603050405020304"/>
@@ -13491,16 +13515,16 @@
               <a:buNone/>
             </a:pPr>
             <a:r>
-              <a:rPr lang="en-US" sz="2000" b="1" i="0" u="none" strike="noStrike" cap="none" dirty="0">
+              <a:rPr lang="en-US" sz="1600" b="1" i="0" u="none" strike="noStrike" cap="none" dirty="0">
                 <a:latin typeface="Times New Roman" panose="02020603050405020304"/>
                 <a:ea typeface="Times New Roman" panose="02020603050405020304"/>
                 <a:cs typeface="Times New Roman" panose="02020603050405020304"/>
                 <a:sym typeface="Times New Roman" panose="02020603050405020304"/>
               </a:rPr>
-              <a:t>                                  KRITTIKA R</a:t>
-            </a:r>
-            <a:r>
-              <a:rPr lang="en-US" sz="2000" b="1" dirty="0">
+              <a:t>                                 	   KRITTIKA R</a:t>
+            </a:r>
+            <a:r>
+              <a:rPr lang="en-US" sz="1600" b="1" dirty="0">
                 <a:latin typeface="Times New Roman" panose="02020603050405020304"/>
                 <a:ea typeface="Times New Roman" panose="02020603050405020304"/>
                 <a:cs typeface="Times New Roman" panose="02020603050405020304"/>
@@ -13520,16 +13544,16 @@
               <a:buNone/>
             </a:pPr>
             <a:r>
-              <a:rPr lang="en-US" sz="2000" b="1" i="0" u="none" strike="noStrike" cap="none" dirty="0">
+              <a:rPr lang="en-US" sz="1600" b="1" i="0" u="none" strike="noStrike" cap="none" dirty="0">
                 <a:latin typeface="Times New Roman" panose="02020603050405020304"/>
                 <a:ea typeface="Times New Roman" panose="02020603050405020304"/>
                 <a:cs typeface="Times New Roman" panose="02020603050405020304"/>
                 <a:sym typeface="Times New Roman" panose="02020603050405020304"/>
               </a:rPr>
-              <a:t>                                  BARATH KUMAR R</a:t>
-            </a:r>
-            <a:r>
-              <a:rPr lang="en-US" sz="2000" b="1" dirty="0">
+              <a:t>                                       BARATH KUMAR R</a:t>
+            </a:r>
+            <a:r>
+              <a:rPr lang="en-US" sz="1600" b="1" dirty="0">
                 <a:latin typeface="Times New Roman" panose="02020603050405020304"/>
                 <a:ea typeface="Times New Roman" panose="02020603050405020304"/>
                 <a:cs typeface="Times New Roman" panose="02020603050405020304"/>
@@ -13537,7 +13561,7 @@
               </a:rPr>
               <a:t>   (22ITL121)</a:t>
             </a:r>
-            <a:endParaRPr sz="2000" b="0" i="0" u="none" strike="noStrike" cap="none" dirty="0">
+            <a:endParaRPr sz="1600" b="0" i="0" u="none" strike="noStrike" cap="none" dirty="0">
               <a:latin typeface="Times New Roman" panose="02020603050405020304"/>
               <a:ea typeface="Times New Roman" panose="02020603050405020304"/>
               <a:cs typeface="Times New Roman" panose="02020603050405020304"/>
@@ -13586,6 +13610,150 @@
 </file>
 
 <file path=ppt/slides/slide10.xml><?xml version="1.0" encoding="utf-8"?>
+<p:sld xmlns:a="http://schemas.openxmlformats.org/drawingml/2006/main" xmlns:r="http://schemas.openxmlformats.org/officeDocument/2006/relationships" xmlns:p="http://schemas.openxmlformats.org/presentationml/2006/main">
+  <p:cSld>
+    <p:spTree>
+      <p:nvGrpSpPr>
+        <p:cNvPr id="1" name="">
+          <a:extLst>
+            <a:ext uri="{FF2B5EF4-FFF2-40B4-BE49-F238E27FC236}">
+              <a16:creationId xmlns:a16="http://schemas.microsoft.com/office/drawing/2014/main" id="{E474DF81-28A7-CF1C-F8EC-45299E79D976}"/>
+            </a:ext>
+          </a:extLst>
+        </p:cNvPr>
+        <p:cNvGrpSpPr/>
+        <p:nvPr/>
+      </p:nvGrpSpPr>
+      <p:grpSpPr>
+        <a:xfrm>
+          <a:off x="0" y="0"/>
+          <a:ext cx="0" cy="0"/>
+          <a:chOff x="0" y="0"/>
+          <a:chExt cx="0" cy="0"/>
+        </a:xfrm>
+      </p:grpSpPr>
+      <p:sp>
+        <p:nvSpPr>
+          <p:cNvPr id="2" name="Title 1">
+            <a:extLst>
+              <a:ext uri="{FF2B5EF4-FFF2-40B4-BE49-F238E27FC236}">
+                <a16:creationId xmlns:a16="http://schemas.microsoft.com/office/drawing/2014/main" id="{11BC11BB-906E-4120-AF26-CA283DF29B80}"/>
+              </a:ext>
+            </a:extLst>
+          </p:cNvPr>
+          <p:cNvSpPr>
+            <a:spLocks noGrp="1"/>
+          </p:cNvSpPr>
+          <p:nvPr>
+            <p:ph type="title"/>
+          </p:nvPr>
+        </p:nvSpPr>
+        <p:spPr>
+          <a:xfrm>
+            <a:off x="457200" y="533400"/>
+            <a:ext cx="8229600" cy="643813"/>
+          </a:xfrm>
+        </p:spPr>
+        <p:txBody>
+          <a:bodyPr/>
+          <a:lstStyle/>
+          <a:p>
+            <a:pPr algn="ctr"/>
+            <a:r>
+              <a:rPr lang="en-IN" b="1" dirty="0">
+                <a:solidFill>
+                  <a:srgbClr val="C00000"/>
+                </a:solidFill>
+                <a:latin typeface="Times New Roman" panose="02020603050405020304" pitchFamily="18" charset="0"/>
+                <a:cs typeface="Times New Roman" panose="02020603050405020304" pitchFamily="18" charset="0"/>
+              </a:rPr>
+              <a:t>Project Management</a:t>
+            </a:r>
+          </a:p>
+        </p:txBody>
+      </p:sp>
+      <p:sp>
+        <p:nvSpPr>
+          <p:cNvPr id="4" name="TextBox 3">
+            <a:extLst>
+              <a:ext uri="{FF2B5EF4-FFF2-40B4-BE49-F238E27FC236}">
+                <a16:creationId xmlns:a16="http://schemas.microsoft.com/office/drawing/2014/main" id="{55337AAF-ED40-1909-9D9F-4D397D0D823D}"/>
+              </a:ext>
+            </a:extLst>
+          </p:cNvPr>
+          <p:cNvSpPr txBox="1"/>
+          <p:nvPr/>
+        </p:nvSpPr>
+        <p:spPr>
+          <a:xfrm>
+            <a:off x="1981200" y="1500242"/>
+            <a:ext cx="5867400" cy="369332"/>
+          </a:xfrm>
+          <a:prstGeom prst="rect">
+            <a:avLst/>
+          </a:prstGeom>
+          <a:noFill/>
+        </p:spPr>
+        <p:txBody>
+          <a:bodyPr wrap="square">
+            <a:spAutoFit/>
+          </a:bodyPr>
+          <a:lstStyle/>
+          <a:p>
+            <a:r>
+              <a:rPr lang="en-US" dirty="0"/>
+              <a:t>Manage the project list with employees working with it </a:t>
+            </a:r>
+          </a:p>
+        </p:txBody>
+      </p:sp>
+      <p:pic>
+        <p:nvPicPr>
+          <p:cNvPr id="6" name="Picture 5">
+            <a:extLst>
+              <a:ext uri="{FF2B5EF4-FFF2-40B4-BE49-F238E27FC236}">
+                <a16:creationId xmlns:a16="http://schemas.microsoft.com/office/drawing/2014/main" id="{33B9308D-CE72-24A0-CD97-B807E7A80433}"/>
+              </a:ext>
+            </a:extLst>
+          </p:cNvPr>
+          <p:cNvPicPr>
+            <a:picLocks noChangeAspect="1"/>
+          </p:cNvPicPr>
+          <p:nvPr/>
+        </p:nvPicPr>
+        <p:blipFill>
+          <a:blip r:embed="rId2"/>
+          <a:stretch>
+            <a:fillRect/>
+          </a:stretch>
+        </p:blipFill>
+        <p:spPr>
+          <a:xfrm>
+            <a:off x="2605087" y="2181225"/>
+            <a:ext cx="4619625" cy="4143375"/>
+          </a:xfrm>
+          <a:prstGeom prst="rect">
+            <a:avLst/>
+          </a:prstGeom>
+        </p:spPr>
+      </p:pic>
+    </p:spTree>
+    <p:extLst>
+      <p:ext uri="{BB962C8B-B14F-4D97-AF65-F5344CB8AC3E}">
+        <p14:creationId xmlns:p14="http://schemas.microsoft.com/office/powerpoint/2010/main" val="2034760454"/>
+      </p:ext>
+    </p:extLst>
+  </p:cSld>
+  <p:clrMapOvr>
+    <a:masterClrMapping/>
+  </p:clrMapOvr>
+  <p:transition>
+    <p:fade/>
+  </p:transition>
+</p:sld>
+</file>
+
+<file path=ppt/slides/slide11.xml><?xml version="1.0" encoding="utf-8"?>
 <p:sld xmlns:a="http://schemas.openxmlformats.org/drawingml/2006/main" xmlns:r="http://schemas.openxmlformats.org/officeDocument/2006/relationships" xmlns:p="http://schemas.openxmlformats.org/presentationml/2006/main">
   <p:cSld>
     <p:spTree>
@@ -14021,7 +14189,7 @@
 </p:sld>
 </file>
 
-<file path=ppt/slides/slide11.xml><?xml version="1.0" encoding="utf-8"?>
+<file path=ppt/slides/slide12.xml><?xml version="1.0" encoding="utf-8"?>
 <p:sld xmlns:a="http://schemas.openxmlformats.org/drawingml/2006/main" xmlns:r="http://schemas.openxmlformats.org/officeDocument/2006/relationships" xmlns:p="http://schemas.openxmlformats.org/presentationml/2006/main">
   <p:cSld>
     <p:spTree>
@@ -14130,7 +14298,7 @@
 </p:sld>
 </file>
 
-<file path=ppt/slides/slide12.xml><?xml version="1.0" encoding="utf-8"?>
+<file path=ppt/slides/slide13.xml><?xml version="1.0" encoding="utf-8"?>
 <p:sld xmlns:a="http://schemas.openxmlformats.org/drawingml/2006/main" xmlns:r="http://schemas.openxmlformats.org/officeDocument/2006/relationships" xmlns:p="http://schemas.openxmlformats.org/presentationml/2006/main">
   <p:cSld>
     <p:spTree>
@@ -14153,6 +14321,36 @@
           <a:chExt cx="0" cy="0"/>
         </a:xfrm>
       </p:grpSpPr>
+      <p:pic>
+        <p:nvPicPr>
+          <p:cNvPr id="3" name="Picture 2">
+            <a:extLst>
+              <a:ext uri="{FF2B5EF4-FFF2-40B4-BE49-F238E27FC236}">
+                <a16:creationId xmlns:a16="http://schemas.microsoft.com/office/drawing/2014/main" id="{43AA6487-2275-C560-2561-08B8EF352A78}"/>
+              </a:ext>
+            </a:extLst>
+          </p:cNvPr>
+          <p:cNvPicPr>
+            <a:picLocks noChangeAspect="1"/>
+          </p:cNvPicPr>
+          <p:nvPr/>
+        </p:nvPicPr>
+        <p:blipFill>
+          <a:blip r:embed="rId2"/>
+          <a:stretch>
+            <a:fillRect/>
+          </a:stretch>
+        </p:blipFill>
+        <p:spPr>
+          <a:xfrm>
+            <a:off x="990600" y="-4916"/>
+            <a:ext cx="7718182" cy="6858000"/>
+          </a:xfrm>
+          <a:prstGeom prst="rect">
+            <a:avLst/>
+          </a:prstGeom>
+        </p:spPr>
+      </p:pic>
     </p:spTree>
     <p:extLst>
       <p:ext uri="{BB962C8B-B14F-4D97-AF65-F5344CB8AC3E}">
@@ -14169,7 +14367,7 @@
 </p:sld>
 </file>
 
-<file path=ppt/slides/slide13.xml><?xml version="1.0" encoding="utf-8"?>
+<file path=ppt/slides/slide14.xml><?xml version="1.0" encoding="utf-8"?>
 <p:sld xmlns:a="http://schemas.openxmlformats.org/drawingml/2006/main" xmlns:r="http://schemas.openxmlformats.org/officeDocument/2006/relationships" xmlns:p="http://schemas.openxmlformats.org/presentationml/2006/main">
   <p:cSld>
     <p:spTree>
@@ -14192,6 +14390,36 @@
           <a:chExt cx="0" cy="0"/>
         </a:xfrm>
       </p:grpSpPr>
+      <p:pic>
+        <p:nvPicPr>
+          <p:cNvPr id="5" name="Picture 4">
+            <a:extLst>
+              <a:ext uri="{FF2B5EF4-FFF2-40B4-BE49-F238E27FC236}">
+                <a16:creationId xmlns:a16="http://schemas.microsoft.com/office/drawing/2014/main" id="{52400FD0-A67E-6B94-610A-E210BEA6B3EF}"/>
+              </a:ext>
+            </a:extLst>
+          </p:cNvPr>
+          <p:cNvPicPr>
+            <a:picLocks noChangeAspect="1"/>
+          </p:cNvPicPr>
+          <p:nvPr/>
+        </p:nvPicPr>
+        <p:blipFill>
+          <a:blip r:embed="rId2"/>
+          <a:stretch>
+            <a:fillRect/>
+          </a:stretch>
+        </p:blipFill>
+        <p:spPr>
+          <a:xfrm>
+            <a:off x="1295400" y="0"/>
+            <a:ext cx="6935844" cy="6858000"/>
+          </a:xfrm>
+          <a:prstGeom prst="rect">
+            <a:avLst/>
+          </a:prstGeom>
+        </p:spPr>
+      </p:pic>
     </p:spTree>
     <p:extLst>
       <p:ext uri="{BB962C8B-B14F-4D97-AF65-F5344CB8AC3E}">
@@ -14208,7 +14436,7 @@
 </p:sld>
 </file>
 
-<file path=ppt/slides/slide14.xml><?xml version="1.0" encoding="utf-8"?>
+<file path=ppt/slides/slide15.xml><?xml version="1.0" encoding="utf-8"?>
 <p:sld xmlns:a="http://schemas.openxmlformats.org/drawingml/2006/main" xmlns:r="http://schemas.openxmlformats.org/officeDocument/2006/relationships" xmlns:p="http://schemas.openxmlformats.org/presentationml/2006/main">
   <p:cSld>
     <p:spTree>
@@ -14231,6 +14459,36 @@
           <a:chExt cx="0" cy="0"/>
         </a:xfrm>
       </p:grpSpPr>
+      <p:pic>
+        <p:nvPicPr>
+          <p:cNvPr id="3" name="Picture 2">
+            <a:extLst>
+              <a:ext uri="{FF2B5EF4-FFF2-40B4-BE49-F238E27FC236}">
+                <a16:creationId xmlns:a16="http://schemas.microsoft.com/office/drawing/2014/main" id="{16566908-915F-5E2D-5C0E-6C4416E8FBCF}"/>
+              </a:ext>
+            </a:extLst>
+          </p:cNvPr>
+          <p:cNvPicPr>
+            <a:picLocks noChangeAspect="1"/>
+          </p:cNvPicPr>
+          <p:nvPr/>
+        </p:nvPicPr>
+        <p:blipFill>
+          <a:blip r:embed="rId2"/>
+          <a:stretch>
+            <a:fillRect/>
+          </a:stretch>
+        </p:blipFill>
+        <p:spPr>
+          <a:xfrm>
+            <a:off x="1447800" y="0"/>
+            <a:ext cx="6966570" cy="6858000"/>
+          </a:xfrm>
+          <a:prstGeom prst="rect">
+            <a:avLst/>
+          </a:prstGeom>
+        </p:spPr>
+      </p:pic>
     </p:spTree>
     <p:extLst>
       <p:ext uri="{BB962C8B-B14F-4D97-AF65-F5344CB8AC3E}">
@@ -14247,7 +14505,7 @@
 </p:sld>
 </file>
 
-<file path=ppt/slides/slide15.xml><?xml version="1.0" encoding="utf-8"?>
+<file path=ppt/slides/slide16.xml><?xml version="1.0" encoding="utf-8"?>
 <p:sld xmlns:a="http://schemas.openxmlformats.org/drawingml/2006/main" xmlns:r="http://schemas.openxmlformats.org/officeDocument/2006/relationships" xmlns:p="http://schemas.openxmlformats.org/presentationml/2006/main">
   <p:cSld>
     <p:spTree>
@@ -14270,6 +14528,36 @@
           <a:chExt cx="0" cy="0"/>
         </a:xfrm>
       </p:grpSpPr>
+      <p:pic>
+        <p:nvPicPr>
+          <p:cNvPr id="3" name="Picture 2">
+            <a:extLst>
+              <a:ext uri="{FF2B5EF4-FFF2-40B4-BE49-F238E27FC236}">
+                <a16:creationId xmlns:a16="http://schemas.microsoft.com/office/drawing/2014/main" id="{5F0C2917-0861-B470-7806-AFBB1F98CC15}"/>
+              </a:ext>
+            </a:extLst>
+          </p:cNvPr>
+          <p:cNvPicPr>
+            <a:picLocks noChangeAspect="1"/>
+          </p:cNvPicPr>
+          <p:nvPr/>
+        </p:nvPicPr>
+        <p:blipFill>
+          <a:blip r:embed="rId2"/>
+          <a:stretch>
+            <a:fillRect/>
+          </a:stretch>
+        </p:blipFill>
+        <p:spPr>
+          <a:xfrm>
+            <a:off x="1143000" y="573682"/>
+            <a:ext cx="7830154" cy="5984722"/>
+          </a:xfrm>
+          <a:prstGeom prst="rect">
+            <a:avLst/>
+          </a:prstGeom>
+        </p:spPr>
+      </p:pic>
     </p:spTree>
     <p:extLst>
       <p:ext uri="{BB962C8B-B14F-4D97-AF65-F5344CB8AC3E}">
@@ -14286,7 +14574,7 @@
 </p:sld>
 </file>
 
-<file path=ppt/slides/slide16.xml><?xml version="1.0" encoding="utf-8"?>
+<file path=ppt/slides/slide17.xml><?xml version="1.0" encoding="utf-8"?>
 <p:sld xmlns:a="http://schemas.openxmlformats.org/drawingml/2006/main" xmlns:r="http://schemas.openxmlformats.org/officeDocument/2006/relationships" xmlns:p="http://schemas.openxmlformats.org/presentationml/2006/main">
   <p:cSld>
     <p:spTree>
@@ -14586,38 +14874,8 @@
         </p:blipFill>
         <p:spPr>
           <a:xfrm>
-            <a:off x="1066800" y="1138085"/>
-            <a:ext cx="4391865" cy="2367116"/>
-          </a:xfrm>
-          <a:prstGeom prst="rect">
-            <a:avLst/>
-          </a:prstGeom>
-        </p:spPr>
-      </p:pic>
-      <p:pic>
-        <p:nvPicPr>
-          <p:cNvPr id="6" name="Picture 5">
-            <a:extLst>
-              <a:ext uri="{FF2B5EF4-FFF2-40B4-BE49-F238E27FC236}">
-                <a16:creationId xmlns:a16="http://schemas.microsoft.com/office/drawing/2014/main" id="{58B9FEC2-FD00-7D7E-C3C6-46E50B35C8AA}"/>
-              </a:ext>
-            </a:extLst>
-          </p:cNvPr>
-          <p:cNvPicPr>
-            <a:picLocks noChangeAspect="1"/>
-          </p:cNvPicPr>
-          <p:nvPr/>
-        </p:nvPicPr>
-        <p:blipFill>
-          <a:blip r:embed="rId3"/>
-          <a:stretch>
-            <a:fillRect/>
-          </a:stretch>
-        </p:blipFill>
-        <p:spPr>
-          <a:xfrm>
-            <a:off x="5796929" y="2895600"/>
-            <a:ext cx="3132467" cy="3604359"/>
+            <a:off x="1134186" y="1600200"/>
+            <a:ext cx="7360819" cy="3967315"/>
           </a:xfrm>
           <a:prstGeom prst="rect">
             <a:avLst/>
@@ -14635,7 +14893,7 @@
 </p:sld>
 </file>
 
-<file path=ppt/slides/slide17.xml><?xml version="1.0" encoding="utf-8"?>
+<file path=ppt/slides/slide18.xml><?xml version="1.0" encoding="utf-8"?>
 <p:sld xmlns:a="http://schemas.openxmlformats.org/drawingml/2006/main" xmlns:r="http://schemas.openxmlformats.org/officeDocument/2006/relationships" xmlns:p="http://schemas.openxmlformats.org/presentationml/2006/main">
   <p:cSld>
     <p:spTree>
@@ -14725,10 +14983,10 @@
       </p:sp>
       <p:pic>
         <p:nvPicPr>
-          <p:cNvPr id="4" name="Picture 3">
+          <p:cNvPr id="3" name="Picture 2">
             <a:extLst>
               <a:ext uri="{FF2B5EF4-FFF2-40B4-BE49-F238E27FC236}">
-                <a16:creationId xmlns:a16="http://schemas.microsoft.com/office/drawing/2014/main" id="{A29AF152-4565-0B9E-6698-A3C675AD2860}"/>
+                <a16:creationId xmlns:a16="http://schemas.microsoft.com/office/drawing/2014/main" id="{F889E9D3-D850-A877-7FF3-5FA857ADD284}"/>
               </a:ext>
             </a:extLst>
           </p:cNvPr>
@@ -14745,8 +15003,8 @@
         </p:blipFill>
         <p:spPr>
           <a:xfrm>
-            <a:off x="914400" y="838200"/>
-            <a:ext cx="4467537" cy="3015009"/>
+            <a:off x="609600" y="228599"/>
+            <a:ext cx="6705600" cy="3067669"/>
           </a:xfrm>
           <a:prstGeom prst="rect">
             <a:avLst/>
@@ -14755,10 +15013,10 @@
       </p:pic>
       <p:pic>
         <p:nvPicPr>
-          <p:cNvPr id="6" name="Picture 5">
+          <p:cNvPr id="5" name="Picture 4">
             <a:extLst>
               <a:ext uri="{FF2B5EF4-FFF2-40B4-BE49-F238E27FC236}">
-                <a16:creationId xmlns:a16="http://schemas.microsoft.com/office/drawing/2014/main" id="{C6403EB0-D7E5-6CF0-C759-5C376BC2A2C9}"/>
+                <a16:creationId xmlns:a16="http://schemas.microsoft.com/office/drawing/2014/main" id="{9253D040-8464-89AA-591E-DA2B8AAD4777}"/>
               </a:ext>
             </a:extLst>
           </p:cNvPr>
@@ -14775,8 +15033,8 @@
         </p:blipFill>
         <p:spPr>
           <a:xfrm>
-            <a:off x="3581400" y="3895420"/>
-            <a:ext cx="5182451" cy="2826055"/>
+            <a:off x="1752601" y="3336608"/>
+            <a:ext cx="7391400" cy="3485646"/>
           </a:xfrm>
           <a:prstGeom prst="rect">
             <a:avLst/>
@@ -14799,7 +15057,7 @@
 </p:sld>
 </file>
 
-<file path=ppt/slides/slide18.xml><?xml version="1.0" encoding="utf-8"?>
+<file path=ppt/slides/slide19.xml><?xml version="1.0" encoding="utf-8"?>
 <p:sld xmlns:a="http://schemas.openxmlformats.org/drawingml/2006/main" xmlns:r="http://schemas.openxmlformats.org/officeDocument/2006/relationships" xmlns:p="http://schemas.openxmlformats.org/presentationml/2006/main">
   <p:cSld>
     <p:spTree>
@@ -14889,10 +15147,10 @@
       </p:sp>
       <p:pic>
         <p:nvPicPr>
-          <p:cNvPr id="4" name="Picture 3">
+          <p:cNvPr id="3" name="Picture 2">
             <a:extLst>
               <a:ext uri="{FF2B5EF4-FFF2-40B4-BE49-F238E27FC236}">
-                <a16:creationId xmlns:a16="http://schemas.microsoft.com/office/drawing/2014/main" id="{62DFB9C5-35BD-A29B-2D4B-04EB5C16A6D8}"/>
+                <a16:creationId xmlns:a16="http://schemas.microsoft.com/office/drawing/2014/main" id="{BEA2E548-0CCE-9811-B198-25C2636019A3}"/>
               </a:ext>
             </a:extLst>
           </p:cNvPr>
@@ -14909,8 +15167,8 @@
         </p:blipFill>
         <p:spPr>
           <a:xfrm>
-            <a:off x="1295400" y="838200"/>
-            <a:ext cx="3753374" cy="2229161"/>
+            <a:off x="914400" y="575310"/>
+            <a:ext cx="8050157" cy="3615690"/>
           </a:xfrm>
           <a:prstGeom prst="rect">
             <a:avLst/>
@@ -14919,10 +15177,10 @@
       </p:pic>
       <p:pic>
         <p:nvPicPr>
-          <p:cNvPr id="6" name="Picture 5">
+          <p:cNvPr id="5" name="Picture 4">
             <a:extLst>
               <a:ext uri="{FF2B5EF4-FFF2-40B4-BE49-F238E27FC236}">
-                <a16:creationId xmlns:a16="http://schemas.microsoft.com/office/drawing/2014/main" id="{22AEEF84-A041-5812-7658-50E52D6542DA}"/>
+                <a16:creationId xmlns:a16="http://schemas.microsoft.com/office/drawing/2014/main" id="{D4BE1186-19DB-6114-1061-6013B98F50AA}"/>
               </a:ext>
             </a:extLst>
           </p:cNvPr>
@@ -14939,38 +15197,8 @@
         </p:blipFill>
         <p:spPr>
           <a:xfrm>
-            <a:off x="2676718" y="3429000"/>
-            <a:ext cx="4744112" cy="1057423"/>
-          </a:xfrm>
-          <a:prstGeom prst="rect">
-            <a:avLst/>
-          </a:prstGeom>
-        </p:spPr>
-      </p:pic>
-      <p:pic>
-        <p:nvPicPr>
-          <p:cNvPr id="8" name="Picture 7">
-            <a:extLst>
-              <a:ext uri="{FF2B5EF4-FFF2-40B4-BE49-F238E27FC236}">
-                <a16:creationId xmlns:a16="http://schemas.microsoft.com/office/drawing/2014/main" id="{BF7EEEC2-69AF-98B0-B7F4-B55071DF8E33}"/>
-              </a:ext>
-            </a:extLst>
-          </p:cNvPr>
-          <p:cNvPicPr>
-            <a:picLocks noChangeAspect="1"/>
-          </p:cNvPicPr>
-          <p:nvPr/>
-        </p:nvPicPr>
-        <p:blipFill>
-          <a:blip r:embed="rId4"/>
-          <a:stretch>
-            <a:fillRect/>
-          </a:stretch>
-        </p:blipFill>
-        <p:spPr>
-          <a:xfrm>
-            <a:off x="2676718" y="4724400"/>
-            <a:ext cx="4410691" cy="581106"/>
+            <a:off x="914400" y="4193458"/>
+            <a:ext cx="8050156" cy="1904172"/>
           </a:xfrm>
           <a:prstGeom prst="rect">
             <a:avLst/>
@@ -14981,269 +15209,6 @@
     <p:extLst>
       <p:ext uri="{BB962C8B-B14F-4D97-AF65-F5344CB8AC3E}">
         <p14:creationId xmlns:p14="http://schemas.microsoft.com/office/powerpoint/2010/main" val="2731989575"/>
-      </p:ext>
-    </p:extLst>
-  </p:cSld>
-  <p:clrMapOvr>
-    <a:masterClrMapping/>
-  </p:clrMapOvr>
-  <p:transition>
-    <p:fade/>
-  </p:transition>
-</p:sld>
-</file>
-
-<file path=ppt/slides/slide19.xml><?xml version="1.0" encoding="utf-8"?>
-<p:sld xmlns:a="http://schemas.openxmlformats.org/drawingml/2006/main" xmlns:r="http://schemas.openxmlformats.org/officeDocument/2006/relationships" xmlns:p="http://schemas.openxmlformats.org/presentationml/2006/main">
-  <p:cSld>
-    <p:spTree>
-      <p:nvGrpSpPr>
-        <p:cNvPr id="1" name=""/>
-        <p:cNvGrpSpPr/>
-        <p:nvPr/>
-      </p:nvGrpSpPr>
-      <p:grpSpPr>
-        <a:xfrm>
-          <a:off x="0" y="0"/>
-          <a:ext cx="0" cy="0"/>
-          <a:chOff x="0" y="0"/>
-          <a:chExt cx="0" cy="0"/>
-        </a:xfrm>
-      </p:grpSpPr>
-      <p:sp>
-        <p:nvSpPr>
-          <p:cNvPr id="2" name="Date Placeholder 1">
-            <a:extLst>
-              <a:ext uri="{FF2B5EF4-FFF2-40B4-BE49-F238E27FC236}">
-                <a16:creationId xmlns:a16="http://schemas.microsoft.com/office/drawing/2014/main" id="{544D1B20-7A25-B6C0-ABE1-79F51BC6DAFB}"/>
-              </a:ext>
-            </a:extLst>
-          </p:cNvPr>
-          <p:cNvSpPr>
-            <a:spLocks noGrp="1"/>
-          </p:cNvSpPr>
-          <p:nvPr>
-            <p:ph type="dt" sz="half" idx="2"/>
-          </p:nvPr>
-        </p:nvSpPr>
-        <p:spPr/>
-        <p:txBody>
-          <a:bodyPr/>
-          <a:lstStyle/>
-          <a:p>
-            <a:pPr marL="0" marR="0" lvl="0" indent="0" algn="l" defTabSz="914400" rtl="0" eaLnBrk="1" fontAlgn="auto" latinLnBrk="0" hangingPunct="1">
-              <a:lnSpc>
-                <a:spcPct val="100000"/>
-              </a:lnSpc>
-              <a:spcBef>
-                <a:spcPts val="0"/>
-              </a:spcBef>
-              <a:spcAft>
-                <a:spcPts val="0"/>
-              </a:spcAft>
-              <a:buClrTx/>
-              <a:buSzTx/>
-              <a:buFontTx/>
-              <a:buNone/>
-              <a:defRPr/>
-            </a:pPr>
-            <a:r>
-              <a:rPr kumimoji="0" lang="en-US" sz="1000" b="0" i="0" u="none" strike="noStrike" kern="1200" cap="none" spc="0" normalizeH="0" baseline="0" noProof="0">
-                <a:ln>
-                  <a:noFill/>
-                </a:ln>
-                <a:solidFill>
-                  <a:schemeClr val="tx1"/>
-                </a:solidFill>
-                <a:effectLst/>
-                <a:uLnTx/>
-                <a:uFillTx/>
-                <a:latin typeface="+mn-lt"/>
-                <a:ea typeface="+mn-ea"/>
-                <a:cs typeface="+mn-cs"/>
-              </a:rPr>
-              <a:t>3-Sep-24</a:t>
-            </a:r>
-            <a:endParaRPr kumimoji="0" lang="en-US" sz="1000" b="0" i="0" u="none" strike="noStrike" kern="1200" cap="none" spc="0" normalizeH="0" baseline="0" noProof="0" dirty="0">
-              <a:ln>
-                <a:noFill/>
-              </a:ln>
-              <a:solidFill>
-                <a:schemeClr val="tx1"/>
-              </a:solidFill>
-              <a:effectLst/>
-              <a:uLnTx/>
-              <a:uFillTx/>
-              <a:latin typeface="+mn-lt"/>
-              <a:ea typeface="+mn-ea"/>
-              <a:cs typeface="+mn-cs"/>
-            </a:endParaRPr>
-          </a:p>
-        </p:txBody>
-      </p:sp>
-      <p:sp>
-        <p:nvSpPr>
-          <p:cNvPr id="4" name="TextBox 3">
-            <a:extLst>
-              <a:ext uri="{FF2B5EF4-FFF2-40B4-BE49-F238E27FC236}">
-                <a16:creationId xmlns:a16="http://schemas.microsoft.com/office/drawing/2014/main" id="{A15991EA-E975-24D4-DED2-9081C4AACFBF}"/>
-              </a:ext>
-            </a:extLst>
-          </p:cNvPr>
-          <p:cNvSpPr txBox="1"/>
-          <p:nvPr/>
-        </p:nvSpPr>
-        <p:spPr>
-          <a:xfrm>
-            <a:off x="1552074" y="1905000"/>
-            <a:ext cx="7543800" cy="3416320"/>
-          </a:xfrm>
-          <a:prstGeom prst="rect">
-            <a:avLst/>
-          </a:prstGeom>
-          <a:noFill/>
-        </p:spPr>
-        <p:txBody>
-          <a:bodyPr wrap="square">
-            <a:spAutoFit/>
-          </a:bodyPr>
-          <a:lstStyle/>
-          <a:p>
-            <a:r>
-              <a:rPr lang="en-US" dirty="0"/>
-              <a:t>Project git link:</a:t>
-            </a:r>
-          </a:p>
-          <a:p>
-            <a:r>
-              <a:rPr lang="en-US" dirty="0">
-                <a:hlinkClick r:id="rId2"/>
-              </a:rPr>
-              <a:t>https://github.com/Immanuvel1207/employee-Management-System</a:t>
-            </a:r>
-            <a:endParaRPr lang="en-US" dirty="0"/>
-          </a:p>
-          <a:p>
-            <a:endParaRPr lang="en-US" dirty="0"/>
-          </a:p>
-          <a:p>
-            <a:r>
-              <a:rPr lang="en-US" dirty="0"/>
-              <a:t>EMS Host-link: </a:t>
-            </a:r>
-          </a:p>
-          <a:p>
-            <a:endParaRPr lang="en-US" dirty="0"/>
-          </a:p>
-          <a:p>
-            <a:r>
-              <a:rPr lang="en-US" dirty="0"/>
-              <a:t>Node.js Documentation: </a:t>
-            </a:r>
-            <a:r>
-              <a:rPr lang="en-US" dirty="0">
-                <a:hlinkClick r:id="rId3"/>
-              </a:rPr>
-              <a:t>https://nodejs.org/en/docs</a:t>
-            </a:r>
-            <a:endParaRPr lang="en-US" dirty="0"/>
-          </a:p>
-          <a:p>
-            <a:endParaRPr lang="en-US" dirty="0"/>
-          </a:p>
-          <a:p>
-            <a:r>
-              <a:rPr lang="en-US" dirty="0"/>
-              <a:t>React Documentation: </a:t>
-            </a:r>
-            <a:r>
-              <a:rPr lang="en-US" dirty="0">
-                <a:hlinkClick r:id="rId4"/>
-              </a:rPr>
-              <a:t>https://reactjs.org/docs/getting-started.html</a:t>
-            </a:r>
-            <a:endParaRPr lang="en-US" dirty="0"/>
-          </a:p>
-          <a:p>
-            <a:endParaRPr lang="en-US" dirty="0"/>
-          </a:p>
-          <a:p>
-            <a:r>
-              <a:rPr lang="en-US" dirty="0"/>
-              <a:t>MongoDB Documentation: </a:t>
-            </a:r>
-            <a:r>
-              <a:rPr lang="en-US" dirty="0">
-                <a:hlinkClick r:id="rId5"/>
-              </a:rPr>
-              <a:t>https://docs.mongodb.com/</a:t>
-            </a:r>
-            <a:endParaRPr lang="en-US" dirty="0"/>
-          </a:p>
-          <a:p>
-            <a:endParaRPr lang="en-US" dirty="0"/>
-          </a:p>
-          <a:p>
-            <a:r>
-              <a:rPr lang="en-US" dirty="0"/>
-              <a:t>Twilio API Documentation: </a:t>
-            </a:r>
-            <a:r>
-              <a:rPr lang="en-US" dirty="0">
-                <a:hlinkClick r:id="rId6"/>
-              </a:rPr>
-              <a:t>https://www.twilio.com/docs</a:t>
-            </a:r>
-            <a:endParaRPr lang="en-US" dirty="0"/>
-          </a:p>
-        </p:txBody>
-      </p:sp>
-      <p:sp>
-        <p:nvSpPr>
-          <p:cNvPr id="14" name="TextBox 13">
-            <a:extLst>
-              <a:ext uri="{FF2B5EF4-FFF2-40B4-BE49-F238E27FC236}">
-                <a16:creationId xmlns:a16="http://schemas.microsoft.com/office/drawing/2014/main" id="{4F772384-FE66-B230-E74E-CEA7083D9DA6}"/>
-              </a:ext>
-            </a:extLst>
-          </p:cNvPr>
-          <p:cNvSpPr txBox="1"/>
-          <p:nvPr/>
-        </p:nvSpPr>
-        <p:spPr>
-          <a:xfrm>
-            <a:off x="3962400" y="1123890"/>
-            <a:ext cx="1981200" cy="400110"/>
-          </a:xfrm>
-          <a:prstGeom prst="rect">
-            <a:avLst/>
-          </a:prstGeom>
-          <a:noFill/>
-        </p:spPr>
-        <p:txBody>
-          <a:bodyPr wrap="square">
-            <a:spAutoFit/>
-          </a:bodyPr>
-          <a:lstStyle/>
-          <a:p>
-            <a:r>
-              <a:rPr lang="en-IN" sz="2000" b="1" dirty="0">
-                <a:solidFill>
-                  <a:srgbClr val="C00000"/>
-                </a:solidFill>
-                <a:latin typeface="Times New Roman" panose="02020603050405020304" pitchFamily="18" charset="0"/>
-                <a:cs typeface="Times New Roman" panose="02020603050405020304" pitchFamily="18" charset="0"/>
-              </a:rPr>
-              <a:t>REFERENCES</a:t>
-            </a:r>
-            <a:endParaRPr lang="en-US" sz="2000" dirty="0"/>
-          </a:p>
-        </p:txBody>
-      </p:sp>
-    </p:spTree>
-    <p:extLst>
-      <p:ext uri="{BB962C8B-B14F-4D97-AF65-F5344CB8AC3E}">
-        <p14:creationId xmlns:p14="http://schemas.microsoft.com/office/powerpoint/2010/main" val="3483052740"/>
       </p:ext>
     </p:extLst>
   </p:cSld>
@@ -15648,7 +15613,7 @@
   <p:cSld>
     <p:spTree>
       <p:nvGrpSpPr>
-        <p:cNvPr id="1" name="Shape 254"/>
+        <p:cNvPr id="1" name=""/>
         <p:cNvGrpSpPr/>
         <p:nvPr/>
       </p:nvGrpSpPr>
@@ -15662,67 +15627,1875 @@
       </p:grpSpPr>
       <p:sp>
         <p:nvSpPr>
-          <p:cNvPr id="255" name="Google Shape;255;p45"/>
-          <p:cNvSpPr txBox="1">
+          <p:cNvPr id="2" name="Date Placeholder 1">
+            <a:extLst>
+              <a:ext uri="{FF2B5EF4-FFF2-40B4-BE49-F238E27FC236}">
+                <a16:creationId xmlns:a16="http://schemas.microsoft.com/office/drawing/2014/main" id="{74585404-C800-B39F-0FA4-60B32D62842B}"/>
+              </a:ext>
+            </a:extLst>
+          </p:cNvPr>
+          <p:cNvSpPr>
             <a:spLocks noGrp="1"/>
           </p:cNvSpPr>
           <p:nvPr>
-            <p:ph type="title"/>
+            <p:ph type="dt" sz="half" idx="2"/>
           </p:nvPr>
         </p:nvSpPr>
-        <p:spPr>
-          <a:xfrm>
-            <a:off x="685800" y="2209800"/>
-            <a:ext cx="8229600" cy="1417955"/>
-          </a:xfrm>
-          <a:prstGeom prst="rect">
-            <a:avLst/>
-          </a:prstGeom>
-          <a:noFill/>
-          <a:ln>
-            <a:noFill/>
-          </a:ln>
-        </p:spPr>
+        <p:spPr/>
         <p:txBody>
-          <a:bodyPr spcFirstLastPara="1" wrap="square" lIns="0" tIns="45700" rIns="0" bIns="0" anchor="b" anchorCtr="0">
-            <a:noAutofit/>
-          </a:bodyPr>
+          <a:bodyPr/>
           <a:lstStyle/>
           <a:p>
-            <a:pPr marL="0" lvl="0" indent="0" algn="ctr" rtl="0">
+            <a:pPr marL="0" marR="0" lvl="0" indent="0" algn="l" defTabSz="914400" rtl="0" eaLnBrk="1" fontAlgn="auto" latinLnBrk="0" hangingPunct="1">
+              <a:lnSpc>
+                <a:spcPct val="100000"/>
+              </a:lnSpc>
               <a:spcBef>
                 <a:spcPts val="0"/>
               </a:spcBef>
               <a:spcAft>
                 <a:spcPts val="0"/>
               </a:spcAft>
-              <a:buNone/>
+              <a:buClrTx/>
+              <a:buSzTx/>
+              <a:buFontTx/>
+              <a:buNone/>
+              <a:defRPr/>
             </a:pPr>
             <a:r>
-              <a:rPr lang="en-US" sz="5400" b="1" i="1" dirty="0">
-                <a:solidFill>
-                  <a:srgbClr val="C00000"/>
-                </a:solidFill>
-                <a:latin typeface="Times New Roman" panose="02020603050405020304" pitchFamily="18" charset="0"/>
-                <a:ea typeface="Algerian" panose="04020705040A02060702"/>
-                <a:cs typeface="Times New Roman" panose="02020603050405020304" pitchFamily="18" charset="0"/>
-                <a:sym typeface="Algerian" panose="04020705040A02060702"/>
+              <a:rPr kumimoji="0" lang="en-US" sz="1000" b="0" i="0" u="none" strike="noStrike" kern="1200" cap="none" spc="0" normalizeH="0" baseline="0" noProof="0">
+                <a:ln>
+                  <a:noFill/>
+                </a:ln>
+                <a:solidFill>
+                  <a:schemeClr val="tx1"/>
+                </a:solidFill>
+                <a:effectLst/>
+                <a:uLnTx/>
+                <a:uFillTx/>
+                <a:latin typeface="+mn-lt"/>
+                <a:ea typeface="+mn-ea"/>
+                <a:cs typeface="+mn-cs"/>
               </a:rPr>
-              <a:t>THANK YOU</a:t>
-            </a:r>
-            <a:endParaRPr sz="5400" b="1" i="1" dirty="0">
+              <a:t>3-Sep-24</a:t>
+            </a:r>
+            <a:endParaRPr kumimoji="0" lang="en-US" sz="1000" b="0" i="0" u="none" strike="noStrike" kern="1200" cap="none" spc="0" normalizeH="0" baseline="0" noProof="0" dirty="0">
+              <a:ln>
+                <a:noFill/>
+              </a:ln>
               <a:solidFill>
-                <a:schemeClr val="dk1"/>
+                <a:schemeClr val="tx1"/>
               </a:solidFill>
-              <a:latin typeface="Times New Roman" panose="02020603050405020304" pitchFamily="18" charset="0"/>
-              <a:ea typeface="Algerian" panose="04020705040A02060702"/>
-              <a:cs typeface="Times New Roman" panose="02020603050405020304" pitchFamily="18" charset="0"/>
-              <a:sym typeface="Algerian" panose="04020705040A02060702"/>
+              <a:effectLst/>
+              <a:uLnTx/>
+              <a:uFillTx/>
+              <a:latin typeface="+mn-lt"/>
+              <a:ea typeface="+mn-ea"/>
+              <a:cs typeface="+mn-cs"/>
             </a:endParaRPr>
           </a:p>
         </p:txBody>
       </p:sp>
+      <p:pic>
+        <p:nvPicPr>
+          <p:cNvPr id="3" name="Picture 2">
+            <a:extLst>
+              <a:ext uri="{FF2B5EF4-FFF2-40B4-BE49-F238E27FC236}">
+                <a16:creationId xmlns:a16="http://schemas.microsoft.com/office/drawing/2014/main" id="{E2822EF9-5AEB-C0D7-E517-6E65593D1651}"/>
+              </a:ext>
+            </a:extLst>
+          </p:cNvPr>
+          <p:cNvPicPr>
+            <a:picLocks noChangeAspect="1"/>
+          </p:cNvPicPr>
+          <p:nvPr/>
+        </p:nvPicPr>
+        <p:blipFill>
+          <a:blip r:embed="rId2"/>
+          <a:stretch>
+            <a:fillRect/>
+          </a:stretch>
+        </p:blipFill>
+        <p:spPr>
+          <a:xfrm>
+            <a:off x="3124200" y="76200"/>
+            <a:ext cx="5943600" cy="3197225"/>
+          </a:xfrm>
+          <a:prstGeom prst="rect">
+            <a:avLst/>
+          </a:prstGeom>
+        </p:spPr>
+      </p:pic>
+      <p:pic>
+        <p:nvPicPr>
+          <p:cNvPr id="4" name="Picture 3">
+            <a:extLst>
+              <a:ext uri="{FF2B5EF4-FFF2-40B4-BE49-F238E27FC236}">
+                <a16:creationId xmlns:a16="http://schemas.microsoft.com/office/drawing/2014/main" id="{0322FB62-BE54-1CC7-DA4F-EC013F0C617F}"/>
+              </a:ext>
+            </a:extLst>
+          </p:cNvPr>
+          <p:cNvPicPr>
+            <a:picLocks noChangeAspect="1"/>
+          </p:cNvPicPr>
+          <p:nvPr/>
+        </p:nvPicPr>
+        <p:blipFill>
+          <a:blip r:embed="rId3"/>
+          <a:stretch>
+            <a:fillRect/>
+          </a:stretch>
+        </p:blipFill>
+        <p:spPr>
+          <a:xfrm>
+            <a:off x="685799" y="3428999"/>
+            <a:ext cx="7019947" cy="3292475"/>
+          </a:xfrm>
+          <a:prstGeom prst="rect">
+            <a:avLst/>
+          </a:prstGeom>
+        </p:spPr>
+      </p:pic>
     </p:spTree>
+    <p:extLst>
+      <p:ext uri="{BB962C8B-B14F-4D97-AF65-F5344CB8AC3E}">
+        <p14:creationId xmlns:p14="http://schemas.microsoft.com/office/powerpoint/2010/main" val="3110078411"/>
+      </p:ext>
+    </p:extLst>
+  </p:cSld>
+  <p:clrMapOvr>
+    <a:masterClrMapping/>
+  </p:clrMapOvr>
+  <p:transition>
+    <p:fade/>
+  </p:transition>
+</p:sld>
+</file>
+
+<file path=ppt/slides/slide21.xml><?xml version="1.0" encoding="utf-8"?>
+<p:sld xmlns:a="http://schemas.openxmlformats.org/drawingml/2006/main" xmlns:r="http://schemas.openxmlformats.org/officeDocument/2006/relationships" xmlns:p="http://schemas.openxmlformats.org/presentationml/2006/main">
+  <p:cSld>
+    <p:spTree>
+      <p:nvGrpSpPr>
+        <p:cNvPr id="1" name="">
+          <a:extLst>
+            <a:ext uri="{FF2B5EF4-FFF2-40B4-BE49-F238E27FC236}">
+              <a16:creationId xmlns:a16="http://schemas.microsoft.com/office/drawing/2014/main" id="{32B4B07A-263B-CF21-3E4B-A68F57157CE5}"/>
+            </a:ext>
+          </a:extLst>
+        </p:cNvPr>
+        <p:cNvGrpSpPr/>
+        <p:nvPr/>
+      </p:nvGrpSpPr>
+      <p:grpSpPr>
+        <a:xfrm>
+          <a:off x="0" y="0"/>
+          <a:ext cx="0" cy="0"/>
+          <a:chOff x="0" y="0"/>
+          <a:chExt cx="0" cy="0"/>
+        </a:xfrm>
+      </p:grpSpPr>
+      <p:sp>
+        <p:nvSpPr>
+          <p:cNvPr id="2" name="Date Placeholder 1">
+            <a:extLst>
+              <a:ext uri="{FF2B5EF4-FFF2-40B4-BE49-F238E27FC236}">
+                <a16:creationId xmlns:a16="http://schemas.microsoft.com/office/drawing/2014/main" id="{BEB7B135-614F-1234-6597-70CE3A0864D5}"/>
+              </a:ext>
+            </a:extLst>
+          </p:cNvPr>
+          <p:cNvSpPr>
+            <a:spLocks noGrp="1"/>
+          </p:cNvSpPr>
+          <p:nvPr>
+            <p:ph type="dt" sz="half" idx="2"/>
+          </p:nvPr>
+        </p:nvSpPr>
+        <p:spPr/>
+        <p:txBody>
+          <a:bodyPr/>
+          <a:lstStyle/>
+          <a:p>
+            <a:pPr marL="0" marR="0" lvl="0" indent="0" algn="l" defTabSz="914400" rtl="0" eaLnBrk="1" fontAlgn="auto" latinLnBrk="0" hangingPunct="1">
+              <a:lnSpc>
+                <a:spcPct val="100000"/>
+              </a:lnSpc>
+              <a:spcBef>
+                <a:spcPts val="0"/>
+              </a:spcBef>
+              <a:spcAft>
+                <a:spcPts val="0"/>
+              </a:spcAft>
+              <a:buClrTx/>
+              <a:buSzTx/>
+              <a:buFontTx/>
+              <a:buNone/>
+              <a:defRPr/>
+            </a:pPr>
+            <a:r>
+              <a:rPr kumimoji="0" lang="en-US" sz="1000" b="0" i="0" u="none" strike="noStrike" kern="1200" cap="none" spc="0" normalizeH="0" baseline="0" noProof="0">
+                <a:ln>
+                  <a:noFill/>
+                </a:ln>
+                <a:solidFill>
+                  <a:schemeClr val="tx1"/>
+                </a:solidFill>
+                <a:effectLst/>
+                <a:uLnTx/>
+                <a:uFillTx/>
+                <a:latin typeface="+mn-lt"/>
+                <a:ea typeface="+mn-ea"/>
+                <a:cs typeface="+mn-cs"/>
+              </a:rPr>
+              <a:t>3-Sep-24</a:t>
+            </a:r>
+            <a:endParaRPr kumimoji="0" lang="en-US" sz="1000" b="0" i="0" u="none" strike="noStrike" kern="1200" cap="none" spc="0" normalizeH="0" baseline="0" noProof="0" dirty="0">
+              <a:ln>
+                <a:noFill/>
+              </a:ln>
+              <a:solidFill>
+                <a:schemeClr val="tx1"/>
+              </a:solidFill>
+              <a:effectLst/>
+              <a:uLnTx/>
+              <a:uFillTx/>
+              <a:latin typeface="+mn-lt"/>
+              <a:ea typeface="+mn-ea"/>
+              <a:cs typeface="+mn-cs"/>
+            </a:endParaRPr>
+          </a:p>
+        </p:txBody>
+      </p:sp>
+      <p:pic>
+        <p:nvPicPr>
+          <p:cNvPr id="3" name="Picture 2">
+            <a:extLst>
+              <a:ext uri="{FF2B5EF4-FFF2-40B4-BE49-F238E27FC236}">
+                <a16:creationId xmlns:a16="http://schemas.microsoft.com/office/drawing/2014/main" id="{F5528BF9-24E7-2F39-C149-F214DFBA46B7}"/>
+              </a:ext>
+            </a:extLst>
+          </p:cNvPr>
+          <p:cNvPicPr>
+            <a:picLocks noChangeAspect="1"/>
+          </p:cNvPicPr>
+          <p:nvPr/>
+        </p:nvPicPr>
+        <p:blipFill>
+          <a:blip r:embed="rId2"/>
+          <a:stretch>
+            <a:fillRect/>
+          </a:stretch>
+        </p:blipFill>
+        <p:spPr>
+          <a:xfrm>
+            <a:off x="1828800" y="76199"/>
+            <a:ext cx="7239000" cy="3361185"/>
+          </a:xfrm>
+          <a:prstGeom prst="rect">
+            <a:avLst/>
+          </a:prstGeom>
+        </p:spPr>
+      </p:pic>
+      <p:pic>
+        <p:nvPicPr>
+          <p:cNvPr id="4" name="Picture 3">
+            <a:extLst>
+              <a:ext uri="{FF2B5EF4-FFF2-40B4-BE49-F238E27FC236}">
+                <a16:creationId xmlns:a16="http://schemas.microsoft.com/office/drawing/2014/main" id="{E6E391EA-F207-4908-E89D-FD3829E970CB}"/>
+              </a:ext>
+            </a:extLst>
+          </p:cNvPr>
+          <p:cNvPicPr>
+            <a:picLocks noChangeAspect="1"/>
+          </p:cNvPicPr>
+          <p:nvPr/>
+        </p:nvPicPr>
+        <p:blipFill>
+          <a:blip r:embed="rId3"/>
+          <a:stretch>
+            <a:fillRect/>
+          </a:stretch>
+        </p:blipFill>
+        <p:spPr>
+          <a:xfrm>
+            <a:off x="762000" y="3795712"/>
+            <a:ext cx="8153811" cy="2743200"/>
+          </a:xfrm>
+          <a:prstGeom prst="rect">
+            <a:avLst/>
+          </a:prstGeom>
+        </p:spPr>
+      </p:pic>
+    </p:spTree>
+    <p:extLst>
+      <p:ext uri="{BB962C8B-B14F-4D97-AF65-F5344CB8AC3E}">
+        <p14:creationId xmlns:p14="http://schemas.microsoft.com/office/powerpoint/2010/main" val="1995560412"/>
+      </p:ext>
+    </p:extLst>
+  </p:cSld>
+  <p:clrMapOvr>
+    <a:masterClrMapping/>
+  </p:clrMapOvr>
+  <p:transition>
+    <p:fade/>
+  </p:transition>
+</p:sld>
+</file>
+
+<file path=ppt/slides/slide22.xml><?xml version="1.0" encoding="utf-8"?>
+<p:sld xmlns:a="http://schemas.openxmlformats.org/drawingml/2006/main" xmlns:r="http://schemas.openxmlformats.org/officeDocument/2006/relationships" xmlns:p="http://schemas.openxmlformats.org/presentationml/2006/main">
+  <p:cSld>
+    <p:spTree>
+      <p:nvGrpSpPr>
+        <p:cNvPr id="1" name="">
+          <a:extLst>
+            <a:ext uri="{FF2B5EF4-FFF2-40B4-BE49-F238E27FC236}">
+              <a16:creationId xmlns:a16="http://schemas.microsoft.com/office/drawing/2014/main" id="{5773BE6D-EA8D-9252-F1C0-666D0C586CF4}"/>
+            </a:ext>
+          </a:extLst>
+        </p:cNvPr>
+        <p:cNvGrpSpPr/>
+        <p:nvPr/>
+      </p:nvGrpSpPr>
+      <p:grpSpPr>
+        <a:xfrm>
+          <a:off x="0" y="0"/>
+          <a:ext cx="0" cy="0"/>
+          <a:chOff x="0" y="0"/>
+          <a:chExt cx="0" cy="0"/>
+        </a:xfrm>
+      </p:grpSpPr>
+      <p:sp>
+        <p:nvSpPr>
+          <p:cNvPr id="2" name="Date Placeholder 1">
+            <a:extLst>
+              <a:ext uri="{FF2B5EF4-FFF2-40B4-BE49-F238E27FC236}">
+                <a16:creationId xmlns:a16="http://schemas.microsoft.com/office/drawing/2014/main" id="{0CAEB0AF-917B-1F64-083B-35EDBD050FD4}"/>
+              </a:ext>
+            </a:extLst>
+          </p:cNvPr>
+          <p:cNvSpPr>
+            <a:spLocks noGrp="1"/>
+          </p:cNvSpPr>
+          <p:nvPr>
+            <p:ph type="dt" sz="half" idx="2"/>
+          </p:nvPr>
+        </p:nvSpPr>
+        <p:spPr/>
+        <p:txBody>
+          <a:bodyPr/>
+          <a:lstStyle/>
+          <a:p>
+            <a:pPr marL="0" marR="0" lvl="0" indent="0" algn="l" defTabSz="914400" rtl="0" eaLnBrk="1" fontAlgn="auto" latinLnBrk="0" hangingPunct="1">
+              <a:lnSpc>
+                <a:spcPct val="100000"/>
+              </a:lnSpc>
+              <a:spcBef>
+                <a:spcPts val="0"/>
+              </a:spcBef>
+              <a:spcAft>
+                <a:spcPts val="0"/>
+              </a:spcAft>
+              <a:buClrTx/>
+              <a:buSzTx/>
+              <a:buFontTx/>
+              <a:buNone/>
+              <a:defRPr/>
+            </a:pPr>
+            <a:r>
+              <a:rPr kumimoji="0" lang="en-US" sz="1000" b="0" i="0" u="none" strike="noStrike" kern="1200" cap="none" spc="0" normalizeH="0" baseline="0" noProof="0">
+                <a:ln>
+                  <a:noFill/>
+                </a:ln>
+                <a:solidFill>
+                  <a:schemeClr val="tx1"/>
+                </a:solidFill>
+                <a:effectLst/>
+                <a:uLnTx/>
+                <a:uFillTx/>
+                <a:latin typeface="+mn-lt"/>
+                <a:ea typeface="+mn-ea"/>
+                <a:cs typeface="+mn-cs"/>
+              </a:rPr>
+              <a:t>3-Sep-24</a:t>
+            </a:r>
+            <a:endParaRPr kumimoji="0" lang="en-US" sz="1000" b="0" i="0" u="none" strike="noStrike" kern="1200" cap="none" spc="0" normalizeH="0" baseline="0" noProof="0" dirty="0">
+              <a:ln>
+                <a:noFill/>
+              </a:ln>
+              <a:solidFill>
+                <a:schemeClr val="tx1"/>
+              </a:solidFill>
+              <a:effectLst/>
+              <a:uLnTx/>
+              <a:uFillTx/>
+              <a:latin typeface="+mn-lt"/>
+              <a:ea typeface="+mn-ea"/>
+              <a:cs typeface="+mn-cs"/>
+            </a:endParaRPr>
+          </a:p>
+        </p:txBody>
+      </p:sp>
+      <p:pic>
+        <p:nvPicPr>
+          <p:cNvPr id="3" name="Picture 2">
+            <a:extLst>
+              <a:ext uri="{FF2B5EF4-FFF2-40B4-BE49-F238E27FC236}">
+                <a16:creationId xmlns:a16="http://schemas.microsoft.com/office/drawing/2014/main" id="{3AE29F8C-F2AA-8461-6D35-BC5EF937C0AD}"/>
+              </a:ext>
+            </a:extLst>
+          </p:cNvPr>
+          <p:cNvPicPr>
+            <a:picLocks noChangeAspect="1"/>
+          </p:cNvPicPr>
+          <p:nvPr/>
+        </p:nvPicPr>
+        <p:blipFill>
+          <a:blip r:embed="rId2"/>
+          <a:stretch>
+            <a:fillRect/>
+          </a:stretch>
+        </p:blipFill>
+        <p:spPr>
+          <a:xfrm>
+            <a:off x="2113216" y="136525"/>
+            <a:ext cx="6931578" cy="2608404"/>
+          </a:xfrm>
+          <a:prstGeom prst="rect">
+            <a:avLst/>
+          </a:prstGeom>
+        </p:spPr>
+      </p:pic>
+      <p:pic>
+        <p:nvPicPr>
+          <p:cNvPr id="4" name="Picture 3">
+            <a:extLst>
+              <a:ext uri="{FF2B5EF4-FFF2-40B4-BE49-F238E27FC236}">
+                <a16:creationId xmlns:a16="http://schemas.microsoft.com/office/drawing/2014/main" id="{CB6DF540-4D83-1F96-9712-A7C5BA1B461B}"/>
+              </a:ext>
+            </a:extLst>
+          </p:cNvPr>
+          <p:cNvPicPr>
+            <a:picLocks noChangeAspect="1"/>
+          </p:cNvPicPr>
+          <p:nvPr/>
+        </p:nvPicPr>
+        <p:blipFill>
+          <a:blip r:embed="rId3"/>
+          <a:stretch>
+            <a:fillRect/>
+          </a:stretch>
+        </p:blipFill>
+        <p:spPr>
+          <a:xfrm>
+            <a:off x="685800" y="2828082"/>
+            <a:ext cx="7215995" cy="2140172"/>
+          </a:xfrm>
+          <a:prstGeom prst="rect">
+            <a:avLst/>
+          </a:prstGeom>
+        </p:spPr>
+      </p:pic>
+      <p:pic>
+        <p:nvPicPr>
+          <p:cNvPr id="5" name="Picture 4">
+            <a:extLst>
+              <a:ext uri="{FF2B5EF4-FFF2-40B4-BE49-F238E27FC236}">
+                <a16:creationId xmlns:a16="http://schemas.microsoft.com/office/drawing/2014/main" id="{B15CE11D-3A0C-9C5A-0E82-A0B161B6C5F2}"/>
+              </a:ext>
+            </a:extLst>
+          </p:cNvPr>
+          <p:cNvPicPr>
+            <a:picLocks noChangeAspect="1"/>
+          </p:cNvPicPr>
+          <p:nvPr/>
+        </p:nvPicPr>
+        <p:blipFill>
+          <a:blip r:embed="rId4"/>
+          <a:stretch>
+            <a:fillRect/>
+          </a:stretch>
+        </p:blipFill>
+        <p:spPr>
+          <a:xfrm>
+            <a:off x="1828799" y="5034723"/>
+            <a:ext cx="7215995" cy="1794847"/>
+          </a:xfrm>
+          <a:prstGeom prst="rect">
+            <a:avLst/>
+          </a:prstGeom>
+        </p:spPr>
+      </p:pic>
+    </p:spTree>
+    <p:extLst>
+      <p:ext uri="{BB962C8B-B14F-4D97-AF65-F5344CB8AC3E}">
+        <p14:creationId xmlns:p14="http://schemas.microsoft.com/office/powerpoint/2010/main" val="627155710"/>
+      </p:ext>
+    </p:extLst>
+  </p:cSld>
+  <p:clrMapOvr>
+    <a:masterClrMapping/>
+  </p:clrMapOvr>
+  <p:transition>
+    <p:fade/>
+  </p:transition>
+</p:sld>
+</file>
+
+<file path=ppt/slides/slide23.xml><?xml version="1.0" encoding="utf-8"?>
+<p:sld xmlns:a="http://schemas.openxmlformats.org/drawingml/2006/main" xmlns:r="http://schemas.openxmlformats.org/officeDocument/2006/relationships" xmlns:p="http://schemas.openxmlformats.org/presentationml/2006/main">
+  <p:cSld>
+    <p:spTree>
+      <p:nvGrpSpPr>
+        <p:cNvPr id="1" name=""/>
+        <p:cNvGrpSpPr/>
+        <p:nvPr/>
+      </p:nvGrpSpPr>
+      <p:grpSpPr>
+        <a:xfrm>
+          <a:off x="0" y="0"/>
+          <a:ext cx="0" cy="0"/>
+          <a:chOff x="0" y="0"/>
+          <a:chExt cx="0" cy="0"/>
+        </a:xfrm>
+      </p:grpSpPr>
+      <p:sp>
+        <p:nvSpPr>
+          <p:cNvPr id="2" name="Date Placeholder 1">
+            <a:extLst>
+              <a:ext uri="{FF2B5EF4-FFF2-40B4-BE49-F238E27FC236}">
+                <a16:creationId xmlns:a16="http://schemas.microsoft.com/office/drawing/2014/main" id="{9A4F095C-E902-2E5D-02EC-BE2921AD3AE2}"/>
+              </a:ext>
+            </a:extLst>
+          </p:cNvPr>
+          <p:cNvSpPr>
+            <a:spLocks noGrp="1"/>
+          </p:cNvSpPr>
+          <p:nvPr>
+            <p:ph type="dt" sz="half" idx="2"/>
+          </p:nvPr>
+        </p:nvSpPr>
+        <p:spPr/>
+        <p:txBody>
+          <a:bodyPr/>
+          <a:lstStyle/>
+          <a:p>
+            <a:pPr marL="0" marR="0" lvl="0" indent="0" algn="l" defTabSz="914400" rtl="0" eaLnBrk="1" fontAlgn="auto" latinLnBrk="0" hangingPunct="1">
+              <a:lnSpc>
+                <a:spcPct val="100000"/>
+              </a:lnSpc>
+              <a:spcBef>
+                <a:spcPts val="0"/>
+              </a:spcBef>
+              <a:spcAft>
+                <a:spcPts val="0"/>
+              </a:spcAft>
+              <a:buClrTx/>
+              <a:buSzTx/>
+              <a:buFontTx/>
+              <a:buNone/>
+              <a:defRPr/>
+            </a:pPr>
+            <a:r>
+              <a:rPr kumimoji="0" lang="en-US" sz="1000" b="0" i="0" u="none" strike="noStrike" kern="1200" cap="none" spc="0" normalizeH="0" baseline="0" noProof="0">
+                <a:ln>
+                  <a:noFill/>
+                </a:ln>
+                <a:solidFill>
+                  <a:schemeClr val="tx1"/>
+                </a:solidFill>
+                <a:effectLst/>
+                <a:uLnTx/>
+                <a:uFillTx/>
+                <a:latin typeface="+mn-lt"/>
+                <a:ea typeface="+mn-ea"/>
+                <a:cs typeface="+mn-cs"/>
+              </a:rPr>
+              <a:t>3-Sep-24</a:t>
+            </a:r>
+            <a:endParaRPr kumimoji="0" lang="en-US" sz="1000" b="0" i="0" u="none" strike="noStrike" kern="1200" cap="none" spc="0" normalizeH="0" baseline="0" noProof="0" dirty="0">
+              <a:ln>
+                <a:noFill/>
+              </a:ln>
+              <a:solidFill>
+                <a:schemeClr val="tx1"/>
+              </a:solidFill>
+              <a:effectLst/>
+              <a:uLnTx/>
+              <a:uFillTx/>
+              <a:latin typeface="+mn-lt"/>
+              <a:ea typeface="+mn-ea"/>
+              <a:cs typeface="+mn-cs"/>
+            </a:endParaRPr>
+          </a:p>
+        </p:txBody>
+      </p:sp>
+      <p:pic>
+        <p:nvPicPr>
+          <p:cNvPr id="4" name="Picture 3">
+            <a:extLst>
+              <a:ext uri="{FF2B5EF4-FFF2-40B4-BE49-F238E27FC236}">
+                <a16:creationId xmlns:a16="http://schemas.microsoft.com/office/drawing/2014/main" id="{F4B611C3-89B1-5BA8-1CBB-390E002F0B09}"/>
+              </a:ext>
+            </a:extLst>
+          </p:cNvPr>
+          <p:cNvPicPr>
+            <a:picLocks noChangeAspect="1"/>
+          </p:cNvPicPr>
+          <p:nvPr/>
+        </p:nvPicPr>
+        <p:blipFill>
+          <a:blip r:embed="rId2"/>
+          <a:stretch>
+            <a:fillRect/>
+          </a:stretch>
+        </p:blipFill>
+        <p:spPr>
+          <a:xfrm>
+            <a:off x="990600" y="685800"/>
+            <a:ext cx="8001000" cy="3072818"/>
+          </a:xfrm>
+          <a:prstGeom prst="rect">
+            <a:avLst/>
+          </a:prstGeom>
+        </p:spPr>
+      </p:pic>
+      <p:pic>
+        <p:nvPicPr>
+          <p:cNvPr id="6" name="Picture 5">
+            <a:extLst>
+              <a:ext uri="{FF2B5EF4-FFF2-40B4-BE49-F238E27FC236}">
+                <a16:creationId xmlns:a16="http://schemas.microsoft.com/office/drawing/2014/main" id="{B2576821-8202-D8B0-D305-5B8AEA9ADA5C}"/>
+              </a:ext>
+            </a:extLst>
+          </p:cNvPr>
+          <p:cNvPicPr>
+            <a:picLocks noChangeAspect="1"/>
+          </p:cNvPicPr>
+          <p:nvPr/>
+        </p:nvPicPr>
+        <p:blipFill>
+          <a:blip r:embed="rId3"/>
+          <a:stretch>
+            <a:fillRect/>
+          </a:stretch>
+        </p:blipFill>
+        <p:spPr>
+          <a:xfrm>
+            <a:off x="3009900" y="3902152"/>
+            <a:ext cx="3124200" cy="2802117"/>
+          </a:xfrm>
+          <a:prstGeom prst="rect">
+            <a:avLst/>
+          </a:prstGeom>
+        </p:spPr>
+      </p:pic>
+    </p:spTree>
+    <p:extLst>
+      <p:ext uri="{BB962C8B-B14F-4D97-AF65-F5344CB8AC3E}">
+        <p14:creationId xmlns:p14="http://schemas.microsoft.com/office/powerpoint/2010/main" val="2335034464"/>
+      </p:ext>
+    </p:extLst>
+  </p:cSld>
+  <p:clrMapOvr>
+    <a:masterClrMapping/>
+  </p:clrMapOvr>
+  <p:transition>
+    <p:fade/>
+  </p:transition>
+</p:sld>
+</file>
+
+<file path=ppt/slides/slide24.xml><?xml version="1.0" encoding="utf-8"?>
+<p:sld xmlns:a="http://schemas.openxmlformats.org/drawingml/2006/main" xmlns:r="http://schemas.openxmlformats.org/officeDocument/2006/relationships" xmlns:p="http://schemas.openxmlformats.org/presentationml/2006/main">
+  <p:cSld>
+    <p:spTree>
+      <p:nvGrpSpPr>
+        <p:cNvPr id="1" name="">
+          <a:extLst>
+            <a:ext uri="{FF2B5EF4-FFF2-40B4-BE49-F238E27FC236}">
+              <a16:creationId xmlns:a16="http://schemas.microsoft.com/office/drawing/2014/main" id="{90FFACE1-554A-BF4D-62EE-AA958FB8EEAD}"/>
+            </a:ext>
+          </a:extLst>
+        </p:cNvPr>
+        <p:cNvGrpSpPr/>
+        <p:nvPr/>
+      </p:nvGrpSpPr>
+      <p:grpSpPr>
+        <a:xfrm>
+          <a:off x="0" y="0"/>
+          <a:ext cx="0" cy="0"/>
+          <a:chOff x="0" y="0"/>
+          <a:chExt cx="0" cy="0"/>
+        </a:xfrm>
+      </p:grpSpPr>
+      <p:sp>
+        <p:nvSpPr>
+          <p:cNvPr id="2" name="Date Placeholder 1">
+            <a:extLst>
+              <a:ext uri="{FF2B5EF4-FFF2-40B4-BE49-F238E27FC236}">
+                <a16:creationId xmlns:a16="http://schemas.microsoft.com/office/drawing/2014/main" id="{5C9608BB-B55B-6654-2EFE-344496C0E565}"/>
+              </a:ext>
+            </a:extLst>
+          </p:cNvPr>
+          <p:cNvSpPr>
+            <a:spLocks noGrp="1"/>
+          </p:cNvSpPr>
+          <p:nvPr>
+            <p:ph type="dt" sz="half" idx="2"/>
+          </p:nvPr>
+        </p:nvSpPr>
+        <p:spPr/>
+        <p:txBody>
+          <a:bodyPr/>
+          <a:lstStyle/>
+          <a:p>
+            <a:pPr marL="0" marR="0" lvl="0" indent="0" algn="l" defTabSz="914400" rtl="0" eaLnBrk="1" fontAlgn="auto" latinLnBrk="0" hangingPunct="1">
+              <a:lnSpc>
+                <a:spcPct val="100000"/>
+              </a:lnSpc>
+              <a:spcBef>
+                <a:spcPts val="0"/>
+              </a:spcBef>
+              <a:spcAft>
+                <a:spcPts val="0"/>
+              </a:spcAft>
+              <a:buClrTx/>
+              <a:buSzTx/>
+              <a:buFontTx/>
+              <a:buNone/>
+              <a:defRPr/>
+            </a:pPr>
+            <a:r>
+              <a:rPr kumimoji="0" lang="en-US" sz="1000" b="0" i="0" u="none" strike="noStrike" kern="1200" cap="none" spc="0" normalizeH="0" baseline="0" noProof="0">
+                <a:ln>
+                  <a:noFill/>
+                </a:ln>
+                <a:solidFill>
+                  <a:schemeClr val="tx1"/>
+                </a:solidFill>
+                <a:effectLst/>
+                <a:uLnTx/>
+                <a:uFillTx/>
+                <a:latin typeface="+mn-lt"/>
+                <a:ea typeface="+mn-ea"/>
+                <a:cs typeface="+mn-cs"/>
+              </a:rPr>
+              <a:t>3-Sep-24</a:t>
+            </a:r>
+            <a:endParaRPr kumimoji="0" lang="en-US" sz="1000" b="0" i="0" u="none" strike="noStrike" kern="1200" cap="none" spc="0" normalizeH="0" baseline="0" noProof="0" dirty="0">
+              <a:ln>
+                <a:noFill/>
+              </a:ln>
+              <a:solidFill>
+                <a:schemeClr val="tx1"/>
+              </a:solidFill>
+              <a:effectLst/>
+              <a:uLnTx/>
+              <a:uFillTx/>
+              <a:latin typeface="+mn-lt"/>
+              <a:ea typeface="+mn-ea"/>
+              <a:cs typeface="+mn-cs"/>
+            </a:endParaRPr>
+          </a:p>
+        </p:txBody>
+      </p:sp>
+      <p:pic>
+        <p:nvPicPr>
+          <p:cNvPr id="3" name="Picture 2">
+            <a:extLst>
+              <a:ext uri="{FF2B5EF4-FFF2-40B4-BE49-F238E27FC236}">
+                <a16:creationId xmlns:a16="http://schemas.microsoft.com/office/drawing/2014/main" id="{48FED5A1-A16F-2071-6D20-9D0893D0FCB0}"/>
+              </a:ext>
+            </a:extLst>
+          </p:cNvPr>
+          <p:cNvPicPr>
+            <a:picLocks noChangeAspect="1"/>
+          </p:cNvPicPr>
+          <p:nvPr/>
+        </p:nvPicPr>
+        <p:blipFill>
+          <a:blip r:embed="rId2"/>
+          <a:stretch>
+            <a:fillRect/>
+          </a:stretch>
+        </p:blipFill>
+        <p:spPr>
+          <a:xfrm>
+            <a:off x="1600200" y="150851"/>
+            <a:ext cx="5638800" cy="3974872"/>
+          </a:xfrm>
+          <a:prstGeom prst="rect">
+            <a:avLst/>
+          </a:prstGeom>
+        </p:spPr>
+      </p:pic>
+      <p:pic>
+        <p:nvPicPr>
+          <p:cNvPr id="4" name="Picture 3">
+            <a:extLst>
+              <a:ext uri="{FF2B5EF4-FFF2-40B4-BE49-F238E27FC236}">
+                <a16:creationId xmlns:a16="http://schemas.microsoft.com/office/drawing/2014/main" id="{B8B53280-9AB5-0B59-692B-10521AC78C4C}"/>
+              </a:ext>
+            </a:extLst>
+          </p:cNvPr>
+          <p:cNvPicPr>
+            <a:picLocks noChangeAspect="1"/>
+          </p:cNvPicPr>
+          <p:nvPr/>
+        </p:nvPicPr>
+        <p:blipFill>
+          <a:blip r:embed="rId3"/>
+          <a:stretch>
+            <a:fillRect/>
+          </a:stretch>
+        </p:blipFill>
+        <p:spPr>
+          <a:xfrm>
+            <a:off x="1600200" y="4128364"/>
+            <a:ext cx="5638800" cy="2603126"/>
+          </a:xfrm>
+          <a:prstGeom prst="rect">
+            <a:avLst/>
+          </a:prstGeom>
+        </p:spPr>
+      </p:pic>
+    </p:spTree>
+    <p:extLst>
+      <p:ext uri="{BB962C8B-B14F-4D97-AF65-F5344CB8AC3E}">
+        <p14:creationId xmlns:p14="http://schemas.microsoft.com/office/powerpoint/2010/main" val="3118919904"/>
+      </p:ext>
+    </p:extLst>
+  </p:cSld>
+  <p:clrMapOvr>
+    <a:masterClrMapping/>
+  </p:clrMapOvr>
+  <p:transition>
+    <p:fade/>
+  </p:transition>
+</p:sld>
+</file>
+
+<file path=ppt/slides/slide25.xml><?xml version="1.0" encoding="utf-8"?>
+<p:sld xmlns:a="http://schemas.openxmlformats.org/drawingml/2006/main" xmlns:r="http://schemas.openxmlformats.org/officeDocument/2006/relationships" xmlns:p="http://schemas.openxmlformats.org/presentationml/2006/main">
+  <p:cSld>
+    <p:spTree>
+      <p:nvGrpSpPr>
+        <p:cNvPr id="1" name="">
+          <a:extLst>
+            <a:ext uri="{FF2B5EF4-FFF2-40B4-BE49-F238E27FC236}">
+              <a16:creationId xmlns:a16="http://schemas.microsoft.com/office/drawing/2014/main" id="{EF242514-6FD5-7DB5-0A03-762423F45718}"/>
+            </a:ext>
+          </a:extLst>
+        </p:cNvPr>
+        <p:cNvGrpSpPr/>
+        <p:nvPr/>
+      </p:nvGrpSpPr>
+      <p:grpSpPr>
+        <a:xfrm>
+          <a:off x="0" y="0"/>
+          <a:ext cx="0" cy="0"/>
+          <a:chOff x="0" y="0"/>
+          <a:chExt cx="0" cy="0"/>
+        </a:xfrm>
+      </p:grpSpPr>
+      <p:sp>
+        <p:nvSpPr>
+          <p:cNvPr id="2" name="Date Placeholder 1">
+            <a:extLst>
+              <a:ext uri="{FF2B5EF4-FFF2-40B4-BE49-F238E27FC236}">
+                <a16:creationId xmlns:a16="http://schemas.microsoft.com/office/drawing/2014/main" id="{09BF7468-4059-A177-8B9B-A6A4A2831EA7}"/>
+              </a:ext>
+            </a:extLst>
+          </p:cNvPr>
+          <p:cNvSpPr>
+            <a:spLocks noGrp="1"/>
+          </p:cNvSpPr>
+          <p:nvPr>
+            <p:ph type="dt" sz="half" idx="2"/>
+          </p:nvPr>
+        </p:nvSpPr>
+        <p:spPr/>
+        <p:txBody>
+          <a:bodyPr/>
+          <a:lstStyle/>
+          <a:p>
+            <a:pPr marL="0" marR="0" lvl="0" indent="0" algn="l" defTabSz="914400" rtl="0" eaLnBrk="1" fontAlgn="auto" latinLnBrk="0" hangingPunct="1">
+              <a:lnSpc>
+                <a:spcPct val="100000"/>
+              </a:lnSpc>
+              <a:spcBef>
+                <a:spcPts val="0"/>
+              </a:spcBef>
+              <a:spcAft>
+                <a:spcPts val="0"/>
+              </a:spcAft>
+              <a:buClrTx/>
+              <a:buSzTx/>
+              <a:buFontTx/>
+              <a:buNone/>
+              <a:defRPr/>
+            </a:pPr>
+            <a:r>
+              <a:rPr kumimoji="0" lang="en-US" sz="1000" b="0" i="0" u="none" strike="noStrike" kern="1200" cap="none" spc="0" normalizeH="0" baseline="0" noProof="0">
+                <a:ln>
+                  <a:noFill/>
+                </a:ln>
+                <a:solidFill>
+                  <a:schemeClr val="tx1"/>
+                </a:solidFill>
+                <a:effectLst/>
+                <a:uLnTx/>
+                <a:uFillTx/>
+                <a:latin typeface="+mn-lt"/>
+                <a:ea typeface="+mn-ea"/>
+                <a:cs typeface="+mn-cs"/>
+              </a:rPr>
+              <a:t>3-Sep-24</a:t>
+            </a:r>
+            <a:endParaRPr kumimoji="0" lang="en-US" sz="1000" b="0" i="0" u="none" strike="noStrike" kern="1200" cap="none" spc="0" normalizeH="0" baseline="0" noProof="0" dirty="0">
+              <a:ln>
+                <a:noFill/>
+              </a:ln>
+              <a:solidFill>
+                <a:schemeClr val="tx1"/>
+              </a:solidFill>
+              <a:effectLst/>
+              <a:uLnTx/>
+              <a:uFillTx/>
+              <a:latin typeface="+mn-lt"/>
+              <a:ea typeface="+mn-ea"/>
+              <a:cs typeface="+mn-cs"/>
+            </a:endParaRPr>
+          </a:p>
+        </p:txBody>
+      </p:sp>
+      <p:pic>
+        <p:nvPicPr>
+          <p:cNvPr id="3" name="Picture 2">
+            <a:extLst>
+              <a:ext uri="{FF2B5EF4-FFF2-40B4-BE49-F238E27FC236}">
+                <a16:creationId xmlns:a16="http://schemas.microsoft.com/office/drawing/2014/main" id="{CC10AA01-0816-FDB8-E87C-E69349BF2A1F}"/>
+              </a:ext>
+            </a:extLst>
+          </p:cNvPr>
+          <p:cNvPicPr>
+            <a:picLocks noChangeAspect="1"/>
+          </p:cNvPicPr>
+          <p:nvPr/>
+        </p:nvPicPr>
+        <p:blipFill>
+          <a:blip r:embed="rId2"/>
+          <a:stretch>
+            <a:fillRect/>
+          </a:stretch>
+        </p:blipFill>
+        <p:spPr>
+          <a:xfrm>
+            <a:off x="838200" y="726065"/>
+            <a:ext cx="5943600" cy="1682750"/>
+          </a:xfrm>
+          <a:prstGeom prst="rect">
+            <a:avLst/>
+          </a:prstGeom>
+        </p:spPr>
+      </p:pic>
+      <p:pic>
+        <p:nvPicPr>
+          <p:cNvPr id="4" name="Picture 3">
+            <a:extLst>
+              <a:ext uri="{FF2B5EF4-FFF2-40B4-BE49-F238E27FC236}">
+                <a16:creationId xmlns:a16="http://schemas.microsoft.com/office/drawing/2014/main" id="{8345EB68-9B87-9714-436C-5EEDE71A2853}"/>
+              </a:ext>
+            </a:extLst>
+          </p:cNvPr>
+          <p:cNvPicPr>
+            <a:picLocks noChangeAspect="1"/>
+          </p:cNvPicPr>
+          <p:nvPr/>
+        </p:nvPicPr>
+        <p:blipFill>
+          <a:blip r:embed="rId3"/>
+          <a:stretch>
+            <a:fillRect/>
+          </a:stretch>
+        </p:blipFill>
+        <p:spPr>
+          <a:xfrm>
+            <a:off x="2743200" y="2542458"/>
+            <a:ext cx="5943600" cy="889000"/>
+          </a:xfrm>
+          <a:prstGeom prst="rect">
+            <a:avLst/>
+          </a:prstGeom>
+        </p:spPr>
+      </p:pic>
+      <p:pic>
+        <p:nvPicPr>
+          <p:cNvPr id="5" name="Picture 4">
+            <a:extLst>
+              <a:ext uri="{FF2B5EF4-FFF2-40B4-BE49-F238E27FC236}">
+                <a16:creationId xmlns:a16="http://schemas.microsoft.com/office/drawing/2014/main" id="{3C4DFDA8-85B4-AAD7-8061-BAA915F9779F}"/>
+              </a:ext>
+            </a:extLst>
+          </p:cNvPr>
+          <p:cNvPicPr>
+            <a:picLocks noChangeAspect="1"/>
+          </p:cNvPicPr>
+          <p:nvPr/>
+        </p:nvPicPr>
+        <p:blipFill>
+          <a:blip r:embed="rId4"/>
+          <a:stretch>
+            <a:fillRect/>
+          </a:stretch>
+        </p:blipFill>
+        <p:spPr>
+          <a:xfrm>
+            <a:off x="838200" y="3565101"/>
+            <a:ext cx="5943600" cy="1158240"/>
+          </a:xfrm>
+          <a:prstGeom prst="rect">
+            <a:avLst/>
+          </a:prstGeom>
+        </p:spPr>
+      </p:pic>
+      <p:pic>
+        <p:nvPicPr>
+          <p:cNvPr id="6" name="Picture 5">
+            <a:extLst>
+              <a:ext uri="{FF2B5EF4-FFF2-40B4-BE49-F238E27FC236}">
+                <a16:creationId xmlns:a16="http://schemas.microsoft.com/office/drawing/2014/main" id="{2399ABF7-E4E0-9748-E715-54017A46643F}"/>
+              </a:ext>
+            </a:extLst>
+          </p:cNvPr>
+          <p:cNvPicPr>
+            <a:picLocks noChangeAspect="1"/>
+          </p:cNvPicPr>
+          <p:nvPr/>
+        </p:nvPicPr>
+        <p:blipFill>
+          <a:blip r:embed="rId5"/>
+          <a:stretch>
+            <a:fillRect/>
+          </a:stretch>
+        </p:blipFill>
+        <p:spPr>
+          <a:xfrm>
+            <a:off x="2743200" y="4984379"/>
+            <a:ext cx="5943600" cy="788035"/>
+          </a:xfrm>
+          <a:prstGeom prst="rect">
+            <a:avLst/>
+          </a:prstGeom>
+        </p:spPr>
+      </p:pic>
+      <p:pic>
+        <p:nvPicPr>
+          <p:cNvPr id="7" name="Picture 6">
+            <a:extLst>
+              <a:ext uri="{FF2B5EF4-FFF2-40B4-BE49-F238E27FC236}">
+                <a16:creationId xmlns:a16="http://schemas.microsoft.com/office/drawing/2014/main" id="{9321CD45-6BA5-985A-FA56-9A2037C7A17B}"/>
+              </a:ext>
+            </a:extLst>
+          </p:cNvPr>
+          <p:cNvPicPr>
+            <a:picLocks noChangeAspect="1"/>
+          </p:cNvPicPr>
+          <p:nvPr/>
+        </p:nvPicPr>
+        <p:blipFill>
+          <a:blip r:embed="rId6"/>
+          <a:stretch>
+            <a:fillRect/>
+          </a:stretch>
+        </p:blipFill>
+        <p:spPr>
+          <a:xfrm>
+            <a:off x="1219200" y="6033452"/>
+            <a:ext cx="5943600" cy="645795"/>
+          </a:xfrm>
+          <a:prstGeom prst="rect">
+            <a:avLst/>
+          </a:prstGeom>
+        </p:spPr>
+      </p:pic>
+    </p:spTree>
+    <p:extLst>
+      <p:ext uri="{BB962C8B-B14F-4D97-AF65-F5344CB8AC3E}">
+        <p14:creationId xmlns:p14="http://schemas.microsoft.com/office/powerpoint/2010/main" val="2868587476"/>
+      </p:ext>
+    </p:extLst>
+  </p:cSld>
+  <p:clrMapOvr>
+    <a:masterClrMapping/>
+  </p:clrMapOvr>
+  <p:transition>
+    <p:fade/>
+  </p:transition>
+</p:sld>
+</file>
+
+<file path=ppt/slides/slide26.xml><?xml version="1.0" encoding="utf-8"?>
+<p:sld xmlns:a="http://schemas.openxmlformats.org/drawingml/2006/main" xmlns:r="http://schemas.openxmlformats.org/officeDocument/2006/relationships" xmlns:p="http://schemas.openxmlformats.org/presentationml/2006/main">
+  <p:cSld>
+    <p:spTree>
+      <p:nvGrpSpPr>
+        <p:cNvPr id="1" name="">
+          <a:extLst>
+            <a:ext uri="{FF2B5EF4-FFF2-40B4-BE49-F238E27FC236}">
+              <a16:creationId xmlns:a16="http://schemas.microsoft.com/office/drawing/2014/main" id="{19E6247A-A03D-97AF-FB38-A89EC9FB194B}"/>
+            </a:ext>
+          </a:extLst>
+        </p:cNvPr>
+        <p:cNvGrpSpPr/>
+        <p:nvPr/>
+      </p:nvGrpSpPr>
+      <p:grpSpPr>
+        <a:xfrm>
+          <a:off x="0" y="0"/>
+          <a:ext cx="0" cy="0"/>
+          <a:chOff x="0" y="0"/>
+          <a:chExt cx="0" cy="0"/>
+        </a:xfrm>
+      </p:grpSpPr>
+      <p:sp>
+        <p:nvSpPr>
+          <p:cNvPr id="2" name="Date Placeholder 1">
+            <a:extLst>
+              <a:ext uri="{FF2B5EF4-FFF2-40B4-BE49-F238E27FC236}">
+                <a16:creationId xmlns:a16="http://schemas.microsoft.com/office/drawing/2014/main" id="{149C69C4-9A70-60FF-A295-E8C5498857B2}"/>
+              </a:ext>
+            </a:extLst>
+          </p:cNvPr>
+          <p:cNvSpPr>
+            <a:spLocks noGrp="1"/>
+          </p:cNvSpPr>
+          <p:nvPr>
+            <p:ph type="dt" sz="half" idx="2"/>
+          </p:nvPr>
+        </p:nvSpPr>
+        <p:spPr/>
+        <p:txBody>
+          <a:bodyPr/>
+          <a:lstStyle/>
+          <a:p>
+            <a:pPr marL="0" marR="0" lvl="0" indent="0" algn="l" defTabSz="914400" rtl="0" eaLnBrk="1" fontAlgn="auto" latinLnBrk="0" hangingPunct="1">
+              <a:lnSpc>
+                <a:spcPct val="100000"/>
+              </a:lnSpc>
+              <a:spcBef>
+                <a:spcPts val="0"/>
+              </a:spcBef>
+              <a:spcAft>
+                <a:spcPts val="0"/>
+              </a:spcAft>
+              <a:buClrTx/>
+              <a:buSzTx/>
+              <a:buFontTx/>
+              <a:buNone/>
+              <a:defRPr/>
+            </a:pPr>
+            <a:r>
+              <a:rPr kumimoji="0" lang="en-US" sz="1000" b="0" i="0" u="none" strike="noStrike" kern="1200" cap="none" spc="0" normalizeH="0" baseline="0" noProof="0">
+                <a:ln>
+                  <a:noFill/>
+                </a:ln>
+                <a:solidFill>
+                  <a:schemeClr val="tx1"/>
+                </a:solidFill>
+                <a:effectLst/>
+                <a:uLnTx/>
+                <a:uFillTx/>
+                <a:latin typeface="+mn-lt"/>
+                <a:ea typeface="+mn-ea"/>
+                <a:cs typeface="+mn-cs"/>
+              </a:rPr>
+              <a:t>3-Sep-24</a:t>
+            </a:r>
+            <a:endParaRPr kumimoji="0" lang="en-US" sz="1000" b="0" i="0" u="none" strike="noStrike" kern="1200" cap="none" spc="0" normalizeH="0" baseline="0" noProof="0" dirty="0">
+              <a:ln>
+                <a:noFill/>
+              </a:ln>
+              <a:solidFill>
+                <a:schemeClr val="tx1"/>
+              </a:solidFill>
+              <a:effectLst/>
+              <a:uLnTx/>
+              <a:uFillTx/>
+              <a:latin typeface="+mn-lt"/>
+              <a:ea typeface="+mn-ea"/>
+              <a:cs typeface="+mn-cs"/>
+            </a:endParaRPr>
+          </a:p>
+        </p:txBody>
+      </p:sp>
+      <p:pic>
+        <p:nvPicPr>
+          <p:cNvPr id="3" name="Picture 2">
+            <a:extLst>
+              <a:ext uri="{FF2B5EF4-FFF2-40B4-BE49-F238E27FC236}">
+                <a16:creationId xmlns:a16="http://schemas.microsoft.com/office/drawing/2014/main" id="{F16D249B-D7D5-7D65-5D09-AE4B467A6731}"/>
+              </a:ext>
+            </a:extLst>
+          </p:cNvPr>
+          <p:cNvPicPr>
+            <a:picLocks noChangeAspect="1"/>
+          </p:cNvPicPr>
+          <p:nvPr/>
+        </p:nvPicPr>
+        <p:blipFill>
+          <a:blip r:embed="rId2"/>
+          <a:stretch>
+            <a:fillRect/>
+          </a:stretch>
+        </p:blipFill>
+        <p:spPr>
+          <a:xfrm>
+            <a:off x="685800" y="990600"/>
+            <a:ext cx="8293395" cy="762000"/>
+          </a:xfrm>
+          <a:prstGeom prst="rect">
+            <a:avLst/>
+          </a:prstGeom>
+        </p:spPr>
+      </p:pic>
+      <p:pic>
+        <p:nvPicPr>
+          <p:cNvPr id="4" name="Picture 3">
+            <a:extLst>
+              <a:ext uri="{FF2B5EF4-FFF2-40B4-BE49-F238E27FC236}">
+                <a16:creationId xmlns:a16="http://schemas.microsoft.com/office/drawing/2014/main" id="{E1431F57-8E4E-EFF3-6B0A-1F487E6BA8FC}"/>
+              </a:ext>
+            </a:extLst>
+          </p:cNvPr>
+          <p:cNvPicPr>
+            <a:picLocks noChangeAspect="1"/>
+          </p:cNvPicPr>
+          <p:nvPr/>
+        </p:nvPicPr>
+        <p:blipFill>
+          <a:blip r:embed="rId3"/>
+          <a:stretch>
+            <a:fillRect/>
+          </a:stretch>
+        </p:blipFill>
+        <p:spPr>
+          <a:xfrm>
+            <a:off x="685799" y="1905000"/>
+            <a:ext cx="7797929" cy="2133600"/>
+          </a:xfrm>
+          <a:prstGeom prst="rect">
+            <a:avLst/>
+          </a:prstGeom>
+        </p:spPr>
+      </p:pic>
+      <p:pic>
+        <p:nvPicPr>
+          <p:cNvPr id="5" name="Picture 4">
+            <a:extLst>
+              <a:ext uri="{FF2B5EF4-FFF2-40B4-BE49-F238E27FC236}">
+                <a16:creationId xmlns:a16="http://schemas.microsoft.com/office/drawing/2014/main" id="{7AC97089-AEE5-3983-F6CB-1D3B7E3A0339}"/>
+              </a:ext>
+            </a:extLst>
+          </p:cNvPr>
+          <p:cNvPicPr>
+            <a:picLocks noChangeAspect="1"/>
+          </p:cNvPicPr>
+          <p:nvPr/>
+        </p:nvPicPr>
+        <p:blipFill>
+          <a:blip r:embed="rId4"/>
+          <a:stretch>
+            <a:fillRect/>
+          </a:stretch>
+        </p:blipFill>
+        <p:spPr>
+          <a:xfrm>
+            <a:off x="1151769" y="4274668"/>
+            <a:ext cx="7912395" cy="2202114"/>
+          </a:xfrm>
+          <a:prstGeom prst="rect">
+            <a:avLst/>
+          </a:prstGeom>
+        </p:spPr>
+      </p:pic>
+    </p:spTree>
+    <p:extLst>
+      <p:ext uri="{BB962C8B-B14F-4D97-AF65-F5344CB8AC3E}">
+        <p14:creationId xmlns:p14="http://schemas.microsoft.com/office/powerpoint/2010/main" val="1481961659"/>
+      </p:ext>
+    </p:extLst>
+  </p:cSld>
+  <p:clrMapOvr>
+    <a:masterClrMapping/>
+  </p:clrMapOvr>
+  <p:transition>
+    <p:fade/>
+  </p:transition>
+</p:sld>
+</file>
+
+<file path=ppt/slides/slide27.xml><?xml version="1.0" encoding="utf-8"?>
+<p:sld xmlns:a="http://schemas.openxmlformats.org/drawingml/2006/main" xmlns:r="http://schemas.openxmlformats.org/officeDocument/2006/relationships" xmlns:p="http://schemas.openxmlformats.org/presentationml/2006/main">
+  <p:cSld>
+    <p:spTree>
+      <p:nvGrpSpPr>
+        <p:cNvPr id="1" name="">
+          <a:extLst>
+            <a:ext uri="{FF2B5EF4-FFF2-40B4-BE49-F238E27FC236}">
+              <a16:creationId xmlns:a16="http://schemas.microsoft.com/office/drawing/2014/main" id="{BEC64A08-8C7F-2F3F-3894-A60F01487495}"/>
+            </a:ext>
+          </a:extLst>
+        </p:cNvPr>
+        <p:cNvGrpSpPr/>
+        <p:nvPr/>
+      </p:nvGrpSpPr>
+      <p:grpSpPr>
+        <a:xfrm>
+          <a:off x="0" y="0"/>
+          <a:ext cx="0" cy="0"/>
+          <a:chOff x="0" y="0"/>
+          <a:chExt cx="0" cy="0"/>
+        </a:xfrm>
+      </p:grpSpPr>
+      <p:sp>
+        <p:nvSpPr>
+          <p:cNvPr id="2" name="Date Placeholder 1">
+            <a:extLst>
+              <a:ext uri="{FF2B5EF4-FFF2-40B4-BE49-F238E27FC236}">
+                <a16:creationId xmlns:a16="http://schemas.microsoft.com/office/drawing/2014/main" id="{1D8BC612-EF35-44BB-C370-0C69BAC56C22}"/>
+              </a:ext>
+            </a:extLst>
+          </p:cNvPr>
+          <p:cNvSpPr>
+            <a:spLocks noGrp="1"/>
+          </p:cNvSpPr>
+          <p:nvPr>
+            <p:ph type="dt" sz="half" idx="2"/>
+          </p:nvPr>
+        </p:nvSpPr>
+        <p:spPr/>
+        <p:txBody>
+          <a:bodyPr/>
+          <a:lstStyle/>
+          <a:p>
+            <a:pPr marL="0" marR="0" lvl="0" indent="0" algn="l" defTabSz="914400" rtl="0" eaLnBrk="1" fontAlgn="auto" latinLnBrk="0" hangingPunct="1">
+              <a:lnSpc>
+                <a:spcPct val="100000"/>
+              </a:lnSpc>
+              <a:spcBef>
+                <a:spcPts val="0"/>
+              </a:spcBef>
+              <a:spcAft>
+                <a:spcPts val="0"/>
+              </a:spcAft>
+              <a:buClrTx/>
+              <a:buSzTx/>
+              <a:buFontTx/>
+              <a:buNone/>
+              <a:defRPr/>
+            </a:pPr>
+            <a:r>
+              <a:rPr kumimoji="0" lang="en-US" sz="1000" b="0" i="0" u="none" strike="noStrike" kern="1200" cap="none" spc="0" normalizeH="0" baseline="0" noProof="0">
+                <a:ln>
+                  <a:noFill/>
+                </a:ln>
+                <a:solidFill>
+                  <a:schemeClr val="tx1"/>
+                </a:solidFill>
+                <a:effectLst/>
+                <a:uLnTx/>
+                <a:uFillTx/>
+                <a:latin typeface="+mn-lt"/>
+                <a:ea typeface="+mn-ea"/>
+                <a:cs typeface="+mn-cs"/>
+              </a:rPr>
+              <a:t>3-Sep-24</a:t>
+            </a:r>
+            <a:endParaRPr kumimoji="0" lang="en-US" sz="1000" b="0" i="0" u="none" strike="noStrike" kern="1200" cap="none" spc="0" normalizeH="0" baseline="0" noProof="0" dirty="0">
+              <a:ln>
+                <a:noFill/>
+              </a:ln>
+              <a:solidFill>
+                <a:schemeClr val="tx1"/>
+              </a:solidFill>
+              <a:effectLst/>
+              <a:uLnTx/>
+              <a:uFillTx/>
+              <a:latin typeface="+mn-lt"/>
+              <a:ea typeface="+mn-ea"/>
+              <a:cs typeface="+mn-cs"/>
+            </a:endParaRPr>
+          </a:p>
+        </p:txBody>
+      </p:sp>
+      <p:pic>
+        <p:nvPicPr>
+          <p:cNvPr id="3" name="Picture 2">
+            <a:extLst>
+              <a:ext uri="{FF2B5EF4-FFF2-40B4-BE49-F238E27FC236}">
+                <a16:creationId xmlns:a16="http://schemas.microsoft.com/office/drawing/2014/main" id="{562C6F7C-28AE-4E3C-8AA3-B8F6BC0E8EB7}"/>
+              </a:ext>
+            </a:extLst>
+          </p:cNvPr>
+          <p:cNvPicPr>
+            <a:picLocks noChangeAspect="1"/>
+          </p:cNvPicPr>
+          <p:nvPr/>
+        </p:nvPicPr>
+        <p:blipFill>
+          <a:blip r:embed="rId2"/>
+          <a:stretch>
+            <a:fillRect/>
+          </a:stretch>
+        </p:blipFill>
+        <p:spPr>
+          <a:xfrm>
+            <a:off x="776605" y="881159"/>
+            <a:ext cx="3628390" cy="1203325"/>
+          </a:xfrm>
+          <a:prstGeom prst="rect">
+            <a:avLst/>
+          </a:prstGeom>
+        </p:spPr>
+      </p:pic>
+      <p:pic>
+        <p:nvPicPr>
+          <p:cNvPr id="4" name="Picture 3">
+            <a:extLst>
+              <a:ext uri="{FF2B5EF4-FFF2-40B4-BE49-F238E27FC236}">
+                <a16:creationId xmlns:a16="http://schemas.microsoft.com/office/drawing/2014/main" id="{6E833318-969A-66AB-C3C3-A8054A2C413A}"/>
+              </a:ext>
+            </a:extLst>
+          </p:cNvPr>
+          <p:cNvPicPr>
+            <a:picLocks noChangeAspect="1"/>
+          </p:cNvPicPr>
+          <p:nvPr/>
+        </p:nvPicPr>
+        <p:blipFill>
+          <a:blip r:embed="rId3"/>
+          <a:stretch>
+            <a:fillRect/>
+          </a:stretch>
+        </p:blipFill>
+        <p:spPr>
+          <a:xfrm>
+            <a:off x="4572000" y="609600"/>
+            <a:ext cx="4495800" cy="1746445"/>
+          </a:xfrm>
+          <a:prstGeom prst="rect">
+            <a:avLst/>
+          </a:prstGeom>
+        </p:spPr>
+      </p:pic>
+      <p:pic>
+        <p:nvPicPr>
+          <p:cNvPr id="5" name="Picture 4">
+            <a:extLst>
+              <a:ext uri="{FF2B5EF4-FFF2-40B4-BE49-F238E27FC236}">
+                <a16:creationId xmlns:a16="http://schemas.microsoft.com/office/drawing/2014/main" id="{BD71C665-ED8B-7AC4-93FC-9DCA3313AF77}"/>
+              </a:ext>
+            </a:extLst>
+          </p:cNvPr>
+          <p:cNvPicPr>
+            <a:picLocks noChangeAspect="1"/>
+          </p:cNvPicPr>
+          <p:nvPr/>
+        </p:nvPicPr>
+        <p:blipFill>
+          <a:blip r:embed="rId4"/>
+          <a:stretch>
+            <a:fillRect/>
+          </a:stretch>
+        </p:blipFill>
+        <p:spPr>
+          <a:xfrm>
+            <a:off x="1066800" y="2697783"/>
+            <a:ext cx="7228135" cy="3276600"/>
+          </a:xfrm>
+          <a:prstGeom prst="rect">
+            <a:avLst/>
+          </a:prstGeom>
+        </p:spPr>
+      </p:pic>
+    </p:spTree>
+    <p:extLst>
+      <p:ext uri="{BB962C8B-B14F-4D97-AF65-F5344CB8AC3E}">
+        <p14:creationId xmlns:p14="http://schemas.microsoft.com/office/powerpoint/2010/main" val="1557391421"/>
+      </p:ext>
+    </p:extLst>
+  </p:cSld>
+  <p:clrMapOvr>
+    <a:masterClrMapping/>
+  </p:clrMapOvr>
+  <p:transition>
+    <p:fade/>
+  </p:transition>
+</p:sld>
+</file>
+
+<file path=ppt/slides/slide28.xml><?xml version="1.0" encoding="utf-8"?>
+<p:sld xmlns:a="http://schemas.openxmlformats.org/drawingml/2006/main" xmlns:r="http://schemas.openxmlformats.org/officeDocument/2006/relationships" xmlns:p="http://schemas.openxmlformats.org/presentationml/2006/main">
+  <p:cSld>
+    <p:spTree>
+      <p:nvGrpSpPr>
+        <p:cNvPr id="1" name="">
+          <a:extLst>
+            <a:ext uri="{FF2B5EF4-FFF2-40B4-BE49-F238E27FC236}">
+              <a16:creationId xmlns:a16="http://schemas.microsoft.com/office/drawing/2014/main" id="{04C77280-F1F2-6471-4ABA-89D465DF6540}"/>
+            </a:ext>
+          </a:extLst>
+        </p:cNvPr>
+        <p:cNvGrpSpPr/>
+        <p:nvPr/>
+      </p:nvGrpSpPr>
+      <p:grpSpPr>
+        <a:xfrm>
+          <a:off x="0" y="0"/>
+          <a:ext cx="0" cy="0"/>
+          <a:chOff x="0" y="0"/>
+          <a:chExt cx="0" cy="0"/>
+        </a:xfrm>
+      </p:grpSpPr>
+      <p:sp>
+        <p:nvSpPr>
+          <p:cNvPr id="2" name="Date Placeholder 1">
+            <a:extLst>
+              <a:ext uri="{FF2B5EF4-FFF2-40B4-BE49-F238E27FC236}">
+                <a16:creationId xmlns:a16="http://schemas.microsoft.com/office/drawing/2014/main" id="{4BF4ECF9-687A-6E22-8867-748BA3578451}"/>
+              </a:ext>
+            </a:extLst>
+          </p:cNvPr>
+          <p:cNvSpPr>
+            <a:spLocks noGrp="1"/>
+          </p:cNvSpPr>
+          <p:nvPr>
+            <p:ph type="dt" sz="half" idx="2"/>
+          </p:nvPr>
+        </p:nvSpPr>
+        <p:spPr/>
+        <p:txBody>
+          <a:bodyPr/>
+          <a:lstStyle/>
+          <a:p>
+            <a:pPr marL="0" marR="0" lvl="0" indent="0" algn="l" defTabSz="914400" rtl="0" eaLnBrk="1" fontAlgn="auto" latinLnBrk="0" hangingPunct="1">
+              <a:lnSpc>
+                <a:spcPct val="100000"/>
+              </a:lnSpc>
+              <a:spcBef>
+                <a:spcPts val="0"/>
+              </a:spcBef>
+              <a:spcAft>
+                <a:spcPts val="0"/>
+              </a:spcAft>
+              <a:buClrTx/>
+              <a:buSzTx/>
+              <a:buFontTx/>
+              <a:buNone/>
+              <a:defRPr/>
+            </a:pPr>
+            <a:r>
+              <a:rPr kumimoji="0" lang="en-US" sz="1000" b="0" i="0" u="none" strike="noStrike" kern="1200" cap="none" spc="0" normalizeH="0" baseline="0" noProof="0">
+                <a:ln>
+                  <a:noFill/>
+                </a:ln>
+                <a:solidFill>
+                  <a:schemeClr val="tx1"/>
+                </a:solidFill>
+                <a:effectLst/>
+                <a:uLnTx/>
+                <a:uFillTx/>
+                <a:latin typeface="+mn-lt"/>
+                <a:ea typeface="+mn-ea"/>
+                <a:cs typeface="+mn-cs"/>
+              </a:rPr>
+              <a:t>3-Sep-24</a:t>
+            </a:r>
+            <a:endParaRPr kumimoji="0" lang="en-US" sz="1000" b="0" i="0" u="none" strike="noStrike" kern="1200" cap="none" spc="0" normalizeH="0" baseline="0" noProof="0" dirty="0">
+              <a:ln>
+                <a:noFill/>
+              </a:ln>
+              <a:solidFill>
+                <a:schemeClr val="tx1"/>
+              </a:solidFill>
+              <a:effectLst/>
+              <a:uLnTx/>
+              <a:uFillTx/>
+              <a:latin typeface="+mn-lt"/>
+              <a:ea typeface="+mn-ea"/>
+              <a:cs typeface="+mn-cs"/>
+            </a:endParaRPr>
+          </a:p>
+        </p:txBody>
+      </p:sp>
+      <p:pic>
+        <p:nvPicPr>
+          <p:cNvPr id="3" name="Picture 2">
+            <a:extLst>
+              <a:ext uri="{FF2B5EF4-FFF2-40B4-BE49-F238E27FC236}">
+                <a16:creationId xmlns:a16="http://schemas.microsoft.com/office/drawing/2014/main" id="{2BA49B93-A9F2-FF4F-3C1D-3C6DD54F69C3}"/>
+              </a:ext>
+            </a:extLst>
+          </p:cNvPr>
+          <p:cNvPicPr>
+            <a:picLocks noChangeAspect="1"/>
+          </p:cNvPicPr>
+          <p:nvPr/>
+        </p:nvPicPr>
+        <p:blipFill>
+          <a:blip r:embed="rId2"/>
+          <a:stretch>
+            <a:fillRect/>
+          </a:stretch>
+        </p:blipFill>
+        <p:spPr>
+          <a:xfrm>
+            <a:off x="1905000" y="762000"/>
+            <a:ext cx="5943600" cy="1331595"/>
+          </a:xfrm>
+          <a:prstGeom prst="rect">
+            <a:avLst/>
+          </a:prstGeom>
+        </p:spPr>
+      </p:pic>
+      <p:pic>
+        <p:nvPicPr>
+          <p:cNvPr id="4" name="Picture 3">
+            <a:extLst>
+              <a:ext uri="{FF2B5EF4-FFF2-40B4-BE49-F238E27FC236}">
+                <a16:creationId xmlns:a16="http://schemas.microsoft.com/office/drawing/2014/main" id="{48D7ABF9-5483-5D54-0917-7A3DEB0DF5C2}"/>
+              </a:ext>
+            </a:extLst>
+          </p:cNvPr>
+          <p:cNvPicPr>
+            <a:picLocks noChangeAspect="1"/>
+          </p:cNvPicPr>
+          <p:nvPr/>
+        </p:nvPicPr>
+        <p:blipFill>
+          <a:blip r:embed="rId3"/>
+          <a:stretch>
+            <a:fillRect/>
+          </a:stretch>
+        </p:blipFill>
+        <p:spPr>
+          <a:xfrm>
+            <a:off x="838200" y="2400300"/>
+            <a:ext cx="8135726" cy="2057400"/>
+          </a:xfrm>
+          <a:prstGeom prst="rect">
+            <a:avLst/>
+          </a:prstGeom>
+        </p:spPr>
+      </p:pic>
+    </p:spTree>
+    <p:extLst>
+      <p:ext uri="{BB962C8B-B14F-4D97-AF65-F5344CB8AC3E}">
+        <p14:creationId xmlns:p14="http://schemas.microsoft.com/office/powerpoint/2010/main" val="2980616512"/>
+      </p:ext>
+    </p:extLst>
+  </p:cSld>
+  <p:clrMapOvr>
+    <a:masterClrMapping/>
+  </p:clrMapOvr>
+  <p:transition>
+    <p:fade/>
+  </p:transition>
+</p:sld>
+</file>
+
+<file path=ppt/slides/slide29.xml><?xml version="1.0" encoding="utf-8"?>
+<p:sld xmlns:a="http://schemas.openxmlformats.org/drawingml/2006/main" xmlns:r="http://schemas.openxmlformats.org/officeDocument/2006/relationships" xmlns:p="http://schemas.openxmlformats.org/presentationml/2006/main">
+  <p:cSld>
+    <p:spTree>
+      <p:nvGrpSpPr>
+        <p:cNvPr id="1" name="">
+          <a:extLst>
+            <a:ext uri="{FF2B5EF4-FFF2-40B4-BE49-F238E27FC236}">
+              <a16:creationId xmlns:a16="http://schemas.microsoft.com/office/drawing/2014/main" id="{60145799-1448-C815-FFC7-715F68E8842E}"/>
+            </a:ext>
+          </a:extLst>
+        </p:cNvPr>
+        <p:cNvGrpSpPr/>
+        <p:nvPr/>
+      </p:nvGrpSpPr>
+      <p:grpSpPr>
+        <a:xfrm>
+          <a:off x="0" y="0"/>
+          <a:ext cx="0" cy="0"/>
+          <a:chOff x="0" y="0"/>
+          <a:chExt cx="0" cy="0"/>
+        </a:xfrm>
+      </p:grpSpPr>
+      <p:sp>
+        <p:nvSpPr>
+          <p:cNvPr id="2" name="Date Placeholder 1">
+            <a:extLst>
+              <a:ext uri="{FF2B5EF4-FFF2-40B4-BE49-F238E27FC236}">
+                <a16:creationId xmlns:a16="http://schemas.microsoft.com/office/drawing/2014/main" id="{CC6142F9-3FF7-E9CD-0809-B43076129BEF}"/>
+              </a:ext>
+            </a:extLst>
+          </p:cNvPr>
+          <p:cNvSpPr>
+            <a:spLocks noGrp="1"/>
+          </p:cNvSpPr>
+          <p:nvPr>
+            <p:ph type="dt" sz="half" idx="2"/>
+          </p:nvPr>
+        </p:nvSpPr>
+        <p:spPr/>
+        <p:txBody>
+          <a:bodyPr/>
+          <a:lstStyle/>
+          <a:p>
+            <a:pPr marL="0" marR="0" lvl="0" indent="0" algn="l" defTabSz="914400" rtl="0" eaLnBrk="1" fontAlgn="auto" latinLnBrk="0" hangingPunct="1">
+              <a:lnSpc>
+                <a:spcPct val="100000"/>
+              </a:lnSpc>
+              <a:spcBef>
+                <a:spcPts val="0"/>
+              </a:spcBef>
+              <a:spcAft>
+                <a:spcPts val="0"/>
+              </a:spcAft>
+              <a:buClrTx/>
+              <a:buSzTx/>
+              <a:buFontTx/>
+              <a:buNone/>
+              <a:defRPr/>
+            </a:pPr>
+            <a:r>
+              <a:rPr kumimoji="0" lang="en-US" sz="1000" b="0" i="0" u="none" strike="noStrike" kern="1200" cap="none" spc="0" normalizeH="0" baseline="0" noProof="0">
+                <a:ln>
+                  <a:noFill/>
+                </a:ln>
+                <a:solidFill>
+                  <a:schemeClr val="tx1"/>
+                </a:solidFill>
+                <a:effectLst/>
+                <a:uLnTx/>
+                <a:uFillTx/>
+                <a:latin typeface="+mn-lt"/>
+                <a:ea typeface="+mn-ea"/>
+                <a:cs typeface="+mn-cs"/>
+              </a:rPr>
+              <a:t>3-Sep-24</a:t>
+            </a:r>
+            <a:endParaRPr kumimoji="0" lang="en-US" sz="1000" b="0" i="0" u="none" strike="noStrike" kern="1200" cap="none" spc="0" normalizeH="0" baseline="0" noProof="0" dirty="0">
+              <a:ln>
+                <a:noFill/>
+              </a:ln>
+              <a:solidFill>
+                <a:schemeClr val="tx1"/>
+              </a:solidFill>
+              <a:effectLst/>
+              <a:uLnTx/>
+              <a:uFillTx/>
+              <a:latin typeface="+mn-lt"/>
+              <a:ea typeface="+mn-ea"/>
+              <a:cs typeface="+mn-cs"/>
+            </a:endParaRPr>
+          </a:p>
+        </p:txBody>
+      </p:sp>
+      <p:pic>
+        <p:nvPicPr>
+          <p:cNvPr id="3" name="Picture 2">
+            <a:extLst>
+              <a:ext uri="{FF2B5EF4-FFF2-40B4-BE49-F238E27FC236}">
+                <a16:creationId xmlns:a16="http://schemas.microsoft.com/office/drawing/2014/main" id="{7A62B204-A348-9A94-FFBE-38D0065EE105}"/>
+              </a:ext>
+            </a:extLst>
+          </p:cNvPr>
+          <p:cNvPicPr>
+            <a:picLocks noChangeAspect="1"/>
+          </p:cNvPicPr>
+          <p:nvPr/>
+        </p:nvPicPr>
+        <p:blipFill>
+          <a:blip r:embed="rId2"/>
+          <a:stretch>
+            <a:fillRect/>
+          </a:stretch>
+        </p:blipFill>
+        <p:spPr>
+          <a:xfrm>
+            <a:off x="1752600" y="762000"/>
+            <a:ext cx="5943600" cy="2012315"/>
+          </a:xfrm>
+          <a:prstGeom prst="rect">
+            <a:avLst/>
+          </a:prstGeom>
+        </p:spPr>
+      </p:pic>
+      <p:pic>
+        <p:nvPicPr>
+          <p:cNvPr id="4" name="Picture 3">
+            <a:extLst>
+              <a:ext uri="{FF2B5EF4-FFF2-40B4-BE49-F238E27FC236}">
+                <a16:creationId xmlns:a16="http://schemas.microsoft.com/office/drawing/2014/main" id="{9EC63F36-3A22-0441-64AE-BF1E11B01A8C}"/>
+              </a:ext>
+            </a:extLst>
+          </p:cNvPr>
+          <p:cNvPicPr>
+            <a:picLocks noChangeAspect="1"/>
+          </p:cNvPicPr>
+          <p:nvPr/>
+        </p:nvPicPr>
+        <p:blipFill>
+          <a:blip r:embed="rId3"/>
+          <a:stretch>
+            <a:fillRect/>
+          </a:stretch>
+        </p:blipFill>
+        <p:spPr>
+          <a:xfrm>
+            <a:off x="2893293" y="4426359"/>
+            <a:ext cx="3124540" cy="1841516"/>
+          </a:xfrm>
+          <a:prstGeom prst="rect">
+            <a:avLst/>
+          </a:prstGeom>
+        </p:spPr>
+      </p:pic>
+      <p:pic>
+        <p:nvPicPr>
+          <p:cNvPr id="5" name="Picture 4">
+            <a:extLst>
+              <a:ext uri="{FF2B5EF4-FFF2-40B4-BE49-F238E27FC236}">
+                <a16:creationId xmlns:a16="http://schemas.microsoft.com/office/drawing/2014/main" id="{82C489F5-2A51-EAE2-5C4E-4A32154FADD0}"/>
+              </a:ext>
+            </a:extLst>
+          </p:cNvPr>
+          <p:cNvPicPr>
+            <a:picLocks noChangeAspect="1"/>
+          </p:cNvPicPr>
+          <p:nvPr/>
+        </p:nvPicPr>
+        <p:blipFill>
+          <a:blip r:embed="rId4"/>
+          <a:stretch>
+            <a:fillRect/>
+          </a:stretch>
+        </p:blipFill>
+        <p:spPr>
+          <a:xfrm>
+            <a:off x="2893293" y="3446584"/>
+            <a:ext cx="3126508" cy="992065"/>
+          </a:xfrm>
+          <a:prstGeom prst="rect">
+            <a:avLst/>
+          </a:prstGeom>
+        </p:spPr>
+      </p:pic>
+    </p:spTree>
+    <p:extLst>
+      <p:ext uri="{BB962C8B-B14F-4D97-AF65-F5344CB8AC3E}">
+        <p14:creationId xmlns:p14="http://schemas.microsoft.com/office/powerpoint/2010/main" val="4259553976"/>
+      </p:ext>
+    </p:extLst>
   </p:cSld>
   <p:clrMapOvr>
     <a:masterClrMapping/>
@@ -15780,7 +17553,7 @@
                 <a:cs typeface="Times New Roman" panose="02020603050405020304" pitchFamily="18" charset="0"/>
                 <a:sym typeface="+mn-ea"/>
               </a:rPr>
-              <a:t>PROJECT DESCRIPTION</a:t>
+              <a:t>OBJECTIVE</a:t>
             </a:r>
             <a:endParaRPr lang="en-IN" b="1" dirty="0">
               <a:latin typeface="Algerian" panose="04020705040A02060702" pitchFamily="82" charset="0"/>
@@ -15790,30 +17563,28 @@
       </p:sp>
       <p:sp>
         <p:nvSpPr>
-          <p:cNvPr id="5" name="Rectangle 2">
+          <p:cNvPr id="8" name="Rectangle 2">
             <a:extLst>
               <a:ext uri="{FF2B5EF4-FFF2-40B4-BE49-F238E27FC236}">
-                <a16:creationId xmlns:a16="http://schemas.microsoft.com/office/drawing/2014/main" id="{EFB4C8D5-A697-1201-5DE5-1A32C15CBA44}"/>
+                <a16:creationId xmlns:a16="http://schemas.microsoft.com/office/drawing/2014/main" id="{5C75F2EF-F367-C057-6453-67ECF5813619}"/>
               </a:ext>
             </a:extLst>
           </p:cNvPr>
-          <p:cNvSpPr>
-            <a:spLocks noGrp="1" noChangeArrowheads="1"/>
+          <p:cNvSpPr txBox="1">
+            <a:spLocks noChangeArrowheads="1"/>
           </p:cNvSpPr>
-          <p:nvPr>
-            <p:ph type="body" idx="1"/>
-          </p:nvPr>
+          <p:nvPr/>
         </p:nvSpPr>
         <p:spPr bwMode="auto">
           <a:xfrm>
-            <a:off x="949390" y="1828800"/>
-            <a:ext cx="7543800" cy="4413516"/>
+            <a:off x="1066800" y="1905000"/>
+            <a:ext cx="7543800" cy="2585323"/>
           </a:xfrm>
           <a:prstGeom prst="rect">
             <a:avLst/>
           </a:prstGeom>
           <a:noFill/>
-          <a:ln>
+          <a:ln w="9525">
             <a:noFill/>
           </a:ln>
           <a:effectLst/>
@@ -15853,133 +17624,333 @@
             </a:prstTxWarp>
             <a:spAutoFit/>
           </a:bodyPr>
-          <a:lstStyle/>
+          <a:lstStyle>
+            <a:lvl1pPr marL="273050" indent="-273050" algn="l" rtl="0" eaLnBrk="0" fontAlgn="base" hangingPunct="0">
+              <a:spcBef>
+                <a:spcPct val="20000"/>
+              </a:spcBef>
+              <a:spcAft>
+                <a:spcPct val="0"/>
+              </a:spcAft>
+              <a:buSzPct val="80000"/>
+              <a:buFont typeface="Wingdings" panose="05000000000000000000" pitchFamily="2" charset="2"/>
+              <a:buChar char="Ø"/>
+              <a:defRPr sz="2000" kern="1200">
+                <a:solidFill>
+                  <a:schemeClr val="tx1"/>
+                </a:solidFill>
+                <a:latin typeface="+mn-lt"/>
+                <a:ea typeface="+mn-ea"/>
+                <a:cs typeface="+mn-cs"/>
+              </a:defRPr>
+            </a:lvl1pPr>
+            <a:lvl2pPr marL="640080" indent="-246380" algn="l" rtl="0" eaLnBrk="0" fontAlgn="base" hangingPunct="0">
+              <a:spcBef>
+                <a:spcPct val="20000"/>
+              </a:spcBef>
+              <a:spcAft>
+                <a:spcPct val="0"/>
+              </a:spcAft>
+              <a:buSzPct val="80000"/>
+              <a:buFont typeface="Wingdings" panose="05000000000000000000" pitchFamily="2" charset="2"/>
+              <a:buChar char="Ø"/>
+              <a:defRPr sz="2000" kern="1200">
+                <a:solidFill>
+                  <a:schemeClr val="tx1"/>
+                </a:solidFill>
+                <a:latin typeface="+mn-lt"/>
+                <a:ea typeface="+mn-ea"/>
+                <a:cs typeface="+mn-cs"/>
+              </a:defRPr>
+            </a:lvl2pPr>
+            <a:lvl3pPr marL="914400" indent="-246380" algn="l" rtl="0" eaLnBrk="0" fontAlgn="base" hangingPunct="0">
+              <a:spcBef>
+                <a:spcPct val="20000"/>
+              </a:spcBef>
+              <a:spcAft>
+                <a:spcPct val="0"/>
+              </a:spcAft>
+              <a:buSzPct val="80000"/>
+              <a:buFont typeface="Wingdings" panose="05000000000000000000" pitchFamily="2" charset="2"/>
+              <a:buChar char="Ø"/>
+              <a:defRPr sz="2000" kern="1200">
+                <a:solidFill>
+                  <a:schemeClr val="tx1"/>
+                </a:solidFill>
+                <a:latin typeface="+mn-lt"/>
+                <a:ea typeface="+mn-ea"/>
+                <a:cs typeface="+mn-cs"/>
+              </a:defRPr>
+            </a:lvl3pPr>
+            <a:lvl4pPr marL="1187450" indent="-209550" algn="l" rtl="0" eaLnBrk="0" fontAlgn="base" hangingPunct="0">
+              <a:spcBef>
+                <a:spcPct val="20000"/>
+              </a:spcBef>
+              <a:spcAft>
+                <a:spcPct val="0"/>
+              </a:spcAft>
+              <a:buSzPct val="80000"/>
+              <a:buFont typeface="Wingdings" panose="05000000000000000000" pitchFamily="2" charset="2"/>
+              <a:buChar char="Ø"/>
+              <a:defRPr sz="2000" kern="1200">
+                <a:solidFill>
+                  <a:schemeClr val="tx1"/>
+                </a:solidFill>
+                <a:latin typeface="+mn-lt"/>
+                <a:ea typeface="+mn-ea"/>
+                <a:cs typeface="+mn-cs"/>
+              </a:defRPr>
+            </a:lvl4pPr>
+            <a:lvl5pPr marL="1462405" indent="-209550" algn="l" rtl="0" eaLnBrk="0" fontAlgn="base" hangingPunct="0">
+              <a:spcBef>
+                <a:spcPct val="20000"/>
+              </a:spcBef>
+              <a:spcAft>
+                <a:spcPct val="0"/>
+              </a:spcAft>
+              <a:buSzPct val="80000"/>
+              <a:buFont typeface="Wingdings" panose="05000000000000000000" pitchFamily="2" charset="2"/>
+              <a:buChar char="Ø"/>
+              <a:defRPr sz="2000" kern="1200">
+                <a:solidFill>
+                  <a:schemeClr val="tx1"/>
+                </a:solidFill>
+                <a:latin typeface="+mn-lt"/>
+                <a:ea typeface="+mn-ea"/>
+                <a:cs typeface="+mn-cs"/>
+              </a:defRPr>
+            </a:lvl5pPr>
+            <a:lvl6pPr marL="1737360" indent="-210185" algn="l" rtl="0" eaLnBrk="1" latinLnBrk="0" hangingPunct="1">
+              <a:spcBef>
+                <a:spcPct val="20000"/>
+              </a:spcBef>
+              <a:buClr>
+                <a:schemeClr val="accent5"/>
+              </a:buClr>
+              <a:buSzPct val="80000"/>
+              <a:buFont typeface="Wingdings 2" panose="05020102010507070707"/>
+              <a:buChar char=""/>
+              <a:defRPr kumimoji="0" sz="1800" kern="1200">
+                <a:solidFill>
+                  <a:schemeClr val="tx1"/>
+                </a:solidFill>
+                <a:latin typeface="+mn-lt"/>
+                <a:ea typeface="+mn-ea"/>
+                <a:cs typeface="+mn-cs"/>
+              </a:defRPr>
+            </a:lvl6pPr>
+            <a:lvl7pPr marL="1920240" indent="-182880" algn="l" rtl="0" eaLnBrk="1" latinLnBrk="0" hangingPunct="1">
+              <a:spcBef>
+                <a:spcPct val="20000"/>
+              </a:spcBef>
+              <a:buClr>
+                <a:schemeClr val="accent6"/>
+              </a:buClr>
+              <a:buSzPct val="80000"/>
+              <a:buFont typeface="Wingdings 2" panose="05020102010507070707"/>
+              <a:buChar char=""/>
+              <a:defRPr kumimoji="0" sz="1600" kern="1200" baseline="0">
+                <a:solidFill>
+                  <a:schemeClr val="tx1"/>
+                </a:solidFill>
+                <a:latin typeface="+mn-lt"/>
+                <a:ea typeface="+mn-ea"/>
+                <a:cs typeface="+mn-cs"/>
+              </a:defRPr>
+            </a:lvl7pPr>
+            <a:lvl8pPr marL="2194560" indent="-182880" algn="l" rtl="0" eaLnBrk="1" latinLnBrk="0" hangingPunct="1">
+              <a:spcBef>
+                <a:spcPct val="20000"/>
+              </a:spcBef>
+              <a:buClr>
+                <a:schemeClr val="tx2"/>
+              </a:buClr>
+              <a:buChar char="•"/>
+              <a:defRPr kumimoji="0" sz="1600" kern="1200">
+                <a:solidFill>
+                  <a:schemeClr val="tx1"/>
+                </a:solidFill>
+                <a:latin typeface="+mn-lt"/>
+                <a:ea typeface="+mn-ea"/>
+                <a:cs typeface="+mn-cs"/>
+              </a:defRPr>
+            </a:lvl8pPr>
+            <a:lvl9pPr marL="2468880" indent="-182880" algn="l" rtl="0" eaLnBrk="1" latinLnBrk="0" hangingPunct="1">
+              <a:spcBef>
+                <a:spcPct val="20000"/>
+              </a:spcBef>
+              <a:buClr>
+                <a:schemeClr val="tx2"/>
+              </a:buClr>
+              <a:buFontTx/>
+              <a:buChar char="•"/>
+              <a:defRPr kumimoji="0" sz="1400" kern="1200" baseline="0">
+                <a:solidFill>
+                  <a:schemeClr val="tx1"/>
+                </a:solidFill>
+                <a:latin typeface="+mn-lt"/>
+                <a:ea typeface="+mn-ea"/>
+                <a:cs typeface="+mn-cs"/>
+              </a:defRPr>
+            </a:lvl9pPr>
+          </a:lstStyle>
           <a:p>
             <a:pPr algn="just"/>
             <a:r>
-              <a:rPr lang="en-GB" sz="1800" b="1" dirty="0">
+              <a:rPr lang="en-US" sz="1800" dirty="0">
                 <a:latin typeface="Times New Roman" panose="02020603050405020304" pitchFamily="18" charset="0"/>
                 <a:cs typeface="Times New Roman" panose="02020603050405020304" pitchFamily="18" charset="0"/>
               </a:rPr>
-              <a:t>Comprehensive Employee Management</a:t>
-            </a:r>
-            <a:r>
-              <a:rPr lang="en-GB" sz="1800" dirty="0">
+              <a:t>1. Develop an integrated system for comprehensive employee data management</a:t>
+            </a:r>
+          </a:p>
+          <a:p>
+            <a:pPr algn="just"/>
+            <a:r>
+              <a:rPr lang="en-US" sz="1800" dirty="0">
                 <a:latin typeface="Times New Roman" panose="02020603050405020304" pitchFamily="18" charset="0"/>
                 <a:cs typeface="Times New Roman" panose="02020603050405020304" pitchFamily="18" charset="0"/>
               </a:rPr>
-              <a:t>: A web application for managing employee data, attendance, and roles.</a:t>
+              <a:t>2. Automate attendance tracking and leave management processes</a:t>
             </a:r>
           </a:p>
           <a:p>
             <a:pPr algn="just"/>
-            <a:endParaRPr lang="en-GB" sz="1800" dirty="0">
+            <a:r>
+              <a:rPr lang="en-US" sz="1800" dirty="0">
+                <a:latin typeface="Times New Roman" panose="02020603050405020304" pitchFamily="18" charset="0"/>
+                <a:cs typeface="Times New Roman" panose="02020603050405020304" pitchFamily="18" charset="0"/>
+              </a:rPr>
+              <a:t>3. Implement a real-time salary calculation system</a:t>
+            </a:r>
+          </a:p>
+          <a:p>
+            <a:pPr algn="just"/>
+            <a:r>
+              <a:rPr lang="en-US" sz="1800" dirty="0">
+                <a:latin typeface="Times New Roman" panose="02020603050405020304" pitchFamily="18" charset="0"/>
+                <a:cs typeface="Times New Roman" panose="02020603050405020304" pitchFamily="18" charset="0"/>
+              </a:rPr>
+              <a:t>4. Enhance communication between management and employees</a:t>
+            </a:r>
+          </a:p>
+          <a:p>
+            <a:pPr algn="just"/>
+            <a:r>
+              <a:rPr lang="en-US" sz="1800" dirty="0">
+                <a:latin typeface="Times New Roman" panose="02020603050405020304" pitchFamily="18" charset="0"/>
+                <a:cs typeface="Times New Roman" panose="02020603050405020304" pitchFamily="18" charset="0"/>
+              </a:rPr>
+              <a:t>5. Provide a user-friendly interface for both administrators and employees</a:t>
+            </a:r>
+          </a:p>
+          <a:p>
+            <a:pPr algn="just"/>
+            <a:r>
+              <a:rPr lang="en-US" sz="1800" dirty="0">
+                <a:latin typeface="Times New Roman" panose="02020603050405020304" pitchFamily="18" charset="0"/>
+                <a:cs typeface="Times New Roman" panose="02020603050405020304" pitchFamily="18" charset="0"/>
+              </a:rPr>
+              <a:t>6. Ensure data security and role-based access control.</a:t>
+            </a:r>
+          </a:p>
+          <a:p>
+            <a:pPr algn="just">
+              <a:spcBef>
+                <a:spcPct val="0"/>
+              </a:spcBef>
+              <a:buSzTx/>
+            </a:pPr>
+            <a:endParaRPr lang="en-US" altLang="en-US" sz="1800" dirty="0">
               <a:latin typeface="Times New Roman" panose="02020603050405020304" pitchFamily="18" charset="0"/>
               <a:cs typeface="Times New Roman" panose="02020603050405020304" pitchFamily="18" charset="0"/>
             </a:endParaRPr>
           </a:p>
-          <a:p>
-            <a:pPr algn="just"/>
-            <a:r>
-              <a:rPr lang="en-GB" sz="1800" b="1" dirty="0">
-                <a:latin typeface="Times New Roman" panose="02020603050405020304" pitchFamily="18" charset="0"/>
-                <a:cs typeface="Times New Roman" panose="02020603050405020304" pitchFamily="18" charset="0"/>
-              </a:rPr>
-              <a:t>User-Friendly Interface</a:t>
-            </a:r>
-            <a:r>
-              <a:rPr lang="en-GB" sz="1800" dirty="0">
-                <a:latin typeface="Times New Roman" panose="02020603050405020304" pitchFamily="18" charset="0"/>
-                <a:cs typeface="Times New Roman" panose="02020603050405020304" pitchFamily="18" charset="0"/>
-              </a:rPr>
-              <a:t>: Intuitive design for ease of use by admins and employees.</a:t>
-            </a:r>
-          </a:p>
-          <a:p>
-            <a:pPr algn="just"/>
-            <a:endParaRPr lang="en-GB" sz="1800" dirty="0">
-              <a:latin typeface="Times New Roman" panose="02020603050405020304" pitchFamily="18" charset="0"/>
-              <a:cs typeface="Times New Roman" panose="02020603050405020304" pitchFamily="18" charset="0"/>
-            </a:endParaRPr>
-          </a:p>
-          <a:p>
-            <a:pPr algn="just"/>
-            <a:r>
-              <a:rPr lang="en-GB" sz="1800" b="1" dirty="0">
-                <a:latin typeface="Times New Roman" panose="02020603050405020304" pitchFamily="18" charset="0"/>
-                <a:cs typeface="Times New Roman" panose="02020603050405020304" pitchFamily="18" charset="0"/>
-              </a:rPr>
-              <a:t>Secure Access</a:t>
-            </a:r>
-            <a:r>
-              <a:rPr lang="en-GB" sz="1800" dirty="0">
-                <a:latin typeface="Times New Roman" panose="02020603050405020304" pitchFamily="18" charset="0"/>
-                <a:cs typeface="Times New Roman" panose="02020603050405020304" pitchFamily="18" charset="0"/>
-              </a:rPr>
-              <a:t>: Role-based access control to protect sensitive information.</a:t>
-            </a:r>
-          </a:p>
-          <a:p>
-            <a:pPr algn="just"/>
-            <a:endParaRPr lang="en-GB" sz="1800" dirty="0">
-              <a:latin typeface="Times New Roman" panose="02020603050405020304" pitchFamily="18" charset="0"/>
-              <a:cs typeface="Times New Roman" panose="02020603050405020304" pitchFamily="18" charset="0"/>
-            </a:endParaRPr>
-          </a:p>
-          <a:p>
-            <a:pPr algn="just"/>
-            <a:r>
-              <a:rPr lang="en-GB" sz="1800" b="1" dirty="0">
-                <a:latin typeface="Times New Roman" panose="02020603050405020304" pitchFamily="18" charset="0"/>
-                <a:cs typeface="Times New Roman" panose="02020603050405020304" pitchFamily="18" charset="0"/>
-              </a:rPr>
-              <a:t>Real-Time Updates</a:t>
-            </a:r>
-            <a:r>
-              <a:rPr lang="en-GB" sz="1800" dirty="0">
-                <a:latin typeface="Times New Roman" panose="02020603050405020304" pitchFamily="18" charset="0"/>
-                <a:cs typeface="Times New Roman" panose="02020603050405020304" pitchFamily="18" charset="0"/>
-              </a:rPr>
-              <a:t>: Live updates on employee status, attendance, and records.</a:t>
-            </a:r>
-          </a:p>
-          <a:p>
-            <a:pPr algn="just"/>
-            <a:endParaRPr lang="en-GB" sz="1800" dirty="0">
-              <a:latin typeface="Times New Roman" panose="02020603050405020304" pitchFamily="18" charset="0"/>
-              <a:cs typeface="Times New Roman" panose="02020603050405020304" pitchFamily="18" charset="0"/>
-            </a:endParaRPr>
-          </a:p>
-          <a:p>
-            <a:pPr algn="just"/>
-            <a:r>
-              <a:rPr lang="en-GB" sz="1800" b="1" dirty="0">
-                <a:latin typeface="Times New Roman" panose="02020603050405020304" pitchFamily="18" charset="0"/>
-                <a:cs typeface="Times New Roman" panose="02020603050405020304" pitchFamily="18" charset="0"/>
-              </a:rPr>
-              <a:t>Scalable Architecture</a:t>
-            </a:r>
-            <a:r>
-              <a:rPr lang="en-GB" sz="1800" dirty="0">
-                <a:latin typeface="Times New Roman" panose="02020603050405020304" pitchFamily="18" charset="0"/>
-                <a:cs typeface="Times New Roman" panose="02020603050405020304" pitchFamily="18" charset="0"/>
-              </a:rPr>
-              <a:t>: Designed to support growing organizations and additional features.</a:t>
-            </a:r>
-          </a:p>
-          <a:p>
-            <a:pPr marR="0" lvl="0" algn="just" defTabSz="914400" rtl="0" eaLnBrk="0" fontAlgn="base" latinLnBrk="0" hangingPunct="0">
+        </p:txBody>
+      </p:sp>
+    </p:spTree>
+  </p:cSld>
+  <p:clrMapOvr>
+    <a:masterClrMapping/>
+  </p:clrMapOvr>
+  <p:transition>
+    <p:fade/>
+  </p:transition>
+</p:sld>
+</file>
+
+<file path=ppt/slides/slide30.xml><?xml version="1.0" encoding="utf-8"?>
+<p:sld xmlns:a="http://schemas.openxmlformats.org/drawingml/2006/main" xmlns:r="http://schemas.openxmlformats.org/officeDocument/2006/relationships" xmlns:p="http://schemas.openxmlformats.org/presentationml/2006/main">
+  <p:cSld>
+    <p:spTree>
+      <p:nvGrpSpPr>
+        <p:cNvPr id="1" name=""/>
+        <p:cNvGrpSpPr/>
+        <p:nvPr/>
+      </p:nvGrpSpPr>
+      <p:grpSpPr>
+        <a:xfrm>
+          <a:off x="0" y="0"/>
+          <a:ext cx="0" cy="0"/>
+          <a:chOff x="0" y="0"/>
+          <a:chExt cx="0" cy="0"/>
+        </a:xfrm>
+      </p:grpSpPr>
+      <p:sp>
+        <p:nvSpPr>
+          <p:cNvPr id="2" name="Date Placeholder 1">
+            <a:extLst>
+              <a:ext uri="{FF2B5EF4-FFF2-40B4-BE49-F238E27FC236}">
+                <a16:creationId xmlns:a16="http://schemas.microsoft.com/office/drawing/2014/main" id="{F24351EB-822C-A4C3-83BA-93443E2DF952}"/>
+              </a:ext>
+            </a:extLst>
+          </p:cNvPr>
+          <p:cNvSpPr>
+            <a:spLocks noGrp="1"/>
+          </p:cNvSpPr>
+          <p:nvPr>
+            <p:ph type="dt" sz="half" idx="2"/>
+          </p:nvPr>
+        </p:nvSpPr>
+        <p:spPr/>
+        <p:txBody>
+          <a:bodyPr/>
+          <a:lstStyle/>
+          <a:p>
+            <a:pPr marL="0" marR="0" lvl="0" indent="0" algn="l" defTabSz="914400" rtl="0" eaLnBrk="1" fontAlgn="auto" latinLnBrk="0" hangingPunct="1">
+              <a:lnSpc>
+                <a:spcPct val="100000"/>
+              </a:lnSpc>
               <a:spcBef>
-                <a:spcPct val="0"/>
+                <a:spcPts val="0"/>
               </a:spcBef>
               <a:spcAft>
-                <a:spcPct val="0"/>
+                <a:spcPts val="0"/>
               </a:spcAft>
               <a:buClrTx/>
               <a:buSzTx/>
-              <a:tabLst/>
+              <a:buFontTx/>
+              <a:buNone/>
+              <a:defRPr/>
             </a:pPr>
-            <a:endParaRPr kumimoji="0" lang="en-US" altLang="en-US" sz="1800" i="0" u="none" strike="noStrike" cap="none" normalizeH="0" baseline="0" dirty="0">
+            <a:r>
+              <a:rPr kumimoji="0" lang="en-US" sz="1000" b="0" i="0" u="none" strike="noStrike" kern="1200" cap="none" spc="0" normalizeH="0" baseline="0" noProof="0">
+                <a:ln>
+                  <a:noFill/>
+                </a:ln>
+                <a:solidFill>
+                  <a:schemeClr val="tx1"/>
+                </a:solidFill>
+                <a:effectLst/>
+                <a:uLnTx/>
+                <a:uFillTx/>
+                <a:latin typeface="+mn-lt"/>
+                <a:ea typeface="+mn-ea"/>
+                <a:cs typeface="+mn-cs"/>
+              </a:rPr>
+              <a:t>3-Sep-24</a:t>
+            </a:r>
+            <a:endParaRPr kumimoji="0" lang="en-US" sz="1000" b="0" i="0" u="none" strike="noStrike" kern="1200" cap="none" spc="0" normalizeH="0" baseline="0" noProof="0" dirty="0">
               <a:ln>
                 <a:noFill/>
               </a:ln>
@@ -15987,8 +17958,525 @@
                 <a:schemeClr val="tx1"/>
               </a:solidFill>
               <a:effectLst/>
+              <a:uLnTx/>
+              <a:uFillTx/>
+              <a:latin typeface="+mn-lt"/>
+              <a:ea typeface="+mn-ea"/>
+              <a:cs typeface="+mn-cs"/>
+            </a:endParaRPr>
+          </a:p>
+        </p:txBody>
+      </p:sp>
+      <p:sp>
+        <p:nvSpPr>
+          <p:cNvPr id="3" name="TextBox 2">
+            <a:extLst>
+              <a:ext uri="{FF2B5EF4-FFF2-40B4-BE49-F238E27FC236}">
+                <a16:creationId xmlns:a16="http://schemas.microsoft.com/office/drawing/2014/main" id="{519891EC-3A7A-0BDA-B6A6-19C06E0E2D5F}"/>
+              </a:ext>
+            </a:extLst>
+          </p:cNvPr>
+          <p:cNvSpPr txBox="1"/>
+          <p:nvPr/>
+        </p:nvSpPr>
+        <p:spPr>
+          <a:xfrm>
+            <a:off x="3733800" y="762000"/>
+            <a:ext cx="2743200" cy="400110"/>
+          </a:xfrm>
+          <a:prstGeom prst="rect">
+            <a:avLst/>
+          </a:prstGeom>
+          <a:noFill/>
+        </p:spPr>
+        <p:txBody>
+          <a:bodyPr wrap="square">
+            <a:spAutoFit/>
+          </a:bodyPr>
+          <a:lstStyle/>
+          <a:p>
+            <a:r>
+              <a:rPr lang="en-IN" sz="2000" b="1" dirty="0">
+                <a:solidFill>
+                  <a:srgbClr val="C00000"/>
+                </a:solidFill>
+                <a:latin typeface="Times New Roman" panose="02020603050405020304" pitchFamily="18" charset="0"/>
+                <a:cs typeface="Times New Roman" panose="02020603050405020304" pitchFamily="18" charset="0"/>
+              </a:rPr>
+              <a:t>FUTURE WORKS</a:t>
+            </a:r>
+            <a:endParaRPr lang="en-US" sz="2000" dirty="0"/>
+          </a:p>
+        </p:txBody>
+      </p:sp>
+      <p:sp>
+        <p:nvSpPr>
+          <p:cNvPr id="6" name="TextBox 5">
+            <a:extLst>
+              <a:ext uri="{FF2B5EF4-FFF2-40B4-BE49-F238E27FC236}">
+                <a16:creationId xmlns:a16="http://schemas.microsoft.com/office/drawing/2014/main" id="{D3ED2065-FA68-6BFE-AA54-D46F1EB8F2E8}"/>
+              </a:ext>
+            </a:extLst>
+          </p:cNvPr>
+          <p:cNvSpPr txBox="1"/>
+          <p:nvPr/>
+        </p:nvSpPr>
+        <p:spPr>
+          <a:xfrm>
+            <a:off x="1752600" y="1660525"/>
+            <a:ext cx="6858000" cy="646331"/>
+          </a:xfrm>
+          <a:prstGeom prst="rect">
+            <a:avLst/>
+          </a:prstGeom>
+          <a:noFill/>
+        </p:spPr>
+        <p:txBody>
+          <a:bodyPr wrap="square">
+            <a:spAutoFit/>
+          </a:bodyPr>
+          <a:lstStyle/>
+          <a:p>
+            <a:r>
+              <a:rPr lang="en-US" dirty="0"/>
+              <a:t>Connect the EMS to payroll and finance systems for seamless salary processing, tax calculations, and benefits management.</a:t>
+            </a:r>
+          </a:p>
+        </p:txBody>
+      </p:sp>
+      <p:sp>
+        <p:nvSpPr>
+          <p:cNvPr id="8" name="TextBox 7">
+            <a:extLst>
+              <a:ext uri="{FF2B5EF4-FFF2-40B4-BE49-F238E27FC236}">
+                <a16:creationId xmlns:a16="http://schemas.microsoft.com/office/drawing/2014/main" id="{4CC76435-3EBA-FE39-5CE3-DD97C51BBE8F}"/>
+              </a:ext>
+            </a:extLst>
+          </p:cNvPr>
+          <p:cNvSpPr txBox="1"/>
+          <p:nvPr/>
+        </p:nvSpPr>
+        <p:spPr>
+          <a:xfrm>
+            <a:off x="1752600" y="2505670"/>
+            <a:ext cx="6629400" cy="646331"/>
+          </a:xfrm>
+          <a:prstGeom prst="rect">
+            <a:avLst/>
+          </a:prstGeom>
+          <a:noFill/>
+        </p:spPr>
+        <p:txBody>
+          <a:bodyPr wrap="square">
+            <a:spAutoFit/>
+          </a:bodyPr>
+          <a:lstStyle/>
+          <a:p>
+            <a:r>
+              <a:rPr lang="en-US" dirty="0"/>
+              <a:t>Support integrations with tools like Slack, Microsoft Teams, and calendar applications for better communication and scheduling</a:t>
+            </a:r>
+          </a:p>
+        </p:txBody>
+      </p:sp>
+      <p:sp>
+        <p:nvSpPr>
+          <p:cNvPr id="10" name="TextBox 9">
+            <a:extLst>
+              <a:ext uri="{FF2B5EF4-FFF2-40B4-BE49-F238E27FC236}">
+                <a16:creationId xmlns:a16="http://schemas.microsoft.com/office/drawing/2014/main" id="{8B8296D5-3172-DBB4-8D90-A56B69DB926E}"/>
+              </a:ext>
+            </a:extLst>
+          </p:cNvPr>
+          <p:cNvSpPr txBox="1"/>
+          <p:nvPr/>
+        </p:nvSpPr>
+        <p:spPr>
+          <a:xfrm>
+            <a:off x="1752600" y="3429000"/>
+            <a:ext cx="6858000" cy="646331"/>
+          </a:xfrm>
+          <a:prstGeom prst="rect">
+            <a:avLst/>
+          </a:prstGeom>
+          <a:noFill/>
+        </p:spPr>
+        <p:txBody>
+          <a:bodyPr wrap="square">
+            <a:spAutoFit/>
+          </a:bodyPr>
+          <a:lstStyle/>
+          <a:p>
+            <a:r>
+              <a:rPr lang="en-US" dirty="0"/>
+              <a:t>Project management for tracking which employee works in which project.</a:t>
+            </a:r>
+          </a:p>
+        </p:txBody>
+      </p:sp>
+    </p:spTree>
+    <p:extLst>
+      <p:ext uri="{BB962C8B-B14F-4D97-AF65-F5344CB8AC3E}">
+        <p14:creationId xmlns:p14="http://schemas.microsoft.com/office/powerpoint/2010/main" val="2595230305"/>
+      </p:ext>
+    </p:extLst>
+  </p:cSld>
+  <p:clrMapOvr>
+    <a:masterClrMapping/>
+  </p:clrMapOvr>
+  <p:transition>
+    <p:fade/>
+  </p:transition>
+</p:sld>
+</file>
+
+<file path=ppt/slides/slide31.xml><?xml version="1.0" encoding="utf-8"?>
+<p:sld xmlns:a="http://schemas.openxmlformats.org/drawingml/2006/main" xmlns:r="http://schemas.openxmlformats.org/officeDocument/2006/relationships" xmlns:p="http://schemas.openxmlformats.org/presentationml/2006/main">
+  <p:cSld>
+    <p:spTree>
+      <p:nvGrpSpPr>
+        <p:cNvPr id="1" name=""/>
+        <p:cNvGrpSpPr/>
+        <p:nvPr/>
+      </p:nvGrpSpPr>
+      <p:grpSpPr>
+        <a:xfrm>
+          <a:off x="0" y="0"/>
+          <a:ext cx="0" cy="0"/>
+          <a:chOff x="0" y="0"/>
+          <a:chExt cx="0" cy="0"/>
+        </a:xfrm>
+      </p:grpSpPr>
+      <p:sp>
+        <p:nvSpPr>
+          <p:cNvPr id="2" name="Date Placeholder 1">
+            <a:extLst>
+              <a:ext uri="{FF2B5EF4-FFF2-40B4-BE49-F238E27FC236}">
+                <a16:creationId xmlns:a16="http://schemas.microsoft.com/office/drawing/2014/main" id="{544D1B20-7A25-B6C0-ABE1-79F51BC6DAFB}"/>
+              </a:ext>
+            </a:extLst>
+          </p:cNvPr>
+          <p:cNvSpPr>
+            <a:spLocks noGrp="1"/>
+          </p:cNvSpPr>
+          <p:nvPr>
+            <p:ph type="dt" sz="half" idx="2"/>
+          </p:nvPr>
+        </p:nvSpPr>
+        <p:spPr/>
+        <p:txBody>
+          <a:bodyPr/>
+          <a:lstStyle/>
+          <a:p>
+            <a:pPr marL="0" marR="0" lvl="0" indent="0" algn="l" defTabSz="914400" rtl="0" eaLnBrk="1" fontAlgn="auto" latinLnBrk="0" hangingPunct="1">
+              <a:lnSpc>
+                <a:spcPct val="100000"/>
+              </a:lnSpc>
+              <a:spcBef>
+                <a:spcPts val="0"/>
+              </a:spcBef>
+              <a:spcAft>
+                <a:spcPts val="0"/>
+              </a:spcAft>
+              <a:buClrTx/>
+              <a:buSzTx/>
+              <a:buFontTx/>
+              <a:buNone/>
+              <a:defRPr/>
+            </a:pPr>
+            <a:r>
+              <a:rPr kumimoji="0" lang="en-US" sz="1000" b="0" i="0" u="none" strike="noStrike" kern="1200" cap="none" spc="0" normalizeH="0" baseline="0" noProof="0">
+                <a:ln>
+                  <a:noFill/>
+                </a:ln>
+                <a:solidFill>
+                  <a:schemeClr val="tx1"/>
+                </a:solidFill>
+                <a:effectLst/>
+                <a:uLnTx/>
+                <a:uFillTx/>
+                <a:latin typeface="+mn-lt"/>
+                <a:ea typeface="+mn-ea"/>
+                <a:cs typeface="+mn-cs"/>
+              </a:rPr>
+              <a:t>3-Sep-24</a:t>
+            </a:r>
+            <a:endParaRPr kumimoji="0" lang="en-US" sz="1000" b="0" i="0" u="none" strike="noStrike" kern="1200" cap="none" spc="0" normalizeH="0" baseline="0" noProof="0" dirty="0">
+              <a:ln>
+                <a:noFill/>
+              </a:ln>
+              <a:solidFill>
+                <a:schemeClr val="tx1"/>
+              </a:solidFill>
+              <a:effectLst/>
+              <a:uLnTx/>
+              <a:uFillTx/>
+              <a:latin typeface="+mn-lt"/>
+              <a:ea typeface="+mn-ea"/>
+              <a:cs typeface="+mn-cs"/>
+            </a:endParaRPr>
+          </a:p>
+        </p:txBody>
+      </p:sp>
+      <p:sp>
+        <p:nvSpPr>
+          <p:cNvPr id="4" name="TextBox 3">
+            <a:extLst>
+              <a:ext uri="{FF2B5EF4-FFF2-40B4-BE49-F238E27FC236}">
+                <a16:creationId xmlns:a16="http://schemas.microsoft.com/office/drawing/2014/main" id="{A15991EA-E975-24D4-DED2-9081C4AACFBF}"/>
+              </a:ext>
+            </a:extLst>
+          </p:cNvPr>
+          <p:cNvSpPr txBox="1"/>
+          <p:nvPr/>
+        </p:nvSpPr>
+        <p:spPr>
+          <a:xfrm>
+            <a:off x="1552074" y="1905000"/>
+            <a:ext cx="7543800" cy="3693319"/>
+          </a:xfrm>
+          <a:prstGeom prst="rect">
+            <a:avLst/>
+          </a:prstGeom>
+          <a:noFill/>
+        </p:spPr>
+        <p:txBody>
+          <a:bodyPr wrap="square">
+            <a:spAutoFit/>
+          </a:bodyPr>
+          <a:lstStyle/>
+          <a:p>
+            <a:r>
+              <a:rPr lang="en-US" dirty="0"/>
+              <a:t>Project git link:</a:t>
+            </a:r>
+          </a:p>
+          <a:p>
+            <a:r>
+              <a:rPr lang="en-US" dirty="0">
+                <a:hlinkClick r:id="rId2"/>
+              </a:rPr>
+              <a:t>https://github.com/Immanuvel1207/employee-Management-System</a:t>
+            </a:r>
+            <a:endParaRPr lang="en-US" dirty="0"/>
+          </a:p>
+          <a:p>
+            <a:endParaRPr lang="en-US" dirty="0"/>
+          </a:p>
+          <a:p>
+            <a:r>
+              <a:rPr lang="en-US" dirty="0"/>
+              <a:t>EMS Host-link: </a:t>
+            </a:r>
+          </a:p>
+          <a:p>
+            <a:r>
+              <a:rPr lang="en-US" dirty="0">
+                <a:hlinkClick r:id="rId3"/>
+              </a:rPr>
+              <a:t>https://employee-management-system-x7bb.onrender.com</a:t>
+            </a:r>
+            <a:endParaRPr lang="en-US" dirty="0"/>
+          </a:p>
+          <a:p>
+            <a:endParaRPr lang="en-US" dirty="0"/>
+          </a:p>
+          <a:p>
+            <a:r>
+              <a:rPr lang="en-US" dirty="0"/>
+              <a:t>Node.js Documentation: </a:t>
+            </a:r>
+            <a:r>
+              <a:rPr lang="en-US" dirty="0">
+                <a:hlinkClick r:id="rId4"/>
+              </a:rPr>
+              <a:t>https://nodejs.org/en/docs</a:t>
+            </a:r>
+            <a:endParaRPr lang="en-US" dirty="0"/>
+          </a:p>
+          <a:p>
+            <a:endParaRPr lang="en-US" dirty="0"/>
+          </a:p>
+          <a:p>
+            <a:r>
+              <a:rPr lang="en-US" dirty="0"/>
+              <a:t>React Documentation: </a:t>
+            </a:r>
+            <a:r>
+              <a:rPr lang="en-US" dirty="0">
+                <a:hlinkClick r:id="rId5"/>
+              </a:rPr>
+              <a:t>https://reactjs.org/docs/getting-started.html</a:t>
+            </a:r>
+            <a:endParaRPr lang="en-US" dirty="0"/>
+          </a:p>
+          <a:p>
+            <a:endParaRPr lang="en-US" dirty="0"/>
+          </a:p>
+          <a:p>
+            <a:r>
+              <a:rPr lang="en-US" dirty="0"/>
+              <a:t>MongoDB Documentation: </a:t>
+            </a:r>
+            <a:r>
+              <a:rPr lang="en-US" dirty="0">
+                <a:hlinkClick r:id="rId6"/>
+              </a:rPr>
+              <a:t>https://docs.mongodb.com/</a:t>
+            </a:r>
+            <a:endParaRPr lang="en-US" dirty="0"/>
+          </a:p>
+          <a:p>
+            <a:endParaRPr lang="en-US" dirty="0"/>
+          </a:p>
+          <a:p>
+            <a:r>
+              <a:rPr lang="en-US" dirty="0"/>
+              <a:t>Twilio API Documentation: </a:t>
+            </a:r>
+            <a:r>
+              <a:rPr lang="en-US" dirty="0">
+                <a:hlinkClick r:id="rId7"/>
+              </a:rPr>
+              <a:t>https://www.twilio.com/docs</a:t>
+            </a:r>
+            <a:endParaRPr lang="en-US" dirty="0"/>
+          </a:p>
+        </p:txBody>
+      </p:sp>
+      <p:sp>
+        <p:nvSpPr>
+          <p:cNvPr id="14" name="TextBox 13">
+            <a:extLst>
+              <a:ext uri="{FF2B5EF4-FFF2-40B4-BE49-F238E27FC236}">
+                <a16:creationId xmlns:a16="http://schemas.microsoft.com/office/drawing/2014/main" id="{4F772384-FE66-B230-E74E-CEA7083D9DA6}"/>
+              </a:ext>
+            </a:extLst>
+          </p:cNvPr>
+          <p:cNvSpPr txBox="1"/>
+          <p:nvPr/>
+        </p:nvSpPr>
+        <p:spPr>
+          <a:xfrm>
+            <a:off x="3962400" y="1123890"/>
+            <a:ext cx="1981200" cy="400110"/>
+          </a:xfrm>
+          <a:prstGeom prst="rect">
+            <a:avLst/>
+          </a:prstGeom>
+          <a:noFill/>
+        </p:spPr>
+        <p:txBody>
+          <a:bodyPr wrap="square">
+            <a:spAutoFit/>
+          </a:bodyPr>
+          <a:lstStyle/>
+          <a:p>
+            <a:r>
+              <a:rPr lang="en-IN" sz="2000" b="1" dirty="0">
+                <a:solidFill>
+                  <a:srgbClr val="C00000"/>
+                </a:solidFill>
+                <a:latin typeface="Times New Roman" panose="02020603050405020304" pitchFamily="18" charset="0"/>
+                <a:cs typeface="Times New Roman" panose="02020603050405020304" pitchFamily="18" charset="0"/>
+              </a:rPr>
+              <a:t>REFERENCES</a:t>
+            </a:r>
+            <a:endParaRPr lang="en-US" sz="2000" dirty="0"/>
+          </a:p>
+        </p:txBody>
+      </p:sp>
+    </p:spTree>
+    <p:extLst>
+      <p:ext uri="{BB962C8B-B14F-4D97-AF65-F5344CB8AC3E}">
+        <p14:creationId xmlns:p14="http://schemas.microsoft.com/office/powerpoint/2010/main" val="3483052740"/>
+      </p:ext>
+    </p:extLst>
+  </p:cSld>
+  <p:clrMapOvr>
+    <a:masterClrMapping/>
+  </p:clrMapOvr>
+  <p:transition>
+    <p:fade/>
+  </p:transition>
+</p:sld>
+</file>
+
+<file path=ppt/slides/slide32.xml><?xml version="1.0" encoding="utf-8"?>
+<p:sld xmlns:a="http://schemas.openxmlformats.org/drawingml/2006/main" xmlns:r="http://schemas.openxmlformats.org/officeDocument/2006/relationships" xmlns:p="http://schemas.openxmlformats.org/presentationml/2006/main">
+  <p:cSld>
+    <p:spTree>
+      <p:nvGrpSpPr>
+        <p:cNvPr id="1" name="Shape 254"/>
+        <p:cNvGrpSpPr/>
+        <p:nvPr/>
+      </p:nvGrpSpPr>
+      <p:grpSpPr>
+        <a:xfrm>
+          <a:off x="0" y="0"/>
+          <a:ext cx="0" cy="0"/>
+          <a:chOff x="0" y="0"/>
+          <a:chExt cx="0" cy="0"/>
+        </a:xfrm>
+      </p:grpSpPr>
+      <p:sp>
+        <p:nvSpPr>
+          <p:cNvPr id="255" name="Google Shape;255;p45"/>
+          <p:cNvSpPr txBox="1">
+            <a:spLocks noGrp="1"/>
+          </p:cNvSpPr>
+          <p:nvPr>
+            <p:ph type="title"/>
+          </p:nvPr>
+        </p:nvSpPr>
+        <p:spPr>
+          <a:xfrm>
+            <a:off x="685800" y="2209800"/>
+            <a:ext cx="8229600" cy="1417955"/>
+          </a:xfrm>
+          <a:prstGeom prst="rect">
+            <a:avLst/>
+          </a:prstGeom>
+          <a:noFill/>
+          <a:ln>
+            <a:noFill/>
+          </a:ln>
+        </p:spPr>
+        <p:txBody>
+          <a:bodyPr spcFirstLastPara="1" wrap="square" lIns="0" tIns="45700" rIns="0" bIns="0" anchor="b" anchorCtr="0">
+            <a:noAutofit/>
+          </a:bodyPr>
+          <a:lstStyle/>
+          <a:p>
+            <a:pPr marL="0" lvl="0" indent="0" algn="ctr" rtl="0">
+              <a:spcBef>
+                <a:spcPts val="0"/>
+              </a:spcBef>
+              <a:spcAft>
+                <a:spcPts val="0"/>
+              </a:spcAft>
+              <a:buNone/>
+            </a:pPr>
+            <a:r>
+              <a:rPr lang="en-US" sz="5400" b="1" i="1" dirty="0">
+                <a:solidFill>
+                  <a:srgbClr val="C00000"/>
+                </a:solidFill>
+                <a:latin typeface="Times New Roman" panose="02020603050405020304" pitchFamily="18" charset="0"/>
+                <a:ea typeface="Algerian" panose="04020705040A02060702"/>
+                <a:cs typeface="Times New Roman" panose="02020603050405020304" pitchFamily="18" charset="0"/>
+                <a:sym typeface="Algerian" panose="04020705040A02060702"/>
+              </a:rPr>
+              <a:t>THANK YOU</a:t>
+            </a:r>
+            <a:endParaRPr sz="5400" b="1" i="1" dirty="0">
+              <a:solidFill>
+                <a:schemeClr val="dk1"/>
+              </a:solidFill>
               <a:latin typeface="Times New Roman" panose="02020603050405020304" pitchFamily="18" charset="0"/>
+              <a:ea typeface="Algerian" panose="04020705040A02060702"/>
               <a:cs typeface="Times New Roman" panose="02020603050405020304" pitchFamily="18" charset="0"/>
+              <a:sym typeface="Algerian" panose="04020705040A02060702"/>
             </a:endParaRPr>
           </a:p>
         </p:txBody>
@@ -16051,7 +18539,7 @@
                 <a:cs typeface="Times New Roman" panose="02020603050405020304" pitchFamily="18" charset="0"/>
                 <a:sym typeface="+mn-ea"/>
               </a:rPr>
-              <a:t>OBJECTIVE</a:t>
+              <a:t>PROJECT DESCRIPTION</a:t>
             </a:r>
             <a:endParaRPr lang="en-IN" b="1" dirty="0">
               <a:latin typeface="Algerian" panose="04020705040A02060702" pitchFamily="82" charset="0"/>
@@ -16061,28 +18549,30 @@
       </p:sp>
       <p:sp>
         <p:nvSpPr>
-          <p:cNvPr id="8" name="Rectangle 2">
+          <p:cNvPr id="5" name="Rectangle 2">
             <a:extLst>
               <a:ext uri="{FF2B5EF4-FFF2-40B4-BE49-F238E27FC236}">
-                <a16:creationId xmlns:a16="http://schemas.microsoft.com/office/drawing/2014/main" id="{5C75F2EF-F367-C057-6453-67ECF5813619}"/>
+                <a16:creationId xmlns:a16="http://schemas.microsoft.com/office/drawing/2014/main" id="{EFB4C8D5-A697-1201-5DE5-1A32C15CBA44}"/>
               </a:ext>
             </a:extLst>
           </p:cNvPr>
-          <p:cNvSpPr txBox="1">
-            <a:spLocks noChangeArrowheads="1"/>
+          <p:cNvSpPr>
+            <a:spLocks noGrp="1" noChangeArrowheads="1"/>
           </p:cNvSpPr>
-          <p:nvPr/>
+          <p:nvPr>
+            <p:ph type="body" idx="1"/>
+          </p:nvPr>
         </p:nvSpPr>
         <p:spPr bwMode="auto">
           <a:xfrm>
-            <a:off x="1066800" y="1905000"/>
-            <a:ext cx="7543800" cy="2585323"/>
+            <a:off x="949390" y="1828800"/>
+            <a:ext cx="7543800" cy="4413516"/>
           </a:xfrm>
           <a:prstGeom prst="rect">
             <a:avLst/>
           </a:prstGeom>
           <a:noFill/>
-          <a:ln w="9525">
+          <a:ln>
             <a:noFill/>
           </a:ln>
           <a:effectLst/>
@@ -16122,244 +18612,140 @@
             </a:prstTxWarp>
             <a:spAutoFit/>
           </a:bodyPr>
-          <a:lstStyle>
-            <a:lvl1pPr marL="273050" indent="-273050" algn="l" rtl="0" eaLnBrk="0" fontAlgn="base" hangingPunct="0">
-              <a:spcBef>
-                <a:spcPct val="20000"/>
-              </a:spcBef>
-              <a:spcAft>
-                <a:spcPct val="0"/>
-              </a:spcAft>
-              <a:buSzPct val="80000"/>
-              <a:buFont typeface="Wingdings" panose="05000000000000000000" pitchFamily="2" charset="2"/>
-              <a:buChar char="Ø"/>
-              <a:defRPr sz="2000" kern="1200">
-                <a:solidFill>
-                  <a:schemeClr val="tx1"/>
-                </a:solidFill>
-                <a:latin typeface="+mn-lt"/>
-                <a:ea typeface="+mn-ea"/>
-                <a:cs typeface="+mn-cs"/>
-              </a:defRPr>
-            </a:lvl1pPr>
-            <a:lvl2pPr marL="640080" indent="-246380" algn="l" rtl="0" eaLnBrk="0" fontAlgn="base" hangingPunct="0">
-              <a:spcBef>
-                <a:spcPct val="20000"/>
-              </a:spcBef>
-              <a:spcAft>
-                <a:spcPct val="0"/>
-              </a:spcAft>
-              <a:buSzPct val="80000"/>
-              <a:buFont typeface="Wingdings" panose="05000000000000000000" pitchFamily="2" charset="2"/>
-              <a:buChar char="Ø"/>
-              <a:defRPr sz="2000" kern="1200">
-                <a:solidFill>
-                  <a:schemeClr val="tx1"/>
-                </a:solidFill>
-                <a:latin typeface="+mn-lt"/>
-                <a:ea typeface="+mn-ea"/>
-                <a:cs typeface="+mn-cs"/>
-              </a:defRPr>
-            </a:lvl2pPr>
-            <a:lvl3pPr marL="914400" indent="-246380" algn="l" rtl="0" eaLnBrk="0" fontAlgn="base" hangingPunct="0">
-              <a:spcBef>
-                <a:spcPct val="20000"/>
-              </a:spcBef>
-              <a:spcAft>
-                <a:spcPct val="0"/>
-              </a:spcAft>
-              <a:buSzPct val="80000"/>
-              <a:buFont typeface="Wingdings" panose="05000000000000000000" pitchFamily="2" charset="2"/>
-              <a:buChar char="Ø"/>
-              <a:defRPr sz="2000" kern="1200">
-                <a:solidFill>
-                  <a:schemeClr val="tx1"/>
-                </a:solidFill>
-                <a:latin typeface="+mn-lt"/>
-                <a:ea typeface="+mn-ea"/>
-                <a:cs typeface="+mn-cs"/>
-              </a:defRPr>
-            </a:lvl3pPr>
-            <a:lvl4pPr marL="1187450" indent="-209550" algn="l" rtl="0" eaLnBrk="0" fontAlgn="base" hangingPunct="0">
-              <a:spcBef>
-                <a:spcPct val="20000"/>
-              </a:spcBef>
-              <a:spcAft>
-                <a:spcPct val="0"/>
-              </a:spcAft>
-              <a:buSzPct val="80000"/>
-              <a:buFont typeface="Wingdings" panose="05000000000000000000" pitchFamily="2" charset="2"/>
-              <a:buChar char="Ø"/>
-              <a:defRPr sz="2000" kern="1200">
-                <a:solidFill>
-                  <a:schemeClr val="tx1"/>
-                </a:solidFill>
-                <a:latin typeface="+mn-lt"/>
-                <a:ea typeface="+mn-ea"/>
-                <a:cs typeface="+mn-cs"/>
-              </a:defRPr>
-            </a:lvl4pPr>
-            <a:lvl5pPr marL="1462405" indent="-209550" algn="l" rtl="0" eaLnBrk="0" fontAlgn="base" hangingPunct="0">
-              <a:spcBef>
-                <a:spcPct val="20000"/>
-              </a:spcBef>
-              <a:spcAft>
-                <a:spcPct val="0"/>
-              </a:spcAft>
-              <a:buSzPct val="80000"/>
-              <a:buFont typeface="Wingdings" panose="05000000000000000000" pitchFamily="2" charset="2"/>
-              <a:buChar char="Ø"/>
-              <a:defRPr sz="2000" kern="1200">
-                <a:solidFill>
-                  <a:schemeClr val="tx1"/>
-                </a:solidFill>
-                <a:latin typeface="+mn-lt"/>
-                <a:ea typeface="+mn-ea"/>
-                <a:cs typeface="+mn-cs"/>
-              </a:defRPr>
-            </a:lvl5pPr>
-            <a:lvl6pPr marL="1737360" indent="-210185" algn="l" rtl="0" eaLnBrk="1" latinLnBrk="0" hangingPunct="1">
-              <a:spcBef>
-                <a:spcPct val="20000"/>
-              </a:spcBef>
-              <a:buClr>
-                <a:schemeClr val="accent5"/>
-              </a:buClr>
-              <a:buSzPct val="80000"/>
-              <a:buFont typeface="Wingdings 2" panose="05020102010507070707"/>
-              <a:buChar char=""/>
-              <a:defRPr kumimoji="0" sz="1800" kern="1200">
-                <a:solidFill>
-                  <a:schemeClr val="tx1"/>
-                </a:solidFill>
-                <a:latin typeface="+mn-lt"/>
-                <a:ea typeface="+mn-ea"/>
-                <a:cs typeface="+mn-cs"/>
-              </a:defRPr>
-            </a:lvl6pPr>
-            <a:lvl7pPr marL="1920240" indent="-182880" algn="l" rtl="0" eaLnBrk="1" latinLnBrk="0" hangingPunct="1">
-              <a:spcBef>
-                <a:spcPct val="20000"/>
-              </a:spcBef>
-              <a:buClr>
-                <a:schemeClr val="accent6"/>
-              </a:buClr>
-              <a:buSzPct val="80000"/>
-              <a:buFont typeface="Wingdings 2" panose="05020102010507070707"/>
-              <a:buChar char=""/>
-              <a:defRPr kumimoji="0" sz="1600" kern="1200" baseline="0">
-                <a:solidFill>
-                  <a:schemeClr val="tx1"/>
-                </a:solidFill>
-                <a:latin typeface="+mn-lt"/>
-                <a:ea typeface="+mn-ea"/>
-                <a:cs typeface="+mn-cs"/>
-              </a:defRPr>
-            </a:lvl7pPr>
-            <a:lvl8pPr marL="2194560" indent="-182880" algn="l" rtl="0" eaLnBrk="1" latinLnBrk="0" hangingPunct="1">
-              <a:spcBef>
-                <a:spcPct val="20000"/>
-              </a:spcBef>
-              <a:buClr>
-                <a:schemeClr val="tx2"/>
-              </a:buClr>
-              <a:buChar char="•"/>
-              <a:defRPr kumimoji="0" sz="1600" kern="1200">
-                <a:solidFill>
-                  <a:schemeClr val="tx1"/>
-                </a:solidFill>
-                <a:latin typeface="+mn-lt"/>
-                <a:ea typeface="+mn-ea"/>
-                <a:cs typeface="+mn-cs"/>
-              </a:defRPr>
-            </a:lvl8pPr>
-            <a:lvl9pPr marL="2468880" indent="-182880" algn="l" rtl="0" eaLnBrk="1" latinLnBrk="0" hangingPunct="1">
-              <a:spcBef>
-                <a:spcPct val="20000"/>
-              </a:spcBef>
-              <a:buClr>
-                <a:schemeClr val="tx2"/>
-              </a:buClr>
-              <a:buFontTx/>
-              <a:buChar char="•"/>
-              <a:defRPr kumimoji="0" sz="1400" kern="1200" baseline="0">
-                <a:solidFill>
-                  <a:schemeClr val="tx1"/>
-                </a:solidFill>
-                <a:latin typeface="+mn-lt"/>
-                <a:ea typeface="+mn-ea"/>
-                <a:cs typeface="+mn-cs"/>
-              </a:defRPr>
-            </a:lvl9pPr>
-          </a:lstStyle>
+          <a:lstStyle/>
           <a:p>
             <a:pPr algn="just"/>
             <a:r>
-              <a:rPr lang="en-US" sz="1800" dirty="0">
+              <a:rPr lang="en-GB" sz="1800" b="1" dirty="0">
                 <a:latin typeface="Times New Roman" panose="02020603050405020304" pitchFamily="18" charset="0"/>
                 <a:cs typeface="Times New Roman" panose="02020603050405020304" pitchFamily="18" charset="0"/>
               </a:rPr>
-              <a:t>1. Develop an integrated system for comprehensive employee data management</a:t>
-            </a:r>
-          </a:p>
-          <a:p>
-            <a:pPr algn="just"/>
-            <a:r>
-              <a:rPr lang="en-US" sz="1800" dirty="0">
+              <a:t>Comprehensive Employee Management</a:t>
+            </a:r>
+            <a:r>
+              <a:rPr lang="en-GB" sz="1800" dirty="0">
                 <a:latin typeface="Times New Roman" panose="02020603050405020304" pitchFamily="18" charset="0"/>
                 <a:cs typeface="Times New Roman" panose="02020603050405020304" pitchFamily="18" charset="0"/>
               </a:rPr>
-              <a:t>2. Automate attendance tracking and leave management processes</a:t>
+              <a:t>: A web application for managing employee data, attendance, and roles.</a:t>
             </a:r>
           </a:p>
           <a:p>
             <a:pPr algn="just"/>
-            <a:r>
-              <a:rPr lang="en-US" sz="1800" dirty="0">
+            <a:endParaRPr lang="en-GB" sz="1800" dirty="0">
+              <a:latin typeface="Times New Roman" panose="02020603050405020304" pitchFamily="18" charset="0"/>
+              <a:cs typeface="Times New Roman" panose="02020603050405020304" pitchFamily="18" charset="0"/>
+            </a:endParaRPr>
+          </a:p>
+          <a:p>
+            <a:pPr algn="just"/>
+            <a:r>
+              <a:rPr lang="en-GB" sz="1800" b="1" dirty="0">
                 <a:latin typeface="Times New Roman" panose="02020603050405020304" pitchFamily="18" charset="0"/>
                 <a:cs typeface="Times New Roman" panose="02020603050405020304" pitchFamily="18" charset="0"/>
               </a:rPr>
-              <a:t>3. Implement a real-time salary calculation system</a:t>
-            </a:r>
-          </a:p>
-          <a:p>
-            <a:pPr algn="just"/>
-            <a:r>
-              <a:rPr lang="en-US" sz="1800" dirty="0">
+              <a:t>User-Friendly Interface</a:t>
+            </a:r>
+            <a:r>
+              <a:rPr lang="en-GB" sz="1800" dirty="0">
                 <a:latin typeface="Times New Roman" panose="02020603050405020304" pitchFamily="18" charset="0"/>
                 <a:cs typeface="Times New Roman" panose="02020603050405020304" pitchFamily="18" charset="0"/>
               </a:rPr>
-              <a:t>4. Enhance communication between management and employees</a:t>
+              <a:t>: Intuitive design for ease of use by admins and employees.</a:t>
             </a:r>
           </a:p>
           <a:p>
             <a:pPr algn="just"/>
-            <a:r>
-              <a:rPr lang="en-US" sz="1800" dirty="0">
+            <a:endParaRPr lang="en-GB" sz="1800" dirty="0">
+              <a:latin typeface="Times New Roman" panose="02020603050405020304" pitchFamily="18" charset="0"/>
+              <a:cs typeface="Times New Roman" panose="02020603050405020304" pitchFamily="18" charset="0"/>
+            </a:endParaRPr>
+          </a:p>
+          <a:p>
+            <a:pPr algn="just"/>
+            <a:r>
+              <a:rPr lang="en-GB" sz="1800" b="1" dirty="0">
                 <a:latin typeface="Times New Roman" panose="02020603050405020304" pitchFamily="18" charset="0"/>
                 <a:cs typeface="Times New Roman" panose="02020603050405020304" pitchFamily="18" charset="0"/>
               </a:rPr>
-              <a:t>5. Provide a user-friendly interface for both administrators and employees</a:t>
-            </a:r>
-          </a:p>
-          <a:p>
-            <a:pPr algn="just"/>
-            <a:r>
-              <a:rPr lang="en-US" sz="1800" dirty="0">
+              <a:t>Secure Access</a:t>
+            </a:r>
+            <a:r>
+              <a:rPr lang="en-GB" sz="1800" dirty="0">
                 <a:latin typeface="Times New Roman" panose="02020603050405020304" pitchFamily="18" charset="0"/>
                 <a:cs typeface="Times New Roman" panose="02020603050405020304" pitchFamily="18" charset="0"/>
               </a:rPr>
-              <a:t>6. Ensure data security and role-based access control.</a:t>
-            </a:r>
-          </a:p>
-          <a:p>
-            <a:pPr algn="just">
+              <a:t>: Role-based access control to protect sensitive information.</a:t>
+            </a:r>
+          </a:p>
+          <a:p>
+            <a:pPr algn="just"/>
+            <a:endParaRPr lang="en-GB" sz="1800" dirty="0">
+              <a:latin typeface="Times New Roman" panose="02020603050405020304" pitchFamily="18" charset="0"/>
+              <a:cs typeface="Times New Roman" panose="02020603050405020304" pitchFamily="18" charset="0"/>
+            </a:endParaRPr>
+          </a:p>
+          <a:p>
+            <a:pPr algn="just"/>
+            <a:r>
+              <a:rPr lang="en-GB" sz="1800" b="1" dirty="0">
+                <a:latin typeface="Times New Roman" panose="02020603050405020304" pitchFamily="18" charset="0"/>
+                <a:cs typeface="Times New Roman" panose="02020603050405020304" pitchFamily="18" charset="0"/>
+              </a:rPr>
+              <a:t>Real-Time Updates</a:t>
+            </a:r>
+            <a:r>
+              <a:rPr lang="en-GB" sz="1800" dirty="0">
+                <a:latin typeface="Times New Roman" panose="02020603050405020304" pitchFamily="18" charset="0"/>
+                <a:cs typeface="Times New Roman" panose="02020603050405020304" pitchFamily="18" charset="0"/>
+              </a:rPr>
+              <a:t>: Live updates on employee status, attendance, and records.</a:t>
+            </a:r>
+          </a:p>
+          <a:p>
+            <a:pPr algn="just"/>
+            <a:endParaRPr lang="en-GB" sz="1800" dirty="0">
+              <a:latin typeface="Times New Roman" panose="02020603050405020304" pitchFamily="18" charset="0"/>
+              <a:cs typeface="Times New Roman" panose="02020603050405020304" pitchFamily="18" charset="0"/>
+            </a:endParaRPr>
+          </a:p>
+          <a:p>
+            <a:pPr algn="just"/>
+            <a:r>
+              <a:rPr lang="en-GB" sz="1800" b="1" dirty="0">
+                <a:latin typeface="Times New Roman" panose="02020603050405020304" pitchFamily="18" charset="0"/>
+                <a:cs typeface="Times New Roman" panose="02020603050405020304" pitchFamily="18" charset="0"/>
+              </a:rPr>
+              <a:t>Scalable Architecture</a:t>
+            </a:r>
+            <a:r>
+              <a:rPr lang="en-GB" sz="1800" dirty="0">
+                <a:latin typeface="Times New Roman" panose="02020603050405020304" pitchFamily="18" charset="0"/>
+                <a:cs typeface="Times New Roman" panose="02020603050405020304" pitchFamily="18" charset="0"/>
+              </a:rPr>
+              <a:t>: Designed to support growing organizations and additional features.</a:t>
+            </a:r>
+          </a:p>
+          <a:p>
+            <a:pPr marR="0" lvl="0" algn="just" defTabSz="914400" rtl="0" eaLnBrk="0" fontAlgn="base" latinLnBrk="0" hangingPunct="0">
               <a:spcBef>
                 <a:spcPct val="0"/>
               </a:spcBef>
+              <a:spcAft>
+                <a:spcPct val="0"/>
+              </a:spcAft>
+              <a:buClrTx/>
               <a:buSzTx/>
+              <a:tabLst/>
             </a:pPr>
-            <a:endParaRPr lang="en-US" altLang="en-US" sz="1800" dirty="0">
+            <a:endParaRPr kumimoji="0" lang="en-US" altLang="en-US" sz="1800" i="0" u="none" strike="noStrike" cap="none" normalizeH="0" baseline="0" dirty="0">
+              <a:ln>
+                <a:noFill/>
+              </a:ln>
+              <a:solidFill>
+                <a:schemeClr val="tx1"/>
+              </a:solidFill>
+              <a:effectLst/>
               <a:latin typeface="Times New Roman" panose="02020603050405020304" pitchFamily="18" charset="0"/>
               <a:cs typeface="Times New Roman" panose="02020603050405020304" pitchFamily="18" charset="0"/>
             </a:endParaRPr>
@@ -16406,8 +18792,8 @@
         </p:nvSpPr>
         <p:spPr>
           <a:xfrm>
-            <a:off x="681134" y="704850"/>
-            <a:ext cx="8005665" cy="657419"/>
+            <a:off x="603167" y="248428"/>
+            <a:ext cx="8229600" cy="912845"/>
           </a:xfrm>
         </p:spPr>
         <p:txBody>
@@ -16416,391 +18802,547 @@
           <a:p>
             <a:pPr algn="ctr"/>
             <a:r>
-              <a:rPr lang="en-IN" b="1" dirty="0">
+              <a:rPr lang="en-IN" sz="3600" b="1" dirty="0">
                 <a:solidFill>
                   <a:srgbClr val="C00000"/>
                 </a:solidFill>
                 <a:latin typeface="Times New Roman" panose="02020603050405020304" pitchFamily="18" charset="0"/>
                 <a:cs typeface="Times New Roman" panose="02020603050405020304" pitchFamily="18" charset="0"/>
               </a:rPr>
-              <a:t>MODULES</a:t>
+              <a:t>TECHNOLOGY USED</a:t>
             </a:r>
           </a:p>
         </p:txBody>
       </p:sp>
       <p:sp>
         <p:nvSpPr>
-          <p:cNvPr id="4" name="Text Placeholder 3"/>
-          <p:cNvSpPr>
-            <a:spLocks noGrp="1"/>
-          </p:cNvSpPr>
-          <p:nvPr>
-            <p:ph type="body" idx="1"/>
-          </p:nvPr>
+          <p:cNvPr id="4" name="Content Placeholder 2"/>
+          <p:cNvSpPr txBox="1"/>
+          <p:nvPr/>
         </p:nvSpPr>
         <p:spPr>
           <a:xfrm>
-            <a:off x="1026695" y="2245531"/>
-            <a:ext cx="4288082" cy="4389437"/>
-          </a:xfrm>
+            <a:off x="5638801" y="1507958"/>
+            <a:ext cx="4260767" cy="5085571"/>
+          </a:xfrm>
+          <a:prstGeom prst="rect">
+            <a:avLst/>
+          </a:prstGeom>
+          <a:noFill/>
+          <a:ln>
+            <a:noFill/>
+          </a:ln>
         </p:spPr>
         <p:txBody>
-          <a:bodyPr/>
-          <a:lstStyle/>
-          <a:p>
-            <a:r>
-              <a:rPr lang="en-US" dirty="0"/>
-              <a:t>Admin Dashboard</a:t>
-            </a:r>
-          </a:p>
-          <a:p>
-            <a:pPr lvl="1">
-              <a:buFont typeface="Wingdings" panose="05000000000000000000" pitchFamily="2" charset="2"/>
-              <a:buChar char="§"/>
+          <a:bodyPr spcFirstLastPara="1" wrap="square" lIns="91425" tIns="45700" rIns="91425" bIns="45700" anchor="t" anchorCtr="0">
+            <a:normAutofit fontScale="77500" lnSpcReduction="20000"/>
+          </a:bodyPr>
+          <a:lstStyle>
+            <a:defPPr marR="0" lvl="0" algn="l" rtl="0">
+              <a:lnSpc>
+                <a:spcPct val="100000"/>
+              </a:lnSpc>
+              <a:spcBef>
+                <a:spcPts val="0"/>
+              </a:spcBef>
+              <a:spcAft>
+                <a:spcPts val="0"/>
+              </a:spcAft>
+            </a:defPPr>
+            <a:lvl1pPr marL="457200" marR="0" lvl="0" indent="-320040" algn="l" rtl="0">
+              <a:lnSpc>
+                <a:spcPct val="100000"/>
+              </a:lnSpc>
+              <a:spcBef>
+                <a:spcPts val="360"/>
+              </a:spcBef>
+              <a:spcAft>
+                <a:spcPts val="0"/>
+              </a:spcAft>
+              <a:buClr>
+                <a:schemeClr val="dk1"/>
+              </a:buClr>
+              <a:buSzPts val="1440"/>
+              <a:buFont typeface="Noto Sans Symbols"/>
+              <a:buChar char="⮚"/>
+              <a:defRPr sz="2000" b="0" i="0" u="none" strike="noStrike" cap="none">
+                <a:solidFill>
+                  <a:schemeClr val="dk1"/>
+                </a:solidFill>
+                <a:latin typeface="Arial" panose="020B0604020202020204"/>
+                <a:ea typeface="Arial" panose="020B0604020202020204"/>
+                <a:cs typeface="Arial" panose="020B0604020202020204"/>
+                <a:sym typeface="Arial" panose="020B0604020202020204"/>
+              </a:defRPr>
+            </a:lvl1pPr>
+            <a:lvl2pPr marL="914400" marR="0" lvl="1" indent="-320040" algn="l" rtl="0">
+              <a:lnSpc>
+                <a:spcPct val="100000"/>
+              </a:lnSpc>
+              <a:spcBef>
+                <a:spcPts val="360"/>
+              </a:spcBef>
+              <a:spcAft>
+                <a:spcPts val="0"/>
+              </a:spcAft>
+              <a:buClr>
+                <a:schemeClr val="dk1"/>
+              </a:buClr>
+              <a:buSzPts val="1440"/>
+              <a:buFont typeface="Noto Sans Symbols"/>
+              <a:buChar char="⮚"/>
+              <a:defRPr sz="2000" b="0" i="0" u="none" strike="noStrike" cap="none">
+                <a:solidFill>
+                  <a:schemeClr val="dk1"/>
+                </a:solidFill>
+                <a:latin typeface="Arial" panose="020B0604020202020204"/>
+                <a:ea typeface="Arial" panose="020B0604020202020204"/>
+                <a:cs typeface="Arial" panose="020B0604020202020204"/>
+                <a:sym typeface="Arial" panose="020B0604020202020204"/>
+              </a:defRPr>
+            </a:lvl2pPr>
+            <a:lvl3pPr marL="1371600" marR="0" lvl="2" indent="-320040" algn="l" rtl="0">
+              <a:lnSpc>
+                <a:spcPct val="100000"/>
+              </a:lnSpc>
+              <a:spcBef>
+                <a:spcPts val="360"/>
+              </a:spcBef>
+              <a:spcAft>
+                <a:spcPts val="0"/>
+              </a:spcAft>
+              <a:buClr>
+                <a:schemeClr val="dk1"/>
+              </a:buClr>
+              <a:buSzPts val="1440"/>
+              <a:buFont typeface="Noto Sans Symbols"/>
+              <a:buChar char="⮚"/>
+              <a:defRPr sz="2000" b="0" i="0" u="none" strike="noStrike" cap="none">
+                <a:solidFill>
+                  <a:schemeClr val="dk1"/>
+                </a:solidFill>
+                <a:latin typeface="Arial" panose="020B0604020202020204"/>
+                <a:ea typeface="Arial" panose="020B0604020202020204"/>
+                <a:cs typeface="Arial" panose="020B0604020202020204"/>
+                <a:sym typeface="Arial" panose="020B0604020202020204"/>
+              </a:defRPr>
+            </a:lvl3pPr>
+            <a:lvl4pPr marL="1828800" marR="0" lvl="3" indent="-320040" algn="l" rtl="0">
+              <a:lnSpc>
+                <a:spcPct val="100000"/>
+              </a:lnSpc>
+              <a:spcBef>
+                <a:spcPts val="360"/>
+              </a:spcBef>
+              <a:spcAft>
+                <a:spcPts val="0"/>
+              </a:spcAft>
+              <a:buClr>
+                <a:schemeClr val="dk1"/>
+              </a:buClr>
+              <a:buSzPts val="1440"/>
+              <a:buFont typeface="Noto Sans Symbols"/>
+              <a:buChar char="⮚"/>
+              <a:defRPr sz="2000" b="0" i="0" u="none" strike="noStrike" cap="none">
+                <a:solidFill>
+                  <a:schemeClr val="dk1"/>
+                </a:solidFill>
+                <a:latin typeface="Arial" panose="020B0604020202020204"/>
+                <a:ea typeface="Arial" panose="020B0604020202020204"/>
+                <a:cs typeface="Arial" panose="020B0604020202020204"/>
+                <a:sym typeface="Arial" panose="020B0604020202020204"/>
+              </a:defRPr>
+            </a:lvl4pPr>
+            <a:lvl5pPr marL="2286000" marR="0" lvl="4" indent="-320040" algn="l" rtl="0">
+              <a:lnSpc>
+                <a:spcPct val="100000"/>
+              </a:lnSpc>
+              <a:spcBef>
+                <a:spcPts val="360"/>
+              </a:spcBef>
+              <a:spcAft>
+                <a:spcPts val="0"/>
+              </a:spcAft>
+              <a:buClr>
+                <a:schemeClr val="dk1"/>
+              </a:buClr>
+              <a:buSzPts val="1440"/>
+              <a:buFont typeface="Noto Sans Symbols"/>
+              <a:buChar char="⮚"/>
+              <a:defRPr sz="2000" b="0" i="0" u="none" strike="noStrike" cap="none">
+                <a:solidFill>
+                  <a:schemeClr val="dk1"/>
+                </a:solidFill>
+                <a:latin typeface="Arial" panose="020B0604020202020204"/>
+                <a:ea typeface="Arial" panose="020B0604020202020204"/>
+                <a:cs typeface="Arial" panose="020B0604020202020204"/>
+                <a:sym typeface="Arial" panose="020B0604020202020204"/>
+              </a:defRPr>
+            </a:lvl5pPr>
+            <a:lvl6pPr marL="2743200" marR="0" lvl="5" indent="-320040" algn="l" rtl="0">
+              <a:lnSpc>
+                <a:spcPct val="100000"/>
+              </a:lnSpc>
+              <a:spcBef>
+                <a:spcPts val="360"/>
+              </a:spcBef>
+              <a:spcAft>
+                <a:spcPts val="0"/>
+              </a:spcAft>
+              <a:buClr>
+                <a:schemeClr val="accent5"/>
+              </a:buClr>
+              <a:buSzPts val="1440"/>
+              <a:buFont typeface="Noto Sans Symbols"/>
+              <a:buChar char="⚫"/>
+              <a:defRPr sz="1800" b="0" i="0" u="none" strike="noStrike" cap="none">
+                <a:solidFill>
+                  <a:schemeClr val="dk1"/>
+                </a:solidFill>
+                <a:latin typeface="Arial" panose="020B0604020202020204"/>
+                <a:ea typeface="Arial" panose="020B0604020202020204"/>
+                <a:cs typeface="Arial" panose="020B0604020202020204"/>
+                <a:sym typeface="Arial" panose="020B0604020202020204"/>
+              </a:defRPr>
+            </a:lvl6pPr>
+            <a:lvl7pPr marL="3200400" marR="0" lvl="6" indent="-320040" algn="l" rtl="0">
+              <a:lnSpc>
+                <a:spcPct val="100000"/>
+              </a:lnSpc>
+              <a:spcBef>
+                <a:spcPts val="360"/>
+              </a:spcBef>
+              <a:spcAft>
+                <a:spcPts val="0"/>
+              </a:spcAft>
+              <a:buClr>
+                <a:schemeClr val="accent6"/>
+              </a:buClr>
+              <a:buSzPts val="1440"/>
+              <a:buFont typeface="Noto Sans Symbols"/>
+              <a:buChar char="⚫"/>
+              <a:defRPr sz="1600" b="0" i="0" u="none" strike="noStrike" cap="none">
+                <a:solidFill>
+                  <a:schemeClr val="dk1"/>
+                </a:solidFill>
+                <a:latin typeface="Arial" panose="020B0604020202020204"/>
+                <a:ea typeface="Arial" panose="020B0604020202020204"/>
+                <a:cs typeface="Arial" panose="020B0604020202020204"/>
+                <a:sym typeface="Arial" panose="020B0604020202020204"/>
+              </a:defRPr>
+            </a:lvl7pPr>
+            <a:lvl8pPr marL="3657600" marR="0" lvl="7" indent="-342900" algn="l" rtl="0">
+              <a:lnSpc>
+                <a:spcPct val="100000"/>
+              </a:lnSpc>
+              <a:spcBef>
+                <a:spcPts val="360"/>
+              </a:spcBef>
+              <a:spcAft>
+                <a:spcPts val="0"/>
+              </a:spcAft>
+              <a:buClr>
+                <a:schemeClr val="dk2"/>
+              </a:buClr>
+              <a:buSzPts val="1800"/>
+              <a:buFont typeface="Arial" panose="020B0604020202020204"/>
+              <a:buChar char="•"/>
+              <a:defRPr sz="1600" b="0" i="0" u="none" strike="noStrike" cap="none">
+                <a:solidFill>
+                  <a:schemeClr val="dk1"/>
+                </a:solidFill>
+                <a:latin typeface="Arial" panose="020B0604020202020204"/>
+                <a:ea typeface="Arial" panose="020B0604020202020204"/>
+                <a:cs typeface="Arial" panose="020B0604020202020204"/>
+                <a:sym typeface="Arial" panose="020B0604020202020204"/>
+              </a:defRPr>
+            </a:lvl8pPr>
+            <a:lvl9pPr marL="4114800" marR="0" lvl="8" indent="-342900" algn="l" rtl="0">
+              <a:lnSpc>
+                <a:spcPct val="100000"/>
+              </a:lnSpc>
+              <a:spcBef>
+                <a:spcPts val="360"/>
+              </a:spcBef>
+              <a:spcAft>
+                <a:spcPts val="0"/>
+              </a:spcAft>
+              <a:buClr>
+                <a:schemeClr val="dk2"/>
+              </a:buClr>
+              <a:buSzPts val="1800"/>
+              <a:buFont typeface="Arial" panose="020B0604020202020204"/>
+              <a:buChar char="•"/>
+              <a:defRPr sz="1400" b="0" i="0" u="none" strike="noStrike" cap="none">
+                <a:solidFill>
+                  <a:schemeClr val="dk1"/>
+                </a:solidFill>
+                <a:latin typeface="Arial" panose="020B0604020202020204"/>
+                <a:ea typeface="Arial" panose="020B0604020202020204"/>
+                <a:cs typeface="Arial" panose="020B0604020202020204"/>
+                <a:sym typeface="Arial" panose="020B0604020202020204"/>
+              </a:defRPr>
+            </a:lvl9pPr>
+          </a:lstStyle>
+          <a:p>
+            <a:pPr marL="0" indent="0">
+              <a:lnSpc>
+                <a:spcPct val="150000"/>
+              </a:lnSpc>
+              <a:buFont typeface="Noto Sans Symbols"/>
+              <a:buNone/>
             </a:pPr>
             <a:r>
-              <a:rPr lang="en-US" dirty="0"/>
-              <a:t>Add Employee</a:t>
-            </a:r>
-          </a:p>
-          <a:p>
-            <a:pPr lvl="1">
-              <a:buFont typeface="Wingdings" panose="05000000000000000000" pitchFamily="2" charset="2"/>
-              <a:buChar char="§"/>
+              <a:rPr lang="en-IN" sz="2400" b="1" dirty="0">
+                <a:solidFill>
+                  <a:srgbClr val="C00000"/>
+                </a:solidFill>
+                <a:latin typeface="Times New Roman" panose="02020603050405020304" pitchFamily="18" charset="0"/>
+                <a:cs typeface="Times New Roman" panose="02020603050405020304" pitchFamily="18" charset="0"/>
+              </a:rPr>
+              <a:t>BACK-END:</a:t>
+            </a:r>
+          </a:p>
+          <a:p>
+            <a:pPr marL="0" indent="0">
+              <a:lnSpc>
+                <a:spcPct val="150000"/>
+              </a:lnSpc>
+              <a:buFont typeface="Noto Sans Symbols"/>
+              <a:buNone/>
             </a:pPr>
-            <a:r>
-              <a:rPr lang="en-US" dirty="0"/>
-              <a:t>Update Employee</a:t>
-            </a:r>
-          </a:p>
-          <a:p>
-            <a:pPr lvl="1">
-              <a:buFont typeface="Wingdings" panose="05000000000000000000" pitchFamily="2" charset="2"/>
-              <a:buChar char="§"/>
+            <a:endParaRPr lang="en-IN" dirty="0">
+              <a:solidFill>
+                <a:schemeClr val="tx1"/>
+              </a:solidFill>
+              <a:latin typeface="Times New Roman" panose="02020603050405020304" pitchFamily="18" charset="0"/>
+              <a:cs typeface="Times New Roman" panose="02020603050405020304" pitchFamily="18" charset="0"/>
+            </a:endParaRPr>
+          </a:p>
+          <a:p>
+            <a:pPr marL="0" indent="0">
+              <a:lnSpc>
+                <a:spcPct val="150000"/>
+              </a:lnSpc>
+              <a:buFont typeface="Noto Sans Symbols"/>
+              <a:buNone/>
             </a:pPr>
             <a:r>
-              <a:rPr lang="en-US" dirty="0"/>
-              <a:t>Delete(Resigned) Employee</a:t>
-            </a:r>
-          </a:p>
-          <a:p>
-            <a:pPr lvl="1">
-              <a:buFont typeface="Wingdings" panose="05000000000000000000" pitchFamily="2" charset="2"/>
-              <a:buChar char="§"/>
+              <a:rPr lang="en-IN" dirty="0">
+                <a:solidFill>
+                  <a:schemeClr val="tx1"/>
+                </a:solidFill>
+                <a:latin typeface="Times New Roman" panose="02020603050405020304" pitchFamily="18" charset="0"/>
+                <a:cs typeface="Times New Roman" panose="02020603050405020304" pitchFamily="18" charset="0"/>
+              </a:rPr>
+              <a:t>Express.js</a:t>
+            </a:r>
+          </a:p>
+          <a:p>
+            <a:pPr marL="0" indent="0">
+              <a:lnSpc>
+                <a:spcPct val="150000"/>
+              </a:lnSpc>
+              <a:buFont typeface="Noto Sans Symbols"/>
+              <a:buNone/>
             </a:pPr>
-            <a:r>
-              <a:rPr lang="en-US" dirty="0"/>
-              <a:t>Track attendance</a:t>
-            </a:r>
-          </a:p>
-          <a:p>
-            <a:pPr lvl="1">
-              <a:buFont typeface="Wingdings" panose="05000000000000000000" pitchFamily="2" charset="2"/>
-              <a:buChar char="§"/>
+            <a:endParaRPr lang="en-IN" dirty="0">
+              <a:solidFill>
+                <a:schemeClr val="tx1"/>
+              </a:solidFill>
+              <a:latin typeface="Times New Roman" panose="02020603050405020304" pitchFamily="18" charset="0"/>
+              <a:cs typeface="Times New Roman" panose="02020603050405020304" pitchFamily="18" charset="0"/>
+            </a:endParaRPr>
+          </a:p>
+          <a:p>
+            <a:pPr marL="0" indent="0">
+              <a:lnSpc>
+                <a:spcPct val="150000"/>
+              </a:lnSpc>
+              <a:buFont typeface="Noto Sans Symbols"/>
+              <a:buNone/>
             </a:pPr>
             <a:r>
-              <a:rPr lang="en-US" dirty="0"/>
-              <a:t>Integrated messaging system</a:t>
-            </a:r>
-          </a:p>
-          <a:p>
-            <a:pPr lvl="1">
-              <a:buFont typeface="Wingdings" panose="05000000000000000000" pitchFamily="2" charset="2"/>
-              <a:buChar char="§"/>
+              <a:rPr lang="en-IN" dirty="0">
+                <a:solidFill>
+                  <a:schemeClr val="tx1"/>
+                </a:solidFill>
+                <a:latin typeface="Times New Roman" panose="02020603050405020304" pitchFamily="18" charset="0"/>
+                <a:cs typeface="Times New Roman" panose="02020603050405020304" pitchFamily="18" charset="0"/>
+              </a:rPr>
+              <a:t>MongoDB</a:t>
+            </a:r>
+            <a:endParaRPr lang="en-IN" sz="2400" dirty="0">
+              <a:solidFill>
+                <a:schemeClr val="tx1"/>
+              </a:solidFill>
+              <a:latin typeface="Times New Roman" panose="02020603050405020304" pitchFamily="18" charset="0"/>
+              <a:cs typeface="Times New Roman" panose="02020603050405020304" pitchFamily="18" charset="0"/>
+            </a:endParaRPr>
+          </a:p>
+          <a:p>
+            <a:pPr marL="0" indent="0">
+              <a:lnSpc>
+                <a:spcPct val="150000"/>
+              </a:lnSpc>
+              <a:buFont typeface="Noto Sans Symbols"/>
+              <a:buNone/>
             </a:pPr>
-            <a:r>
-              <a:rPr lang="en-US" dirty="0"/>
-              <a:t>Leave Management</a:t>
-            </a:r>
-          </a:p>
-          <a:p>
-            <a:pPr lvl="1">
-              <a:buFont typeface="Wingdings" panose="05000000000000000000" pitchFamily="2" charset="2"/>
-              <a:buChar char="§"/>
+            <a:endParaRPr lang="en-IN" dirty="0">
+              <a:solidFill>
+                <a:schemeClr val="tx1"/>
+              </a:solidFill>
+              <a:latin typeface="Times New Roman" panose="02020603050405020304" pitchFamily="18" charset="0"/>
+              <a:cs typeface="Times New Roman" panose="02020603050405020304" pitchFamily="18" charset="0"/>
+            </a:endParaRPr>
+          </a:p>
+          <a:p>
+            <a:pPr marL="0" indent="0">
+              <a:lnSpc>
+                <a:spcPct val="150000"/>
+              </a:lnSpc>
+              <a:buFont typeface="Noto Sans Symbols"/>
+              <a:buNone/>
             </a:pPr>
             <a:r>
-              <a:rPr lang="en-US" dirty="0"/>
-              <a:t>Holiday management</a:t>
-            </a:r>
-          </a:p>
-          <a:p>
-            <a:pPr lvl="1">
-              <a:buFont typeface="Wingdings" panose="05000000000000000000" pitchFamily="2" charset="2"/>
-              <a:buChar char="§"/>
+              <a:rPr lang="en-IN" dirty="0">
+                <a:solidFill>
+                  <a:schemeClr val="tx1"/>
+                </a:solidFill>
+                <a:latin typeface="Times New Roman" panose="02020603050405020304" pitchFamily="18" charset="0"/>
+                <a:cs typeface="Times New Roman" panose="02020603050405020304" pitchFamily="18" charset="0"/>
+              </a:rPr>
+              <a:t>Twilio</a:t>
+            </a:r>
+            <a:endParaRPr lang="en-IN" sz="2400" dirty="0">
+              <a:solidFill>
+                <a:schemeClr val="tx1"/>
+              </a:solidFill>
+              <a:latin typeface="Times New Roman" panose="02020603050405020304" pitchFamily="18" charset="0"/>
+              <a:cs typeface="Times New Roman" panose="02020603050405020304" pitchFamily="18" charset="0"/>
+            </a:endParaRPr>
+          </a:p>
+          <a:p>
+            <a:pPr marL="0" indent="0">
+              <a:lnSpc>
+                <a:spcPct val="150000"/>
+              </a:lnSpc>
+              <a:buFont typeface="Noto Sans Symbols"/>
+              <a:buNone/>
             </a:pPr>
-            <a:r>
-              <a:rPr lang="en-US" dirty="0"/>
-              <a:t>Information Passing</a:t>
-            </a:r>
-          </a:p>
-          <a:p>
-            <a:pPr lvl="1">
-              <a:buFont typeface="Wingdings" panose="05000000000000000000" pitchFamily="2" charset="2"/>
-              <a:buChar char="§"/>
+            <a:endParaRPr lang="en-IN" dirty="0">
+              <a:solidFill>
+                <a:schemeClr val="tx1"/>
+              </a:solidFill>
+              <a:latin typeface="Times New Roman" panose="02020603050405020304" pitchFamily="18" charset="0"/>
+              <a:cs typeface="Times New Roman" panose="02020603050405020304" pitchFamily="18" charset="0"/>
+            </a:endParaRPr>
+          </a:p>
+          <a:p>
+            <a:pPr marL="0" indent="0">
+              <a:lnSpc>
+                <a:spcPct val="150000"/>
+              </a:lnSpc>
+              <a:buFont typeface="Noto Sans Symbols"/>
+              <a:buNone/>
             </a:pPr>
             <a:r>
-              <a:rPr lang="en-US" dirty="0"/>
-              <a:t>Salary calculation</a:t>
-            </a:r>
-          </a:p>
-          <a:p>
-            <a:endParaRPr lang="en-US" dirty="0"/>
-          </a:p>
-          <a:p>
-            <a:endParaRPr lang="en-US" dirty="0"/>
+              <a:rPr lang="en-IN" dirty="0">
+                <a:solidFill>
+                  <a:schemeClr val="tx1"/>
+                </a:solidFill>
+                <a:latin typeface="Times New Roman" panose="02020603050405020304" pitchFamily="18" charset="0"/>
+                <a:cs typeface="Times New Roman" panose="02020603050405020304" pitchFamily="18" charset="0"/>
+              </a:rPr>
+              <a:t>Render</a:t>
+            </a:r>
+          </a:p>
+          <a:p>
+            <a:pPr marL="0" indent="0">
+              <a:lnSpc>
+                <a:spcPct val="150000"/>
+              </a:lnSpc>
+              <a:buFont typeface="Noto Sans Symbols"/>
+              <a:buNone/>
+            </a:pPr>
+            <a:endParaRPr lang="en-IN" dirty="0">
+              <a:solidFill>
+                <a:schemeClr val="tx1"/>
+              </a:solidFill>
+              <a:latin typeface="Times New Roman" panose="02020603050405020304" pitchFamily="18" charset="0"/>
+              <a:cs typeface="Times New Roman" panose="02020603050405020304" pitchFamily="18" charset="0"/>
+            </a:endParaRPr>
+          </a:p>
+          <a:p>
+            <a:pPr marL="0" indent="0">
+              <a:lnSpc>
+                <a:spcPct val="150000"/>
+              </a:lnSpc>
+              <a:buFont typeface="Noto Sans Symbols"/>
+              <a:buNone/>
+            </a:pPr>
+            <a:r>
+              <a:rPr lang="en-US" sz="2100" dirty="0" err="1">
+                <a:latin typeface="Times New Roman" panose="02020603050405020304" pitchFamily="18" charset="0"/>
+                <a:cs typeface="Times New Roman" panose="02020603050405020304" pitchFamily="18" charset="0"/>
+              </a:rPr>
+              <a:t>Nodemailer</a:t>
+            </a:r>
+            <a:endParaRPr lang="en-US" sz="2100" dirty="0">
+              <a:latin typeface="Times New Roman" panose="02020603050405020304" pitchFamily="18" charset="0"/>
+              <a:cs typeface="Times New Roman" panose="02020603050405020304" pitchFamily="18" charset="0"/>
+            </a:endParaRPr>
+          </a:p>
+          <a:p>
+            <a:pPr marL="0" indent="0">
+              <a:lnSpc>
+                <a:spcPct val="150000"/>
+              </a:lnSpc>
+              <a:buFont typeface="Noto Sans Symbols"/>
+              <a:buNone/>
+            </a:pPr>
+            <a:endParaRPr lang="en-US" dirty="0">
+              <a:solidFill>
+                <a:schemeClr val="tx1"/>
+              </a:solidFill>
+              <a:latin typeface="Times New Roman" panose="02020603050405020304" pitchFamily="18" charset="0"/>
+              <a:cs typeface="Times New Roman" panose="02020603050405020304" pitchFamily="18" charset="0"/>
+            </a:endParaRPr>
+          </a:p>
+          <a:p>
+            <a:pPr marL="0" indent="0">
+              <a:lnSpc>
+                <a:spcPct val="150000"/>
+              </a:lnSpc>
+              <a:buFont typeface="Noto Sans Symbols"/>
+              <a:buNone/>
+            </a:pPr>
+            <a:r>
+              <a:rPr lang="en-US" dirty="0">
+                <a:solidFill>
+                  <a:schemeClr val="tx1"/>
+                </a:solidFill>
+                <a:latin typeface="Times New Roman" panose="02020603050405020304" pitchFamily="18" charset="0"/>
+                <a:cs typeface="Times New Roman" panose="02020603050405020304" pitchFamily="18" charset="0"/>
+              </a:rPr>
+              <a:t>JWT</a:t>
+            </a:r>
+            <a:endParaRPr lang="en-IN" dirty="0">
+              <a:solidFill>
+                <a:schemeClr val="tx1"/>
+              </a:solidFill>
+              <a:latin typeface="Times New Roman" panose="02020603050405020304" pitchFamily="18" charset="0"/>
+              <a:cs typeface="Times New Roman" panose="02020603050405020304" pitchFamily="18" charset="0"/>
+            </a:endParaRPr>
           </a:p>
         </p:txBody>
       </p:sp>
       <p:sp>
         <p:nvSpPr>
-          <p:cNvPr id="3" name="Text Placeholder 3">
+          <p:cNvPr id="3" name="Content Placeholder 2">
             <a:extLst>
               <a:ext uri="{FF2B5EF4-FFF2-40B4-BE49-F238E27FC236}">
-                <a16:creationId xmlns:a16="http://schemas.microsoft.com/office/drawing/2014/main" id="{8622B14B-ED52-24CF-5CAD-5612960AA095}"/>
-              </a:ext>
-            </a:extLst>
-          </p:cNvPr>
-          <p:cNvSpPr txBox="1">
-            <a:spLocks/>
-          </p:cNvSpPr>
-          <p:nvPr/>
-        </p:nvSpPr>
-        <p:spPr>
-          <a:xfrm>
-            <a:off x="5065295" y="2245530"/>
-            <a:ext cx="4114800" cy="4389437"/>
-          </a:xfrm>
-          <a:prstGeom prst="rect">
-            <a:avLst/>
-          </a:prstGeom>
-          <a:noFill/>
-          <a:ln w="9525">
-            <a:noFill/>
-          </a:ln>
-        </p:spPr>
-        <p:txBody>
-          <a:bodyPr/>
-          <a:lstStyle>
-            <a:lvl1pPr marL="273050" indent="-273050" algn="l" rtl="0" eaLnBrk="0" fontAlgn="base" hangingPunct="0">
-              <a:spcBef>
-                <a:spcPct val="20000"/>
-              </a:spcBef>
-              <a:spcAft>
-                <a:spcPct val="0"/>
-              </a:spcAft>
-              <a:buSzPct val="80000"/>
-              <a:buFont typeface="Wingdings" panose="05000000000000000000" pitchFamily="2" charset="2"/>
-              <a:buChar char="Ø"/>
-              <a:defRPr sz="2000" kern="1200">
-                <a:solidFill>
-                  <a:schemeClr val="tx1"/>
-                </a:solidFill>
-                <a:latin typeface="+mn-lt"/>
-                <a:ea typeface="+mn-ea"/>
-                <a:cs typeface="+mn-cs"/>
-              </a:defRPr>
-            </a:lvl1pPr>
-            <a:lvl2pPr marL="640080" indent="-246380" algn="l" rtl="0" eaLnBrk="0" fontAlgn="base" hangingPunct="0">
-              <a:spcBef>
-                <a:spcPct val="20000"/>
-              </a:spcBef>
-              <a:spcAft>
-                <a:spcPct val="0"/>
-              </a:spcAft>
-              <a:buSzPct val="80000"/>
-              <a:buFont typeface="Wingdings" panose="05000000000000000000" pitchFamily="2" charset="2"/>
-              <a:buChar char="Ø"/>
-              <a:defRPr sz="2000" kern="1200">
-                <a:solidFill>
-                  <a:schemeClr val="tx1"/>
-                </a:solidFill>
-                <a:latin typeface="+mn-lt"/>
-                <a:ea typeface="+mn-ea"/>
-                <a:cs typeface="+mn-cs"/>
-              </a:defRPr>
-            </a:lvl2pPr>
-            <a:lvl3pPr marL="914400" indent="-246380" algn="l" rtl="0" eaLnBrk="0" fontAlgn="base" hangingPunct="0">
-              <a:spcBef>
-                <a:spcPct val="20000"/>
-              </a:spcBef>
-              <a:spcAft>
-                <a:spcPct val="0"/>
-              </a:spcAft>
-              <a:buSzPct val="80000"/>
-              <a:buFont typeface="Wingdings" panose="05000000000000000000" pitchFamily="2" charset="2"/>
-              <a:buChar char="Ø"/>
-              <a:defRPr sz="2000" kern="1200">
-                <a:solidFill>
-                  <a:schemeClr val="tx1"/>
-                </a:solidFill>
-                <a:latin typeface="+mn-lt"/>
-                <a:ea typeface="+mn-ea"/>
-                <a:cs typeface="+mn-cs"/>
-              </a:defRPr>
-            </a:lvl3pPr>
-            <a:lvl4pPr marL="1187450" indent="-209550" algn="l" rtl="0" eaLnBrk="0" fontAlgn="base" hangingPunct="0">
-              <a:spcBef>
-                <a:spcPct val="20000"/>
-              </a:spcBef>
-              <a:spcAft>
-                <a:spcPct val="0"/>
-              </a:spcAft>
-              <a:buSzPct val="80000"/>
-              <a:buFont typeface="Wingdings" panose="05000000000000000000" pitchFamily="2" charset="2"/>
-              <a:buChar char="Ø"/>
-              <a:defRPr sz="2000" kern="1200">
-                <a:solidFill>
-                  <a:schemeClr val="tx1"/>
-                </a:solidFill>
-                <a:latin typeface="+mn-lt"/>
-                <a:ea typeface="+mn-ea"/>
-                <a:cs typeface="+mn-cs"/>
-              </a:defRPr>
-            </a:lvl4pPr>
-            <a:lvl5pPr marL="1462405" indent="-209550" algn="l" rtl="0" eaLnBrk="0" fontAlgn="base" hangingPunct="0">
-              <a:spcBef>
-                <a:spcPct val="20000"/>
-              </a:spcBef>
-              <a:spcAft>
-                <a:spcPct val="0"/>
-              </a:spcAft>
-              <a:buSzPct val="80000"/>
-              <a:buFont typeface="Wingdings" panose="05000000000000000000" pitchFamily="2" charset="2"/>
-              <a:buChar char="Ø"/>
-              <a:defRPr sz="2000" kern="1200">
-                <a:solidFill>
-                  <a:schemeClr val="tx1"/>
-                </a:solidFill>
-                <a:latin typeface="+mn-lt"/>
-                <a:ea typeface="+mn-ea"/>
-                <a:cs typeface="+mn-cs"/>
-              </a:defRPr>
-            </a:lvl5pPr>
-            <a:lvl6pPr marL="1737360" indent="-210185" algn="l" rtl="0" eaLnBrk="1" latinLnBrk="0" hangingPunct="1">
-              <a:spcBef>
-                <a:spcPct val="20000"/>
-              </a:spcBef>
-              <a:buClr>
-                <a:schemeClr val="accent5"/>
-              </a:buClr>
-              <a:buSzPct val="80000"/>
-              <a:buFont typeface="Wingdings 2" panose="05020102010507070707"/>
-              <a:buChar char=""/>
-              <a:defRPr kumimoji="0" sz="1800" kern="1200">
-                <a:solidFill>
-                  <a:schemeClr val="tx1"/>
-                </a:solidFill>
-                <a:latin typeface="+mn-lt"/>
-                <a:ea typeface="+mn-ea"/>
-                <a:cs typeface="+mn-cs"/>
-              </a:defRPr>
-            </a:lvl6pPr>
-            <a:lvl7pPr marL="1920240" indent="-182880" algn="l" rtl="0" eaLnBrk="1" latinLnBrk="0" hangingPunct="1">
-              <a:spcBef>
-                <a:spcPct val="20000"/>
-              </a:spcBef>
-              <a:buClr>
-                <a:schemeClr val="accent6"/>
-              </a:buClr>
-              <a:buSzPct val="80000"/>
-              <a:buFont typeface="Wingdings 2" panose="05020102010507070707"/>
-              <a:buChar char=""/>
-              <a:defRPr kumimoji="0" sz="1600" kern="1200" baseline="0">
-                <a:solidFill>
-                  <a:schemeClr val="tx1"/>
-                </a:solidFill>
-                <a:latin typeface="+mn-lt"/>
-                <a:ea typeface="+mn-ea"/>
-                <a:cs typeface="+mn-cs"/>
-              </a:defRPr>
-            </a:lvl7pPr>
-            <a:lvl8pPr marL="2194560" indent="-182880" algn="l" rtl="0" eaLnBrk="1" latinLnBrk="0" hangingPunct="1">
-              <a:spcBef>
-                <a:spcPct val="20000"/>
-              </a:spcBef>
-              <a:buClr>
-                <a:schemeClr val="tx2"/>
-              </a:buClr>
-              <a:buChar char="•"/>
-              <a:defRPr kumimoji="0" sz="1600" kern="1200">
-                <a:solidFill>
-                  <a:schemeClr val="tx1"/>
-                </a:solidFill>
-                <a:latin typeface="+mn-lt"/>
-                <a:ea typeface="+mn-ea"/>
-                <a:cs typeface="+mn-cs"/>
-              </a:defRPr>
-            </a:lvl8pPr>
-            <a:lvl9pPr marL="2468880" indent="-182880" algn="l" rtl="0" eaLnBrk="1" latinLnBrk="0" hangingPunct="1">
-              <a:spcBef>
-                <a:spcPct val="20000"/>
-              </a:spcBef>
-              <a:buClr>
-                <a:schemeClr val="tx2"/>
-              </a:buClr>
-              <a:buFontTx/>
-              <a:buChar char="•"/>
-              <a:defRPr kumimoji="0" sz="1400" kern="1200" baseline="0">
-                <a:solidFill>
-                  <a:schemeClr val="tx1"/>
-                </a:solidFill>
-                <a:latin typeface="+mn-lt"/>
-                <a:ea typeface="+mn-ea"/>
-                <a:cs typeface="+mn-cs"/>
-              </a:defRPr>
-            </a:lvl9pPr>
-          </a:lstStyle>
-          <a:p>
-            <a:r>
-              <a:rPr lang="en-US" dirty="0"/>
-              <a:t>Employee Dashboard</a:t>
-            </a:r>
-          </a:p>
-          <a:p>
-            <a:pPr lvl="1">
-              <a:buFont typeface="Wingdings" panose="05000000000000000000" pitchFamily="2" charset="2"/>
-              <a:buChar char="§"/>
-            </a:pPr>
-            <a:r>
-              <a:rPr lang="en-US" dirty="0"/>
-              <a:t>Personal details</a:t>
-            </a:r>
-          </a:p>
-          <a:p>
-            <a:pPr lvl="1">
-              <a:buFont typeface="Wingdings" panose="05000000000000000000" pitchFamily="2" charset="2"/>
-              <a:buChar char="§"/>
-            </a:pPr>
-            <a:r>
-              <a:rPr lang="en-US" dirty="0"/>
-              <a:t>Leave application</a:t>
-            </a:r>
-          </a:p>
-          <a:p>
-            <a:pPr lvl="1">
-              <a:buFont typeface="Wingdings" panose="05000000000000000000" pitchFamily="2" charset="2"/>
-              <a:buChar char="§"/>
-            </a:pPr>
-            <a:r>
-              <a:rPr lang="en-US" dirty="0"/>
-              <a:t>Attendance &amp; salary viewing</a:t>
-            </a:r>
-          </a:p>
-          <a:p>
-            <a:endParaRPr lang="en-US" dirty="0"/>
-          </a:p>
-          <a:p>
-            <a:pPr algn="ctr"/>
-            <a:endParaRPr lang="en-US" dirty="0"/>
-          </a:p>
-        </p:txBody>
-      </p:sp>
-      <p:sp>
-        <p:nvSpPr>
-          <p:cNvPr id="8" name="TextBox 7">
-            <a:extLst>
-              <a:ext uri="{FF2B5EF4-FFF2-40B4-BE49-F238E27FC236}">
-                <a16:creationId xmlns:a16="http://schemas.microsoft.com/office/drawing/2014/main" id="{21870AFD-D6C7-095D-930C-6226B6AA25B3}"/>
+                <a16:creationId xmlns:a16="http://schemas.microsoft.com/office/drawing/2014/main" id="{575BC973-DC6B-6A5C-584E-D87DBA081745}"/>
               </a:ext>
             </a:extLst>
           </p:cNvPr>
@@ -16809,31 +19351,669 @@
         </p:nvSpPr>
         <p:spPr>
           <a:xfrm>
-            <a:off x="3371513" y="1600200"/>
-            <a:ext cx="2320763" cy="400110"/>
+            <a:off x="1143001" y="1524000"/>
+            <a:ext cx="2362200" cy="2345371"/>
           </a:xfrm>
           <a:prstGeom prst="rect">
             <a:avLst/>
           </a:prstGeom>
           <a:noFill/>
+          <a:ln>
+            <a:noFill/>
+          </a:ln>
         </p:spPr>
         <p:txBody>
-          <a:bodyPr wrap="square">
-            <a:spAutoFit/>
+          <a:bodyPr spcFirstLastPara="1" wrap="square" lIns="91425" tIns="45700" rIns="91425" bIns="45700" anchor="t" anchorCtr="0">
+            <a:normAutofit/>
           </a:bodyPr>
-          <a:lstStyle/>
-          <a:p>
-            <a:pPr marL="285750" indent="-285750" algn="ctr">
-              <a:buFont typeface="Wingdings" panose="05000000000000000000" pitchFamily="2" charset="2"/>
-              <a:buChar char="Ø"/>
+          <a:lstStyle>
+            <a:defPPr marR="0" lvl="0" algn="l" rtl="0">
+              <a:lnSpc>
+                <a:spcPct val="100000"/>
+              </a:lnSpc>
+              <a:spcBef>
+                <a:spcPts val="0"/>
+              </a:spcBef>
+              <a:spcAft>
+                <a:spcPts val="0"/>
+              </a:spcAft>
+            </a:defPPr>
+            <a:lvl1pPr marL="457200" marR="0" lvl="0" indent="-320040" algn="l" rtl="0">
+              <a:lnSpc>
+                <a:spcPct val="100000"/>
+              </a:lnSpc>
+              <a:spcBef>
+                <a:spcPts val="360"/>
+              </a:spcBef>
+              <a:spcAft>
+                <a:spcPts val="0"/>
+              </a:spcAft>
+              <a:buClr>
+                <a:schemeClr val="dk1"/>
+              </a:buClr>
+              <a:buSzPts val="1440"/>
+              <a:buFont typeface="Noto Sans Symbols"/>
+              <a:buChar char="⮚"/>
+              <a:defRPr sz="2000" b="0" i="0" u="none" strike="noStrike" cap="none">
+                <a:solidFill>
+                  <a:schemeClr val="dk1"/>
+                </a:solidFill>
+                <a:latin typeface="Arial" panose="020B0604020202020204"/>
+                <a:ea typeface="Arial" panose="020B0604020202020204"/>
+                <a:cs typeface="Arial" panose="020B0604020202020204"/>
+                <a:sym typeface="Arial" panose="020B0604020202020204"/>
+              </a:defRPr>
+            </a:lvl1pPr>
+            <a:lvl2pPr marL="914400" marR="0" lvl="1" indent="-320040" algn="l" rtl="0">
+              <a:lnSpc>
+                <a:spcPct val="100000"/>
+              </a:lnSpc>
+              <a:spcBef>
+                <a:spcPts val="360"/>
+              </a:spcBef>
+              <a:spcAft>
+                <a:spcPts val="0"/>
+              </a:spcAft>
+              <a:buClr>
+                <a:schemeClr val="dk1"/>
+              </a:buClr>
+              <a:buSzPts val="1440"/>
+              <a:buFont typeface="Noto Sans Symbols"/>
+              <a:buChar char="⮚"/>
+              <a:defRPr sz="2000" b="0" i="0" u="none" strike="noStrike" cap="none">
+                <a:solidFill>
+                  <a:schemeClr val="dk1"/>
+                </a:solidFill>
+                <a:latin typeface="Arial" panose="020B0604020202020204"/>
+                <a:ea typeface="Arial" panose="020B0604020202020204"/>
+                <a:cs typeface="Arial" panose="020B0604020202020204"/>
+                <a:sym typeface="Arial" panose="020B0604020202020204"/>
+              </a:defRPr>
+            </a:lvl2pPr>
+            <a:lvl3pPr marL="1371600" marR="0" lvl="2" indent="-320040" algn="l" rtl="0">
+              <a:lnSpc>
+                <a:spcPct val="100000"/>
+              </a:lnSpc>
+              <a:spcBef>
+                <a:spcPts val="360"/>
+              </a:spcBef>
+              <a:spcAft>
+                <a:spcPts val="0"/>
+              </a:spcAft>
+              <a:buClr>
+                <a:schemeClr val="dk1"/>
+              </a:buClr>
+              <a:buSzPts val="1440"/>
+              <a:buFont typeface="Noto Sans Symbols"/>
+              <a:buChar char="⮚"/>
+              <a:defRPr sz="2000" b="0" i="0" u="none" strike="noStrike" cap="none">
+                <a:solidFill>
+                  <a:schemeClr val="dk1"/>
+                </a:solidFill>
+                <a:latin typeface="Arial" panose="020B0604020202020204"/>
+                <a:ea typeface="Arial" panose="020B0604020202020204"/>
+                <a:cs typeface="Arial" panose="020B0604020202020204"/>
+                <a:sym typeface="Arial" panose="020B0604020202020204"/>
+              </a:defRPr>
+            </a:lvl3pPr>
+            <a:lvl4pPr marL="1828800" marR="0" lvl="3" indent="-320040" algn="l" rtl="0">
+              <a:lnSpc>
+                <a:spcPct val="100000"/>
+              </a:lnSpc>
+              <a:spcBef>
+                <a:spcPts val="360"/>
+              </a:spcBef>
+              <a:spcAft>
+                <a:spcPts val="0"/>
+              </a:spcAft>
+              <a:buClr>
+                <a:schemeClr val="dk1"/>
+              </a:buClr>
+              <a:buSzPts val="1440"/>
+              <a:buFont typeface="Noto Sans Symbols"/>
+              <a:buChar char="⮚"/>
+              <a:defRPr sz="2000" b="0" i="0" u="none" strike="noStrike" cap="none">
+                <a:solidFill>
+                  <a:schemeClr val="dk1"/>
+                </a:solidFill>
+                <a:latin typeface="Arial" panose="020B0604020202020204"/>
+                <a:ea typeface="Arial" panose="020B0604020202020204"/>
+                <a:cs typeface="Arial" panose="020B0604020202020204"/>
+                <a:sym typeface="Arial" panose="020B0604020202020204"/>
+              </a:defRPr>
+            </a:lvl4pPr>
+            <a:lvl5pPr marL="2286000" marR="0" lvl="4" indent="-320040" algn="l" rtl="0">
+              <a:lnSpc>
+                <a:spcPct val="100000"/>
+              </a:lnSpc>
+              <a:spcBef>
+                <a:spcPts val="360"/>
+              </a:spcBef>
+              <a:spcAft>
+                <a:spcPts val="0"/>
+              </a:spcAft>
+              <a:buClr>
+                <a:schemeClr val="dk1"/>
+              </a:buClr>
+              <a:buSzPts val="1440"/>
+              <a:buFont typeface="Noto Sans Symbols"/>
+              <a:buChar char="⮚"/>
+              <a:defRPr sz="2000" b="0" i="0" u="none" strike="noStrike" cap="none">
+                <a:solidFill>
+                  <a:schemeClr val="dk1"/>
+                </a:solidFill>
+                <a:latin typeface="Arial" panose="020B0604020202020204"/>
+                <a:ea typeface="Arial" panose="020B0604020202020204"/>
+                <a:cs typeface="Arial" panose="020B0604020202020204"/>
+                <a:sym typeface="Arial" panose="020B0604020202020204"/>
+              </a:defRPr>
+            </a:lvl5pPr>
+            <a:lvl6pPr marL="2743200" marR="0" lvl="5" indent="-320040" algn="l" rtl="0">
+              <a:lnSpc>
+                <a:spcPct val="100000"/>
+              </a:lnSpc>
+              <a:spcBef>
+                <a:spcPts val="360"/>
+              </a:spcBef>
+              <a:spcAft>
+                <a:spcPts val="0"/>
+              </a:spcAft>
+              <a:buClr>
+                <a:schemeClr val="accent5"/>
+              </a:buClr>
+              <a:buSzPts val="1440"/>
+              <a:buFont typeface="Noto Sans Symbols"/>
+              <a:buChar char="⚫"/>
+              <a:defRPr sz="1800" b="0" i="0" u="none" strike="noStrike" cap="none">
+                <a:solidFill>
+                  <a:schemeClr val="dk1"/>
+                </a:solidFill>
+                <a:latin typeface="Arial" panose="020B0604020202020204"/>
+                <a:ea typeface="Arial" panose="020B0604020202020204"/>
+                <a:cs typeface="Arial" panose="020B0604020202020204"/>
+                <a:sym typeface="Arial" panose="020B0604020202020204"/>
+              </a:defRPr>
+            </a:lvl6pPr>
+            <a:lvl7pPr marL="3200400" marR="0" lvl="6" indent="-320040" algn="l" rtl="0">
+              <a:lnSpc>
+                <a:spcPct val="100000"/>
+              </a:lnSpc>
+              <a:spcBef>
+                <a:spcPts val="360"/>
+              </a:spcBef>
+              <a:spcAft>
+                <a:spcPts val="0"/>
+              </a:spcAft>
+              <a:buClr>
+                <a:schemeClr val="accent6"/>
+              </a:buClr>
+              <a:buSzPts val="1440"/>
+              <a:buFont typeface="Noto Sans Symbols"/>
+              <a:buChar char="⚫"/>
+              <a:defRPr sz="1600" b="0" i="0" u="none" strike="noStrike" cap="none">
+                <a:solidFill>
+                  <a:schemeClr val="dk1"/>
+                </a:solidFill>
+                <a:latin typeface="Arial" panose="020B0604020202020204"/>
+                <a:ea typeface="Arial" panose="020B0604020202020204"/>
+                <a:cs typeface="Arial" panose="020B0604020202020204"/>
+                <a:sym typeface="Arial" panose="020B0604020202020204"/>
+              </a:defRPr>
+            </a:lvl7pPr>
+            <a:lvl8pPr marL="3657600" marR="0" lvl="7" indent="-342900" algn="l" rtl="0">
+              <a:lnSpc>
+                <a:spcPct val="100000"/>
+              </a:lnSpc>
+              <a:spcBef>
+                <a:spcPts val="360"/>
+              </a:spcBef>
+              <a:spcAft>
+                <a:spcPts val="0"/>
+              </a:spcAft>
+              <a:buClr>
+                <a:schemeClr val="dk2"/>
+              </a:buClr>
+              <a:buSzPts val="1800"/>
+              <a:buFont typeface="Arial" panose="020B0604020202020204"/>
+              <a:buChar char="•"/>
+              <a:defRPr sz="1600" b="0" i="0" u="none" strike="noStrike" cap="none">
+                <a:solidFill>
+                  <a:schemeClr val="dk1"/>
+                </a:solidFill>
+                <a:latin typeface="Arial" panose="020B0604020202020204"/>
+                <a:ea typeface="Arial" panose="020B0604020202020204"/>
+                <a:cs typeface="Arial" panose="020B0604020202020204"/>
+                <a:sym typeface="Arial" panose="020B0604020202020204"/>
+              </a:defRPr>
+            </a:lvl8pPr>
+            <a:lvl9pPr marL="4114800" marR="0" lvl="8" indent="-342900" algn="l" rtl="0">
+              <a:lnSpc>
+                <a:spcPct val="100000"/>
+              </a:lnSpc>
+              <a:spcBef>
+                <a:spcPts val="360"/>
+              </a:spcBef>
+              <a:spcAft>
+                <a:spcPts val="0"/>
+              </a:spcAft>
+              <a:buClr>
+                <a:schemeClr val="dk2"/>
+              </a:buClr>
+              <a:buSzPts val="1800"/>
+              <a:buFont typeface="Arial" panose="020B0604020202020204"/>
+              <a:buChar char="•"/>
+              <a:defRPr sz="1400" b="0" i="0" u="none" strike="noStrike" cap="none">
+                <a:solidFill>
+                  <a:schemeClr val="dk1"/>
+                </a:solidFill>
+                <a:latin typeface="Arial" panose="020B0604020202020204"/>
+                <a:ea typeface="Arial" panose="020B0604020202020204"/>
+                <a:cs typeface="Arial" panose="020B0604020202020204"/>
+                <a:sym typeface="Arial" panose="020B0604020202020204"/>
+              </a:defRPr>
+            </a:lvl9pPr>
+          </a:lstStyle>
+          <a:p>
+            <a:pPr marL="0" indent="0">
+              <a:lnSpc>
+                <a:spcPct val="150000"/>
+              </a:lnSpc>
+              <a:buFont typeface="Noto Sans Symbols"/>
+              <a:buNone/>
             </a:pPr>
             <a:r>
-              <a:rPr lang="en-US" sz="2000" dirty="0"/>
-              <a:t>Login</a:t>
-            </a:r>
+              <a:rPr lang="en-IN" sz="2400" b="1" dirty="0">
+                <a:solidFill>
+                  <a:srgbClr val="C00000"/>
+                </a:solidFill>
+                <a:latin typeface="Times New Roman" panose="02020603050405020304" pitchFamily="18" charset="0"/>
+                <a:cs typeface="Times New Roman" panose="02020603050405020304" pitchFamily="18" charset="0"/>
+              </a:rPr>
+              <a:t>FRONT-END:</a:t>
+            </a:r>
+          </a:p>
+          <a:p>
+            <a:pPr marL="0" indent="0">
+              <a:lnSpc>
+                <a:spcPct val="150000"/>
+              </a:lnSpc>
+              <a:buFont typeface="Noto Sans Symbols"/>
+              <a:buNone/>
+            </a:pPr>
+            <a:endParaRPr lang="en-IN" dirty="0">
+              <a:solidFill>
+                <a:schemeClr val="tx1"/>
+              </a:solidFill>
+              <a:latin typeface="Times New Roman" panose="02020603050405020304" pitchFamily="18" charset="0"/>
+              <a:cs typeface="Times New Roman" panose="02020603050405020304" pitchFamily="18" charset="0"/>
+            </a:endParaRPr>
+          </a:p>
+          <a:p>
+            <a:pPr marL="0" indent="0">
+              <a:lnSpc>
+                <a:spcPct val="150000"/>
+              </a:lnSpc>
+              <a:buFont typeface="Noto Sans Symbols"/>
+              <a:buNone/>
+            </a:pPr>
+            <a:r>
+              <a:rPr lang="en-IN" dirty="0">
+                <a:solidFill>
+                  <a:schemeClr val="tx1"/>
+                </a:solidFill>
+                <a:latin typeface="Times New Roman" panose="02020603050405020304" pitchFamily="18" charset="0"/>
+                <a:cs typeface="Times New Roman" panose="02020603050405020304" pitchFamily="18" charset="0"/>
+              </a:rPr>
+              <a:t>ReactJS</a:t>
+            </a:r>
+          </a:p>
+          <a:p>
+            <a:pPr marL="0" indent="0">
+              <a:lnSpc>
+                <a:spcPct val="150000"/>
+              </a:lnSpc>
+              <a:buFont typeface="Noto Sans Symbols"/>
+              <a:buNone/>
+            </a:pPr>
+            <a:endParaRPr lang="en-IN" dirty="0">
+              <a:solidFill>
+                <a:schemeClr val="tx1"/>
+              </a:solidFill>
+              <a:latin typeface="Times New Roman" panose="02020603050405020304" pitchFamily="18" charset="0"/>
+              <a:cs typeface="Times New Roman" panose="02020603050405020304" pitchFamily="18" charset="0"/>
+            </a:endParaRPr>
           </a:p>
         </p:txBody>
       </p:sp>
+      <p:pic>
+        <p:nvPicPr>
+          <p:cNvPr id="1026" name="Picture 2" descr="React">
+            <a:extLst>
+              <a:ext uri="{FF2B5EF4-FFF2-40B4-BE49-F238E27FC236}">
+                <a16:creationId xmlns:a16="http://schemas.microsoft.com/office/drawing/2014/main" id="{6B0A4973-37F2-AB34-4A3A-076DDABD972C}"/>
+              </a:ext>
+            </a:extLst>
+          </p:cNvPr>
+          <p:cNvPicPr>
+            <a:picLocks noChangeAspect="1" noChangeArrowheads="1"/>
+          </p:cNvPicPr>
+          <p:nvPr/>
+        </p:nvPicPr>
+        <p:blipFill>
+          <a:blip r:embed="rId2">
+            <a:extLst>
+              <a:ext uri="{28A0092B-C50C-407E-A947-70E740481C1C}">
+                <a14:useLocalDpi xmlns:a14="http://schemas.microsoft.com/office/drawing/2010/main" val="0"/>
+              </a:ext>
+            </a:extLst>
+          </a:blip>
+          <a:srcRect/>
+          <a:stretch>
+            <a:fillRect/>
+          </a:stretch>
+        </p:blipFill>
+        <p:spPr bwMode="auto">
+          <a:xfrm>
+            <a:off x="914400" y="3183571"/>
+            <a:ext cx="1371600" cy="1371600"/>
+          </a:xfrm>
+          <a:prstGeom prst="rect">
+            <a:avLst/>
+          </a:prstGeom>
+          <a:noFill/>
+          <a:extLst>
+            <a:ext uri="{909E8E84-426E-40DD-AFC4-6F175D3DCCD1}">
+              <a14:hiddenFill xmlns:a14="http://schemas.microsoft.com/office/drawing/2010/main">
+                <a:solidFill>
+                  <a:srgbClr val="FFFFFF"/>
+                </a:solidFill>
+              </a14:hiddenFill>
+            </a:ext>
+          </a:extLst>
+        </p:spPr>
+      </p:pic>
+      <p:pic>
+        <p:nvPicPr>
+          <p:cNvPr id="1028" name="Picture 4" descr="How to Make an API with Express.js: A ...">
+            <a:extLst>
+              <a:ext uri="{FF2B5EF4-FFF2-40B4-BE49-F238E27FC236}">
+                <a16:creationId xmlns:a16="http://schemas.microsoft.com/office/drawing/2014/main" id="{F42CDBD5-2701-5EEE-BB9B-FC906BBDDB75}"/>
+              </a:ext>
+            </a:extLst>
+          </p:cNvPr>
+          <p:cNvPicPr>
+            <a:picLocks noChangeAspect="1" noChangeArrowheads="1"/>
+          </p:cNvPicPr>
+          <p:nvPr/>
+        </p:nvPicPr>
+        <p:blipFill>
+          <a:blip r:embed="rId3">
+            <a:extLst>
+              <a:ext uri="{28A0092B-C50C-407E-A947-70E740481C1C}">
+                <a14:useLocalDpi xmlns:a14="http://schemas.microsoft.com/office/drawing/2010/main" val="0"/>
+              </a:ext>
+            </a:extLst>
+          </a:blip>
+          <a:srcRect/>
+          <a:stretch>
+            <a:fillRect/>
+          </a:stretch>
+        </p:blipFill>
+        <p:spPr bwMode="auto">
+          <a:xfrm>
+            <a:off x="4237542" y="2133600"/>
+            <a:ext cx="1371762" cy="912845"/>
+          </a:xfrm>
+          <a:prstGeom prst="rect">
+            <a:avLst/>
+          </a:prstGeom>
+          <a:noFill/>
+          <a:extLst>
+            <a:ext uri="{909E8E84-426E-40DD-AFC4-6F175D3DCCD1}">
+              <a14:hiddenFill xmlns:a14="http://schemas.microsoft.com/office/drawing/2010/main">
+                <a:solidFill>
+                  <a:srgbClr val="FFFFFF"/>
+                </a:solidFill>
+              </a14:hiddenFill>
+            </a:ext>
+          </a:extLst>
+        </p:spPr>
+      </p:pic>
+      <p:pic>
+        <p:nvPicPr>
+          <p:cNvPr id="1030" name="Picture 6" descr="What Is MongoDB? - GTech">
+            <a:extLst>
+              <a:ext uri="{FF2B5EF4-FFF2-40B4-BE49-F238E27FC236}">
+                <a16:creationId xmlns:a16="http://schemas.microsoft.com/office/drawing/2014/main" id="{3C9DEF65-4F86-5692-2D19-AE493AA6E2F2}"/>
+              </a:ext>
+            </a:extLst>
+          </p:cNvPr>
+          <p:cNvPicPr>
+            <a:picLocks noChangeAspect="1" noChangeArrowheads="1"/>
+          </p:cNvPicPr>
+          <p:nvPr/>
+        </p:nvPicPr>
+        <p:blipFill>
+          <a:blip r:embed="rId4">
+            <a:extLst>
+              <a:ext uri="{28A0092B-C50C-407E-A947-70E740481C1C}">
+                <a14:useLocalDpi xmlns:a14="http://schemas.microsoft.com/office/drawing/2010/main" val="0"/>
+              </a:ext>
+            </a:extLst>
+          </a:blip>
+          <a:srcRect/>
+          <a:stretch>
+            <a:fillRect/>
+          </a:stretch>
+        </p:blipFill>
+        <p:spPr bwMode="auto">
+          <a:xfrm>
+            <a:off x="6784031" y="2819400"/>
+            <a:ext cx="1932493" cy="884756"/>
+          </a:xfrm>
+          <a:prstGeom prst="rect">
+            <a:avLst/>
+          </a:prstGeom>
+          <a:noFill/>
+          <a:extLst>
+            <a:ext uri="{909E8E84-426E-40DD-AFC4-6F175D3DCCD1}">
+              <a14:hiddenFill xmlns:a14="http://schemas.microsoft.com/office/drawing/2010/main">
+                <a:solidFill>
+                  <a:srgbClr val="FFFFFF"/>
+                </a:solidFill>
+              </a14:hiddenFill>
+            </a:ext>
+          </a:extLst>
+        </p:spPr>
+      </p:pic>
+      <p:pic>
+        <p:nvPicPr>
+          <p:cNvPr id="1032" name="Picture 8" descr="Integrating Salesforce and Twilio - SMBHD">
+            <a:extLst>
+              <a:ext uri="{FF2B5EF4-FFF2-40B4-BE49-F238E27FC236}">
+                <a16:creationId xmlns:a16="http://schemas.microsoft.com/office/drawing/2014/main" id="{3A13954D-C6E9-4A71-4663-09B23BE84708}"/>
+              </a:ext>
+            </a:extLst>
+          </p:cNvPr>
+          <p:cNvPicPr>
+            <a:picLocks noChangeAspect="1" noChangeArrowheads="1"/>
+          </p:cNvPicPr>
+          <p:nvPr/>
+        </p:nvPicPr>
+        <p:blipFill>
+          <a:blip r:embed="rId5">
+            <a:extLst>
+              <a:ext uri="{28A0092B-C50C-407E-A947-70E740481C1C}">
+                <a14:useLocalDpi xmlns:a14="http://schemas.microsoft.com/office/drawing/2010/main" val="0"/>
+              </a:ext>
+            </a:extLst>
+          </a:blip>
+          <a:srcRect/>
+          <a:stretch>
+            <a:fillRect/>
+          </a:stretch>
+        </p:blipFill>
+        <p:spPr bwMode="auto">
+          <a:xfrm>
+            <a:off x="4436647" y="3493992"/>
+            <a:ext cx="1113502" cy="1113502"/>
+          </a:xfrm>
+          <a:prstGeom prst="rect">
+            <a:avLst/>
+          </a:prstGeom>
+          <a:noFill/>
+          <a:extLst>
+            <a:ext uri="{909E8E84-426E-40DD-AFC4-6F175D3DCCD1}">
+              <a14:hiddenFill xmlns:a14="http://schemas.microsoft.com/office/drawing/2010/main">
+                <a:solidFill>
+                  <a:srgbClr val="FFFFFF"/>
+                </a:solidFill>
+              </a14:hiddenFill>
+            </a:ext>
+          </a:extLst>
+        </p:spPr>
+      </p:pic>
+      <p:pic>
+        <p:nvPicPr>
+          <p:cNvPr id="1034" name="Picture 10" descr="Render (@render) / X">
+            <a:extLst>
+              <a:ext uri="{FF2B5EF4-FFF2-40B4-BE49-F238E27FC236}">
+                <a16:creationId xmlns:a16="http://schemas.microsoft.com/office/drawing/2014/main" id="{D6F60FF0-3604-FC6B-F36D-E8A5C0EC9D5F}"/>
+              </a:ext>
+            </a:extLst>
+          </p:cNvPr>
+          <p:cNvPicPr>
+            <a:picLocks noChangeAspect="1" noChangeArrowheads="1"/>
+          </p:cNvPicPr>
+          <p:nvPr/>
+        </p:nvPicPr>
+        <p:blipFill>
+          <a:blip r:embed="rId6">
+            <a:extLst>
+              <a:ext uri="{28A0092B-C50C-407E-A947-70E740481C1C}">
+                <a14:useLocalDpi xmlns:a14="http://schemas.microsoft.com/office/drawing/2010/main" val="0"/>
+              </a:ext>
+            </a:extLst>
+          </a:blip>
+          <a:srcRect/>
+          <a:stretch>
+            <a:fillRect/>
+          </a:stretch>
+        </p:blipFill>
+        <p:spPr bwMode="auto">
+          <a:xfrm>
+            <a:off x="6695286" y="4303732"/>
+            <a:ext cx="988463" cy="988463"/>
+          </a:xfrm>
+          <a:prstGeom prst="rect">
+            <a:avLst/>
+          </a:prstGeom>
+          <a:noFill/>
+          <a:extLst>
+            <a:ext uri="{909E8E84-426E-40DD-AFC4-6F175D3DCCD1}">
+              <a14:hiddenFill xmlns:a14="http://schemas.microsoft.com/office/drawing/2010/main">
+                <a:solidFill>
+                  <a:srgbClr val="FFFFFF"/>
+                </a:solidFill>
+              </a14:hiddenFill>
+            </a:ext>
+          </a:extLst>
+        </p:spPr>
+      </p:pic>
+      <p:pic>
+        <p:nvPicPr>
+          <p:cNvPr id="1036" name="Picture 12" descr="Medusa - medusa-plugin-nodemailer | Medusa">
+            <a:extLst>
+              <a:ext uri="{FF2B5EF4-FFF2-40B4-BE49-F238E27FC236}">
+                <a16:creationId xmlns:a16="http://schemas.microsoft.com/office/drawing/2014/main" id="{4E4FFF34-57E1-42C9-7B11-6330A11D86F0}"/>
+              </a:ext>
+            </a:extLst>
+          </p:cNvPr>
+          <p:cNvPicPr>
+            <a:picLocks noChangeAspect="1" noChangeArrowheads="1"/>
+          </p:cNvPicPr>
+          <p:nvPr/>
+        </p:nvPicPr>
+        <p:blipFill>
+          <a:blip r:embed="rId7">
+            <a:extLst>
+              <a:ext uri="{28A0092B-C50C-407E-A947-70E740481C1C}">
+                <a14:useLocalDpi xmlns:a14="http://schemas.microsoft.com/office/drawing/2010/main" val="0"/>
+              </a:ext>
+            </a:extLst>
+          </a:blip>
+          <a:srcRect/>
+          <a:stretch>
+            <a:fillRect/>
+          </a:stretch>
+        </p:blipFill>
+        <p:spPr bwMode="auto">
+          <a:xfrm>
+            <a:off x="4366672" y="4953000"/>
+            <a:ext cx="1113502" cy="1113502"/>
+          </a:xfrm>
+          <a:prstGeom prst="rect">
+            <a:avLst/>
+          </a:prstGeom>
+          <a:noFill/>
+          <a:extLst>
+            <a:ext uri="{909E8E84-426E-40DD-AFC4-6F175D3DCCD1}">
+              <a14:hiddenFill xmlns:a14="http://schemas.microsoft.com/office/drawing/2010/main">
+                <a:solidFill>
+                  <a:srgbClr val="FFFFFF"/>
+                </a:solidFill>
+              </a14:hiddenFill>
+            </a:ext>
+          </a:extLst>
+        </p:spPr>
+      </p:pic>
+      <p:pic>
+        <p:nvPicPr>
+          <p:cNvPr id="1040" name="Picture 16" descr="JSON Web Token color icon in PNG, SVG">
+            <a:extLst>
+              <a:ext uri="{FF2B5EF4-FFF2-40B4-BE49-F238E27FC236}">
+                <a16:creationId xmlns:a16="http://schemas.microsoft.com/office/drawing/2014/main" id="{27D019F8-E201-F78F-79FD-E1A6D8648B7A}"/>
+              </a:ext>
+            </a:extLst>
+          </p:cNvPr>
+          <p:cNvPicPr>
+            <a:picLocks noChangeAspect="1" noChangeArrowheads="1"/>
+          </p:cNvPicPr>
+          <p:nvPr/>
+        </p:nvPicPr>
+        <p:blipFill>
+          <a:blip r:embed="rId8">
+            <a:extLst>
+              <a:ext uri="{28A0092B-C50C-407E-A947-70E740481C1C}">
+                <a14:useLocalDpi xmlns:a14="http://schemas.microsoft.com/office/drawing/2010/main" val="0"/>
+              </a:ext>
+            </a:extLst>
+          </a:blip>
+          <a:srcRect/>
+          <a:stretch>
+            <a:fillRect/>
+          </a:stretch>
+        </p:blipFill>
+        <p:spPr bwMode="auto">
+          <a:xfrm>
+            <a:off x="6784031" y="5715000"/>
+            <a:ext cx="988464" cy="988464"/>
+          </a:xfrm>
+          <a:prstGeom prst="rect">
+            <a:avLst/>
+          </a:prstGeom>
+          <a:noFill/>
+          <a:extLst>
+            <a:ext uri="{909E8E84-426E-40DD-AFC4-6F175D3DCCD1}">
+              <a14:hiddenFill xmlns:a14="http://schemas.microsoft.com/office/drawing/2010/main">
+                <a:solidFill>
+                  <a:srgbClr val="FFFFFF"/>
+                </a:solidFill>
+              </a14:hiddenFill>
+            </a:ext>
+          </a:extLst>
+        </p:spPr>
+      </p:pic>
     </p:spTree>
   </p:cSld>
   <p:clrMapOvr>
@@ -16874,8 +20054,8 @@
         </p:nvSpPr>
         <p:spPr>
           <a:xfrm>
-            <a:off x="606490" y="577915"/>
-            <a:ext cx="8229600" cy="713403"/>
+            <a:off x="681134" y="704850"/>
+            <a:ext cx="8005665" cy="657419"/>
           </a:xfrm>
         </p:spPr>
         <p:txBody>
@@ -16884,574 +20064,420 @@
           <a:p>
             <a:pPr algn="ctr"/>
             <a:r>
-              <a:rPr lang="en-IN" altLang="en-US" b="1" dirty="0">
+              <a:rPr lang="en-IN" b="1" dirty="0">
                 <a:solidFill>
                   <a:srgbClr val="C00000"/>
                 </a:solidFill>
                 <a:latin typeface="Times New Roman" panose="02020603050405020304" pitchFamily="18" charset="0"/>
                 <a:cs typeface="Times New Roman" panose="02020603050405020304" pitchFamily="18" charset="0"/>
-                <a:sym typeface="Times New Roman" panose="02020603050405020304"/>
               </a:rPr>
-              <a:t>NOVELTY</a:t>
+              <a:t>MODULES</a:t>
             </a:r>
           </a:p>
         </p:txBody>
       </p:sp>
       <p:sp>
         <p:nvSpPr>
-          <p:cNvPr id="4" name="Rectangle 1">
-            <a:extLst>
-              <a:ext uri="{FF2B5EF4-FFF2-40B4-BE49-F238E27FC236}">
-                <a16:creationId xmlns:a16="http://schemas.microsoft.com/office/drawing/2014/main" id="{3C2F7489-71EB-4DBD-C446-FA64316F5D79}"/>
-              </a:ext>
-            </a:extLst>
-          </p:cNvPr>
+          <p:cNvPr id="4" name="Text Placeholder 3"/>
           <p:cNvSpPr>
-            <a:spLocks noChangeArrowheads="1"/>
-          </p:cNvSpPr>
-          <p:nvPr/>
-        </p:nvSpPr>
-        <p:spPr bwMode="auto">
-          <a:xfrm>
-            <a:off x="0" y="-184666"/>
-            <a:ext cx="184731" cy="369332"/>
-          </a:xfrm>
-          <a:prstGeom prst="rect">
-            <a:avLst/>
-          </a:prstGeom>
-          <a:noFill/>
-          <a:ln>
-            <a:noFill/>
-          </a:ln>
-          <a:effectLst/>
-          <a:extLst>
-            <a:ext uri="{909E8E84-426E-40DD-AFC4-6F175D3DCCD1}">
-              <a14:hiddenFill xmlns:a14="http://schemas.microsoft.com/office/drawing/2010/main">
-                <a:solidFill>
-                  <a:schemeClr val="accent1"/>
-                </a:solidFill>
-              </a14:hiddenFill>
-            </a:ext>
-            <a:ext uri="{91240B29-F687-4F45-9708-019B960494DF}">
-              <a14:hiddenLine xmlns:a14="http://schemas.microsoft.com/office/drawing/2010/main" w="9525">
-                <a:solidFill>
-                  <a:schemeClr val="tx1"/>
-                </a:solidFill>
-                <a:miter lim="800000"/>
-                <a:headEnd/>
-                <a:tailEnd/>
-              </a14:hiddenLine>
-            </a:ext>
-            <a:ext uri="{AF507438-7753-43E0-B8FC-AC1667EBCBE1}">
-              <a14:hiddenEffects xmlns:a14="http://schemas.microsoft.com/office/drawing/2010/main">
-                <a:effectLst>
-                  <a:outerShdw dist="35921" dir="2700000" algn="ctr" rotWithShape="0">
-                    <a:schemeClr val="bg2"/>
-                  </a:outerShdw>
-                </a:effectLst>
-              </a14:hiddenEffects>
-            </a:ext>
-          </a:extLst>
-        </p:spPr>
-        <p:txBody>
-          <a:bodyPr vert="horz" wrap="none" lIns="91440" tIns="45720" rIns="91440" bIns="45720" numCol="1" anchor="ctr" anchorCtr="0" compatLnSpc="1">
-            <a:prstTxWarp prst="textNoShape">
-              <a:avLst/>
-            </a:prstTxWarp>
-            <a:spAutoFit/>
-          </a:bodyPr>
-          <a:lstStyle/>
-          <a:p>
-            <a:pPr marL="0" marR="0" lvl="0" indent="0" algn="l" defTabSz="914400" rtl="0" eaLnBrk="0" fontAlgn="base" latinLnBrk="0" hangingPunct="0">
-              <a:lnSpc>
-                <a:spcPct val="100000"/>
-              </a:lnSpc>
-              <a:spcBef>
-                <a:spcPct val="0"/>
-              </a:spcBef>
-              <a:spcAft>
-                <a:spcPct val="0"/>
-              </a:spcAft>
-              <a:buClrTx/>
-              <a:buSzTx/>
-              <a:buFontTx/>
-              <a:buNone/>
-              <a:tabLst/>
-            </a:pPr>
-            <a:endParaRPr kumimoji="0" lang="en-US" altLang="en-US" sz="1800" b="0" i="0" u="none" strike="noStrike" cap="none" normalizeH="0" baseline="0" dirty="0">
-              <a:ln>
-                <a:noFill/>
-              </a:ln>
-              <a:solidFill>
-                <a:schemeClr val="tx1"/>
-              </a:solidFill>
-              <a:effectLst/>
-              <a:latin typeface="Arial" panose="020B0604020202020204" pitchFamily="34" charset="0"/>
-            </a:endParaRPr>
-          </a:p>
-        </p:txBody>
-      </p:sp>
-      <p:sp>
-        <p:nvSpPr>
-          <p:cNvPr id="6" name="Rectangle 3">
-            <a:extLst>
-              <a:ext uri="{FF2B5EF4-FFF2-40B4-BE49-F238E27FC236}">
-                <a16:creationId xmlns:a16="http://schemas.microsoft.com/office/drawing/2014/main" id="{E6CFD1E5-42A7-2555-8A7F-733120439FEE}"/>
-              </a:ext>
-            </a:extLst>
-          </p:cNvPr>
-          <p:cNvSpPr>
-            <a:spLocks noChangeArrowheads="1"/>
-          </p:cNvSpPr>
-          <p:nvPr/>
-        </p:nvSpPr>
-        <p:spPr bwMode="auto">
-          <a:xfrm>
-            <a:off x="0" y="-184666"/>
-            <a:ext cx="184731" cy="369332"/>
-          </a:xfrm>
-          <a:prstGeom prst="rect">
-            <a:avLst/>
-          </a:prstGeom>
-          <a:noFill/>
-          <a:ln>
-            <a:noFill/>
-          </a:ln>
-          <a:effectLst/>
-          <a:extLst>
-            <a:ext uri="{909E8E84-426E-40DD-AFC4-6F175D3DCCD1}">
-              <a14:hiddenFill xmlns:a14="http://schemas.microsoft.com/office/drawing/2010/main">
-                <a:solidFill>
-                  <a:schemeClr val="accent1"/>
-                </a:solidFill>
-              </a14:hiddenFill>
-            </a:ext>
-            <a:ext uri="{91240B29-F687-4F45-9708-019B960494DF}">
-              <a14:hiddenLine xmlns:a14="http://schemas.microsoft.com/office/drawing/2010/main" w="9525">
-                <a:solidFill>
-                  <a:schemeClr val="tx1"/>
-                </a:solidFill>
-                <a:miter lim="800000"/>
-                <a:headEnd/>
-                <a:tailEnd/>
-              </a14:hiddenLine>
-            </a:ext>
-            <a:ext uri="{AF507438-7753-43E0-B8FC-AC1667EBCBE1}">
-              <a14:hiddenEffects xmlns:a14="http://schemas.microsoft.com/office/drawing/2010/main">
-                <a:effectLst>
-                  <a:outerShdw dist="35921" dir="2700000" algn="ctr" rotWithShape="0">
-                    <a:schemeClr val="bg2"/>
-                  </a:outerShdw>
-                </a:effectLst>
-              </a14:hiddenEffects>
-            </a:ext>
-          </a:extLst>
-        </p:spPr>
-        <p:txBody>
-          <a:bodyPr vert="horz" wrap="none" lIns="91440" tIns="45720" rIns="91440" bIns="45720" numCol="1" anchor="ctr" anchorCtr="0" compatLnSpc="1">
-            <a:prstTxWarp prst="textNoShape">
-              <a:avLst/>
-            </a:prstTxWarp>
-            <a:spAutoFit/>
-          </a:bodyPr>
-          <a:lstStyle/>
-          <a:p>
-            <a:pPr marL="0" marR="0" lvl="0" indent="0" algn="l" defTabSz="914400" rtl="0" eaLnBrk="0" fontAlgn="base" latinLnBrk="0" hangingPunct="0">
-              <a:lnSpc>
-                <a:spcPct val="100000"/>
-              </a:lnSpc>
-              <a:spcBef>
-                <a:spcPct val="0"/>
-              </a:spcBef>
-              <a:spcAft>
-                <a:spcPct val="0"/>
-              </a:spcAft>
-              <a:buClrTx/>
-              <a:buSzTx/>
-              <a:buFontTx/>
-              <a:buNone/>
-              <a:tabLst/>
-            </a:pPr>
-            <a:endParaRPr kumimoji="0" lang="en-US" altLang="en-US" sz="1800" b="0" i="0" u="none" strike="noStrike" cap="none" normalizeH="0" baseline="0" dirty="0">
-              <a:ln>
-                <a:noFill/>
-              </a:ln>
-              <a:solidFill>
-                <a:schemeClr val="tx1"/>
-              </a:solidFill>
-              <a:effectLst/>
-              <a:latin typeface="Arial" panose="020B0604020202020204" pitchFamily="34" charset="0"/>
-            </a:endParaRPr>
-          </a:p>
-        </p:txBody>
-      </p:sp>
-      <p:sp>
-        <p:nvSpPr>
-          <p:cNvPr id="5" name="Rectangle 2">
-            <a:extLst>
-              <a:ext uri="{FF2B5EF4-FFF2-40B4-BE49-F238E27FC236}">
-                <a16:creationId xmlns:a16="http://schemas.microsoft.com/office/drawing/2014/main" id="{08780E82-12A5-50E9-2724-75AC8711A1D9}"/>
-              </a:ext>
-            </a:extLst>
-          </p:cNvPr>
-          <p:cNvSpPr>
-            <a:spLocks noGrp="1" noChangeArrowheads="1"/>
+            <a:spLocks noGrp="1"/>
           </p:cNvSpPr>
           <p:nvPr>
             <p:ph type="body" idx="1"/>
           </p:nvPr>
         </p:nvSpPr>
-        <p:spPr bwMode="auto">
-          <a:xfrm>
-            <a:off x="2133600" y="1537969"/>
-            <a:ext cx="7499350" cy="3782061"/>
+        <p:spPr>
+          <a:xfrm>
+            <a:off x="1026695" y="2245531"/>
+            <a:ext cx="4288082" cy="4389437"/>
+          </a:xfrm>
+        </p:spPr>
+        <p:txBody>
+          <a:bodyPr/>
+          <a:lstStyle/>
+          <a:p>
+            <a:r>
+              <a:rPr lang="en-US" dirty="0"/>
+              <a:t>Admin Dashboard</a:t>
+            </a:r>
+          </a:p>
+          <a:p>
+            <a:pPr lvl="1">
+              <a:buFont typeface="Wingdings" panose="05000000000000000000" pitchFamily="2" charset="2"/>
+              <a:buChar char="§"/>
+            </a:pPr>
+            <a:r>
+              <a:rPr lang="en-US" dirty="0"/>
+              <a:t>Add Employee</a:t>
+            </a:r>
+          </a:p>
+          <a:p>
+            <a:pPr lvl="1">
+              <a:buFont typeface="Wingdings" panose="05000000000000000000" pitchFamily="2" charset="2"/>
+              <a:buChar char="§"/>
+            </a:pPr>
+            <a:r>
+              <a:rPr lang="en-US" dirty="0"/>
+              <a:t>Update Employee</a:t>
+            </a:r>
+          </a:p>
+          <a:p>
+            <a:pPr lvl="1">
+              <a:buFont typeface="Wingdings" panose="05000000000000000000" pitchFamily="2" charset="2"/>
+              <a:buChar char="§"/>
+            </a:pPr>
+            <a:r>
+              <a:rPr lang="en-US" dirty="0"/>
+              <a:t>Delete(Resigned) Employee</a:t>
+            </a:r>
+          </a:p>
+          <a:p>
+            <a:pPr lvl="1">
+              <a:buFont typeface="Wingdings" panose="05000000000000000000" pitchFamily="2" charset="2"/>
+              <a:buChar char="§"/>
+            </a:pPr>
+            <a:r>
+              <a:rPr lang="en-US" dirty="0"/>
+              <a:t>Track attendance</a:t>
+            </a:r>
+          </a:p>
+          <a:p>
+            <a:pPr lvl="1">
+              <a:buFont typeface="Wingdings" panose="05000000000000000000" pitchFamily="2" charset="2"/>
+              <a:buChar char="§"/>
+            </a:pPr>
+            <a:r>
+              <a:rPr lang="en-US" dirty="0"/>
+              <a:t>Integrated messaging system</a:t>
+            </a:r>
+          </a:p>
+          <a:p>
+            <a:pPr lvl="1">
+              <a:buFont typeface="Wingdings" panose="05000000000000000000" pitchFamily="2" charset="2"/>
+              <a:buChar char="§"/>
+            </a:pPr>
+            <a:r>
+              <a:rPr lang="en-US" dirty="0"/>
+              <a:t>Leave Management</a:t>
+            </a:r>
+          </a:p>
+          <a:p>
+            <a:pPr lvl="1">
+              <a:buFont typeface="Wingdings" panose="05000000000000000000" pitchFamily="2" charset="2"/>
+              <a:buChar char="§"/>
+            </a:pPr>
+            <a:r>
+              <a:rPr lang="en-US" dirty="0"/>
+              <a:t>Holiday management</a:t>
+            </a:r>
+          </a:p>
+          <a:p>
+            <a:pPr lvl="1">
+              <a:buFont typeface="Wingdings" panose="05000000000000000000" pitchFamily="2" charset="2"/>
+              <a:buChar char="§"/>
+            </a:pPr>
+            <a:r>
+              <a:rPr lang="en-US" dirty="0"/>
+              <a:t>Information Passing</a:t>
+            </a:r>
+          </a:p>
+          <a:p>
+            <a:pPr lvl="1">
+              <a:buFont typeface="Wingdings" panose="05000000000000000000" pitchFamily="2" charset="2"/>
+              <a:buChar char="§"/>
+            </a:pPr>
+            <a:r>
+              <a:rPr lang="en-US" dirty="0"/>
+              <a:t>Salary calculation</a:t>
+            </a:r>
+          </a:p>
+          <a:p>
+            <a:endParaRPr lang="en-US" dirty="0"/>
+          </a:p>
+          <a:p>
+            <a:endParaRPr lang="en-US" dirty="0"/>
+          </a:p>
+        </p:txBody>
+      </p:sp>
+      <p:sp>
+        <p:nvSpPr>
+          <p:cNvPr id="3" name="Text Placeholder 3">
+            <a:extLst>
+              <a:ext uri="{FF2B5EF4-FFF2-40B4-BE49-F238E27FC236}">
+                <a16:creationId xmlns:a16="http://schemas.microsoft.com/office/drawing/2014/main" id="{8622B14B-ED52-24CF-5CAD-5612960AA095}"/>
+              </a:ext>
+            </a:extLst>
+          </p:cNvPr>
+          <p:cNvSpPr txBox="1">
+            <a:spLocks/>
+          </p:cNvSpPr>
+          <p:nvPr/>
+        </p:nvSpPr>
+        <p:spPr>
+          <a:xfrm>
+            <a:off x="5065295" y="2245530"/>
+            <a:ext cx="4114800" cy="4389437"/>
           </a:xfrm>
           <a:prstGeom prst="rect">
             <a:avLst/>
           </a:prstGeom>
           <a:noFill/>
-          <a:ln>
+          <a:ln w="9525">
             <a:noFill/>
           </a:ln>
-          <a:effectLst/>
-          <a:extLst>
-            <a:ext uri="{909E8E84-426E-40DD-AFC4-6F175D3DCCD1}">
-              <a14:hiddenFill xmlns:a14="http://schemas.microsoft.com/office/drawing/2010/main">
-                <a:solidFill>
-                  <a:schemeClr val="accent1"/>
-                </a:solidFill>
-              </a14:hiddenFill>
-            </a:ext>
-            <a:ext uri="{91240B29-F687-4F45-9708-019B960494DF}">
-              <a14:hiddenLine xmlns:a14="http://schemas.microsoft.com/office/drawing/2010/main" w="9525">
+        </p:spPr>
+        <p:txBody>
+          <a:bodyPr/>
+          <a:lstStyle>
+            <a:lvl1pPr marL="273050" indent="-273050" algn="l" rtl="0" eaLnBrk="0" fontAlgn="base" hangingPunct="0">
+              <a:spcBef>
+                <a:spcPct val="20000"/>
+              </a:spcBef>
+              <a:spcAft>
+                <a:spcPct val="0"/>
+              </a:spcAft>
+              <a:buSzPct val="80000"/>
+              <a:buFont typeface="Wingdings" panose="05000000000000000000" pitchFamily="2" charset="2"/>
+              <a:buChar char="Ø"/>
+              <a:defRPr sz="2000" kern="1200">
                 <a:solidFill>
                   <a:schemeClr val="tx1"/>
                 </a:solidFill>
-                <a:miter lim="800000"/>
-                <a:headEnd/>
-                <a:tailEnd/>
-              </a14:hiddenLine>
-            </a:ext>
-            <a:ext uri="{AF507438-7753-43E0-B8FC-AC1667EBCBE1}">
-              <a14:hiddenEffects xmlns:a14="http://schemas.microsoft.com/office/drawing/2010/main">
-                <a:effectLst>
-                  <a:outerShdw dist="35921" dir="2700000" algn="ctr" rotWithShape="0">
-                    <a:schemeClr val="bg2"/>
-                  </a:outerShdw>
-                </a:effectLst>
-              </a14:hiddenEffects>
-            </a:ext>
-          </a:extLst>
+                <a:latin typeface="+mn-lt"/>
+                <a:ea typeface="+mn-ea"/>
+                <a:cs typeface="+mn-cs"/>
+              </a:defRPr>
+            </a:lvl1pPr>
+            <a:lvl2pPr marL="640080" indent="-246380" algn="l" rtl="0" eaLnBrk="0" fontAlgn="base" hangingPunct="0">
+              <a:spcBef>
+                <a:spcPct val="20000"/>
+              </a:spcBef>
+              <a:spcAft>
+                <a:spcPct val="0"/>
+              </a:spcAft>
+              <a:buSzPct val="80000"/>
+              <a:buFont typeface="Wingdings" panose="05000000000000000000" pitchFamily="2" charset="2"/>
+              <a:buChar char="Ø"/>
+              <a:defRPr sz="2000" kern="1200">
+                <a:solidFill>
+                  <a:schemeClr val="tx1"/>
+                </a:solidFill>
+                <a:latin typeface="+mn-lt"/>
+                <a:ea typeface="+mn-ea"/>
+                <a:cs typeface="+mn-cs"/>
+              </a:defRPr>
+            </a:lvl2pPr>
+            <a:lvl3pPr marL="914400" indent="-246380" algn="l" rtl="0" eaLnBrk="0" fontAlgn="base" hangingPunct="0">
+              <a:spcBef>
+                <a:spcPct val="20000"/>
+              </a:spcBef>
+              <a:spcAft>
+                <a:spcPct val="0"/>
+              </a:spcAft>
+              <a:buSzPct val="80000"/>
+              <a:buFont typeface="Wingdings" panose="05000000000000000000" pitchFamily="2" charset="2"/>
+              <a:buChar char="Ø"/>
+              <a:defRPr sz="2000" kern="1200">
+                <a:solidFill>
+                  <a:schemeClr val="tx1"/>
+                </a:solidFill>
+                <a:latin typeface="+mn-lt"/>
+                <a:ea typeface="+mn-ea"/>
+                <a:cs typeface="+mn-cs"/>
+              </a:defRPr>
+            </a:lvl3pPr>
+            <a:lvl4pPr marL="1187450" indent="-209550" algn="l" rtl="0" eaLnBrk="0" fontAlgn="base" hangingPunct="0">
+              <a:spcBef>
+                <a:spcPct val="20000"/>
+              </a:spcBef>
+              <a:spcAft>
+                <a:spcPct val="0"/>
+              </a:spcAft>
+              <a:buSzPct val="80000"/>
+              <a:buFont typeface="Wingdings" panose="05000000000000000000" pitchFamily="2" charset="2"/>
+              <a:buChar char="Ø"/>
+              <a:defRPr sz="2000" kern="1200">
+                <a:solidFill>
+                  <a:schemeClr val="tx1"/>
+                </a:solidFill>
+                <a:latin typeface="+mn-lt"/>
+                <a:ea typeface="+mn-ea"/>
+                <a:cs typeface="+mn-cs"/>
+              </a:defRPr>
+            </a:lvl4pPr>
+            <a:lvl5pPr marL="1462405" indent="-209550" algn="l" rtl="0" eaLnBrk="0" fontAlgn="base" hangingPunct="0">
+              <a:spcBef>
+                <a:spcPct val="20000"/>
+              </a:spcBef>
+              <a:spcAft>
+                <a:spcPct val="0"/>
+              </a:spcAft>
+              <a:buSzPct val="80000"/>
+              <a:buFont typeface="Wingdings" panose="05000000000000000000" pitchFamily="2" charset="2"/>
+              <a:buChar char="Ø"/>
+              <a:defRPr sz="2000" kern="1200">
+                <a:solidFill>
+                  <a:schemeClr val="tx1"/>
+                </a:solidFill>
+                <a:latin typeface="+mn-lt"/>
+                <a:ea typeface="+mn-ea"/>
+                <a:cs typeface="+mn-cs"/>
+              </a:defRPr>
+            </a:lvl5pPr>
+            <a:lvl6pPr marL="1737360" indent="-210185" algn="l" rtl="0" eaLnBrk="1" latinLnBrk="0" hangingPunct="1">
+              <a:spcBef>
+                <a:spcPct val="20000"/>
+              </a:spcBef>
+              <a:buClr>
+                <a:schemeClr val="accent5"/>
+              </a:buClr>
+              <a:buSzPct val="80000"/>
+              <a:buFont typeface="Wingdings 2" panose="05020102010507070707"/>
+              <a:buChar char=""/>
+              <a:defRPr kumimoji="0" sz="1800" kern="1200">
+                <a:solidFill>
+                  <a:schemeClr val="tx1"/>
+                </a:solidFill>
+                <a:latin typeface="+mn-lt"/>
+                <a:ea typeface="+mn-ea"/>
+                <a:cs typeface="+mn-cs"/>
+              </a:defRPr>
+            </a:lvl6pPr>
+            <a:lvl7pPr marL="1920240" indent="-182880" algn="l" rtl="0" eaLnBrk="1" latinLnBrk="0" hangingPunct="1">
+              <a:spcBef>
+                <a:spcPct val="20000"/>
+              </a:spcBef>
+              <a:buClr>
+                <a:schemeClr val="accent6"/>
+              </a:buClr>
+              <a:buSzPct val="80000"/>
+              <a:buFont typeface="Wingdings 2" panose="05020102010507070707"/>
+              <a:buChar char=""/>
+              <a:defRPr kumimoji="0" sz="1600" kern="1200" baseline="0">
+                <a:solidFill>
+                  <a:schemeClr val="tx1"/>
+                </a:solidFill>
+                <a:latin typeface="+mn-lt"/>
+                <a:ea typeface="+mn-ea"/>
+                <a:cs typeface="+mn-cs"/>
+              </a:defRPr>
+            </a:lvl7pPr>
+            <a:lvl8pPr marL="2194560" indent="-182880" algn="l" rtl="0" eaLnBrk="1" latinLnBrk="0" hangingPunct="1">
+              <a:spcBef>
+                <a:spcPct val="20000"/>
+              </a:spcBef>
+              <a:buClr>
+                <a:schemeClr val="tx2"/>
+              </a:buClr>
+              <a:buChar char="•"/>
+              <a:defRPr kumimoji="0" sz="1600" kern="1200">
+                <a:solidFill>
+                  <a:schemeClr val="tx1"/>
+                </a:solidFill>
+                <a:latin typeface="+mn-lt"/>
+                <a:ea typeface="+mn-ea"/>
+                <a:cs typeface="+mn-cs"/>
+              </a:defRPr>
+            </a:lvl8pPr>
+            <a:lvl9pPr marL="2468880" indent="-182880" algn="l" rtl="0" eaLnBrk="1" latinLnBrk="0" hangingPunct="1">
+              <a:spcBef>
+                <a:spcPct val="20000"/>
+              </a:spcBef>
+              <a:buClr>
+                <a:schemeClr val="tx2"/>
+              </a:buClr>
+              <a:buFontTx/>
+              <a:buChar char="•"/>
+              <a:defRPr kumimoji="0" sz="1400" kern="1200" baseline="0">
+                <a:solidFill>
+                  <a:schemeClr val="tx1"/>
+                </a:solidFill>
+                <a:latin typeface="+mn-lt"/>
+                <a:ea typeface="+mn-ea"/>
+                <a:cs typeface="+mn-cs"/>
+              </a:defRPr>
+            </a:lvl9pPr>
+          </a:lstStyle>
+          <a:p>
+            <a:r>
+              <a:rPr lang="en-US" dirty="0"/>
+              <a:t>Employee Dashboard</a:t>
+            </a:r>
+          </a:p>
+          <a:p>
+            <a:pPr lvl="1">
+              <a:buFont typeface="Wingdings" panose="05000000000000000000" pitchFamily="2" charset="2"/>
+              <a:buChar char="§"/>
+            </a:pPr>
+            <a:r>
+              <a:rPr lang="en-US" dirty="0"/>
+              <a:t>Personal details</a:t>
+            </a:r>
+          </a:p>
+          <a:p>
+            <a:pPr lvl="1">
+              <a:buFont typeface="Wingdings" panose="05000000000000000000" pitchFamily="2" charset="2"/>
+              <a:buChar char="§"/>
+            </a:pPr>
+            <a:r>
+              <a:rPr lang="en-US" dirty="0"/>
+              <a:t>Leave application</a:t>
+            </a:r>
+          </a:p>
+          <a:p>
+            <a:pPr lvl="1">
+              <a:buFont typeface="Wingdings" panose="05000000000000000000" pitchFamily="2" charset="2"/>
+              <a:buChar char="§"/>
+            </a:pPr>
+            <a:r>
+              <a:rPr lang="en-US" dirty="0"/>
+              <a:t>Attendance &amp; salary viewing</a:t>
+            </a:r>
+          </a:p>
+          <a:p>
+            <a:endParaRPr lang="en-US" dirty="0"/>
+          </a:p>
+          <a:p>
+            <a:pPr algn="ctr"/>
+            <a:endParaRPr lang="en-US" dirty="0"/>
+          </a:p>
+        </p:txBody>
+      </p:sp>
+      <p:sp>
+        <p:nvSpPr>
+          <p:cNvPr id="8" name="TextBox 7">
+            <a:extLst>
+              <a:ext uri="{FF2B5EF4-FFF2-40B4-BE49-F238E27FC236}">
+                <a16:creationId xmlns:a16="http://schemas.microsoft.com/office/drawing/2014/main" id="{21870AFD-D6C7-095D-930C-6226B6AA25B3}"/>
+              </a:ext>
+            </a:extLst>
+          </p:cNvPr>
+          <p:cNvSpPr txBox="1"/>
+          <p:nvPr/>
+        </p:nvSpPr>
+        <p:spPr>
+          <a:xfrm>
+            <a:off x="3371513" y="1600200"/>
+            <a:ext cx="2320763" cy="400110"/>
+          </a:xfrm>
+          <a:prstGeom prst="rect">
+            <a:avLst/>
+          </a:prstGeom>
+          <a:noFill/>
         </p:spPr>
         <p:txBody>
-          <a:bodyPr vert="horz" wrap="square" lIns="91440" tIns="45720" rIns="91440" bIns="45720" numCol="1" anchor="ctr" anchorCtr="0" compatLnSpc="1">
-            <a:prstTxWarp prst="textNoShape">
-              <a:avLst/>
-            </a:prstTxWarp>
+          <a:bodyPr wrap="square">
             <a:spAutoFit/>
           </a:bodyPr>
           <a:lstStyle/>
           <a:p>
-            <a:pPr marR="0" lvl="0" algn="just" defTabSz="914400" rtl="0" eaLnBrk="0" fontAlgn="base" latinLnBrk="0" hangingPunct="0">
-              <a:lnSpc>
-                <a:spcPct val="150000"/>
-              </a:lnSpc>
-              <a:spcBef>
-                <a:spcPct val="0"/>
-              </a:spcBef>
-              <a:spcAft>
-                <a:spcPct val="0"/>
-              </a:spcAft>
-              <a:buClrTx/>
-              <a:buSzTx/>
-              <a:tabLst/>
+            <a:pPr marL="285750" indent="-285750" algn="ctr">
+              <a:buFont typeface="Wingdings" panose="05000000000000000000" pitchFamily="2" charset="2"/>
+              <a:buChar char="Ø"/>
             </a:pPr>
             <a:r>
-              <a:rPr kumimoji="0" lang="en-US" altLang="en-US" sz="1800" i="0" u="none" strike="noStrike" cap="none" normalizeH="0" baseline="0" dirty="0">
-                <a:ln>
-                  <a:noFill/>
-                </a:ln>
-                <a:solidFill>
-                  <a:schemeClr val="tx1"/>
-                </a:solidFill>
-                <a:effectLst/>
-                <a:latin typeface="Times New Roman" panose="02020603050405020304" pitchFamily="18" charset="0"/>
-                <a:cs typeface="Times New Roman" panose="02020603050405020304" pitchFamily="18" charset="0"/>
-              </a:rPr>
-              <a:t>1. Integrated Excel-based Attendance Upload</a:t>
-            </a:r>
-          </a:p>
-          <a:p>
-            <a:pPr marL="0" marR="0" lvl="0" indent="0" algn="just" defTabSz="914400" rtl="0" eaLnBrk="0" fontAlgn="base" latinLnBrk="0" hangingPunct="0">
-              <a:lnSpc>
-                <a:spcPct val="150000"/>
-              </a:lnSpc>
-              <a:spcBef>
-                <a:spcPct val="0"/>
-              </a:spcBef>
-              <a:spcAft>
-                <a:spcPct val="0"/>
-              </a:spcAft>
-              <a:buClrTx/>
-              <a:buSzTx/>
-              <a:buNone/>
-              <a:tabLst/>
-            </a:pPr>
-            <a:r>
-              <a:rPr kumimoji="0" lang="en-US" altLang="en-US" sz="1800" i="0" u="none" strike="noStrike" cap="none" normalizeH="0" baseline="0" dirty="0">
-                <a:ln>
-                  <a:noFill/>
-                </a:ln>
-                <a:solidFill>
-                  <a:schemeClr val="tx1"/>
-                </a:solidFill>
-                <a:effectLst/>
-                <a:latin typeface="Times New Roman" panose="02020603050405020304" pitchFamily="18" charset="0"/>
-                <a:cs typeface="Times New Roman" panose="02020603050405020304" pitchFamily="18" charset="0"/>
-              </a:rPr>
-              <a:t>	- Automatic processing and status updates</a:t>
-            </a:r>
-          </a:p>
-          <a:p>
-            <a:pPr marR="0" lvl="0" algn="just" defTabSz="914400" rtl="0" eaLnBrk="0" fontAlgn="base" latinLnBrk="0" hangingPunct="0">
-              <a:lnSpc>
-                <a:spcPct val="150000"/>
-              </a:lnSpc>
-              <a:spcBef>
-                <a:spcPct val="0"/>
-              </a:spcBef>
-              <a:spcAft>
-                <a:spcPct val="0"/>
-              </a:spcAft>
-              <a:buClrTx/>
-              <a:buSzTx/>
-              <a:tabLst/>
-            </a:pPr>
-            <a:r>
-              <a:rPr kumimoji="0" lang="en-US" altLang="en-US" sz="1800" i="0" u="none" strike="noStrike" cap="none" normalizeH="0" baseline="0" dirty="0">
-                <a:ln>
-                  <a:noFill/>
-                </a:ln>
-                <a:solidFill>
-                  <a:schemeClr val="tx1"/>
-                </a:solidFill>
-                <a:effectLst/>
-                <a:latin typeface="Times New Roman" panose="02020603050405020304" pitchFamily="18" charset="0"/>
-                <a:cs typeface="Times New Roman" panose="02020603050405020304" pitchFamily="18" charset="0"/>
-              </a:rPr>
-              <a:t>2. Smart Leave Management</a:t>
-            </a:r>
-          </a:p>
-          <a:p>
-            <a:pPr marL="0" marR="0" lvl="0" indent="0" algn="just" defTabSz="914400" rtl="0" eaLnBrk="0" fontAlgn="base" latinLnBrk="0" hangingPunct="0">
-              <a:lnSpc>
-                <a:spcPct val="150000"/>
-              </a:lnSpc>
-              <a:spcBef>
-                <a:spcPct val="0"/>
-              </a:spcBef>
-              <a:spcAft>
-                <a:spcPct val="0"/>
-              </a:spcAft>
-              <a:buClrTx/>
-              <a:buSzTx/>
-              <a:buNone/>
-              <a:tabLst/>
-            </a:pPr>
-            <a:r>
-              <a:rPr kumimoji="0" lang="en-US" altLang="en-US" sz="1800" i="0" u="none" strike="noStrike" cap="none" normalizeH="0" baseline="0" dirty="0">
-                <a:ln>
-                  <a:noFill/>
-                </a:ln>
-                <a:solidFill>
-                  <a:schemeClr val="tx1"/>
-                </a:solidFill>
-                <a:effectLst/>
-                <a:latin typeface="Times New Roman" panose="02020603050405020304" pitchFamily="18" charset="0"/>
-                <a:cs typeface="Times New Roman" panose="02020603050405020304" pitchFamily="18" charset="0"/>
-              </a:rPr>
-              <a:t>	- Automatic notifications and leave handling</a:t>
-            </a:r>
-          </a:p>
-          <a:p>
-            <a:pPr marR="0" lvl="0" algn="just" defTabSz="914400" rtl="0" eaLnBrk="0" fontAlgn="base" latinLnBrk="0" hangingPunct="0">
-              <a:lnSpc>
-                <a:spcPct val="150000"/>
-              </a:lnSpc>
-              <a:spcBef>
-                <a:spcPct val="0"/>
-              </a:spcBef>
-              <a:spcAft>
-                <a:spcPct val="0"/>
-              </a:spcAft>
-              <a:buClrTx/>
-              <a:buSzTx/>
-              <a:tabLst/>
-            </a:pPr>
-            <a:r>
-              <a:rPr kumimoji="0" lang="en-US" altLang="en-US" sz="1800" i="0" u="none" strike="noStrike" cap="none" normalizeH="0" baseline="0" dirty="0">
-                <a:ln>
-                  <a:noFill/>
-                </a:ln>
-                <a:solidFill>
-                  <a:schemeClr val="tx1"/>
-                </a:solidFill>
-                <a:effectLst/>
-                <a:latin typeface="Times New Roman" panose="02020603050405020304" pitchFamily="18" charset="0"/>
-                <a:cs typeface="Times New Roman" panose="02020603050405020304" pitchFamily="18" charset="0"/>
-              </a:rPr>
-              <a:t>3. Real-time Salary Calculation</a:t>
-            </a:r>
-          </a:p>
-          <a:p>
-            <a:pPr marL="0" marR="0" lvl="0" indent="0" algn="just" defTabSz="914400" rtl="0" eaLnBrk="0" fontAlgn="base" latinLnBrk="0" hangingPunct="0">
-              <a:lnSpc>
-                <a:spcPct val="150000"/>
-              </a:lnSpc>
-              <a:spcBef>
-                <a:spcPct val="0"/>
-              </a:spcBef>
-              <a:spcAft>
-                <a:spcPct val="0"/>
-              </a:spcAft>
-              <a:buClrTx/>
-              <a:buSzTx/>
-              <a:buNone/>
-              <a:tabLst/>
-            </a:pPr>
-            <a:r>
-              <a:rPr kumimoji="0" lang="en-US" altLang="en-US" sz="1800" i="0" u="none" strike="noStrike" cap="none" normalizeH="0" baseline="0" dirty="0">
-                <a:ln>
-                  <a:noFill/>
-                </a:ln>
-                <a:solidFill>
-                  <a:schemeClr val="tx1"/>
-                </a:solidFill>
-                <a:effectLst/>
-                <a:latin typeface="Times New Roman" panose="02020603050405020304" pitchFamily="18" charset="0"/>
-                <a:cs typeface="Times New Roman" panose="02020603050405020304" pitchFamily="18" charset="0"/>
-              </a:rPr>
-              <a:t>	- Adjustments for uninformed leaves and rejections</a:t>
-            </a:r>
-          </a:p>
-          <a:p>
-            <a:pPr marR="0" lvl="0" algn="just" defTabSz="914400" rtl="0" eaLnBrk="0" fontAlgn="base" latinLnBrk="0" hangingPunct="0">
-              <a:lnSpc>
-                <a:spcPct val="150000"/>
-              </a:lnSpc>
-              <a:spcBef>
-                <a:spcPct val="0"/>
-              </a:spcBef>
-              <a:spcAft>
-                <a:spcPct val="0"/>
-              </a:spcAft>
-              <a:buClrTx/>
-              <a:buSzTx/>
-              <a:tabLst/>
-            </a:pPr>
-            <a:r>
-              <a:rPr kumimoji="0" lang="en-US" altLang="en-US" sz="1800" i="0" u="none" strike="noStrike" cap="none" normalizeH="0" baseline="0" dirty="0">
-                <a:ln>
-                  <a:noFill/>
-                </a:ln>
-                <a:solidFill>
-                  <a:schemeClr val="tx1"/>
-                </a:solidFill>
-                <a:effectLst/>
-                <a:latin typeface="Times New Roman" panose="02020603050405020304" pitchFamily="18" charset="0"/>
-                <a:cs typeface="Times New Roman" panose="02020603050405020304" pitchFamily="18" charset="0"/>
-              </a:rPr>
-              <a:t>4. Multi-channel Communication</a:t>
-            </a:r>
-          </a:p>
-          <a:p>
-            <a:pPr marL="0" marR="0" lvl="0" indent="0" algn="just" defTabSz="914400" rtl="0" eaLnBrk="0" fontAlgn="base" latinLnBrk="0" hangingPunct="0">
-              <a:lnSpc>
-                <a:spcPct val="150000"/>
-              </a:lnSpc>
-              <a:spcBef>
-                <a:spcPct val="0"/>
-              </a:spcBef>
-              <a:spcAft>
-                <a:spcPct val="0"/>
-              </a:spcAft>
-              <a:buClrTx/>
-              <a:buSzTx/>
-              <a:buNone/>
-              <a:tabLst/>
-            </a:pPr>
-            <a:r>
-              <a:rPr kumimoji="0" lang="en-US" altLang="en-US" sz="1800" i="0" u="none" strike="noStrike" cap="none" normalizeH="0" baseline="0" dirty="0">
-                <a:ln>
-                  <a:noFill/>
-                </a:ln>
-                <a:solidFill>
-                  <a:schemeClr val="tx1"/>
-                </a:solidFill>
-                <a:effectLst/>
-                <a:latin typeface="Times New Roman" panose="02020603050405020304" pitchFamily="18" charset="0"/>
-                <a:cs typeface="Times New Roman" panose="02020603050405020304" pitchFamily="18" charset="0"/>
-              </a:rPr>
-              <a:t>	- In-app(</a:t>
-            </a:r>
-            <a:r>
-              <a:rPr kumimoji="0" lang="en-US" altLang="en-US" sz="1800" i="0" u="none" strike="noStrike" cap="none" normalizeH="0" baseline="0" dirty="0" err="1">
-                <a:ln>
-                  <a:noFill/>
-                </a:ln>
-                <a:solidFill>
-                  <a:schemeClr val="tx1"/>
-                </a:solidFill>
-                <a:effectLst/>
-                <a:latin typeface="Times New Roman" panose="02020603050405020304" pitchFamily="18" charset="0"/>
-                <a:cs typeface="Times New Roman" panose="02020603050405020304" pitchFamily="18" charset="0"/>
-              </a:rPr>
-              <a:t>Modemailer</a:t>
-            </a:r>
-            <a:r>
-              <a:rPr kumimoji="0" lang="en-US" altLang="en-US" sz="1800" i="0" u="none" strike="noStrike" cap="none" normalizeH="0" baseline="0" dirty="0">
-                <a:ln>
-                  <a:noFill/>
-                </a:ln>
-                <a:solidFill>
-                  <a:schemeClr val="tx1"/>
-                </a:solidFill>
-                <a:effectLst/>
-                <a:latin typeface="Times New Roman" panose="02020603050405020304" pitchFamily="18" charset="0"/>
-                <a:cs typeface="Times New Roman" panose="02020603050405020304" pitchFamily="18" charset="0"/>
-              </a:rPr>
-              <a:t>) and SMS notifications </a:t>
-            </a:r>
-          </a:p>
-          <a:p>
-            <a:pPr marL="0" marR="0" lvl="0" indent="0" algn="just" defTabSz="914400" rtl="0" eaLnBrk="0" fontAlgn="base" latinLnBrk="0" hangingPunct="0">
-              <a:lnSpc>
-                <a:spcPct val="150000"/>
-              </a:lnSpc>
-              <a:spcBef>
-                <a:spcPct val="0"/>
-              </a:spcBef>
-              <a:spcAft>
-                <a:spcPct val="0"/>
-              </a:spcAft>
-              <a:buClrTx/>
-              <a:buSzTx/>
-              <a:buNone/>
-              <a:tabLst/>
-            </a:pPr>
-            <a:r>
-              <a:rPr kumimoji="0" lang="en-US" altLang="en-US" sz="1800" i="0" u="none" strike="noStrike" cap="none" normalizeH="0" baseline="0" dirty="0">
-                <a:ln>
-                  <a:noFill/>
-                </a:ln>
-                <a:solidFill>
-                  <a:schemeClr val="tx1"/>
-                </a:solidFill>
-                <a:effectLst/>
-                <a:latin typeface="Times New Roman" panose="02020603050405020304" pitchFamily="18" charset="0"/>
-                <a:cs typeface="Times New Roman" panose="02020603050405020304" pitchFamily="18" charset="0"/>
-              </a:rPr>
-              <a:t>with Twilio integration.</a:t>
+              <a:rPr lang="en-US" sz="2000" dirty="0"/>
+              <a:t>Login</a:t>
             </a:r>
           </a:p>
         </p:txBody>
@@ -17496,8 +20522,8 @@
         </p:nvSpPr>
         <p:spPr>
           <a:xfrm>
-            <a:off x="603167" y="248428"/>
-            <a:ext cx="8229600" cy="912845"/>
+            <a:off x="606490" y="577915"/>
+            <a:ext cx="8229600" cy="713403"/>
           </a:xfrm>
         </p:spPr>
         <p:txBody>
@@ -17506,28 +20532,37 @@
           <a:p>
             <a:pPr algn="ctr"/>
             <a:r>
-              <a:rPr lang="en-IN" sz="3600" b="1" dirty="0">
+              <a:rPr lang="en-IN" altLang="en-US" b="1" dirty="0">
                 <a:solidFill>
                   <a:srgbClr val="C00000"/>
                 </a:solidFill>
                 <a:latin typeface="Times New Roman" panose="02020603050405020304" pitchFamily="18" charset="0"/>
                 <a:cs typeface="Times New Roman" panose="02020603050405020304" pitchFamily="18" charset="0"/>
+                <a:sym typeface="Times New Roman" panose="02020603050405020304"/>
               </a:rPr>
-              <a:t>TECHNOLOGY USED</a:t>
+              <a:t>NOVELTY</a:t>
             </a:r>
           </a:p>
         </p:txBody>
       </p:sp>
       <p:sp>
         <p:nvSpPr>
-          <p:cNvPr id="4" name="Content Placeholder 2"/>
-          <p:cNvSpPr txBox="1"/>
+          <p:cNvPr id="4" name="Rectangle 1">
+            <a:extLst>
+              <a:ext uri="{FF2B5EF4-FFF2-40B4-BE49-F238E27FC236}">
+                <a16:creationId xmlns:a16="http://schemas.microsoft.com/office/drawing/2014/main" id="{3C2F7489-71EB-4DBD-C446-FA64316F5D79}"/>
+              </a:ext>
+            </a:extLst>
+          </p:cNvPr>
+          <p:cNvSpPr>
+            <a:spLocks noChangeArrowheads="1"/>
+          </p:cNvSpPr>
           <p:nvPr/>
         </p:nvSpPr>
-        <p:spPr>
-          <a:xfrm>
-            <a:off x="5638801" y="1507958"/>
-            <a:ext cx="4260767" cy="5085571"/>
+        <p:spPr bwMode="auto">
+          <a:xfrm>
+            <a:off x="0" y="-184666"/>
+            <a:ext cx="184731" cy="369332"/>
           </a:xfrm>
           <a:prstGeom prst="rect">
             <a:avLst/>
@@ -17536,527 +20571,92 @@
           <a:ln>
             <a:noFill/>
           </a:ln>
+          <a:effectLst/>
+          <a:extLst>
+            <a:ext uri="{909E8E84-426E-40DD-AFC4-6F175D3DCCD1}">
+              <a14:hiddenFill xmlns:a14="http://schemas.microsoft.com/office/drawing/2010/main">
+                <a:solidFill>
+                  <a:schemeClr val="accent1"/>
+                </a:solidFill>
+              </a14:hiddenFill>
+            </a:ext>
+            <a:ext uri="{91240B29-F687-4F45-9708-019B960494DF}">
+              <a14:hiddenLine xmlns:a14="http://schemas.microsoft.com/office/drawing/2010/main" w="9525">
+                <a:solidFill>
+                  <a:schemeClr val="tx1"/>
+                </a:solidFill>
+                <a:miter lim="800000"/>
+                <a:headEnd/>
+                <a:tailEnd/>
+              </a14:hiddenLine>
+            </a:ext>
+            <a:ext uri="{AF507438-7753-43E0-B8FC-AC1667EBCBE1}">
+              <a14:hiddenEffects xmlns:a14="http://schemas.microsoft.com/office/drawing/2010/main">
+                <a:effectLst>
+                  <a:outerShdw dist="35921" dir="2700000" algn="ctr" rotWithShape="0">
+                    <a:schemeClr val="bg2"/>
+                  </a:outerShdw>
+                </a:effectLst>
+              </a14:hiddenEffects>
+            </a:ext>
+          </a:extLst>
         </p:spPr>
         <p:txBody>
-          <a:bodyPr spcFirstLastPara="1" wrap="square" lIns="91425" tIns="45700" rIns="91425" bIns="45700" anchor="t" anchorCtr="0">
-            <a:normAutofit fontScale="77500" lnSpcReduction="20000"/>
+          <a:bodyPr vert="horz" wrap="none" lIns="91440" tIns="45720" rIns="91440" bIns="45720" numCol="1" anchor="ctr" anchorCtr="0" compatLnSpc="1">
+            <a:prstTxWarp prst="textNoShape">
+              <a:avLst/>
+            </a:prstTxWarp>
+            <a:spAutoFit/>
           </a:bodyPr>
-          <a:lstStyle>
-            <a:defPPr marR="0" lvl="0" algn="l" rtl="0">
+          <a:lstStyle/>
+          <a:p>
+            <a:pPr marL="0" marR="0" lvl="0" indent="0" algn="l" defTabSz="914400" rtl="0" eaLnBrk="0" fontAlgn="base" latinLnBrk="0" hangingPunct="0">
               <a:lnSpc>
                 <a:spcPct val="100000"/>
               </a:lnSpc>
               <a:spcBef>
-                <a:spcPts val="0"/>
+                <a:spcPct val="0"/>
               </a:spcBef>
               <a:spcAft>
-                <a:spcPts val="0"/>
+                <a:spcPct val="0"/>
               </a:spcAft>
-            </a:defPPr>
-            <a:lvl1pPr marL="457200" marR="0" lvl="0" indent="-320040" algn="l" rtl="0">
-              <a:lnSpc>
-                <a:spcPct val="100000"/>
-              </a:lnSpc>
-              <a:spcBef>
-                <a:spcPts val="360"/>
-              </a:spcBef>
-              <a:spcAft>
-                <a:spcPts val="0"/>
-              </a:spcAft>
-              <a:buClr>
-                <a:schemeClr val="dk1"/>
-              </a:buClr>
-              <a:buSzPts val="1440"/>
-              <a:buFont typeface="Noto Sans Symbols"/>
-              <a:buChar char="⮚"/>
-              <a:defRPr sz="2000" b="0" i="0" u="none" strike="noStrike" cap="none">
-                <a:solidFill>
-                  <a:schemeClr val="dk1"/>
-                </a:solidFill>
-                <a:latin typeface="Arial" panose="020B0604020202020204"/>
-                <a:ea typeface="Arial" panose="020B0604020202020204"/>
-                <a:cs typeface="Arial" panose="020B0604020202020204"/>
-                <a:sym typeface="Arial" panose="020B0604020202020204"/>
-              </a:defRPr>
-            </a:lvl1pPr>
-            <a:lvl2pPr marL="914400" marR="0" lvl="1" indent="-320040" algn="l" rtl="0">
-              <a:lnSpc>
-                <a:spcPct val="100000"/>
-              </a:lnSpc>
-              <a:spcBef>
-                <a:spcPts val="360"/>
-              </a:spcBef>
-              <a:spcAft>
-                <a:spcPts val="0"/>
-              </a:spcAft>
-              <a:buClr>
-                <a:schemeClr val="dk1"/>
-              </a:buClr>
-              <a:buSzPts val="1440"/>
-              <a:buFont typeface="Noto Sans Symbols"/>
-              <a:buChar char="⮚"/>
-              <a:defRPr sz="2000" b="0" i="0" u="none" strike="noStrike" cap="none">
-                <a:solidFill>
-                  <a:schemeClr val="dk1"/>
-                </a:solidFill>
-                <a:latin typeface="Arial" panose="020B0604020202020204"/>
-                <a:ea typeface="Arial" panose="020B0604020202020204"/>
-                <a:cs typeface="Arial" panose="020B0604020202020204"/>
-                <a:sym typeface="Arial" panose="020B0604020202020204"/>
-              </a:defRPr>
-            </a:lvl2pPr>
-            <a:lvl3pPr marL="1371600" marR="0" lvl="2" indent="-320040" algn="l" rtl="0">
-              <a:lnSpc>
-                <a:spcPct val="100000"/>
-              </a:lnSpc>
-              <a:spcBef>
-                <a:spcPts val="360"/>
-              </a:spcBef>
-              <a:spcAft>
-                <a:spcPts val="0"/>
-              </a:spcAft>
-              <a:buClr>
-                <a:schemeClr val="dk1"/>
-              </a:buClr>
-              <a:buSzPts val="1440"/>
-              <a:buFont typeface="Noto Sans Symbols"/>
-              <a:buChar char="⮚"/>
-              <a:defRPr sz="2000" b="0" i="0" u="none" strike="noStrike" cap="none">
-                <a:solidFill>
-                  <a:schemeClr val="dk1"/>
-                </a:solidFill>
-                <a:latin typeface="Arial" panose="020B0604020202020204"/>
-                <a:ea typeface="Arial" panose="020B0604020202020204"/>
-                <a:cs typeface="Arial" panose="020B0604020202020204"/>
-                <a:sym typeface="Arial" panose="020B0604020202020204"/>
-              </a:defRPr>
-            </a:lvl3pPr>
-            <a:lvl4pPr marL="1828800" marR="0" lvl="3" indent="-320040" algn="l" rtl="0">
-              <a:lnSpc>
-                <a:spcPct val="100000"/>
-              </a:lnSpc>
-              <a:spcBef>
-                <a:spcPts val="360"/>
-              </a:spcBef>
-              <a:spcAft>
-                <a:spcPts val="0"/>
-              </a:spcAft>
-              <a:buClr>
-                <a:schemeClr val="dk1"/>
-              </a:buClr>
-              <a:buSzPts val="1440"/>
-              <a:buFont typeface="Noto Sans Symbols"/>
-              <a:buChar char="⮚"/>
-              <a:defRPr sz="2000" b="0" i="0" u="none" strike="noStrike" cap="none">
-                <a:solidFill>
-                  <a:schemeClr val="dk1"/>
-                </a:solidFill>
-                <a:latin typeface="Arial" panose="020B0604020202020204"/>
-                <a:ea typeface="Arial" panose="020B0604020202020204"/>
-                <a:cs typeface="Arial" panose="020B0604020202020204"/>
-                <a:sym typeface="Arial" panose="020B0604020202020204"/>
-              </a:defRPr>
-            </a:lvl4pPr>
-            <a:lvl5pPr marL="2286000" marR="0" lvl="4" indent="-320040" algn="l" rtl="0">
-              <a:lnSpc>
-                <a:spcPct val="100000"/>
-              </a:lnSpc>
-              <a:spcBef>
-                <a:spcPts val="360"/>
-              </a:spcBef>
-              <a:spcAft>
-                <a:spcPts val="0"/>
-              </a:spcAft>
-              <a:buClr>
-                <a:schemeClr val="dk1"/>
-              </a:buClr>
-              <a:buSzPts val="1440"/>
-              <a:buFont typeface="Noto Sans Symbols"/>
-              <a:buChar char="⮚"/>
-              <a:defRPr sz="2000" b="0" i="0" u="none" strike="noStrike" cap="none">
-                <a:solidFill>
-                  <a:schemeClr val="dk1"/>
-                </a:solidFill>
-                <a:latin typeface="Arial" panose="020B0604020202020204"/>
-                <a:ea typeface="Arial" panose="020B0604020202020204"/>
-                <a:cs typeface="Arial" panose="020B0604020202020204"/>
-                <a:sym typeface="Arial" panose="020B0604020202020204"/>
-              </a:defRPr>
-            </a:lvl5pPr>
-            <a:lvl6pPr marL="2743200" marR="0" lvl="5" indent="-320040" algn="l" rtl="0">
-              <a:lnSpc>
-                <a:spcPct val="100000"/>
-              </a:lnSpc>
-              <a:spcBef>
-                <a:spcPts val="360"/>
-              </a:spcBef>
-              <a:spcAft>
-                <a:spcPts val="0"/>
-              </a:spcAft>
-              <a:buClr>
-                <a:schemeClr val="accent5"/>
-              </a:buClr>
-              <a:buSzPts val="1440"/>
-              <a:buFont typeface="Noto Sans Symbols"/>
-              <a:buChar char="⚫"/>
-              <a:defRPr sz="1800" b="0" i="0" u="none" strike="noStrike" cap="none">
-                <a:solidFill>
-                  <a:schemeClr val="dk1"/>
-                </a:solidFill>
-                <a:latin typeface="Arial" panose="020B0604020202020204"/>
-                <a:ea typeface="Arial" panose="020B0604020202020204"/>
-                <a:cs typeface="Arial" panose="020B0604020202020204"/>
-                <a:sym typeface="Arial" panose="020B0604020202020204"/>
-              </a:defRPr>
-            </a:lvl6pPr>
-            <a:lvl7pPr marL="3200400" marR="0" lvl="6" indent="-320040" algn="l" rtl="0">
-              <a:lnSpc>
-                <a:spcPct val="100000"/>
-              </a:lnSpc>
-              <a:spcBef>
-                <a:spcPts val="360"/>
-              </a:spcBef>
-              <a:spcAft>
-                <a:spcPts val="0"/>
-              </a:spcAft>
-              <a:buClr>
-                <a:schemeClr val="accent6"/>
-              </a:buClr>
-              <a:buSzPts val="1440"/>
-              <a:buFont typeface="Noto Sans Symbols"/>
-              <a:buChar char="⚫"/>
-              <a:defRPr sz="1600" b="0" i="0" u="none" strike="noStrike" cap="none">
-                <a:solidFill>
-                  <a:schemeClr val="dk1"/>
-                </a:solidFill>
-                <a:latin typeface="Arial" panose="020B0604020202020204"/>
-                <a:ea typeface="Arial" panose="020B0604020202020204"/>
-                <a:cs typeface="Arial" panose="020B0604020202020204"/>
-                <a:sym typeface="Arial" panose="020B0604020202020204"/>
-              </a:defRPr>
-            </a:lvl7pPr>
-            <a:lvl8pPr marL="3657600" marR="0" lvl="7" indent="-342900" algn="l" rtl="0">
-              <a:lnSpc>
-                <a:spcPct val="100000"/>
-              </a:lnSpc>
-              <a:spcBef>
-                <a:spcPts val="360"/>
-              </a:spcBef>
-              <a:spcAft>
-                <a:spcPts val="0"/>
-              </a:spcAft>
-              <a:buClr>
-                <a:schemeClr val="dk2"/>
-              </a:buClr>
-              <a:buSzPts val="1800"/>
-              <a:buFont typeface="Arial" panose="020B0604020202020204"/>
-              <a:buChar char="•"/>
-              <a:defRPr sz="1600" b="0" i="0" u="none" strike="noStrike" cap="none">
-                <a:solidFill>
-                  <a:schemeClr val="dk1"/>
-                </a:solidFill>
-                <a:latin typeface="Arial" panose="020B0604020202020204"/>
-                <a:ea typeface="Arial" panose="020B0604020202020204"/>
-                <a:cs typeface="Arial" panose="020B0604020202020204"/>
-                <a:sym typeface="Arial" panose="020B0604020202020204"/>
-              </a:defRPr>
-            </a:lvl8pPr>
-            <a:lvl9pPr marL="4114800" marR="0" lvl="8" indent="-342900" algn="l" rtl="0">
-              <a:lnSpc>
-                <a:spcPct val="100000"/>
-              </a:lnSpc>
-              <a:spcBef>
-                <a:spcPts val="360"/>
-              </a:spcBef>
-              <a:spcAft>
-                <a:spcPts val="0"/>
-              </a:spcAft>
-              <a:buClr>
-                <a:schemeClr val="dk2"/>
-              </a:buClr>
-              <a:buSzPts val="1800"/>
-              <a:buFont typeface="Arial" panose="020B0604020202020204"/>
-              <a:buChar char="•"/>
-              <a:defRPr sz="1400" b="0" i="0" u="none" strike="noStrike" cap="none">
-                <a:solidFill>
-                  <a:schemeClr val="dk1"/>
-                </a:solidFill>
-                <a:latin typeface="Arial" panose="020B0604020202020204"/>
-                <a:ea typeface="Arial" panose="020B0604020202020204"/>
-                <a:cs typeface="Arial" panose="020B0604020202020204"/>
-                <a:sym typeface="Arial" panose="020B0604020202020204"/>
-              </a:defRPr>
-            </a:lvl9pPr>
-          </a:lstStyle>
-          <a:p>
-            <a:pPr marL="0" indent="0">
-              <a:lnSpc>
-                <a:spcPct val="150000"/>
-              </a:lnSpc>
-              <a:buFont typeface="Noto Sans Symbols"/>
-              <a:buNone/>
+              <a:buClrTx/>
+              <a:buSzTx/>
+              <a:buFontTx/>
+              <a:buNone/>
+              <a:tabLst/>
             </a:pPr>
-            <a:r>
-              <a:rPr lang="en-IN" sz="2400" b="1" dirty="0">
-                <a:solidFill>
-                  <a:srgbClr val="C00000"/>
-                </a:solidFill>
-                <a:latin typeface="Times New Roman" panose="02020603050405020304" pitchFamily="18" charset="0"/>
-                <a:cs typeface="Times New Roman" panose="02020603050405020304" pitchFamily="18" charset="0"/>
-              </a:rPr>
-              <a:t>BACK-END:</a:t>
-            </a:r>
-          </a:p>
-          <a:p>
-            <a:pPr marL="0" indent="0">
-              <a:lnSpc>
-                <a:spcPct val="150000"/>
-              </a:lnSpc>
-              <a:buFont typeface="Noto Sans Symbols"/>
-              <a:buNone/>
-            </a:pPr>
-            <a:endParaRPr lang="en-IN" dirty="0">
+            <a:endParaRPr kumimoji="0" lang="en-US" altLang="en-US" sz="1800" b="0" i="0" u="none" strike="noStrike" cap="none" normalizeH="0" baseline="0" dirty="0">
+              <a:ln>
+                <a:noFill/>
+              </a:ln>
               <a:solidFill>
                 <a:schemeClr val="tx1"/>
               </a:solidFill>
-              <a:latin typeface="Times New Roman" panose="02020603050405020304" pitchFamily="18" charset="0"/>
-              <a:cs typeface="Times New Roman" panose="02020603050405020304" pitchFamily="18" charset="0"/>
-            </a:endParaRPr>
-          </a:p>
-          <a:p>
-            <a:pPr marL="0" indent="0">
-              <a:lnSpc>
-                <a:spcPct val="150000"/>
-              </a:lnSpc>
-              <a:buFont typeface="Noto Sans Symbols"/>
-              <a:buNone/>
-            </a:pPr>
-            <a:r>
-              <a:rPr lang="en-IN" dirty="0">
-                <a:solidFill>
-                  <a:schemeClr val="tx1"/>
-                </a:solidFill>
-                <a:latin typeface="Times New Roman" panose="02020603050405020304" pitchFamily="18" charset="0"/>
-                <a:cs typeface="Times New Roman" panose="02020603050405020304" pitchFamily="18" charset="0"/>
-              </a:rPr>
-              <a:t>Express.js</a:t>
-            </a:r>
-          </a:p>
-          <a:p>
-            <a:pPr marL="0" indent="0">
-              <a:lnSpc>
-                <a:spcPct val="150000"/>
-              </a:lnSpc>
-              <a:buFont typeface="Noto Sans Symbols"/>
-              <a:buNone/>
-            </a:pPr>
-            <a:endParaRPr lang="en-IN" dirty="0">
-              <a:solidFill>
-                <a:schemeClr val="tx1"/>
-              </a:solidFill>
-              <a:latin typeface="Times New Roman" panose="02020603050405020304" pitchFamily="18" charset="0"/>
-              <a:cs typeface="Times New Roman" panose="02020603050405020304" pitchFamily="18" charset="0"/>
-            </a:endParaRPr>
-          </a:p>
-          <a:p>
-            <a:pPr marL="0" indent="0">
-              <a:lnSpc>
-                <a:spcPct val="150000"/>
-              </a:lnSpc>
-              <a:buFont typeface="Noto Sans Symbols"/>
-              <a:buNone/>
-            </a:pPr>
-            <a:r>
-              <a:rPr lang="en-IN" dirty="0">
-                <a:solidFill>
-                  <a:schemeClr val="tx1"/>
-                </a:solidFill>
-                <a:latin typeface="Times New Roman" panose="02020603050405020304" pitchFamily="18" charset="0"/>
-                <a:cs typeface="Times New Roman" panose="02020603050405020304" pitchFamily="18" charset="0"/>
-              </a:rPr>
-              <a:t>MongoDB</a:t>
-            </a:r>
-            <a:endParaRPr lang="en-IN" sz="2400" dirty="0">
-              <a:solidFill>
-                <a:schemeClr val="tx1"/>
-              </a:solidFill>
-              <a:latin typeface="Times New Roman" panose="02020603050405020304" pitchFamily="18" charset="0"/>
-              <a:cs typeface="Times New Roman" panose="02020603050405020304" pitchFamily="18" charset="0"/>
-            </a:endParaRPr>
-          </a:p>
-          <a:p>
-            <a:pPr marL="0" indent="0">
-              <a:lnSpc>
-                <a:spcPct val="150000"/>
-              </a:lnSpc>
-              <a:buFont typeface="Noto Sans Symbols"/>
-              <a:buNone/>
-            </a:pPr>
-            <a:endParaRPr lang="en-IN" dirty="0">
-              <a:solidFill>
-                <a:schemeClr val="tx1"/>
-              </a:solidFill>
-              <a:latin typeface="Times New Roman" panose="02020603050405020304" pitchFamily="18" charset="0"/>
-              <a:cs typeface="Times New Roman" panose="02020603050405020304" pitchFamily="18" charset="0"/>
-            </a:endParaRPr>
-          </a:p>
-          <a:p>
-            <a:pPr marL="0" indent="0">
-              <a:lnSpc>
-                <a:spcPct val="150000"/>
-              </a:lnSpc>
-              <a:buFont typeface="Noto Sans Symbols"/>
-              <a:buNone/>
-            </a:pPr>
-            <a:r>
-              <a:rPr lang="en-IN" dirty="0">
-                <a:solidFill>
-                  <a:schemeClr val="tx1"/>
-                </a:solidFill>
-                <a:latin typeface="Times New Roman" panose="02020603050405020304" pitchFamily="18" charset="0"/>
-                <a:cs typeface="Times New Roman" panose="02020603050405020304" pitchFamily="18" charset="0"/>
-              </a:rPr>
-              <a:t>Twilio</a:t>
-            </a:r>
-            <a:endParaRPr lang="en-IN" sz="2400" dirty="0">
-              <a:solidFill>
-                <a:schemeClr val="tx1"/>
-              </a:solidFill>
-              <a:latin typeface="Times New Roman" panose="02020603050405020304" pitchFamily="18" charset="0"/>
-              <a:cs typeface="Times New Roman" panose="02020603050405020304" pitchFamily="18" charset="0"/>
-            </a:endParaRPr>
-          </a:p>
-          <a:p>
-            <a:pPr marL="0" indent="0">
-              <a:lnSpc>
-                <a:spcPct val="150000"/>
-              </a:lnSpc>
-              <a:buFont typeface="Noto Sans Symbols"/>
-              <a:buNone/>
-            </a:pPr>
-            <a:endParaRPr lang="en-IN" dirty="0">
-              <a:solidFill>
-                <a:schemeClr val="tx1"/>
-              </a:solidFill>
-              <a:latin typeface="Times New Roman" panose="02020603050405020304" pitchFamily="18" charset="0"/>
-              <a:cs typeface="Times New Roman" panose="02020603050405020304" pitchFamily="18" charset="0"/>
-            </a:endParaRPr>
-          </a:p>
-          <a:p>
-            <a:pPr marL="0" indent="0">
-              <a:lnSpc>
-                <a:spcPct val="150000"/>
-              </a:lnSpc>
-              <a:buFont typeface="Noto Sans Symbols"/>
-              <a:buNone/>
-            </a:pPr>
-            <a:r>
-              <a:rPr lang="en-IN" dirty="0">
-                <a:solidFill>
-                  <a:schemeClr val="tx1"/>
-                </a:solidFill>
-                <a:latin typeface="Times New Roman" panose="02020603050405020304" pitchFamily="18" charset="0"/>
-                <a:cs typeface="Times New Roman" panose="02020603050405020304" pitchFamily="18" charset="0"/>
-              </a:rPr>
-              <a:t>Render</a:t>
-            </a:r>
-          </a:p>
-          <a:p>
-            <a:pPr marL="0" indent="0">
-              <a:lnSpc>
-                <a:spcPct val="150000"/>
-              </a:lnSpc>
-              <a:buFont typeface="Noto Sans Symbols"/>
-              <a:buNone/>
-            </a:pPr>
-            <a:endParaRPr lang="en-IN" dirty="0">
-              <a:solidFill>
-                <a:schemeClr val="tx1"/>
-              </a:solidFill>
-              <a:latin typeface="Times New Roman" panose="02020603050405020304" pitchFamily="18" charset="0"/>
-              <a:cs typeface="Times New Roman" panose="02020603050405020304" pitchFamily="18" charset="0"/>
-            </a:endParaRPr>
-          </a:p>
-          <a:p>
-            <a:pPr marL="0" indent="0">
-              <a:lnSpc>
-                <a:spcPct val="150000"/>
-              </a:lnSpc>
-              <a:buFont typeface="Noto Sans Symbols"/>
-              <a:buNone/>
-            </a:pPr>
-            <a:r>
-              <a:rPr lang="en-US" sz="2100" dirty="0" err="1">
-                <a:latin typeface="Times New Roman" panose="02020603050405020304" pitchFamily="18" charset="0"/>
-                <a:cs typeface="Times New Roman" panose="02020603050405020304" pitchFamily="18" charset="0"/>
-              </a:rPr>
-              <a:t>Nodemailer</a:t>
-            </a:r>
-            <a:endParaRPr lang="en-US" sz="2100" dirty="0">
-              <a:latin typeface="Times New Roman" panose="02020603050405020304" pitchFamily="18" charset="0"/>
-              <a:cs typeface="Times New Roman" panose="02020603050405020304" pitchFamily="18" charset="0"/>
-            </a:endParaRPr>
-          </a:p>
-          <a:p>
-            <a:pPr marL="0" indent="0">
-              <a:lnSpc>
-                <a:spcPct val="150000"/>
-              </a:lnSpc>
-              <a:buFont typeface="Noto Sans Symbols"/>
-              <a:buNone/>
-            </a:pPr>
-            <a:endParaRPr lang="en-US" dirty="0">
-              <a:solidFill>
-                <a:schemeClr val="tx1"/>
-              </a:solidFill>
-              <a:latin typeface="Times New Roman" panose="02020603050405020304" pitchFamily="18" charset="0"/>
-              <a:cs typeface="Times New Roman" panose="02020603050405020304" pitchFamily="18" charset="0"/>
-            </a:endParaRPr>
-          </a:p>
-          <a:p>
-            <a:pPr marL="0" indent="0">
-              <a:lnSpc>
-                <a:spcPct val="150000"/>
-              </a:lnSpc>
-              <a:buFont typeface="Noto Sans Symbols"/>
-              <a:buNone/>
-            </a:pPr>
-            <a:r>
-              <a:rPr lang="en-US" dirty="0">
-                <a:solidFill>
-                  <a:schemeClr val="tx1"/>
-                </a:solidFill>
-                <a:latin typeface="Times New Roman" panose="02020603050405020304" pitchFamily="18" charset="0"/>
-                <a:cs typeface="Times New Roman" panose="02020603050405020304" pitchFamily="18" charset="0"/>
-              </a:rPr>
-              <a:t>JWT</a:t>
-            </a:r>
-            <a:endParaRPr lang="en-IN" dirty="0">
-              <a:solidFill>
-                <a:schemeClr val="tx1"/>
-              </a:solidFill>
-              <a:latin typeface="Times New Roman" panose="02020603050405020304" pitchFamily="18" charset="0"/>
-              <a:cs typeface="Times New Roman" panose="02020603050405020304" pitchFamily="18" charset="0"/>
+              <a:effectLst/>
+              <a:latin typeface="Arial" panose="020B0604020202020204" pitchFamily="34" charset="0"/>
             </a:endParaRPr>
           </a:p>
         </p:txBody>
       </p:sp>
       <p:sp>
         <p:nvSpPr>
-          <p:cNvPr id="3" name="Content Placeholder 2">
+          <p:cNvPr id="6" name="Rectangle 3">
             <a:extLst>
               <a:ext uri="{FF2B5EF4-FFF2-40B4-BE49-F238E27FC236}">
-                <a16:creationId xmlns:a16="http://schemas.microsoft.com/office/drawing/2014/main" id="{575BC973-DC6B-6A5C-584E-D87DBA081745}"/>
+                <a16:creationId xmlns:a16="http://schemas.microsoft.com/office/drawing/2014/main" id="{E6CFD1E5-42A7-2555-8A7F-733120439FEE}"/>
               </a:ext>
             </a:extLst>
           </p:cNvPr>
-          <p:cNvSpPr txBox="1"/>
+          <p:cNvSpPr>
+            <a:spLocks noChangeArrowheads="1"/>
+          </p:cNvSpPr>
           <p:nvPr/>
         </p:nvSpPr>
-        <p:spPr>
-          <a:xfrm>
-            <a:off x="1143001" y="1524000"/>
-            <a:ext cx="2362200" cy="2345371"/>
+        <p:spPr bwMode="auto">
+          <a:xfrm>
+            <a:off x="0" y="-184666"/>
+            <a:ext cx="184731" cy="369332"/>
           </a:xfrm>
           <a:prstGeom prst="rect">
             <a:avLst/>
@@ -18065,659 +20665,452 @@
           <a:ln>
             <a:noFill/>
           </a:ln>
+          <a:effectLst/>
+          <a:extLst>
+            <a:ext uri="{909E8E84-426E-40DD-AFC4-6F175D3DCCD1}">
+              <a14:hiddenFill xmlns:a14="http://schemas.microsoft.com/office/drawing/2010/main">
+                <a:solidFill>
+                  <a:schemeClr val="accent1"/>
+                </a:solidFill>
+              </a14:hiddenFill>
+            </a:ext>
+            <a:ext uri="{91240B29-F687-4F45-9708-019B960494DF}">
+              <a14:hiddenLine xmlns:a14="http://schemas.microsoft.com/office/drawing/2010/main" w="9525">
+                <a:solidFill>
+                  <a:schemeClr val="tx1"/>
+                </a:solidFill>
+                <a:miter lim="800000"/>
+                <a:headEnd/>
+                <a:tailEnd/>
+              </a14:hiddenLine>
+            </a:ext>
+            <a:ext uri="{AF507438-7753-43E0-B8FC-AC1667EBCBE1}">
+              <a14:hiddenEffects xmlns:a14="http://schemas.microsoft.com/office/drawing/2010/main">
+                <a:effectLst>
+                  <a:outerShdw dist="35921" dir="2700000" algn="ctr" rotWithShape="0">
+                    <a:schemeClr val="bg2"/>
+                  </a:outerShdw>
+                </a:effectLst>
+              </a14:hiddenEffects>
+            </a:ext>
+          </a:extLst>
         </p:spPr>
         <p:txBody>
-          <a:bodyPr spcFirstLastPara="1" wrap="square" lIns="91425" tIns="45700" rIns="91425" bIns="45700" anchor="t" anchorCtr="0">
-            <a:normAutofit/>
+          <a:bodyPr vert="horz" wrap="none" lIns="91440" tIns="45720" rIns="91440" bIns="45720" numCol="1" anchor="ctr" anchorCtr="0" compatLnSpc="1">
+            <a:prstTxWarp prst="textNoShape">
+              <a:avLst/>
+            </a:prstTxWarp>
+            <a:spAutoFit/>
           </a:bodyPr>
-          <a:lstStyle>
-            <a:defPPr marR="0" lvl="0" algn="l" rtl="0">
+          <a:lstStyle/>
+          <a:p>
+            <a:pPr marL="0" marR="0" lvl="0" indent="0" algn="l" defTabSz="914400" rtl="0" eaLnBrk="0" fontAlgn="base" latinLnBrk="0" hangingPunct="0">
               <a:lnSpc>
                 <a:spcPct val="100000"/>
               </a:lnSpc>
               <a:spcBef>
-                <a:spcPts val="0"/>
+                <a:spcPct val="0"/>
               </a:spcBef>
               <a:spcAft>
-                <a:spcPts val="0"/>
+                <a:spcPct val="0"/>
               </a:spcAft>
-            </a:defPPr>
-            <a:lvl1pPr marL="457200" marR="0" lvl="0" indent="-320040" algn="l" rtl="0">
-              <a:lnSpc>
-                <a:spcPct val="100000"/>
-              </a:lnSpc>
-              <a:spcBef>
-                <a:spcPts val="360"/>
-              </a:spcBef>
-              <a:spcAft>
-                <a:spcPts val="0"/>
-              </a:spcAft>
-              <a:buClr>
-                <a:schemeClr val="dk1"/>
-              </a:buClr>
-              <a:buSzPts val="1440"/>
-              <a:buFont typeface="Noto Sans Symbols"/>
-              <a:buChar char="⮚"/>
-              <a:defRPr sz="2000" b="0" i="0" u="none" strike="noStrike" cap="none">
-                <a:solidFill>
-                  <a:schemeClr val="dk1"/>
-                </a:solidFill>
-                <a:latin typeface="Arial" panose="020B0604020202020204"/>
-                <a:ea typeface="Arial" panose="020B0604020202020204"/>
-                <a:cs typeface="Arial" panose="020B0604020202020204"/>
-                <a:sym typeface="Arial" panose="020B0604020202020204"/>
-              </a:defRPr>
-            </a:lvl1pPr>
-            <a:lvl2pPr marL="914400" marR="0" lvl="1" indent="-320040" algn="l" rtl="0">
-              <a:lnSpc>
-                <a:spcPct val="100000"/>
-              </a:lnSpc>
-              <a:spcBef>
-                <a:spcPts val="360"/>
-              </a:spcBef>
-              <a:spcAft>
-                <a:spcPts val="0"/>
-              </a:spcAft>
-              <a:buClr>
-                <a:schemeClr val="dk1"/>
-              </a:buClr>
-              <a:buSzPts val="1440"/>
-              <a:buFont typeface="Noto Sans Symbols"/>
-              <a:buChar char="⮚"/>
-              <a:defRPr sz="2000" b="0" i="0" u="none" strike="noStrike" cap="none">
-                <a:solidFill>
-                  <a:schemeClr val="dk1"/>
-                </a:solidFill>
-                <a:latin typeface="Arial" panose="020B0604020202020204"/>
-                <a:ea typeface="Arial" panose="020B0604020202020204"/>
-                <a:cs typeface="Arial" panose="020B0604020202020204"/>
-                <a:sym typeface="Arial" panose="020B0604020202020204"/>
-              </a:defRPr>
-            </a:lvl2pPr>
-            <a:lvl3pPr marL="1371600" marR="0" lvl="2" indent="-320040" algn="l" rtl="0">
-              <a:lnSpc>
-                <a:spcPct val="100000"/>
-              </a:lnSpc>
-              <a:spcBef>
-                <a:spcPts val="360"/>
-              </a:spcBef>
-              <a:spcAft>
-                <a:spcPts val="0"/>
-              </a:spcAft>
-              <a:buClr>
-                <a:schemeClr val="dk1"/>
-              </a:buClr>
-              <a:buSzPts val="1440"/>
-              <a:buFont typeface="Noto Sans Symbols"/>
-              <a:buChar char="⮚"/>
-              <a:defRPr sz="2000" b="0" i="0" u="none" strike="noStrike" cap="none">
-                <a:solidFill>
-                  <a:schemeClr val="dk1"/>
-                </a:solidFill>
-                <a:latin typeface="Arial" panose="020B0604020202020204"/>
-                <a:ea typeface="Arial" panose="020B0604020202020204"/>
-                <a:cs typeface="Arial" panose="020B0604020202020204"/>
-                <a:sym typeface="Arial" panose="020B0604020202020204"/>
-              </a:defRPr>
-            </a:lvl3pPr>
-            <a:lvl4pPr marL="1828800" marR="0" lvl="3" indent="-320040" algn="l" rtl="0">
-              <a:lnSpc>
-                <a:spcPct val="100000"/>
-              </a:lnSpc>
-              <a:spcBef>
-                <a:spcPts val="360"/>
-              </a:spcBef>
-              <a:spcAft>
-                <a:spcPts val="0"/>
-              </a:spcAft>
-              <a:buClr>
-                <a:schemeClr val="dk1"/>
-              </a:buClr>
-              <a:buSzPts val="1440"/>
-              <a:buFont typeface="Noto Sans Symbols"/>
-              <a:buChar char="⮚"/>
-              <a:defRPr sz="2000" b="0" i="0" u="none" strike="noStrike" cap="none">
-                <a:solidFill>
-                  <a:schemeClr val="dk1"/>
-                </a:solidFill>
-                <a:latin typeface="Arial" panose="020B0604020202020204"/>
-                <a:ea typeface="Arial" panose="020B0604020202020204"/>
-                <a:cs typeface="Arial" panose="020B0604020202020204"/>
-                <a:sym typeface="Arial" panose="020B0604020202020204"/>
-              </a:defRPr>
-            </a:lvl4pPr>
-            <a:lvl5pPr marL="2286000" marR="0" lvl="4" indent="-320040" algn="l" rtl="0">
-              <a:lnSpc>
-                <a:spcPct val="100000"/>
-              </a:lnSpc>
-              <a:spcBef>
-                <a:spcPts val="360"/>
-              </a:spcBef>
-              <a:spcAft>
-                <a:spcPts val="0"/>
-              </a:spcAft>
-              <a:buClr>
-                <a:schemeClr val="dk1"/>
-              </a:buClr>
-              <a:buSzPts val="1440"/>
-              <a:buFont typeface="Noto Sans Symbols"/>
-              <a:buChar char="⮚"/>
-              <a:defRPr sz="2000" b="0" i="0" u="none" strike="noStrike" cap="none">
-                <a:solidFill>
-                  <a:schemeClr val="dk1"/>
-                </a:solidFill>
-                <a:latin typeface="Arial" panose="020B0604020202020204"/>
-                <a:ea typeface="Arial" panose="020B0604020202020204"/>
-                <a:cs typeface="Arial" panose="020B0604020202020204"/>
-                <a:sym typeface="Arial" panose="020B0604020202020204"/>
-              </a:defRPr>
-            </a:lvl5pPr>
-            <a:lvl6pPr marL="2743200" marR="0" lvl="5" indent="-320040" algn="l" rtl="0">
-              <a:lnSpc>
-                <a:spcPct val="100000"/>
-              </a:lnSpc>
-              <a:spcBef>
-                <a:spcPts val="360"/>
-              </a:spcBef>
-              <a:spcAft>
-                <a:spcPts val="0"/>
-              </a:spcAft>
-              <a:buClr>
-                <a:schemeClr val="accent5"/>
-              </a:buClr>
-              <a:buSzPts val="1440"/>
-              <a:buFont typeface="Noto Sans Symbols"/>
-              <a:buChar char="⚫"/>
-              <a:defRPr sz="1800" b="0" i="0" u="none" strike="noStrike" cap="none">
-                <a:solidFill>
-                  <a:schemeClr val="dk1"/>
-                </a:solidFill>
-                <a:latin typeface="Arial" panose="020B0604020202020204"/>
-                <a:ea typeface="Arial" panose="020B0604020202020204"/>
-                <a:cs typeface="Arial" panose="020B0604020202020204"/>
-                <a:sym typeface="Arial" panose="020B0604020202020204"/>
-              </a:defRPr>
-            </a:lvl6pPr>
-            <a:lvl7pPr marL="3200400" marR="0" lvl="6" indent="-320040" algn="l" rtl="0">
-              <a:lnSpc>
-                <a:spcPct val="100000"/>
-              </a:lnSpc>
-              <a:spcBef>
-                <a:spcPts val="360"/>
-              </a:spcBef>
-              <a:spcAft>
-                <a:spcPts val="0"/>
-              </a:spcAft>
-              <a:buClr>
-                <a:schemeClr val="accent6"/>
-              </a:buClr>
-              <a:buSzPts val="1440"/>
-              <a:buFont typeface="Noto Sans Symbols"/>
-              <a:buChar char="⚫"/>
-              <a:defRPr sz="1600" b="0" i="0" u="none" strike="noStrike" cap="none">
-                <a:solidFill>
-                  <a:schemeClr val="dk1"/>
-                </a:solidFill>
-                <a:latin typeface="Arial" panose="020B0604020202020204"/>
-                <a:ea typeface="Arial" panose="020B0604020202020204"/>
-                <a:cs typeface="Arial" panose="020B0604020202020204"/>
-                <a:sym typeface="Arial" panose="020B0604020202020204"/>
-              </a:defRPr>
-            </a:lvl7pPr>
-            <a:lvl8pPr marL="3657600" marR="0" lvl="7" indent="-342900" algn="l" rtl="0">
-              <a:lnSpc>
-                <a:spcPct val="100000"/>
-              </a:lnSpc>
-              <a:spcBef>
-                <a:spcPts val="360"/>
-              </a:spcBef>
-              <a:spcAft>
-                <a:spcPts val="0"/>
-              </a:spcAft>
-              <a:buClr>
-                <a:schemeClr val="dk2"/>
-              </a:buClr>
-              <a:buSzPts val="1800"/>
-              <a:buFont typeface="Arial" panose="020B0604020202020204"/>
-              <a:buChar char="•"/>
-              <a:defRPr sz="1600" b="0" i="0" u="none" strike="noStrike" cap="none">
-                <a:solidFill>
-                  <a:schemeClr val="dk1"/>
-                </a:solidFill>
-                <a:latin typeface="Arial" panose="020B0604020202020204"/>
-                <a:ea typeface="Arial" panose="020B0604020202020204"/>
-                <a:cs typeface="Arial" panose="020B0604020202020204"/>
-                <a:sym typeface="Arial" panose="020B0604020202020204"/>
-              </a:defRPr>
-            </a:lvl8pPr>
-            <a:lvl9pPr marL="4114800" marR="0" lvl="8" indent="-342900" algn="l" rtl="0">
-              <a:lnSpc>
-                <a:spcPct val="100000"/>
-              </a:lnSpc>
-              <a:spcBef>
-                <a:spcPts val="360"/>
-              </a:spcBef>
-              <a:spcAft>
-                <a:spcPts val="0"/>
-              </a:spcAft>
-              <a:buClr>
-                <a:schemeClr val="dk2"/>
-              </a:buClr>
-              <a:buSzPts val="1800"/>
-              <a:buFont typeface="Arial" panose="020B0604020202020204"/>
-              <a:buChar char="•"/>
-              <a:defRPr sz="1400" b="0" i="0" u="none" strike="noStrike" cap="none">
-                <a:solidFill>
-                  <a:schemeClr val="dk1"/>
-                </a:solidFill>
-                <a:latin typeface="Arial" panose="020B0604020202020204"/>
-                <a:ea typeface="Arial" panose="020B0604020202020204"/>
-                <a:cs typeface="Arial" panose="020B0604020202020204"/>
-                <a:sym typeface="Arial" panose="020B0604020202020204"/>
-              </a:defRPr>
-            </a:lvl9pPr>
-          </a:lstStyle>
-          <a:p>
-            <a:pPr marL="0" indent="0">
-              <a:lnSpc>
-                <a:spcPct val="150000"/>
-              </a:lnSpc>
-              <a:buFont typeface="Noto Sans Symbols"/>
-              <a:buNone/>
+              <a:buClrTx/>
+              <a:buSzTx/>
+              <a:buFontTx/>
+              <a:buNone/>
+              <a:tabLst/>
             </a:pPr>
-            <a:r>
-              <a:rPr lang="en-IN" sz="2400" b="1" dirty="0">
-                <a:solidFill>
-                  <a:srgbClr val="C00000"/>
-                </a:solidFill>
-                <a:latin typeface="Times New Roman" panose="02020603050405020304" pitchFamily="18" charset="0"/>
-                <a:cs typeface="Times New Roman" panose="02020603050405020304" pitchFamily="18" charset="0"/>
-              </a:rPr>
-              <a:t>FRONT-END:</a:t>
-            </a:r>
-          </a:p>
-          <a:p>
-            <a:pPr marL="0" indent="0">
-              <a:lnSpc>
-                <a:spcPct val="150000"/>
-              </a:lnSpc>
-              <a:buFont typeface="Noto Sans Symbols"/>
-              <a:buNone/>
-            </a:pPr>
-            <a:endParaRPr lang="en-IN" dirty="0">
+            <a:endParaRPr kumimoji="0" lang="en-US" altLang="en-US" sz="1800" b="0" i="0" u="none" strike="noStrike" cap="none" normalizeH="0" baseline="0" dirty="0">
+              <a:ln>
+                <a:noFill/>
+              </a:ln>
               <a:solidFill>
                 <a:schemeClr val="tx1"/>
               </a:solidFill>
-              <a:latin typeface="Times New Roman" panose="02020603050405020304" pitchFamily="18" charset="0"/>
-              <a:cs typeface="Times New Roman" panose="02020603050405020304" pitchFamily="18" charset="0"/>
-            </a:endParaRPr>
-          </a:p>
-          <a:p>
-            <a:pPr marL="0" indent="0">
-              <a:lnSpc>
-                <a:spcPct val="150000"/>
-              </a:lnSpc>
-              <a:buFont typeface="Noto Sans Symbols"/>
-              <a:buNone/>
-            </a:pPr>
-            <a:r>
-              <a:rPr lang="en-IN" dirty="0">
-                <a:solidFill>
-                  <a:schemeClr val="tx1"/>
-                </a:solidFill>
-                <a:latin typeface="Times New Roman" panose="02020603050405020304" pitchFamily="18" charset="0"/>
-                <a:cs typeface="Times New Roman" panose="02020603050405020304" pitchFamily="18" charset="0"/>
-              </a:rPr>
-              <a:t>ReactJS</a:t>
-            </a:r>
-          </a:p>
-          <a:p>
-            <a:pPr marL="0" indent="0">
-              <a:lnSpc>
-                <a:spcPct val="150000"/>
-              </a:lnSpc>
-              <a:buFont typeface="Noto Sans Symbols"/>
-              <a:buNone/>
-            </a:pPr>
-            <a:endParaRPr lang="en-IN" dirty="0">
-              <a:solidFill>
-                <a:schemeClr val="tx1"/>
-              </a:solidFill>
-              <a:latin typeface="Times New Roman" panose="02020603050405020304" pitchFamily="18" charset="0"/>
-              <a:cs typeface="Times New Roman" panose="02020603050405020304" pitchFamily="18" charset="0"/>
+              <a:effectLst/>
+              <a:latin typeface="Arial" panose="020B0604020202020204" pitchFamily="34" charset="0"/>
             </a:endParaRPr>
           </a:p>
         </p:txBody>
       </p:sp>
-      <p:pic>
-        <p:nvPicPr>
-          <p:cNvPr id="1026" name="Picture 2" descr="React">
+      <p:sp>
+        <p:nvSpPr>
+          <p:cNvPr id="5" name="Rectangle 2">
             <a:extLst>
               <a:ext uri="{FF2B5EF4-FFF2-40B4-BE49-F238E27FC236}">
-                <a16:creationId xmlns:a16="http://schemas.microsoft.com/office/drawing/2014/main" id="{6B0A4973-37F2-AB34-4A3A-076DDABD972C}"/>
+                <a16:creationId xmlns:a16="http://schemas.microsoft.com/office/drawing/2014/main" id="{08780E82-12A5-50E9-2724-75AC8711A1D9}"/>
               </a:ext>
             </a:extLst>
           </p:cNvPr>
-          <p:cNvPicPr>
-            <a:picLocks noChangeAspect="1" noChangeArrowheads="1"/>
-          </p:cNvPicPr>
-          <p:nvPr/>
-        </p:nvPicPr>
-        <p:blipFill>
-          <a:blip r:embed="rId2">
-            <a:extLst>
-              <a:ext uri="{28A0092B-C50C-407E-A947-70E740481C1C}">
-                <a14:useLocalDpi xmlns:a14="http://schemas.microsoft.com/office/drawing/2010/main" val="0"/>
-              </a:ext>
-            </a:extLst>
-          </a:blip>
-          <a:srcRect/>
-          <a:stretch>
-            <a:fillRect/>
-          </a:stretch>
-        </p:blipFill>
+          <p:cNvSpPr>
+            <a:spLocks noGrp="1" noChangeArrowheads="1"/>
+          </p:cNvSpPr>
+          <p:nvPr>
+            <p:ph type="body" idx="1"/>
+          </p:nvPr>
+        </p:nvSpPr>
         <p:spPr bwMode="auto">
           <a:xfrm>
-            <a:off x="914400" y="3183571"/>
-            <a:ext cx="1371600" cy="1371600"/>
+            <a:off x="2133600" y="1537969"/>
+            <a:ext cx="7499350" cy="3782061"/>
           </a:xfrm>
           <a:prstGeom prst="rect">
             <a:avLst/>
           </a:prstGeom>
           <a:noFill/>
+          <a:ln>
+            <a:noFill/>
+          </a:ln>
+          <a:effectLst/>
           <a:extLst>
             <a:ext uri="{909E8E84-426E-40DD-AFC4-6F175D3DCCD1}">
               <a14:hiddenFill xmlns:a14="http://schemas.microsoft.com/office/drawing/2010/main">
                 <a:solidFill>
-                  <a:srgbClr val="FFFFFF"/>
+                  <a:schemeClr val="accent1"/>
                 </a:solidFill>
               </a14:hiddenFill>
             </a:ext>
-          </a:extLst>
-        </p:spPr>
-      </p:pic>
-      <p:pic>
-        <p:nvPicPr>
-          <p:cNvPr id="1028" name="Picture 4" descr="How to Make an API with Express.js: A ...">
-            <a:extLst>
-              <a:ext uri="{FF2B5EF4-FFF2-40B4-BE49-F238E27FC236}">
-                <a16:creationId xmlns:a16="http://schemas.microsoft.com/office/drawing/2014/main" id="{F42CDBD5-2701-5EEE-BB9B-FC906BBDDB75}"/>
-              </a:ext>
-            </a:extLst>
-          </p:cNvPr>
-          <p:cNvPicPr>
-            <a:picLocks noChangeAspect="1" noChangeArrowheads="1"/>
-          </p:cNvPicPr>
-          <p:nvPr/>
-        </p:nvPicPr>
-        <p:blipFill>
-          <a:blip r:embed="rId3">
-            <a:extLst>
-              <a:ext uri="{28A0092B-C50C-407E-A947-70E740481C1C}">
-                <a14:useLocalDpi xmlns:a14="http://schemas.microsoft.com/office/drawing/2010/main" val="0"/>
-              </a:ext>
-            </a:extLst>
-          </a:blip>
-          <a:srcRect/>
-          <a:stretch>
-            <a:fillRect/>
-          </a:stretch>
-        </p:blipFill>
-        <p:spPr bwMode="auto">
-          <a:xfrm>
-            <a:off x="4237542" y="2133600"/>
-            <a:ext cx="1371762" cy="912845"/>
-          </a:xfrm>
-          <a:prstGeom prst="rect">
-            <a:avLst/>
-          </a:prstGeom>
-          <a:noFill/>
-          <a:extLst>
-            <a:ext uri="{909E8E84-426E-40DD-AFC4-6F175D3DCCD1}">
-              <a14:hiddenFill xmlns:a14="http://schemas.microsoft.com/office/drawing/2010/main">
-                <a:solidFill>
-                  <a:srgbClr val="FFFFFF"/>
-                </a:solidFill>
-              </a14:hiddenFill>
+            <a:ext uri="{91240B29-F687-4F45-9708-019B960494DF}">
+              <a14:hiddenLine xmlns:a14="http://schemas.microsoft.com/office/drawing/2010/main" w="9525">
+                <a:solidFill>
+                  <a:schemeClr val="tx1"/>
+                </a:solidFill>
+                <a:miter lim="800000"/>
+                <a:headEnd/>
+                <a:tailEnd/>
+              </a14:hiddenLine>
+            </a:ext>
+            <a:ext uri="{AF507438-7753-43E0-B8FC-AC1667EBCBE1}">
+              <a14:hiddenEffects xmlns:a14="http://schemas.microsoft.com/office/drawing/2010/main">
+                <a:effectLst>
+                  <a:outerShdw dist="35921" dir="2700000" algn="ctr" rotWithShape="0">
+                    <a:schemeClr val="bg2"/>
+                  </a:outerShdw>
+                </a:effectLst>
+              </a14:hiddenEffects>
             </a:ext>
           </a:extLst>
         </p:spPr>
-      </p:pic>
-      <p:pic>
-        <p:nvPicPr>
-          <p:cNvPr id="1030" name="Picture 6" descr="What Is MongoDB? - GTech">
-            <a:extLst>
-              <a:ext uri="{FF2B5EF4-FFF2-40B4-BE49-F238E27FC236}">
-                <a16:creationId xmlns:a16="http://schemas.microsoft.com/office/drawing/2014/main" id="{3C9DEF65-4F86-5692-2D19-AE493AA6E2F2}"/>
-              </a:ext>
-            </a:extLst>
-          </p:cNvPr>
-          <p:cNvPicPr>
-            <a:picLocks noChangeAspect="1" noChangeArrowheads="1"/>
-          </p:cNvPicPr>
-          <p:nvPr/>
-        </p:nvPicPr>
-        <p:blipFill>
-          <a:blip r:embed="rId4">
-            <a:extLst>
-              <a:ext uri="{28A0092B-C50C-407E-A947-70E740481C1C}">
-                <a14:useLocalDpi xmlns:a14="http://schemas.microsoft.com/office/drawing/2010/main" val="0"/>
-              </a:ext>
-            </a:extLst>
-          </a:blip>
-          <a:srcRect/>
-          <a:stretch>
-            <a:fillRect/>
-          </a:stretch>
-        </p:blipFill>
-        <p:spPr bwMode="auto">
-          <a:xfrm>
-            <a:off x="6784031" y="2819400"/>
-            <a:ext cx="1932493" cy="884756"/>
-          </a:xfrm>
-          <a:prstGeom prst="rect">
-            <a:avLst/>
-          </a:prstGeom>
-          <a:noFill/>
-          <a:extLst>
-            <a:ext uri="{909E8E84-426E-40DD-AFC4-6F175D3DCCD1}">
-              <a14:hiddenFill xmlns:a14="http://schemas.microsoft.com/office/drawing/2010/main">
-                <a:solidFill>
-                  <a:srgbClr val="FFFFFF"/>
-                </a:solidFill>
-              </a14:hiddenFill>
-            </a:ext>
-          </a:extLst>
-        </p:spPr>
-      </p:pic>
-      <p:pic>
-        <p:nvPicPr>
-          <p:cNvPr id="1032" name="Picture 8" descr="Integrating Salesforce and Twilio - SMBHD">
-            <a:extLst>
-              <a:ext uri="{FF2B5EF4-FFF2-40B4-BE49-F238E27FC236}">
-                <a16:creationId xmlns:a16="http://schemas.microsoft.com/office/drawing/2014/main" id="{3A13954D-C6E9-4A71-4663-09B23BE84708}"/>
-              </a:ext>
-            </a:extLst>
-          </p:cNvPr>
-          <p:cNvPicPr>
-            <a:picLocks noChangeAspect="1" noChangeArrowheads="1"/>
-          </p:cNvPicPr>
-          <p:nvPr/>
-        </p:nvPicPr>
-        <p:blipFill>
-          <a:blip r:embed="rId5">
-            <a:extLst>
-              <a:ext uri="{28A0092B-C50C-407E-A947-70E740481C1C}">
-                <a14:useLocalDpi xmlns:a14="http://schemas.microsoft.com/office/drawing/2010/main" val="0"/>
-              </a:ext>
-            </a:extLst>
-          </a:blip>
-          <a:srcRect/>
-          <a:stretch>
-            <a:fillRect/>
-          </a:stretch>
-        </p:blipFill>
-        <p:spPr bwMode="auto">
-          <a:xfrm>
-            <a:off x="4436647" y="3493992"/>
-            <a:ext cx="1113502" cy="1113502"/>
-          </a:xfrm>
-          <a:prstGeom prst="rect">
-            <a:avLst/>
-          </a:prstGeom>
-          <a:noFill/>
-          <a:extLst>
-            <a:ext uri="{909E8E84-426E-40DD-AFC4-6F175D3DCCD1}">
-              <a14:hiddenFill xmlns:a14="http://schemas.microsoft.com/office/drawing/2010/main">
-                <a:solidFill>
-                  <a:srgbClr val="FFFFFF"/>
-                </a:solidFill>
-              </a14:hiddenFill>
-            </a:ext>
-          </a:extLst>
-        </p:spPr>
-      </p:pic>
-      <p:pic>
-        <p:nvPicPr>
-          <p:cNvPr id="1034" name="Picture 10" descr="Render (@render) / X">
-            <a:extLst>
-              <a:ext uri="{FF2B5EF4-FFF2-40B4-BE49-F238E27FC236}">
-                <a16:creationId xmlns:a16="http://schemas.microsoft.com/office/drawing/2014/main" id="{D6F60FF0-3604-FC6B-F36D-E8A5C0EC9D5F}"/>
-              </a:ext>
-            </a:extLst>
-          </p:cNvPr>
-          <p:cNvPicPr>
-            <a:picLocks noChangeAspect="1" noChangeArrowheads="1"/>
-          </p:cNvPicPr>
-          <p:nvPr/>
-        </p:nvPicPr>
-        <p:blipFill>
-          <a:blip r:embed="rId6">
-            <a:extLst>
-              <a:ext uri="{28A0092B-C50C-407E-A947-70E740481C1C}">
-                <a14:useLocalDpi xmlns:a14="http://schemas.microsoft.com/office/drawing/2010/main" val="0"/>
-              </a:ext>
-            </a:extLst>
-          </a:blip>
-          <a:srcRect/>
-          <a:stretch>
-            <a:fillRect/>
-          </a:stretch>
-        </p:blipFill>
-        <p:spPr bwMode="auto">
-          <a:xfrm>
-            <a:off x="6695286" y="4303732"/>
-            <a:ext cx="988463" cy="988463"/>
-          </a:xfrm>
-          <a:prstGeom prst="rect">
-            <a:avLst/>
-          </a:prstGeom>
-          <a:noFill/>
-          <a:extLst>
-            <a:ext uri="{909E8E84-426E-40DD-AFC4-6F175D3DCCD1}">
-              <a14:hiddenFill xmlns:a14="http://schemas.microsoft.com/office/drawing/2010/main">
-                <a:solidFill>
-                  <a:srgbClr val="FFFFFF"/>
-                </a:solidFill>
-              </a14:hiddenFill>
-            </a:ext>
-          </a:extLst>
-        </p:spPr>
-      </p:pic>
-      <p:pic>
-        <p:nvPicPr>
-          <p:cNvPr id="1036" name="Picture 12" descr="Medusa - medusa-plugin-nodemailer | Medusa">
-            <a:extLst>
-              <a:ext uri="{FF2B5EF4-FFF2-40B4-BE49-F238E27FC236}">
-                <a16:creationId xmlns:a16="http://schemas.microsoft.com/office/drawing/2014/main" id="{4E4FFF34-57E1-42C9-7B11-6330A11D86F0}"/>
-              </a:ext>
-            </a:extLst>
-          </p:cNvPr>
-          <p:cNvPicPr>
-            <a:picLocks noChangeAspect="1" noChangeArrowheads="1"/>
-          </p:cNvPicPr>
-          <p:nvPr/>
-        </p:nvPicPr>
-        <p:blipFill>
-          <a:blip r:embed="rId7">
-            <a:extLst>
-              <a:ext uri="{28A0092B-C50C-407E-A947-70E740481C1C}">
-                <a14:useLocalDpi xmlns:a14="http://schemas.microsoft.com/office/drawing/2010/main" val="0"/>
-              </a:ext>
-            </a:extLst>
-          </a:blip>
-          <a:srcRect/>
-          <a:stretch>
-            <a:fillRect/>
-          </a:stretch>
-        </p:blipFill>
-        <p:spPr bwMode="auto">
-          <a:xfrm>
-            <a:off x="4366672" y="4953000"/>
-            <a:ext cx="1113502" cy="1113502"/>
-          </a:xfrm>
-          <a:prstGeom prst="rect">
-            <a:avLst/>
-          </a:prstGeom>
-          <a:noFill/>
-          <a:extLst>
-            <a:ext uri="{909E8E84-426E-40DD-AFC4-6F175D3DCCD1}">
-              <a14:hiddenFill xmlns:a14="http://schemas.microsoft.com/office/drawing/2010/main">
-                <a:solidFill>
-                  <a:srgbClr val="FFFFFF"/>
-                </a:solidFill>
-              </a14:hiddenFill>
-            </a:ext>
-          </a:extLst>
-        </p:spPr>
-      </p:pic>
-      <p:pic>
-        <p:nvPicPr>
-          <p:cNvPr id="1040" name="Picture 16" descr="JSON Web Token color icon in PNG, SVG">
-            <a:extLst>
-              <a:ext uri="{FF2B5EF4-FFF2-40B4-BE49-F238E27FC236}">
-                <a16:creationId xmlns:a16="http://schemas.microsoft.com/office/drawing/2014/main" id="{27D019F8-E201-F78F-79FD-E1A6D8648B7A}"/>
-              </a:ext>
-            </a:extLst>
-          </p:cNvPr>
-          <p:cNvPicPr>
-            <a:picLocks noChangeAspect="1" noChangeArrowheads="1"/>
-          </p:cNvPicPr>
-          <p:nvPr/>
-        </p:nvPicPr>
-        <p:blipFill>
-          <a:blip r:embed="rId8">
-            <a:extLst>
-              <a:ext uri="{28A0092B-C50C-407E-A947-70E740481C1C}">
-                <a14:useLocalDpi xmlns:a14="http://schemas.microsoft.com/office/drawing/2010/main" val="0"/>
-              </a:ext>
-            </a:extLst>
-          </a:blip>
-          <a:srcRect/>
-          <a:stretch>
-            <a:fillRect/>
-          </a:stretch>
-        </p:blipFill>
-        <p:spPr bwMode="auto">
-          <a:xfrm>
-            <a:off x="6784031" y="5715000"/>
-            <a:ext cx="988464" cy="988464"/>
-          </a:xfrm>
-          <a:prstGeom prst="rect">
-            <a:avLst/>
-          </a:prstGeom>
-          <a:noFill/>
-          <a:extLst>
-            <a:ext uri="{909E8E84-426E-40DD-AFC4-6F175D3DCCD1}">
-              <a14:hiddenFill xmlns:a14="http://schemas.microsoft.com/office/drawing/2010/main">
-                <a:solidFill>
-                  <a:srgbClr val="FFFFFF"/>
-                </a:solidFill>
-              </a14:hiddenFill>
-            </a:ext>
-          </a:extLst>
-        </p:spPr>
-      </p:pic>
+        <p:txBody>
+          <a:bodyPr vert="horz" wrap="square" lIns="91440" tIns="45720" rIns="91440" bIns="45720" numCol="1" anchor="ctr" anchorCtr="0" compatLnSpc="1">
+            <a:prstTxWarp prst="textNoShape">
+              <a:avLst/>
+            </a:prstTxWarp>
+            <a:spAutoFit/>
+          </a:bodyPr>
+          <a:lstStyle/>
+          <a:p>
+            <a:pPr marR="0" lvl="0" algn="just" defTabSz="914400" rtl="0" eaLnBrk="0" fontAlgn="base" latinLnBrk="0" hangingPunct="0">
+              <a:lnSpc>
+                <a:spcPct val="150000"/>
+              </a:lnSpc>
+              <a:spcBef>
+                <a:spcPct val="0"/>
+              </a:spcBef>
+              <a:spcAft>
+                <a:spcPct val="0"/>
+              </a:spcAft>
+              <a:buClrTx/>
+              <a:buSzTx/>
+              <a:tabLst/>
+            </a:pPr>
+            <a:r>
+              <a:rPr kumimoji="0" lang="en-US" altLang="en-US" sz="1800" i="0" u="none" strike="noStrike" cap="none" normalizeH="0" baseline="0" dirty="0">
+                <a:ln>
+                  <a:noFill/>
+                </a:ln>
+                <a:solidFill>
+                  <a:schemeClr val="tx1"/>
+                </a:solidFill>
+                <a:effectLst/>
+                <a:latin typeface="Times New Roman" panose="02020603050405020304" pitchFamily="18" charset="0"/>
+                <a:cs typeface="Times New Roman" panose="02020603050405020304" pitchFamily="18" charset="0"/>
+              </a:rPr>
+              <a:t>1. Integrated Excel-based Attendance Upload</a:t>
+            </a:r>
+          </a:p>
+          <a:p>
+            <a:pPr marL="0" marR="0" lvl="0" indent="0" algn="just" defTabSz="914400" rtl="0" eaLnBrk="0" fontAlgn="base" latinLnBrk="0" hangingPunct="0">
+              <a:lnSpc>
+                <a:spcPct val="150000"/>
+              </a:lnSpc>
+              <a:spcBef>
+                <a:spcPct val="0"/>
+              </a:spcBef>
+              <a:spcAft>
+                <a:spcPct val="0"/>
+              </a:spcAft>
+              <a:buClrTx/>
+              <a:buSzTx/>
+              <a:buNone/>
+              <a:tabLst/>
+            </a:pPr>
+            <a:r>
+              <a:rPr kumimoji="0" lang="en-US" altLang="en-US" sz="1800" i="0" u="none" strike="noStrike" cap="none" normalizeH="0" baseline="0" dirty="0">
+                <a:ln>
+                  <a:noFill/>
+                </a:ln>
+                <a:solidFill>
+                  <a:schemeClr val="tx1"/>
+                </a:solidFill>
+                <a:effectLst/>
+                <a:latin typeface="Times New Roman" panose="02020603050405020304" pitchFamily="18" charset="0"/>
+                <a:cs typeface="Times New Roman" panose="02020603050405020304" pitchFamily="18" charset="0"/>
+              </a:rPr>
+              <a:t>	- Automatic processing and status updates</a:t>
+            </a:r>
+          </a:p>
+          <a:p>
+            <a:pPr marR="0" lvl="0" algn="just" defTabSz="914400" rtl="0" eaLnBrk="0" fontAlgn="base" latinLnBrk="0" hangingPunct="0">
+              <a:lnSpc>
+                <a:spcPct val="150000"/>
+              </a:lnSpc>
+              <a:spcBef>
+                <a:spcPct val="0"/>
+              </a:spcBef>
+              <a:spcAft>
+                <a:spcPct val="0"/>
+              </a:spcAft>
+              <a:buClrTx/>
+              <a:buSzTx/>
+              <a:tabLst/>
+            </a:pPr>
+            <a:r>
+              <a:rPr kumimoji="0" lang="en-US" altLang="en-US" sz="1800" i="0" u="none" strike="noStrike" cap="none" normalizeH="0" baseline="0" dirty="0">
+                <a:ln>
+                  <a:noFill/>
+                </a:ln>
+                <a:solidFill>
+                  <a:schemeClr val="tx1"/>
+                </a:solidFill>
+                <a:effectLst/>
+                <a:latin typeface="Times New Roman" panose="02020603050405020304" pitchFamily="18" charset="0"/>
+                <a:cs typeface="Times New Roman" panose="02020603050405020304" pitchFamily="18" charset="0"/>
+              </a:rPr>
+              <a:t>2. Smart Leave Management</a:t>
+            </a:r>
+          </a:p>
+          <a:p>
+            <a:pPr marL="0" marR="0" lvl="0" indent="0" algn="just" defTabSz="914400" rtl="0" eaLnBrk="0" fontAlgn="base" latinLnBrk="0" hangingPunct="0">
+              <a:lnSpc>
+                <a:spcPct val="150000"/>
+              </a:lnSpc>
+              <a:spcBef>
+                <a:spcPct val="0"/>
+              </a:spcBef>
+              <a:spcAft>
+                <a:spcPct val="0"/>
+              </a:spcAft>
+              <a:buClrTx/>
+              <a:buSzTx/>
+              <a:buNone/>
+              <a:tabLst/>
+            </a:pPr>
+            <a:r>
+              <a:rPr kumimoji="0" lang="en-US" altLang="en-US" sz="1800" i="0" u="none" strike="noStrike" cap="none" normalizeH="0" baseline="0" dirty="0">
+                <a:ln>
+                  <a:noFill/>
+                </a:ln>
+                <a:solidFill>
+                  <a:schemeClr val="tx1"/>
+                </a:solidFill>
+                <a:effectLst/>
+                <a:latin typeface="Times New Roman" panose="02020603050405020304" pitchFamily="18" charset="0"/>
+                <a:cs typeface="Times New Roman" panose="02020603050405020304" pitchFamily="18" charset="0"/>
+              </a:rPr>
+              <a:t>	- Automatic notifications and leave handling</a:t>
+            </a:r>
+          </a:p>
+          <a:p>
+            <a:pPr marR="0" lvl="0" algn="just" defTabSz="914400" rtl="0" eaLnBrk="0" fontAlgn="base" latinLnBrk="0" hangingPunct="0">
+              <a:lnSpc>
+                <a:spcPct val="150000"/>
+              </a:lnSpc>
+              <a:spcBef>
+                <a:spcPct val="0"/>
+              </a:spcBef>
+              <a:spcAft>
+                <a:spcPct val="0"/>
+              </a:spcAft>
+              <a:buClrTx/>
+              <a:buSzTx/>
+              <a:tabLst/>
+            </a:pPr>
+            <a:r>
+              <a:rPr kumimoji="0" lang="en-US" altLang="en-US" sz="1800" i="0" u="none" strike="noStrike" cap="none" normalizeH="0" baseline="0" dirty="0">
+                <a:ln>
+                  <a:noFill/>
+                </a:ln>
+                <a:solidFill>
+                  <a:schemeClr val="tx1"/>
+                </a:solidFill>
+                <a:effectLst/>
+                <a:latin typeface="Times New Roman" panose="02020603050405020304" pitchFamily="18" charset="0"/>
+                <a:cs typeface="Times New Roman" panose="02020603050405020304" pitchFamily="18" charset="0"/>
+              </a:rPr>
+              <a:t>3. Real-time Salary Calculation</a:t>
+            </a:r>
+          </a:p>
+          <a:p>
+            <a:pPr marL="0" marR="0" lvl="0" indent="0" algn="just" defTabSz="914400" rtl="0" eaLnBrk="0" fontAlgn="base" latinLnBrk="0" hangingPunct="0">
+              <a:lnSpc>
+                <a:spcPct val="150000"/>
+              </a:lnSpc>
+              <a:spcBef>
+                <a:spcPct val="0"/>
+              </a:spcBef>
+              <a:spcAft>
+                <a:spcPct val="0"/>
+              </a:spcAft>
+              <a:buClrTx/>
+              <a:buSzTx/>
+              <a:buNone/>
+              <a:tabLst/>
+            </a:pPr>
+            <a:r>
+              <a:rPr kumimoji="0" lang="en-US" altLang="en-US" sz="1800" i="0" u="none" strike="noStrike" cap="none" normalizeH="0" baseline="0" dirty="0">
+                <a:ln>
+                  <a:noFill/>
+                </a:ln>
+                <a:solidFill>
+                  <a:schemeClr val="tx1"/>
+                </a:solidFill>
+                <a:effectLst/>
+                <a:latin typeface="Times New Roman" panose="02020603050405020304" pitchFamily="18" charset="0"/>
+                <a:cs typeface="Times New Roman" panose="02020603050405020304" pitchFamily="18" charset="0"/>
+              </a:rPr>
+              <a:t>	- Adjustments for uninformed leaves and rejections</a:t>
+            </a:r>
+          </a:p>
+          <a:p>
+            <a:pPr marR="0" lvl="0" algn="just" defTabSz="914400" rtl="0" eaLnBrk="0" fontAlgn="base" latinLnBrk="0" hangingPunct="0">
+              <a:lnSpc>
+                <a:spcPct val="150000"/>
+              </a:lnSpc>
+              <a:spcBef>
+                <a:spcPct val="0"/>
+              </a:spcBef>
+              <a:spcAft>
+                <a:spcPct val="0"/>
+              </a:spcAft>
+              <a:buClrTx/>
+              <a:buSzTx/>
+              <a:tabLst/>
+            </a:pPr>
+            <a:r>
+              <a:rPr kumimoji="0" lang="en-US" altLang="en-US" sz="1800" i="0" u="none" strike="noStrike" cap="none" normalizeH="0" baseline="0" dirty="0">
+                <a:ln>
+                  <a:noFill/>
+                </a:ln>
+                <a:solidFill>
+                  <a:schemeClr val="tx1"/>
+                </a:solidFill>
+                <a:effectLst/>
+                <a:latin typeface="Times New Roman" panose="02020603050405020304" pitchFamily="18" charset="0"/>
+                <a:cs typeface="Times New Roman" panose="02020603050405020304" pitchFamily="18" charset="0"/>
+              </a:rPr>
+              <a:t>4. Multi-channel Communication</a:t>
+            </a:r>
+          </a:p>
+          <a:p>
+            <a:pPr marL="0" marR="0" lvl="0" indent="0" algn="just" defTabSz="914400" rtl="0" eaLnBrk="0" fontAlgn="base" latinLnBrk="0" hangingPunct="0">
+              <a:lnSpc>
+                <a:spcPct val="150000"/>
+              </a:lnSpc>
+              <a:spcBef>
+                <a:spcPct val="0"/>
+              </a:spcBef>
+              <a:spcAft>
+                <a:spcPct val="0"/>
+              </a:spcAft>
+              <a:buClrTx/>
+              <a:buSzTx/>
+              <a:buNone/>
+              <a:tabLst/>
+            </a:pPr>
+            <a:r>
+              <a:rPr kumimoji="0" lang="en-US" altLang="en-US" sz="1800" i="0" u="none" strike="noStrike" cap="none" normalizeH="0" baseline="0" dirty="0">
+                <a:ln>
+                  <a:noFill/>
+                </a:ln>
+                <a:solidFill>
+                  <a:schemeClr val="tx1"/>
+                </a:solidFill>
+                <a:effectLst/>
+                <a:latin typeface="Times New Roman" panose="02020603050405020304" pitchFamily="18" charset="0"/>
+                <a:cs typeface="Times New Roman" panose="02020603050405020304" pitchFamily="18" charset="0"/>
+              </a:rPr>
+              <a:t>	- In-app(</a:t>
+            </a:r>
+            <a:r>
+              <a:rPr lang="en-US" altLang="en-US" sz="1800" dirty="0" err="1">
+                <a:latin typeface="Times New Roman" panose="02020603050405020304" pitchFamily="18" charset="0"/>
+                <a:cs typeface="Times New Roman" panose="02020603050405020304" pitchFamily="18" charset="0"/>
+              </a:rPr>
+              <a:t>N</a:t>
+            </a:r>
+            <a:r>
+              <a:rPr kumimoji="0" lang="en-US" altLang="en-US" sz="1800" i="0" u="none" strike="noStrike" cap="none" normalizeH="0" baseline="0" dirty="0" err="1">
+                <a:ln>
+                  <a:noFill/>
+                </a:ln>
+                <a:solidFill>
+                  <a:schemeClr val="tx1"/>
+                </a:solidFill>
+                <a:effectLst/>
+                <a:latin typeface="Times New Roman" panose="02020603050405020304" pitchFamily="18" charset="0"/>
+                <a:cs typeface="Times New Roman" panose="02020603050405020304" pitchFamily="18" charset="0"/>
+              </a:rPr>
+              <a:t>odemailer</a:t>
+            </a:r>
+            <a:r>
+              <a:rPr kumimoji="0" lang="en-US" altLang="en-US" sz="1800" i="0" u="none" strike="noStrike" cap="none" normalizeH="0" baseline="0" dirty="0">
+                <a:ln>
+                  <a:noFill/>
+                </a:ln>
+                <a:solidFill>
+                  <a:schemeClr val="tx1"/>
+                </a:solidFill>
+                <a:effectLst/>
+                <a:latin typeface="Times New Roman" panose="02020603050405020304" pitchFamily="18" charset="0"/>
+                <a:cs typeface="Times New Roman" panose="02020603050405020304" pitchFamily="18" charset="0"/>
+              </a:rPr>
+              <a:t>) and SMS notifications </a:t>
+            </a:r>
+          </a:p>
+          <a:p>
+            <a:pPr marL="0" marR="0" lvl="0" indent="0" algn="just" defTabSz="914400" rtl="0" eaLnBrk="0" fontAlgn="base" latinLnBrk="0" hangingPunct="0">
+              <a:lnSpc>
+                <a:spcPct val="150000"/>
+              </a:lnSpc>
+              <a:spcBef>
+                <a:spcPct val="0"/>
+              </a:spcBef>
+              <a:spcAft>
+                <a:spcPct val="0"/>
+              </a:spcAft>
+              <a:buClrTx/>
+              <a:buSzTx/>
+              <a:buNone/>
+              <a:tabLst/>
+            </a:pPr>
+            <a:r>
+              <a:rPr kumimoji="0" lang="en-US" altLang="en-US" sz="1800" i="0" u="none" strike="noStrike" cap="none" normalizeH="0" baseline="0" dirty="0">
+                <a:ln>
+                  <a:noFill/>
+                </a:ln>
+                <a:solidFill>
+                  <a:schemeClr val="tx1"/>
+                </a:solidFill>
+                <a:effectLst/>
+                <a:latin typeface="Times New Roman" panose="02020603050405020304" pitchFamily="18" charset="0"/>
+                <a:cs typeface="Times New Roman" panose="02020603050405020304" pitchFamily="18" charset="0"/>
+              </a:rPr>
+              <a:t>with Twilio integration.</a:t>
+            </a:r>
+          </a:p>
+        </p:txBody>
+      </p:sp>
     </p:spTree>
   </p:cSld>
   <p:clrMapOvr>
